--- a/docs/presentations/数据获取与后续计划-2026-10-13-最终版.pptx
+++ b/docs/presentations/数据获取与后续计划-2026-10-13-最终版.pptx
@@ -9,13 +9,11 @@
   </p:notesMasterIdLst>
   <p:sldIdLst>
     <p:sldId id="256" r:id="rId3"/>
-    <p:sldId id="257" r:id="rId5"/>
-    <p:sldId id="259" r:id="rId6"/>
+    <p:sldId id="259" r:id="rId5"/>
+    <p:sldId id="257" r:id="rId6"/>
     <p:sldId id="262" r:id="rId7"/>
     <p:sldId id="263" r:id="rId8"/>
     <p:sldId id="268" r:id="rId9"/>
-    <p:sldId id="269" r:id="rId10"/>
-    <p:sldId id="270" r:id="rId11"/>
   </p:sldIdLst>
   <p:sldSz cx="12192000" cy="6858000"/>
   <p:notesSz cx="6858000" cy="9144000"/>
@@ -366,13 +364,13 @@
           <a:lstStyle/>
           <a:p>
             <a:r>
-              <a:t>这里表达个人累计工作投入。实际采集记录跨2026年9月18日至10月1日，采集窗口和人工投入不是同一个时间概念。不要把168小时说成系统跑完所需时间，也不要人为拆分各环节工时。</a:t>
+              <a:t>六个逐款源包括appdetails_en、appdetails_zh、global_ach、community_ach、steamspy、rawg。批量枚举另有store_search、store_applist、steamspy_all。SteamSpy平均与中位时长字段已失效，时长展示必须使用有效的RAWG字段。</a:t>
             </a:r>
           </a:p>
           <a:p/>
           <a:p>
             <a:r>
-              <a:t>来源：用户本次说明；/Users/Learning/course/achievement-analytics/AGENTS.md；/Users/Learning/course/achievement-analytics/docs/data-report.md</a:t>
+              <a:t>来源：/Users/Learning/course/achievement-analytics/AGENTS.md；/Users/Learning/course/achievement-analytics/docs/sources.md</a:t>
             </a:r>
           </a:p>
         </p:txBody>
@@ -440,13 +438,13 @@
           <a:lstStyle/>
           <a:p>
             <a:r>
-              <a:t>六个逐款源包括appdetails_en、appdetails_zh、global_ach、community_ach、steamspy、rawg。批量枚举另有store_search、store_applist、steamspy_all。SteamSpy平均与中位时长字段已失效，时长展示必须使用有效的RAWG字段。</a:t>
+              <a:t>这里表达个人累计工作投入。实际采集记录跨2026年9月18日至10月1日，采集窗口和人工投入不是同一个时间概念。不要把168小时说成系统跑完所需时间，也不要人为拆分各环节工时。</a:t>
             </a:r>
           </a:p>
           <a:p/>
           <a:p>
             <a:r>
-              <a:t>来源：/Users/Learning/course/achievement-analytics/AGENTS.md；/Users/Learning/course/achievement-analytics/docs/sources.md</a:t>
+              <a:t>来源：用户本次说明；/Users/Learning/course/achievement-analytics/AGENTS.md；/Users/Learning/course/achievement-analytics/docs/data-report.md</a:t>
             </a:r>
           </a:p>
         </p:txBody>
@@ -669,154 +667,6 @@
           <a:p>
             <a:r>
               <a:t>来源：/Users/Learning/course/achievement-analytics/docs/plan.md</a:t>
-            </a:r>
-          </a:p>
-        </p:txBody>
-      </p:sp>
-      <p:sp>
-        <p:nvSpPr>
-          <p:cNvPr id="4" name="Slide Number Placeholder 3"/>
-          <p:cNvSpPr>
-            <a:spLocks noGrp="1"/>
-          </p:cNvSpPr>
-          <p:nvPr>
-            <p:ph type="sldNum" idx="5"/>
-          </p:nvPr>
-        </p:nvSpPr>
-        <p:spPr/>
-        <p:txBody>
-          <a:bodyPr/>
-          <a:lstStyle/>
-          <a:p/>
-        </p:txBody>
-      </p:sp>
-    </p:spTree>
-  </p:cSld>
-  <p:clrMapOvr>
-    <a:masterClrMapping/>
-  </p:clrMapOvr>
-</p:notes>
-</file>
-
-<file path=ppt/notesSlides/notesSlide7.xml><?xml version="1.0" encoding="utf-8"?>
-<p:notes xmlns:a="http://schemas.openxmlformats.org/drawingml/2006/main" xmlns:r="http://schemas.openxmlformats.org/officeDocument/2006/relationships" xmlns:p="http://schemas.openxmlformats.org/presentationml/2006/main">
-  <p:cSld>
-    <p:spTree>
-      <p:nvGrpSpPr>
-        <p:cNvPr id="1" name=""/>
-        <p:cNvGrpSpPr/>
-        <p:nvPr/>
-      </p:nvGrpSpPr>
-      <p:grpSpPr/>
-      <p:sp>
-        <p:nvSpPr>
-          <p:cNvPr id="2" name="Slide Image Placeholder 1"/>
-          <p:cNvSpPr>
-            <a:spLocks noGrp="1"/>
-          </p:cNvSpPr>
-          <p:nvPr>
-            <p:ph type="sldImg"/>
-          </p:nvPr>
-        </p:nvSpPr>
-        <p:spPr/>
-      </p:sp>
-      <p:sp>
-        <p:nvSpPr>
-          <p:cNvPr id="3" name="Notes Placeholder 2"/>
-          <p:cNvSpPr>
-            <a:spLocks noGrp="1"/>
-          </p:cNvSpPr>
-          <p:nvPr>
-            <p:ph type="body" idx="1"/>
-          </p:nvPr>
-        </p:nvSpPr>
-        <p:spPr/>
-        <p:txBody>
-          <a:bodyPr/>
-          <a:lstStyle/>
-          <a:p>
-            <a:r>
-              <a:t>20款试标是本次提出的建议规模，不是plan已有承诺。plan原本提出100至1000款主线明确的游戏，所以建议先试标再扩展。推荐用同学盲评前五条结果，与简单标签重合作对照。分类曲线不把按完成率排序当剧情时间线。</a:t>
-            </a:r>
-          </a:p>
-          <a:p/>
-          <a:p>
-            <a:r>
-              <a:t>来源：/Users/Learning/course/achievement-analytics/docs/plan.md</a:t>
-            </a:r>
-          </a:p>
-        </p:txBody>
-      </p:sp>
-      <p:sp>
-        <p:nvSpPr>
-          <p:cNvPr id="4" name="Slide Number Placeholder 3"/>
-          <p:cNvSpPr>
-            <a:spLocks noGrp="1"/>
-          </p:cNvSpPr>
-          <p:nvPr>
-            <p:ph type="sldNum" idx="5"/>
-          </p:nvPr>
-        </p:nvSpPr>
-        <p:spPr/>
-        <p:txBody>
-          <a:bodyPr/>
-          <a:lstStyle/>
-          <a:p/>
-        </p:txBody>
-      </p:sp>
-    </p:spTree>
-  </p:cSld>
-  <p:clrMapOvr>
-    <a:masterClrMapping/>
-  </p:clrMapOvr>
-</p:notes>
-</file>
-
-<file path=ppt/notesSlides/notesSlide8.xml><?xml version="1.0" encoding="utf-8"?>
-<p:notes xmlns:a="http://schemas.openxmlformats.org/drawingml/2006/main" xmlns:r="http://schemas.openxmlformats.org/officeDocument/2006/relationships" xmlns:p="http://schemas.openxmlformats.org/presentationml/2006/main">
-  <p:cSld>
-    <p:spTree>
-      <p:nvGrpSpPr>
-        <p:cNvPr id="1" name=""/>
-        <p:cNvGrpSpPr/>
-        <p:nvPr/>
-      </p:nvGrpSpPr>
-      <p:grpSpPr/>
-      <p:sp>
-        <p:nvSpPr>
-          <p:cNvPr id="2" name="Slide Image Placeholder 1"/>
-          <p:cNvSpPr>
-            <a:spLocks noGrp="1"/>
-          </p:cNvSpPr>
-          <p:nvPr>
-            <p:ph type="sldImg"/>
-          </p:nvPr>
-        </p:nvSpPr>
-        <p:spPr/>
-      </p:sp>
-      <p:sp>
-        <p:nvSpPr>
-          <p:cNvPr id="3" name="Notes Placeholder 2"/>
-          <p:cNvSpPr>
-            <a:spLocks noGrp="1"/>
-          </p:cNvSpPr>
-          <p:nvPr>
-            <p:ph type="body" idx="1"/>
-          </p:nvPr>
-        </p:nvSpPr>
-        <p:spPr/>
-        <p:txBody>
-          <a:bodyPr/>
-          <a:lstStyle/>
-          <a:p>
-            <a:r>
-              <a:t>未来验收应关注能够解释和验证的结果。年度标签比例是发行批次的特征，不是当年的市场热度。主线完成率是观察时点的聚合比例，不等于留存或流失。推荐须给出理由，并有基础方法对照。若开展口碑预测，以平均分基线和线性方法先行，避免同游戏版本泄漏，结论表述为相关。</a:t>
-            </a:r>
-          </a:p>
-          <a:p/>
-          <a:p>
-            <a:r>
-              <a:t>来源：/Users/Learning/course/achievement-analytics/docs/plan.md；RAWG 数据页面需要回链：https://rawg.io/</a:t>
             </a:r>
           </a:p>
         </p:txBody>
@@ -2790,76 +2640,6 @@
       <p:grpSpPr/>
       <p:sp>
         <p:nvSpPr>
-          <p:cNvPr id="6" name="矩形 5"/>
-          <p:cNvSpPr>
-            <a:spLocks noGrp="1"/>
-          </p:cNvSpPr>
-          <p:nvPr/>
-        </p:nvSpPr>
-        <p:spPr>
-          <a:xfrm>
-            <a:off x="10668000" y="6438900"/>
-            <a:ext cx="952500" cy="209550"/>
-          </a:xfrm>
-          <a:prstGeom prst="rect">
-            <a:avLst/>
-          </a:prstGeom>
-          <a:noFill/>
-          <a:ln w="0">
-            <a:noFill/>
-          </a:ln>
-        </p:spPr>
-        <p:txBody>
-          <a:bodyPr wrap="square" lIns="0" tIns="0" rIns="0" bIns="0" anchor="t">
-            <a:noAutofit/>
-          </a:bodyPr>
-          <a:lstStyle>
-            <a:defPPr>
-              <a:defRPr sz="1125" b="0">
-                <a:solidFill>
-                  <a:srgbClr val="BDD0C8"/>
-                </a:solidFill>
-                <a:latin typeface="Hiragino Sans GB" panose="020B0300000000000000" charset="-122"/>
-                <a:ea typeface="Hiragino Sans GB" panose="020B0300000000000000" charset="-122"/>
-                <a:cs typeface="Hiragino Sans GB" panose="020B0300000000000000" charset="-122"/>
-              </a:defRPr>
-            </a:defPPr>
-          </a:lstStyle>
-          <a:p>
-            <a:pPr>
-              <a:defRPr sz="1125" b="0">
-                <a:solidFill>
-                  <a:srgbClr val="BDD0C8"/>
-                </a:solidFill>
-                <a:latin typeface="Hiragino Sans GB" panose="020B0300000000000000" charset="-122"/>
-                <a:ea typeface="Hiragino Sans GB" panose="020B0300000000000000" charset="-122"/>
-                <a:cs typeface="Hiragino Sans GB" panose="020B0300000000000000" charset="-122"/>
-              </a:defRPr>
-            </a:pPr>
-            <a:r>
-              <a:rPr sz="1125" b="0">
-                <a:solidFill>
-                  <a:srgbClr val="BDD0C8"/>
-                </a:solidFill>
-                <a:latin typeface="Hiragino Sans GB" panose="020B0300000000000000" charset="-122"/>
-                <a:ea typeface="Hiragino Sans GB" panose="020B0300000000000000" charset="-122"/>
-                <a:cs typeface="Hiragino Sans GB" panose="020B0300000000000000" charset="-122"/>
-              </a:rPr>
-              <a:t>01 / 15</a:t>
-            </a:r>
-            <a:endParaRPr sz="1125" b="0">
-              <a:solidFill>
-                <a:srgbClr val="BDD0C8"/>
-              </a:solidFill>
-              <a:latin typeface="Hiragino Sans GB" panose="020B0300000000000000" charset="-122"/>
-              <a:ea typeface="Hiragino Sans GB" panose="020B0300000000000000" charset="-122"/>
-              <a:cs typeface="Hiragino Sans GB" panose="020B0300000000000000" charset="-122"/>
-            </a:endParaRPr>
-          </a:p>
-        </p:txBody>
-      </p:sp>
-      <p:sp>
-        <p:nvSpPr>
           <p:cNvPr id="2" name="矩形 1"/>
           <p:cNvSpPr>
             <a:spLocks noGrp="1"/>
@@ -2868,7 +2648,7 @@
         </p:nvSpPr>
         <p:spPr>
           <a:xfrm>
-            <a:off x="609600" y="1524000"/>
+            <a:off x="609600" y="908685"/>
             <a:ext cx="10858500" cy="1047750"/>
           </a:xfrm>
           <a:prstGeom prst="rect">
@@ -2907,7 +2687,7 @@
               </a:defRPr>
             </a:pPr>
             <a:r>
-              <a:rPr sz="5700" b="1">
+              <a:rPr lang="zh-CN" altLang="en-US" sz="4800" b="1">
                 <a:solidFill>
                   <a:srgbClr val="FFFFFF"/>
                 </a:solidFill>
@@ -2915,79 +2695,9 @@
                 <a:ea typeface="Hiragino Sans GB" panose="020B0300000000000000" charset="-122"/>
                 <a:cs typeface="Hiragino Sans GB" panose="020B0300000000000000" charset="-122"/>
               </a:rPr>
-              <a:t>Steam 游戏数据</a:t>
+              <a:t>基于游戏特征与成就数据的偏好分析</a:t>
             </a:r>
-            <a:endParaRPr sz="5700" b="1">
-              <a:solidFill>
-                <a:srgbClr val="FFFFFF"/>
-              </a:solidFill>
-              <a:latin typeface="Hiragino Sans GB" panose="020B0300000000000000" charset="-122"/>
-              <a:ea typeface="Hiragino Sans GB" panose="020B0300000000000000" charset="-122"/>
-              <a:cs typeface="Hiragino Sans GB" panose="020B0300000000000000" charset="-122"/>
-            </a:endParaRPr>
-          </a:p>
-        </p:txBody>
-      </p:sp>
-      <p:sp>
-        <p:nvSpPr>
-          <p:cNvPr id="3" name="矩形 2"/>
-          <p:cNvSpPr>
-            <a:spLocks noGrp="1"/>
-          </p:cNvSpPr>
-          <p:nvPr/>
-        </p:nvSpPr>
-        <p:spPr>
-          <a:xfrm>
-            <a:off x="609600" y="2705100"/>
-            <a:ext cx="10858500" cy="857250"/>
-          </a:xfrm>
-          <a:prstGeom prst="rect">
-            <a:avLst/>
-          </a:prstGeom>
-          <a:noFill/>
-          <a:ln w="0">
-            <a:noFill/>
-          </a:ln>
-        </p:spPr>
-        <p:txBody>
-          <a:bodyPr wrap="square" lIns="0" tIns="0" rIns="0" bIns="0" anchor="t">
-            <a:noAutofit/>
-          </a:bodyPr>
-          <a:lstStyle>
-            <a:defPPr>
-              <a:defRPr sz="4200" b="1">
-                <a:solidFill>
-                  <a:srgbClr val="FFFFFF"/>
-                </a:solidFill>
-                <a:latin typeface="Hiragino Sans GB" panose="020B0300000000000000" charset="-122"/>
-                <a:ea typeface="Hiragino Sans GB" panose="020B0300000000000000" charset="-122"/>
-                <a:cs typeface="Hiragino Sans GB" panose="020B0300000000000000" charset="-122"/>
-              </a:defRPr>
-            </a:defPPr>
-          </a:lstStyle>
-          <a:p>
-            <a:pPr>
-              <a:defRPr sz="4200" b="1">
-                <a:solidFill>
-                  <a:srgbClr val="FFFFFF"/>
-                </a:solidFill>
-                <a:latin typeface="Hiragino Sans GB" panose="020B0300000000000000" charset="-122"/>
-                <a:ea typeface="Hiragino Sans GB" panose="020B0300000000000000" charset="-122"/>
-                <a:cs typeface="Hiragino Sans GB" panose="020B0300000000000000" charset="-122"/>
-              </a:defRPr>
-            </a:pPr>
-            <a:r>
-              <a:rPr sz="4200" b="1">
-                <a:solidFill>
-                  <a:srgbClr val="FFFFFF"/>
-                </a:solidFill>
-                <a:latin typeface="Hiragino Sans GB" panose="020B0300000000000000" charset="-122"/>
-                <a:ea typeface="Hiragino Sans GB" panose="020B0300000000000000" charset="-122"/>
-                <a:cs typeface="Hiragino Sans GB" panose="020B0300000000000000" charset="-122"/>
-              </a:rPr>
-              <a:t>获取成果与后续计划</a:t>
-            </a:r>
-            <a:endParaRPr sz="4200" b="1">
+            <a:endParaRPr lang="zh-CN" altLang="en-US" sz="4800" b="1">
               <a:solidFill>
                 <a:srgbClr val="FFFFFF"/>
               </a:solidFill>
@@ -3008,7 +2718,7 @@
         </p:nvSpPr>
         <p:spPr>
           <a:xfrm>
-            <a:off x="647700" y="5429250"/>
+            <a:off x="609600" y="6237605"/>
             <a:ext cx="9525000" cy="381000"/>
           </a:xfrm>
           <a:prstGeom prst="rect">
@@ -3060,242 +2770,6 @@
             <a:endParaRPr sz="1800" b="0">
               <a:solidFill>
                 <a:srgbClr val="BDD0C8"/>
-              </a:solidFill>
-              <a:latin typeface="Hiragino Sans GB" panose="020B0300000000000000" charset="-122"/>
-              <a:ea typeface="Hiragino Sans GB" panose="020B0300000000000000" charset="-122"/>
-              <a:cs typeface="Hiragino Sans GB" panose="020B0300000000000000" charset="-122"/>
-            </a:endParaRPr>
-          </a:p>
-        </p:txBody>
-      </p:sp>
-    </p:spTree>
-  </p:cSld>
-  <p:clrMapOvr>
-    <a:masterClrMapping/>
-  </p:clrMapOvr>
-</p:sld>
-</file>
-
-<file path=ppt/slides/slide2.xml><?xml version="1.0" encoding="utf-8"?>
-<p:sld xmlns:a="http://schemas.openxmlformats.org/drawingml/2006/main" xmlns:r="http://schemas.openxmlformats.org/officeDocument/2006/relationships" xmlns:p="http://schemas.openxmlformats.org/presentationml/2006/main">
-  <p:cSld>
-    <p:bg>
-      <p:bgPr>
-        <a:solidFill>
-          <a:srgbClr val="F4F2EC"/>
-        </a:solidFill>
-        <a:effectLst/>
-      </p:bgPr>
-    </p:bg>
-    <p:spTree>
-      <p:nvGrpSpPr>
-        <p:cNvPr id="1" name=""/>
-        <p:cNvGrpSpPr/>
-        <p:nvPr/>
-      </p:nvGrpSpPr>
-      <p:grpSpPr/>
-      <p:sp>
-        <p:nvSpPr>
-          <p:cNvPr id="14" name="矩形 13"/>
-          <p:cNvSpPr>
-            <a:spLocks noGrp="1"/>
-          </p:cNvSpPr>
-          <p:nvPr/>
-        </p:nvSpPr>
-        <p:spPr>
-          <a:xfrm>
-            <a:off x="609600" y="457200"/>
-            <a:ext cx="10972800" cy="838200"/>
-          </a:xfrm>
-          <a:prstGeom prst="rect">
-            <a:avLst/>
-          </a:prstGeom>
-          <a:noFill/>
-          <a:ln w="0">
-            <a:noFill/>
-          </a:ln>
-        </p:spPr>
-        <p:txBody>
-          <a:bodyPr wrap="square" lIns="0" tIns="0" rIns="0" bIns="0" anchor="t">
-            <a:noAutofit/>
-          </a:bodyPr>
-          <a:lstStyle>
-            <a:defPPr>
-              <a:defRPr sz="3300" b="1">
-                <a:solidFill>
-                  <a:srgbClr val="172A2A"/>
-                </a:solidFill>
-                <a:latin typeface="Hiragino Sans GB" panose="020B0300000000000000" charset="-122"/>
-                <a:ea typeface="Hiragino Sans GB" panose="020B0300000000000000" charset="-122"/>
-                <a:cs typeface="Hiragino Sans GB" panose="020B0300000000000000" charset="-122"/>
-              </a:defRPr>
-            </a:defPPr>
-          </a:lstStyle>
-          <a:p>
-            <a:pPr>
-              <a:defRPr sz="3300" b="1">
-                <a:solidFill>
-                  <a:srgbClr val="172A2A"/>
-                </a:solidFill>
-                <a:latin typeface="Hiragino Sans GB" panose="020B0300000000000000" charset="-122"/>
-                <a:ea typeface="Hiragino Sans GB" panose="020B0300000000000000" charset="-122"/>
-                <a:cs typeface="Hiragino Sans GB" panose="020B0300000000000000" charset="-122"/>
-              </a:defRPr>
-            </a:pPr>
-            <a:r>
-              <a:rPr sz="3300" b="1">
-                <a:solidFill>
-                  <a:srgbClr val="172A2A"/>
-                </a:solidFill>
-                <a:latin typeface="Hiragino Sans GB" panose="020B0300000000000000" charset="-122"/>
-                <a:ea typeface="Hiragino Sans GB" panose="020B0300000000000000" charset="-122"/>
-                <a:cs typeface="Hiragino Sans GB" panose="020B0300000000000000" charset="-122"/>
-              </a:rPr>
-              <a:t>约 168 小时，投入在数据管道的每一层</a:t>
-            </a:r>
-            <a:endParaRPr sz="3300" b="1">
-              <a:solidFill>
-                <a:srgbClr val="172A2A"/>
-              </a:solidFill>
-              <a:latin typeface="Hiragino Sans GB" panose="020B0300000000000000" charset="-122"/>
-              <a:ea typeface="Hiragino Sans GB" panose="020B0300000000000000" charset="-122"/>
-              <a:cs typeface="Hiragino Sans GB" panose="020B0300000000000000" charset="-122"/>
-            </a:endParaRPr>
-          </a:p>
-        </p:txBody>
-      </p:sp>
-      <p:sp>
-        <p:nvSpPr>
-          <p:cNvPr id="2" name="矩形 1"/>
-          <p:cNvSpPr>
-            <a:spLocks noGrp="1"/>
-          </p:cNvSpPr>
-          <p:nvPr/>
-        </p:nvSpPr>
-        <p:spPr>
-          <a:xfrm>
-            <a:off x="10668000" y="6438900"/>
-            <a:ext cx="952500" cy="209550"/>
-          </a:xfrm>
-          <a:prstGeom prst="rect">
-            <a:avLst/>
-          </a:prstGeom>
-          <a:noFill/>
-          <a:ln w="0">
-            <a:noFill/>
-          </a:ln>
-        </p:spPr>
-        <p:txBody>
-          <a:bodyPr wrap="square" lIns="0" tIns="0" rIns="0" bIns="0" anchor="t">
-            <a:noAutofit/>
-          </a:bodyPr>
-          <a:lstStyle>
-            <a:defPPr>
-              <a:defRPr sz="1125" b="0">
-                <a:solidFill>
-                  <a:srgbClr val="5B6864"/>
-                </a:solidFill>
-                <a:latin typeface="Hiragino Sans GB" panose="020B0300000000000000" charset="-122"/>
-                <a:ea typeface="Hiragino Sans GB" panose="020B0300000000000000" charset="-122"/>
-                <a:cs typeface="Hiragino Sans GB" panose="020B0300000000000000" charset="-122"/>
-              </a:defRPr>
-            </a:defPPr>
-          </a:lstStyle>
-          <a:p>
-            <a:pPr>
-              <a:defRPr sz="1125" b="0">
-                <a:solidFill>
-                  <a:srgbClr val="5B6864"/>
-                </a:solidFill>
-                <a:latin typeface="Hiragino Sans GB" panose="020B0300000000000000" charset="-122"/>
-                <a:ea typeface="Hiragino Sans GB" panose="020B0300000000000000" charset="-122"/>
-                <a:cs typeface="Hiragino Sans GB" panose="020B0300000000000000" charset="-122"/>
-              </a:defRPr>
-            </a:pPr>
-            <a:r>
-              <a:rPr sz="1125" b="0">
-                <a:solidFill>
-                  <a:srgbClr val="5B6864"/>
-                </a:solidFill>
-                <a:latin typeface="Hiragino Sans GB" panose="020B0300000000000000" charset="-122"/>
-                <a:ea typeface="Hiragino Sans GB" panose="020B0300000000000000" charset="-122"/>
-                <a:cs typeface="Hiragino Sans GB" panose="020B0300000000000000" charset="-122"/>
-              </a:rPr>
-              <a:t>02 / 15</a:t>
-            </a:r>
-            <a:endParaRPr sz="1125" b="0">
-              <a:solidFill>
-                <a:srgbClr val="5B6864"/>
-              </a:solidFill>
-              <a:latin typeface="Hiragino Sans GB" panose="020B0300000000000000" charset="-122"/>
-              <a:ea typeface="Hiragino Sans GB" panose="020B0300000000000000" charset="-122"/>
-              <a:cs typeface="Hiragino Sans GB" panose="020B0300000000000000" charset="-122"/>
-            </a:endParaRPr>
-          </a:p>
-        </p:txBody>
-      </p:sp>
-      <p:sp>
-        <p:nvSpPr>
-          <p:cNvPr id="3" name="矩形 2"/>
-          <p:cNvSpPr>
-            <a:spLocks noGrp="1"/>
-          </p:cNvSpPr>
-          <p:nvPr/>
-        </p:nvSpPr>
-        <p:spPr>
-          <a:xfrm>
-            <a:off x="609600" y="6238875"/>
-            <a:ext cx="9715500" cy="457200"/>
-          </a:xfrm>
-          <a:prstGeom prst="rect">
-            <a:avLst/>
-          </a:prstGeom>
-          <a:noFill/>
-          <a:ln w="0">
-            <a:noFill/>
-          </a:ln>
-        </p:spPr>
-        <p:txBody>
-          <a:bodyPr wrap="square" lIns="0" tIns="0" rIns="0" bIns="0" anchor="t">
-            <a:noAutofit/>
-          </a:bodyPr>
-          <a:lstStyle>
-            <a:defPPr>
-              <a:defRPr sz="1125" b="0">
-                <a:solidFill>
-                  <a:srgbClr val="5B6864"/>
-                </a:solidFill>
-                <a:latin typeface="Hiragino Sans GB" panose="020B0300000000000000" charset="-122"/>
-                <a:ea typeface="Hiragino Sans GB" panose="020B0300000000000000" charset="-122"/>
-                <a:cs typeface="Hiragino Sans GB" panose="020B0300000000000000" charset="-122"/>
-              </a:defRPr>
-            </a:defPPr>
-          </a:lstStyle>
-          <a:p>
-            <a:pPr>
-              <a:defRPr sz="1125" b="0">
-                <a:solidFill>
-                  <a:srgbClr val="5B6864"/>
-                </a:solidFill>
-                <a:latin typeface="Hiragino Sans GB" panose="020B0300000000000000" charset="-122"/>
-                <a:ea typeface="Hiragino Sans GB" panose="020B0300000000000000" charset="-122"/>
-                <a:cs typeface="Hiragino Sans GB" panose="020B0300000000000000" charset="-122"/>
-              </a:defRPr>
-            </a:pPr>
-            <a:r>
-              <a:rPr sz="1125" b="0">
-                <a:solidFill>
-                  <a:srgbClr val="5B6864"/>
-                </a:solidFill>
-                <a:latin typeface="Hiragino Sans GB" panose="020B0300000000000000" charset="-122"/>
-                <a:ea typeface="Hiragino Sans GB" panose="020B0300000000000000" charset="-122"/>
-                <a:cs typeface="Hiragino Sans GB" panose="020B0300000000000000" charset="-122"/>
-              </a:rPr>
-              <a:t>个人估算累计投入，约等于 7 × 24 小时。各环节未单独计时。</a:t>
-            </a:r>
-            <a:endParaRPr sz="1125" b="0">
-              <a:solidFill>
-                <a:srgbClr val="5B6864"/>
               </a:solidFill>
               <a:latin typeface="Hiragino Sans GB" panose="020B0300000000000000" charset="-122"/>
               <a:ea typeface="Hiragino Sans GB" panose="020B0300000000000000" charset="-122"/>
@@ -3314,8 +2788,8 @@
         </p:nvSpPr>
         <p:spPr>
           <a:xfrm>
-            <a:off x="609600" y="1885950"/>
-            <a:ext cx="4381500" cy="1952625"/>
+            <a:off x="609600" y="3566795"/>
+            <a:ext cx="10858500" cy="857250"/>
           </a:xfrm>
           <a:prstGeom prst="rect">
             <a:avLst/>
@@ -3331,9 +2805,9 @@
           </a:bodyPr>
           <a:lstStyle>
             <a:defPPr>
-              <a:defRPr sz="13050" b="1">
-                <a:solidFill>
-                  <a:srgbClr val="246A5F"/>
+              <a:defRPr sz="4200" b="1">
+                <a:solidFill>
+                  <a:srgbClr val="FFFFFF"/>
                 </a:solidFill>
                 <a:latin typeface="Hiragino Sans GB" panose="020B0300000000000000" charset="-122"/>
                 <a:ea typeface="Hiragino Sans GB" panose="020B0300000000000000" charset="-122"/>
@@ -3343,9 +2817,9 @@
           </a:lstStyle>
           <a:p>
             <a:pPr>
-              <a:defRPr sz="13050" b="1">
-                <a:solidFill>
-                  <a:srgbClr val="246A5F"/>
+              <a:defRPr sz="4200" b="1">
+                <a:solidFill>
+                  <a:srgbClr val="FFFFFF"/>
                 </a:solidFill>
                 <a:latin typeface="Hiragino Sans GB" panose="020B0300000000000000" charset="-122"/>
                 <a:ea typeface="Hiragino Sans GB" panose="020B0300000000000000" charset="-122"/>
@@ -3353,89 +2827,41 @@
               </a:defRPr>
             </a:pPr>
             <a:r>
-              <a:rPr sz="13050" b="1">
-                <a:solidFill>
-                  <a:srgbClr val="246A5F"/>
+              <a:rPr lang="zh-CN" sz="4200" b="1">
+                <a:solidFill>
+                  <a:srgbClr val="FFFFFF"/>
                 </a:solidFill>
                 <a:latin typeface="Hiragino Sans GB" panose="020B0300000000000000" charset="-122"/>
                 <a:ea typeface="Hiragino Sans GB" panose="020B0300000000000000" charset="-122"/>
                 <a:cs typeface="Hiragino Sans GB" panose="020B0300000000000000" charset="-122"/>
               </a:rPr>
-              <a:t>168</a:t>
+              <a:t>组长</a:t>
             </a:r>
-            <a:endParaRPr sz="13050" b="1">
+            <a:r>
+              <a:rPr lang="en-US" altLang="zh-CN" sz="4200" b="1">
+                <a:solidFill>
+                  <a:srgbClr val="FFFFFF"/>
+                </a:solidFill>
+                <a:latin typeface="Hiragino Sans GB" panose="020B0300000000000000" charset="-122"/>
+                <a:ea typeface="Hiragino Sans GB" panose="020B0300000000000000" charset="-122"/>
+                <a:cs typeface="Hiragino Sans GB" panose="020B0300000000000000" charset="-122"/>
+              </a:rPr>
+              <a:t>：</a:t>
+            </a:r>
+            <a:r>
+              <a:rPr lang="zh-CN" altLang="en-US" sz="4200" b="1">
+                <a:solidFill>
+                  <a:srgbClr val="FFFFFF"/>
+                </a:solidFill>
+                <a:latin typeface="Hiragino Sans GB" panose="020B0300000000000000" charset="-122"/>
+                <a:ea typeface="Hiragino Sans GB" panose="020B0300000000000000" charset="-122"/>
+                <a:cs typeface="Hiragino Sans GB" panose="020B0300000000000000" charset="-122"/>
+              </a:rPr>
+              <a:t>王文海</a:t>
+            </a:r>
+            <a:endParaRPr lang="zh-CN" altLang="en-US" sz="4200" b="1">
               <a:solidFill>
-                <a:srgbClr val="246A5F"/>
-              </a:solidFill>
-              <a:latin typeface="Hiragino Sans GB" panose="020B0300000000000000" charset="-122"/>
-              <a:ea typeface="Hiragino Sans GB" panose="020B0300000000000000" charset="-122"/>
-              <a:cs typeface="Hiragino Sans GB" panose="020B0300000000000000" charset="-122"/>
-            </a:endParaRPr>
-          </a:p>
-        </p:txBody>
-      </p:sp>
-      <p:sp>
-        <p:nvSpPr>
-          <p:cNvPr id="5" name="矩形 4"/>
-          <p:cNvSpPr>
-            <a:spLocks noGrp="1"/>
-          </p:cNvSpPr>
-          <p:nvPr/>
-        </p:nvSpPr>
-        <p:spPr>
-          <a:xfrm>
-            <a:off x="704850" y="3943350"/>
-            <a:ext cx="3524250" cy="628650"/>
-          </a:xfrm>
-          <a:prstGeom prst="rect">
-            <a:avLst/>
-          </a:prstGeom>
-          <a:noFill/>
-          <a:ln w="0">
-            <a:noFill/>
-          </a:ln>
-        </p:spPr>
-        <p:txBody>
-          <a:bodyPr wrap="square" lIns="0" tIns="0" rIns="0" bIns="0" anchor="t">
-            <a:noAutofit/>
-          </a:bodyPr>
-          <a:lstStyle>
-            <a:defPPr>
-              <a:defRPr sz="3000" b="0">
-                <a:solidFill>
-                  <a:srgbClr val="172A2A"/>
-                </a:solidFill>
-                <a:latin typeface="Hiragino Sans GB" panose="020B0300000000000000" charset="-122"/>
-                <a:ea typeface="Hiragino Sans GB" panose="020B0300000000000000" charset="-122"/>
-                <a:cs typeface="Hiragino Sans GB" panose="020B0300000000000000" charset="-122"/>
-              </a:defRPr>
-            </a:defPPr>
-          </a:lstStyle>
-          <a:p>
-            <a:pPr>
-              <a:defRPr sz="3000" b="0">
-                <a:solidFill>
-                  <a:srgbClr val="172A2A"/>
-                </a:solidFill>
-                <a:latin typeface="Hiragino Sans GB" panose="020B0300000000000000" charset="-122"/>
-                <a:ea typeface="Hiragino Sans GB" panose="020B0300000000000000" charset="-122"/>
-                <a:cs typeface="Hiragino Sans GB" panose="020B0300000000000000" charset="-122"/>
-              </a:defRPr>
-            </a:pPr>
-            <a:r>
-              <a:rPr sz="3000" b="0">
-                <a:solidFill>
-                  <a:srgbClr val="172A2A"/>
-                </a:solidFill>
-                <a:latin typeface="Hiragino Sans GB" panose="020B0300000000000000" charset="-122"/>
-                <a:ea typeface="Hiragino Sans GB" panose="020B0300000000000000" charset="-122"/>
-                <a:cs typeface="Hiragino Sans GB" panose="020B0300000000000000" charset="-122"/>
-              </a:rPr>
-              <a:t>小时</a:t>
-            </a:r>
-            <a:endParaRPr sz="3000" b="0">
-              <a:solidFill>
-                <a:srgbClr val="172A2A"/>
+                <a:srgbClr val="FFFFFF"/>
               </a:solidFill>
               <a:latin typeface="Hiragino Sans GB" panose="020B0300000000000000" charset="-122"/>
               <a:ea typeface="Hiragino Sans GB" panose="020B0300000000000000" charset="-122"/>
@@ -3454,8 +2880,8 @@
         </p:nvSpPr>
         <p:spPr>
           <a:xfrm>
-            <a:off x="5476875" y="1809750"/>
-            <a:ext cx="5953125" cy="400050"/>
+            <a:off x="609600" y="4424045"/>
+            <a:ext cx="10858500" cy="857250"/>
           </a:xfrm>
           <a:prstGeom prst="rect">
             <a:avLst/>
@@ -3471,9 +2897,9 @@
           </a:bodyPr>
           <a:lstStyle>
             <a:defPPr>
-              <a:defRPr sz="2175" b="1">
-                <a:solidFill>
-                  <a:srgbClr val="172A2A"/>
+              <a:defRPr sz="4200" b="1">
+                <a:solidFill>
+                  <a:srgbClr val="FFFFFF"/>
                 </a:solidFill>
                 <a:latin typeface="Hiragino Sans GB" panose="020B0300000000000000" charset="-122"/>
                 <a:ea typeface="Hiragino Sans GB" panose="020B0300000000000000" charset="-122"/>
@@ -3483,9 +2909,9 @@
           </a:lstStyle>
           <a:p>
             <a:pPr>
-              <a:defRPr sz="2175" b="1">
-                <a:solidFill>
-                  <a:srgbClr val="172A2A"/>
+              <a:defRPr sz="4200" b="1">
+                <a:solidFill>
+                  <a:srgbClr val="FFFFFF"/>
                 </a:solidFill>
                 <a:latin typeface="Hiragino Sans GB" panose="020B0300000000000000" charset="-122"/>
                 <a:ea typeface="Hiragino Sans GB" panose="020B0300000000000000" charset="-122"/>
@@ -3493,19 +2919,118 @@
               </a:defRPr>
             </a:pPr>
             <a:r>
-              <a:rPr sz="2175" b="1">
-                <a:solidFill>
-                  <a:srgbClr val="172A2A"/>
+              <a:rPr lang="zh-CN" altLang="en-US" sz="4200" b="1">
+                <a:solidFill>
+                  <a:srgbClr val="FFFFFF"/>
                 </a:solidFill>
                 <a:latin typeface="Hiragino Sans GB" panose="020B0300000000000000" charset="-122"/>
                 <a:ea typeface="Hiragino Sans GB" panose="020B0300000000000000" charset="-122"/>
                 <a:cs typeface="Hiragino Sans GB" panose="020B0300000000000000" charset="-122"/>
               </a:rPr>
-              <a:t>脚本编写</a:t>
+              <a:t>组员</a:t>
             </a:r>
-            <a:endParaRPr sz="2175" b="1">
+            <a:r>
+              <a:rPr lang="en-US" altLang="zh-CN" sz="4200" b="1">
+                <a:solidFill>
+                  <a:srgbClr val="FFFFFF"/>
+                </a:solidFill>
+                <a:latin typeface="Hiragino Sans GB" panose="020B0300000000000000" charset="-122"/>
+                <a:ea typeface="Hiragino Sans GB" panose="020B0300000000000000" charset="-122"/>
+                <a:cs typeface="Hiragino Sans GB" panose="020B0300000000000000" charset="-122"/>
+              </a:rPr>
+              <a:t>：</a:t>
+            </a:r>
+            <a:r>
+              <a:rPr lang="zh-CN" altLang="en-US" sz="4200" b="1">
+                <a:solidFill>
+                  <a:srgbClr val="FFFFFF"/>
+                </a:solidFill>
+                <a:latin typeface="Hiragino Sans GB" panose="020B0300000000000000" charset="-122"/>
+                <a:ea typeface="Hiragino Sans GB" panose="020B0300000000000000" charset="-122"/>
+                <a:cs typeface="Hiragino Sans GB" panose="020B0300000000000000" charset="-122"/>
+              </a:rPr>
+              <a:t>刘宇翔</a:t>
+            </a:r>
+            <a:r>
+              <a:rPr lang="en-US" altLang="zh-CN" sz="4200" b="1">
+                <a:solidFill>
+                  <a:srgbClr val="FFFFFF"/>
+                </a:solidFill>
+                <a:latin typeface="Hiragino Sans GB" panose="020B0300000000000000" charset="-122"/>
+                <a:ea typeface="Hiragino Sans GB" panose="020B0300000000000000" charset="-122"/>
+                <a:cs typeface="Hiragino Sans GB" panose="020B0300000000000000" charset="-122"/>
+              </a:rPr>
+              <a:t>、</a:t>
+            </a:r>
+            <a:r>
+              <a:rPr lang="zh-CN" altLang="en-US" sz="4200" b="1">
+                <a:solidFill>
+                  <a:srgbClr val="FFFFFF"/>
+                </a:solidFill>
+                <a:latin typeface="Hiragino Sans GB" panose="020B0300000000000000" charset="-122"/>
+                <a:ea typeface="Hiragino Sans GB" panose="020B0300000000000000" charset="-122"/>
+                <a:cs typeface="Hiragino Sans GB" panose="020B0300000000000000" charset="-122"/>
+              </a:rPr>
+              <a:t>杨金辉</a:t>
+            </a:r>
+            <a:r>
+              <a:rPr lang="en-US" altLang="zh-CN" sz="4200" b="1">
+                <a:solidFill>
+                  <a:srgbClr val="FFFFFF"/>
+                </a:solidFill>
+                <a:latin typeface="Hiragino Sans GB" panose="020B0300000000000000" charset="-122"/>
+                <a:ea typeface="Hiragino Sans GB" panose="020B0300000000000000" charset="-122"/>
+                <a:cs typeface="Hiragino Sans GB" panose="020B0300000000000000" charset="-122"/>
+              </a:rPr>
+              <a:t>、</a:t>
+            </a:r>
+            <a:r>
+              <a:rPr lang="zh-CN" altLang="en-US" sz="4200" b="1">
+                <a:solidFill>
+                  <a:srgbClr val="FFFFFF"/>
+                </a:solidFill>
+                <a:latin typeface="Hiragino Sans GB" panose="020B0300000000000000" charset="-122"/>
+                <a:ea typeface="Hiragino Sans GB" panose="020B0300000000000000" charset="-122"/>
+                <a:cs typeface="Hiragino Sans GB" panose="020B0300000000000000" charset="-122"/>
+              </a:rPr>
+              <a:t>耶美田</a:t>
+            </a:r>
+            <a:r>
+              <a:rPr lang="en-US" altLang="zh-CN" sz="4200" b="1">
+                <a:solidFill>
+                  <a:srgbClr val="FFFFFF"/>
+                </a:solidFill>
+                <a:latin typeface="Hiragino Sans GB" panose="020B0300000000000000" charset="-122"/>
+                <a:ea typeface="Hiragino Sans GB" panose="020B0300000000000000" charset="-122"/>
+                <a:cs typeface="Hiragino Sans GB" panose="020B0300000000000000" charset="-122"/>
+              </a:rPr>
+              <a:t>、</a:t>
+            </a:r>
+            <a:r>
+              <a:rPr lang="zh-CN" altLang="en-US" sz="4200" b="1">
+                <a:solidFill>
+                  <a:srgbClr val="FFFFFF"/>
+                </a:solidFill>
+                <a:latin typeface="Hiragino Sans GB" panose="020B0300000000000000" charset="-122"/>
+                <a:ea typeface="Hiragino Sans GB" panose="020B0300000000000000" charset="-122"/>
+                <a:cs typeface="Hiragino Sans GB" panose="020B0300000000000000" charset="-122"/>
+              </a:rPr>
+              <a:t>朱政</a:t>
+            </a:r>
+            <a:r>
+              <a:rPr lang="zh-CN" altLang="en-US" sz="4200" b="1">
+                <a:solidFill>
+                  <a:srgbClr val="FFFFFF"/>
+                </a:solidFill>
+                <a:latin typeface="Hiragino Sans GB" panose="020B0300000000000000" charset="-122"/>
+                <a:ea typeface="Hiragino Sans GB" panose="020B0300000000000000" charset="-122"/>
+                <a:cs typeface="Hiragino Sans GB" panose="020B0300000000000000" charset="-122"/>
+              </a:rPr>
+              <a:t>宇</a:t>
+            </a:r>
+            <a:endParaRPr lang="zh-CN" altLang="en-US" sz="4200" b="1">
               <a:solidFill>
-                <a:srgbClr val="172A2A"/>
+                <a:srgbClr val="FFFFFF"/>
               </a:solidFill>
               <a:latin typeface="Hiragino Sans GB" panose="020B0300000000000000" charset="-122"/>
               <a:ea typeface="Hiragino Sans GB" panose="020B0300000000000000" charset="-122"/>
@@ -3524,8 +3049,8 @@
         </p:nvSpPr>
         <p:spPr>
           <a:xfrm>
-            <a:off x="5476875" y="2257425"/>
-            <a:ext cx="5953125" cy="609600"/>
+            <a:off x="623570" y="5229225"/>
+            <a:ext cx="10858500" cy="857250"/>
           </a:xfrm>
           <a:prstGeom prst="rect">
             <a:avLst/>
@@ -3541,9 +3066,9 @@
           </a:bodyPr>
           <a:lstStyle>
             <a:defPPr>
-              <a:defRPr sz="1800" b="0">
-                <a:solidFill>
-                  <a:srgbClr val="5B6864"/>
+              <a:defRPr sz="4200" b="1">
+                <a:solidFill>
+                  <a:srgbClr val="FFFFFF"/>
                 </a:solidFill>
                 <a:latin typeface="Hiragino Sans GB" panose="020B0300000000000000" charset="-122"/>
                 <a:ea typeface="Hiragino Sans GB" panose="020B0300000000000000" charset="-122"/>
@@ -3553,9 +3078,9 @@
           </a:lstStyle>
           <a:p>
             <a:pPr>
-              <a:defRPr sz="1800" b="0">
-                <a:solidFill>
-                  <a:srgbClr val="5B6864"/>
+              <a:defRPr sz="4200" b="1">
+                <a:solidFill>
+                  <a:srgbClr val="FFFFFF"/>
                 </a:solidFill>
                 <a:latin typeface="Hiragino Sans GB" panose="020B0300000000000000" charset="-122"/>
                 <a:ea typeface="Hiragino Sans GB" panose="020B0300000000000000" charset="-122"/>
@@ -3563,443 +3088,47 @@
               </a:defRPr>
             </a:pPr>
             <a:r>
-              <a:rPr sz="1800" b="0">
-                <a:solidFill>
-                  <a:srgbClr val="5B6864"/>
+              <a:rPr lang="zh-CN" altLang="en-US" sz="4200" b="1">
+                <a:solidFill>
+                  <a:srgbClr val="FFFFFF"/>
                 </a:solidFill>
                 <a:latin typeface="Hiragino Sans GB" panose="020B0300000000000000" charset="-122"/>
                 <a:ea typeface="Hiragino Sans GB" panose="020B0300000000000000" charset="-122"/>
                 <a:cs typeface="Hiragino Sans GB" panose="020B0300000000000000" charset="-122"/>
               </a:rPr>
-              <a:t>逐源解析、限速重试、错误识别和任务编排</a:t>
+              <a:t>项目地址</a:t>
             </a:r>
-            <a:endParaRPr sz="1800" b="0">
+            <a:r>
+              <a:rPr lang="en-US" altLang="zh-CN" sz="4200" b="1">
+                <a:solidFill>
+                  <a:srgbClr val="FFFFFF"/>
+                </a:solidFill>
+                <a:latin typeface="Hiragino Sans GB" panose="020B0300000000000000" charset="-122"/>
+                <a:ea typeface="Hiragino Sans GB" panose="020B0300000000000000" charset="-122"/>
+                <a:cs typeface="Hiragino Sans GB" panose="020B0300000000000000" charset="-122"/>
+              </a:rPr>
+              <a:t>：</a:t>
+            </a:r>
+            <a:r>
+              <a:rPr lang="en-US" altLang="zh-CN" sz="2000" b="1">
+                <a:solidFill>
+                  <a:srgbClr val="FFFFFF"/>
+                </a:solidFill>
+                <a:latin typeface="Hiragino Sans GB" panose="020B0300000000000000" charset="-122"/>
+                <a:ea typeface="Hiragino Sans GB" panose="020B0300000000000000" charset="-122"/>
+                <a:cs typeface="Hiragino Sans GB" panose="020B0300000000000000" charset="-122"/>
+                <a:hlinkClick r:id="rId1" action="ppaction://hlinkfile"/>
+              </a:rPr>
+              <a:t>https://github.com/WwhdsOne/achievement-analytics</a:t>
+            </a:r>
+            <a:endParaRPr lang="en-US" altLang="zh-CN" sz="2000" b="1">
               <a:solidFill>
-                <a:srgbClr val="5B6864"/>
+                <a:srgbClr val="FFFFFF"/>
               </a:solidFill>
               <a:latin typeface="Hiragino Sans GB" panose="020B0300000000000000" charset="-122"/>
               <a:ea typeface="Hiragino Sans GB" panose="020B0300000000000000" charset="-122"/>
               <a:cs typeface="Hiragino Sans GB" panose="020B0300000000000000" charset="-122"/>
-            </a:endParaRPr>
-          </a:p>
-        </p:txBody>
-      </p:sp>
-      <p:sp>
-        <p:nvSpPr>
-          <p:cNvPr id="8" name="矩形 7"/>
-          <p:cNvSpPr>
-            <a:spLocks noGrp="1"/>
-          </p:cNvSpPr>
-          <p:nvPr/>
-        </p:nvSpPr>
-        <p:spPr>
-          <a:xfrm>
-            <a:off x="5476875" y="2876550"/>
-            <a:ext cx="5953125" cy="400050"/>
-          </a:xfrm>
-          <a:prstGeom prst="rect">
-            <a:avLst/>
-          </a:prstGeom>
-          <a:noFill/>
-          <a:ln w="0">
-            <a:noFill/>
-          </a:ln>
-        </p:spPr>
-        <p:txBody>
-          <a:bodyPr wrap="square" lIns="0" tIns="0" rIns="0" bIns="0" anchor="t">
-            <a:noAutofit/>
-          </a:bodyPr>
-          <a:lstStyle>
-            <a:defPPr>
-              <a:defRPr sz="2175" b="1">
-                <a:solidFill>
-                  <a:srgbClr val="172A2A"/>
-                </a:solidFill>
-                <a:latin typeface="Hiragino Sans GB" panose="020B0300000000000000" charset="-122"/>
-                <a:ea typeface="Hiragino Sans GB" panose="020B0300000000000000" charset="-122"/>
-                <a:cs typeface="Hiragino Sans GB" panose="020B0300000000000000" charset="-122"/>
-              </a:defRPr>
-            </a:defPPr>
-          </a:lstStyle>
-          <a:p>
-            <a:pPr>
-              <a:defRPr sz="2175" b="1">
-                <a:solidFill>
-                  <a:srgbClr val="172A2A"/>
-                </a:solidFill>
-                <a:latin typeface="Hiragino Sans GB" panose="020B0300000000000000" charset="-122"/>
-                <a:ea typeface="Hiragino Sans GB" panose="020B0300000000000000" charset="-122"/>
-                <a:cs typeface="Hiragino Sans GB" panose="020B0300000000000000" charset="-122"/>
-              </a:defRPr>
-            </a:pPr>
-            <a:r>
-              <a:rPr sz="2175" b="1">
-                <a:solidFill>
-                  <a:srgbClr val="172A2A"/>
-                </a:solidFill>
-                <a:latin typeface="Hiragino Sans GB" panose="020B0300000000000000" charset="-122"/>
-                <a:ea typeface="Hiragino Sans GB" panose="020B0300000000000000" charset="-122"/>
-                <a:cs typeface="Hiragino Sans GB" panose="020B0300000000000000" charset="-122"/>
-              </a:rPr>
-              <a:t>数据库定义</a:t>
-            </a:r>
-            <a:endParaRPr sz="2175" b="1">
-              <a:solidFill>
-                <a:srgbClr val="172A2A"/>
-              </a:solidFill>
-              <a:latin typeface="Hiragino Sans GB" panose="020B0300000000000000" charset="-122"/>
-              <a:ea typeface="Hiragino Sans GB" panose="020B0300000000000000" charset="-122"/>
-              <a:cs typeface="Hiragino Sans GB" panose="020B0300000000000000" charset="-122"/>
-            </a:endParaRPr>
-          </a:p>
-        </p:txBody>
-      </p:sp>
-      <p:sp>
-        <p:nvSpPr>
-          <p:cNvPr id="9" name="矩形 8"/>
-          <p:cNvSpPr>
-            <a:spLocks noGrp="1"/>
-          </p:cNvSpPr>
-          <p:nvPr/>
-        </p:nvSpPr>
-        <p:spPr>
-          <a:xfrm>
-            <a:off x="5476875" y="3324225"/>
-            <a:ext cx="5953125" cy="609600"/>
-          </a:xfrm>
-          <a:prstGeom prst="rect">
-            <a:avLst/>
-          </a:prstGeom>
-          <a:noFill/>
-          <a:ln w="0">
-            <a:noFill/>
-          </a:ln>
-        </p:spPr>
-        <p:txBody>
-          <a:bodyPr wrap="square" lIns="0" tIns="0" rIns="0" bIns="0" anchor="t">
-            <a:noAutofit/>
-          </a:bodyPr>
-          <a:lstStyle>
-            <a:defPPr>
-              <a:defRPr sz="1800" b="0">
-                <a:solidFill>
-                  <a:srgbClr val="5B6864"/>
-                </a:solidFill>
-                <a:latin typeface="Hiragino Sans GB" panose="020B0300000000000000" charset="-122"/>
-                <a:ea typeface="Hiragino Sans GB" panose="020B0300000000000000" charset="-122"/>
-                <a:cs typeface="Hiragino Sans GB" panose="020B0300000000000000" charset="-122"/>
-              </a:defRPr>
-            </a:defPPr>
-          </a:lstStyle>
-          <a:p>
-            <a:pPr>
-              <a:defRPr sz="1800" b="0">
-                <a:solidFill>
-                  <a:srgbClr val="5B6864"/>
-                </a:solidFill>
-                <a:latin typeface="Hiragino Sans GB" panose="020B0300000000000000" charset="-122"/>
-                <a:ea typeface="Hiragino Sans GB" panose="020B0300000000000000" charset="-122"/>
-                <a:cs typeface="Hiragino Sans GB" panose="020B0300000000000000" charset="-122"/>
-              </a:defRPr>
-            </a:pPr>
-            <a:r>
-              <a:rPr sz="1800" b="0">
-                <a:solidFill>
-                  <a:srgbClr val="5B6864"/>
-                </a:solidFill>
-                <a:latin typeface="Hiragino Sans GB" panose="020B0300000000000000" charset="-122"/>
-                <a:ea typeface="Hiragino Sans GB" panose="020B0300000000000000" charset="-122"/>
-                <a:cs typeface="Hiragino Sans GB" panose="020B0300000000000000" charset="-122"/>
-              </a:rPr>
-              <a:t>数据表、索引、视图、队列和配额账本</a:t>
-            </a:r>
-            <a:endParaRPr sz="1800" b="0">
-              <a:solidFill>
-                <a:srgbClr val="5B6864"/>
-              </a:solidFill>
-              <a:latin typeface="Hiragino Sans GB" panose="020B0300000000000000" charset="-122"/>
-              <a:ea typeface="Hiragino Sans GB" panose="020B0300000000000000" charset="-122"/>
-              <a:cs typeface="Hiragino Sans GB" panose="020B0300000000000000" charset="-122"/>
-            </a:endParaRPr>
-          </a:p>
-        </p:txBody>
-      </p:sp>
-      <p:sp>
-        <p:nvSpPr>
-          <p:cNvPr id="10" name="矩形 9"/>
-          <p:cNvSpPr>
-            <a:spLocks noGrp="1"/>
-          </p:cNvSpPr>
-          <p:nvPr/>
-        </p:nvSpPr>
-        <p:spPr>
-          <a:xfrm>
-            <a:off x="5476875" y="3943350"/>
-            <a:ext cx="5953125" cy="400050"/>
-          </a:xfrm>
-          <a:prstGeom prst="rect">
-            <a:avLst/>
-          </a:prstGeom>
-          <a:noFill/>
-          <a:ln w="0">
-            <a:noFill/>
-          </a:ln>
-        </p:spPr>
-        <p:txBody>
-          <a:bodyPr wrap="square" lIns="0" tIns="0" rIns="0" bIns="0" anchor="t">
-            <a:noAutofit/>
-          </a:bodyPr>
-          <a:lstStyle>
-            <a:defPPr>
-              <a:defRPr sz="2175" b="1">
-                <a:solidFill>
-                  <a:srgbClr val="172A2A"/>
-                </a:solidFill>
-                <a:latin typeface="Hiragino Sans GB" panose="020B0300000000000000" charset="-122"/>
-                <a:ea typeface="Hiragino Sans GB" panose="020B0300000000000000" charset="-122"/>
-                <a:cs typeface="Hiragino Sans GB" panose="020B0300000000000000" charset="-122"/>
-              </a:defRPr>
-            </a:defPPr>
-          </a:lstStyle>
-          <a:p>
-            <a:pPr>
-              <a:defRPr sz="2175" b="1">
-                <a:solidFill>
-                  <a:srgbClr val="172A2A"/>
-                </a:solidFill>
-                <a:latin typeface="Hiragino Sans GB" panose="020B0300000000000000" charset="-122"/>
-                <a:ea typeface="Hiragino Sans GB" panose="020B0300000000000000" charset="-122"/>
-                <a:cs typeface="Hiragino Sans GB" panose="020B0300000000000000" charset="-122"/>
-              </a:defRPr>
-            </a:pPr>
-            <a:r>
-              <a:rPr sz="2175" b="1">
-                <a:solidFill>
-                  <a:srgbClr val="172A2A"/>
-                </a:solidFill>
-                <a:latin typeface="Hiragino Sans GB" panose="020B0300000000000000" charset="-122"/>
-                <a:ea typeface="Hiragino Sans GB" panose="020B0300000000000000" charset="-122"/>
-                <a:cs typeface="Hiragino Sans GB" panose="020B0300000000000000" charset="-122"/>
-              </a:rPr>
-              <a:t>数据获取与补抓</a:t>
-            </a:r>
-            <a:endParaRPr sz="2175" b="1">
-              <a:solidFill>
-                <a:srgbClr val="172A2A"/>
-              </a:solidFill>
-              <a:latin typeface="Hiragino Sans GB" panose="020B0300000000000000" charset="-122"/>
-              <a:ea typeface="Hiragino Sans GB" panose="020B0300000000000000" charset="-122"/>
-              <a:cs typeface="Hiragino Sans GB" panose="020B0300000000000000" charset="-122"/>
-            </a:endParaRPr>
-          </a:p>
-        </p:txBody>
-      </p:sp>
-      <p:sp>
-        <p:nvSpPr>
-          <p:cNvPr id="11" name="矩形 10"/>
-          <p:cNvSpPr>
-            <a:spLocks noGrp="1"/>
-          </p:cNvSpPr>
-          <p:nvPr/>
-        </p:nvSpPr>
-        <p:spPr>
-          <a:xfrm>
-            <a:off x="5476875" y="4391025"/>
-            <a:ext cx="5953125" cy="609600"/>
-          </a:xfrm>
-          <a:prstGeom prst="rect">
-            <a:avLst/>
-          </a:prstGeom>
-          <a:noFill/>
-          <a:ln w="0">
-            <a:noFill/>
-          </a:ln>
-        </p:spPr>
-        <p:txBody>
-          <a:bodyPr wrap="square" lIns="0" tIns="0" rIns="0" bIns="0" anchor="t">
-            <a:noAutofit/>
-          </a:bodyPr>
-          <a:lstStyle>
-            <a:defPPr>
-              <a:defRPr sz="1800" b="0">
-                <a:solidFill>
-                  <a:srgbClr val="5B6864"/>
-                </a:solidFill>
-                <a:latin typeface="Hiragino Sans GB" panose="020B0300000000000000" charset="-122"/>
-                <a:ea typeface="Hiragino Sans GB" panose="020B0300000000000000" charset="-122"/>
-                <a:cs typeface="Hiragino Sans GB" panose="020B0300000000000000" charset="-122"/>
-              </a:defRPr>
-            </a:defPPr>
-          </a:lstStyle>
-          <a:p>
-            <a:pPr>
-              <a:defRPr sz="1800" b="0">
-                <a:solidFill>
-                  <a:srgbClr val="5B6864"/>
-                </a:solidFill>
-                <a:latin typeface="Hiragino Sans GB" panose="020B0300000000000000" charset="-122"/>
-                <a:ea typeface="Hiragino Sans GB" panose="020B0300000000000000" charset="-122"/>
-                <a:cs typeface="Hiragino Sans GB" panose="020B0300000000000000" charset="-122"/>
-              </a:defRPr>
-            </a:pPr>
-            <a:r>
-              <a:rPr sz="1800" b="0">
-                <a:solidFill>
-                  <a:srgbClr val="5B6864"/>
-                </a:solidFill>
-                <a:latin typeface="Hiragino Sans GB" panose="020B0300000000000000" charset="-122"/>
-                <a:ea typeface="Hiragino Sans GB" panose="020B0300000000000000" charset="-122"/>
-                <a:cs typeface="Hiragino Sans GB" panose="020B0300000000000000" charset="-122"/>
-              </a:rPr>
-              <a:t>多机连续运行，处理中断、漏页与源级挂起</a:t>
-            </a:r>
-            <a:endParaRPr sz="1800" b="0">
-              <a:solidFill>
-                <a:srgbClr val="5B6864"/>
-              </a:solidFill>
-              <a:latin typeface="Hiragino Sans GB" panose="020B0300000000000000" charset="-122"/>
-              <a:ea typeface="Hiragino Sans GB" panose="020B0300000000000000" charset="-122"/>
-              <a:cs typeface="Hiragino Sans GB" panose="020B0300000000000000" charset="-122"/>
-            </a:endParaRPr>
-          </a:p>
-        </p:txBody>
-      </p:sp>
-      <p:sp>
-        <p:nvSpPr>
-          <p:cNvPr id="12" name="矩形 11"/>
-          <p:cNvSpPr>
-            <a:spLocks noGrp="1"/>
-          </p:cNvSpPr>
-          <p:nvPr/>
-        </p:nvSpPr>
-        <p:spPr>
-          <a:xfrm>
-            <a:off x="5476875" y="5010150"/>
-            <a:ext cx="5953125" cy="400050"/>
-          </a:xfrm>
-          <a:prstGeom prst="rect">
-            <a:avLst/>
-          </a:prstGeom>
-          <a:noFill/>
-          <a:ln w="0">
-            <a:noFill/>
-          </a:ln>
-        </p:spPr>
-        <p:txBody>
-          <a:bodyPr wrap="square" lIns="0" tIns="0" rIns="0" bIns="0" anchor="t">
-            <a:noAutofit/>
-          </a:bodyPr>
-          <a:lstStyle>
-            <a:defPPr>
-              <a:defRPr sz="2175" b="1">
-                <a:solidFill>
-                  <a:srgbClr val="172A2A"/>
-                </a:solidFill>
-                <a:latin typeface="Hiragino Sans GB" panose="020B0300000000000000" charset="-122"/>
-                <a:ea typeface="Hiragino Sans GB" panose="020B0300000000000000" charset="-122"/>
-                <a:cs typeface="Hiragino Sans GB" panose="020B0300000000000000" charset="-122"/>
-              </a:defRPr>
-            </a:defPPr>
-          </a:lstStyle>
-          <a:p>
-            <a:pPr>
-              <a:defRPr sz="2175" b="1">
-                <a:solidFill>
-                  <a:srgbClr val="172A2A"/>
-                </a:solidFill>
-                <a:latin typeface="Hiragino Sans GB" panose="020B0300000000000000" charset="-122"/>
-                <a:ea typeface="Hiragino Sans GB" panose="020B0300000000000000" charset="-122"/>
-                <a:cs typeface="Hiragino Sans GB" panose="020B0300000000000000" charset="-122"/>
-              </a:defRPr>
-            </a:pPr>
-            <a:r>
-              <a:rPr sz="2175" b="1">
-                <a:solidFill>
-                  <a:srgbClr val="172A2A"/>
-                </a:solidFill>
-                <a:latin typeface="Hiragino Sans GB" panose="020B0300000000000000" charset="-122"/>
-                <a:ea typeface="Hiragino Sans GB" panose="020B0300000000000000" charset="-122"/>
-                <a:cs typeface="Hiragino Sans GB" panose="020B0300000000000000" charset="-122"/>
-              </a:rPr>
-              <a:t>验证与修复</a:t>
-            </a:r>
-            <a:endParaRPr sz="2175" b="1">
-              <a:solidFill>
-                <a:srgbClr val="172A2A"/>
-              </a:solidFill>
-              <a:latin typeface="Hiragino Sans GB" panose="020B0300000000000000" charset="-122"/>
-              <a:ea typeface="Hiragino Sans GB" panose="020B0300000000000000" charset="-122"/>
-              <a:cs typeface="Hiragino Sans GB" panose="020B0300000000000000" charset="-122"/>
-            </a:endParaRPr>
-          </a:p>
-        </p:txBody>
-      </p:sp>
-      <p:sp>
-        <p:nvSpPr>
-          <p:cNvPr id="13" name="矩形 12"/>
-          <p:cNvSpPr>
-            <a:spLocks noGrp="1"/>
-          </p:cNvSpPr>
-          <p:nvPr/>
-        </p:nvSpPr>
-        <p:spPr>
-          <a:xfrm>
-            <a:off x="5476875" y="5457825"/>
-            <a:ext cx="5953125" cy="609600"/>
-          </a:xfrm>
-          <a:prstGeom prst="rect">
-            <a:avLst/>
-          </a:prstGeom>
-          <a:noFill/>
-          <a:ln w="0">
-            <a:noFill/>
-          </a:ln>
-        </p:spPr>
-        <p:txBody>
-          <a:bodyPr wrap="square" lIns="0" tIns="0" rIns="0" bIns="0" anchor="t">
-            <a:noAutofit/>
-          </a:bodyPr>
-          <a:lstStyle>
-            <a:defPPr>
-              <a:defRPr sz="1800" b="0">
-                <a:solidFill>
-                  <a:srgbClr val="5B6864"/>
-                </a:solidFill>
-                <a:latin typeface="Hiragino Sans GB" panose="020B0300000000000000" charset="-122"/>
-                <a:ea typeface="Hiragino Sans GB" panose="020B0300000000000000" charset="-122"/>
-                <a:cs typeface="Hiragino Sans GB" panose="020B0300000000000000" charset="-122"/>
-              </a:defRPr>
-            </a:defPPr>
-          </a:lstStyle>
-          <a:p>
-            <a:pPr>
-              <a:defRPr sz="1800" b="0">
-                <a:solidFill>
-                  <a:srgbClr val="5B6864"/>
-                </a:solidFill>
-                <a:latin typeface="Hiragino Sans GB" panose="020B0300000000000000" charset="-122"/>
-                <a:ea typeface="Hiragino Sans GB" panose="020B0300000000000000" charset="-122"/>
-                <a:cs typeface="Hiragino Sans GB" panose="020B0300000000000000" charset="-122"/>
-              </a:defRPr>
-            </a:pPr>
-            <a:r>
-              <a:rPr sz="1800" b="0">
-                <a:solidFill>
-                  <a:srgbClr val="5B6864"/>
-                </a:solidFill>
-                <a:latin typeface="Hiragino Sans GB" panose="020B0300000000000000" charset="-122"/>
-                <a:ea typeface="Hiragino Sans GB" panose="020B0300000000000000" charset="-122"/>
-                <a:cs typeface="Hiragino Sans GB" panose="020B0300000000000000" charset="-122"/>
-              </a:rPr>
-              <a:t>核验名称映射，复查被误判为“无数据”的任务</a:t>
-            </a:r>
-            <a:endParaRPr sz="1800" b="0">
-              <a:solidFill>
-                <a:srgbClr val="5B6864"/>
-              </a:solidFill>
-              <a:latin typeface="Hiragino Sans GB" panose="020B0300000000000000" charset="-122"/>
-              <a:ea typeface="Hiragino Sans GB" panose="020B0300000000000000" charset="-122"/>
-              <a:cs typeface="Hiragino Sans GB" panose="020B0300000000000000" charset="-122"/>
+              <a:hlinkClick r:id="rId1" action="ppaction://hlinkfile"/>
             </a:endParaRPr>
           </a:p>
         </p:txBody>
@@ -4012,7 +3141,7 @@
 </p:sld>
 </file>
 
-<file path=ppt/slides/slide3.xml><?xml version="1.0" encoding="utf-8"?>
+<file path=ppt/slides/slide2.xml><?xml version="1.0" encoding="utf-8"?>
 <p:sld xmlns:a="http://schemas.openxmlformats.org/drawingml/2006/main" xmlns:r="http://schemas.openxmlformats.org/officeDocument/2006/relationships" xmlns:p="http://schemas.openxmlformats.org/presentationml/2006/main">
   <p:cSld>
     <p:bg>
@@ -4087,81 +3216,33 @@
                 <a:ea typeface="Hiragino Sans GB" panose="020B0300000000000000" charset="-122"/>
                 <a:cs typeface="Hiragino Sans GB" panose="020B0300000000000000" charset="-122"/>
               </a:rPr>
-              <a:t>六类逐款数据源，拼成一份游戏档案</a:t>
+              <a:t>六类逐款数据源，</a:t>
+            </a:r>
+            <a:r>
+              <a:rPr lang="zh-CN" sz="3300" b="1">
+                <a:solidFill>
+                  <a:srgbClr val="172A2A"/>
+                </a:solidFill>
+                <a:latin typeface="Hiragino Sans GB" panose="020B0300000000000000" charset="-122"/>
+                <a:ea typeface="Hiragino Sans GB" panose="020B0300000000000000" charset="-122"/>
+                <a:cs typeface="Hiragino Sans GB" panose="020B0300000000000000" charset="-122"/>
+              </a:rPr>
+              <a:t>组合</a:t>
+            </a:r>
+            <a:r>
+              <a:rPr sz="3300" b="1">
+                <a:solidFill>
+                  <a:srgbClr val="172A2A"/>
+                </a:solidFill>
+                <a:latin typeface="Hiragino Sans GB" panose="020B0300000000000000" charset="-122"/>
+                <a:ea typeface="Hiragino Sans GB" panose="020B0300000000000000" charset="-122"/>
+                <a:cs typeface="Hiragino Sans GB" panose="020B0300000000000000" charset="-122"/>
+              </a:rPr>
+              <a:t>一份游戏档案</a:t>
             </a:r>
             <a:endParaRPr sz="3300" b="1">
               <a:solidFill>
                 <a:srgbClr val="172A2A"/>
-              </a:solidFill>
-              <a:latin typeface="Hiragino Sans GB" panose="020B0300000000000000" charset="-122"/>
-              <a:ea typeface="Hiragino Sans GB" panose="020B0300000000000000" charset="-122"/>
-              <a:cs typeface="Hiragino Sans GB" panose="020B0300000000000000" charset="-122"/>
-            </a:endParaRPr>
-          </a:p>
-        </p:txBody>
-      </p:sp>
-      <p:sp>
-        <p:nvSpPr>
-          <p:cNvPr id="2" name="矩形 1"/>
-          <p:cNvSpPr>
-            <a:spLocks noGrp="1"/>
-          </p:cNvSpPr>
-          <p:nvPr/>
-        </p:nvSpPr>
-        <p:spPr>
-          <a:xfrm>
-            <a:off x="10668000" y="6438900"/>
-            <a:ext cx="952500" cy="209550"/>
-          </a:xfrm>
-          <a:prstGeom prst="rect">
-            <a:avLst/>
-          </a:prstGeom>
-          <a:noFill/>
-          <a:ln w="0">
-            <a:noFill/>
-          </a:ln>
-        </p:spPr>
-        <p:txBody>
-          <a:bodyPr wrap="square" lIns="0" tIns="0" rIns="0" bIns="0" anchor="t">
-            <a:noAutofit/>
-          </a:bodyPr>
-          <a:lstStyle>
-            <a:defPPr>
-              <a:defRPr sz="1125" b="0">
-                <a:solidFill>
-                  <a:srgbClr val="5B6864"/>
-                </a:solidFill>
-                <a:latin typeface="Hiragino Sans GB" panose="020B0300000000000000" charset="-122"/>
-                <a:ea typeface="Hiragino Sans GB" panose="020B0300000000000000" charset="-122"/>
-                <a:cs typeface="Hiragino Sans GB" panose="020B0300000000000000" charset="-122"/>
-              </a:defRPr>
-            </a:defPPr>
-          </a:lstStyle>
-          <a:p>
-            <a:pPr>
-              <a:defRPr sz="1125" b="0">
-                <a:solidFill>
-                  <a:srgbClr val="5B6864"/>
-                </a:solidFill>
-                <a:latin typeface="Hiragino Sans GB" panose="020B0300000000000000" charset="-122"/>
-                <a:ea typeface="Hiragino Sans GB" panose="020B0300000000000000" charset="-122"/>
-                <a:cs typeface="Hiragino Sans GB" panose="020B0300000000000000" charset="-122"/>
-              </a:defRPr>
-            </a:pPr>
-            <a:r>
-              <a:rPr sz="1125" b="0">
-                <a:solidFill>
-                  <a:srgbClr val="5B6864"/>
-                </a:solidFill>
-                <a:latin typeface="Hiragino Sans GB" panose="020B0300000000000000" charset="-122"/>
-                <a:ea typeface="Hiragino Sans GB" panose="020B0300000000000000" charset="-122"/>
-                <a:cs typeface="Hiragino Sans GB" panose="020B0300000000000000" charset="-122"/>
-              </a:rPr>
-              <a:t>04 / 15</a:t>
-            </a:r>
-            <a:endParaRPr sz="1125" b="0">
-              <a:solidFill>
-                <a:srgbClr val="5B6864"/>
               </a:solidFill>
               <a:latin typeface="Hiragino Sans GB" panose="020B0300000000000000" charset="-122"/>
               <a:ea typeface="Hiragino Sans GB" panose="020B0300000000000000" charset="-122"/>
@@ -4876,7 +3957,40 @@
                         </a:rPr>
                         <a:t>RAWG</a:t>
                       </a:r>
-                      <a:endParaRPr sz="1800" b="0">
+                      <a:r>
+                        <a:rPr lang="en-US" sz="1800" b="0">
+                          <a:solidFill>
+                            <a:srgbClr val="172A2A"/>
+                          </a:solidFill>
+                          <a:latin typeface="Hiragino Sans GB" panose="020B0300000000000000" charset="-122"/>
+                          <a:ea typeface="Hiragino Sans GB" panose="020B0300000000000000" charset="-122"/>
+                          <a:cs typeface="Hiragino Sans GB" panose="020B0300000000000000" charset="-122"/>
+                        </a:rPr>
+                        <a:t>（</a:t>
+                      </a:r>
+                      <a:r>
+                        <a:rPr lang="zh-CN" altLang="en-US" sz="1800" b="0">
+                          <a:solidFill>
+                            <a:srgbClr val="172A2A"/>
+                          </a:solidFill>
+                          <a:latin typeface="Hiragino Sans GB" panose="020B0300000000000000" charset="-122"/>
+                          <a:ea typeface="Hiragino Sans GB" panose="020B0300000000000000" charset="-122"/>
+                          <a:cs typeface="Hiragino Sans GB" panose="020B0300000000000000" charset="-122"/>
+                        </a:rPr>
+                        <a:t>仅部分游戏获取</a:t>
+                      </a:r>
+                      <a:r>
+                        <a:rPr lang="en-US" sz="1800" b="0">
+                          <a:solidFill>
+                            <a:srgbClr val="172A2A"/>
+                          </a:solidFill>
+                          <a:latin typeface="Hiragino Sans GB" panose="020B0300000000000000" charset="-122"/>
+                          <a:ea typeface="Hiragino Sans GB" panose="020B0300000000000000" charset="-122"/>
+                          <a:cs typeface="Hiragino Sans GB" panose="020B0300000000000000" charset="-122"/>
+                        </a:rPr>
+                        <a:t>）</a:t>
+                      </a:r>
+                      <a:endParaRPr lang="en-US" sz="1800" b="0">
                         <a:solidFill>
                           <a:srgbClr val="172A2A"/>
                         </a:solidFill>
@@ -5039,6 +4153,739 @@
               <a:ea typeface="Hiragino Sans GB" panose="020B0300000000000000" charset="-122"/>
               <a:cs typeface="Hiragino Sans GB" panose="020B0300000000000000" charset="-122"/>
               <a:hlinkClick r:id="rId1"/>
+            </a:endParaRPr>
+          </a:p>
+        </p:txBody>
+      </p:sp>
+    </p:spTree>
+  </p:cSld>
+  <p:clrMapOvr>
+    <a:masterClrMapping/>
+  </p:clrMapOvr>
+</p:sld>
+</file>
+
+<file path=ppt/slides/slide3.xml><?xml version="1.0" encoding="utf-8"?>
+<p:sld xmlns:a="http://schemas.openxmlformats.org/drawingml/2006/main" xmlns:r="http://schemas.openxmlformats.org/officeDocument/2006/relationships" xmlns:p="http://schemas.openxmlformats.org/presentationml/2006/main">
+  <p:cSld>
+    <p:bg>
+      <p:bgPr>
+        <a:solidFill>
+          <a:srgbClr val="F4F2EC"/>
+        </a:solidFill>
+        <a:effectLst/>
+      </p:bgPr>
+    </p:bg>
+    <p:spTree>
+      <p:nvGrpSpPr>
+        <p:cNvPr id="1" name=""/>
+        <p:cNvGrpSpPr/>
+        <p:nvPr/>
+      </p:nvGrpSpPr>
+      <p:grpSpPr/>
+      <p:sp>
+        <p:nvSpPr>
+          <p:cNvPr id="14" name="矩形 13"/>
+          <p:cNvSpPr>
+            <a:spLocks noGrp="1"/>
+          </p:cNvSpPr>
+          <p:nvPr/>
+        </p:nvSpPr>
+        <p:spPr>
+          <a:xfrm>
+            <a:off x="609600" y="457200"/>
+            <a:ext cx="10972800" cy="838200"/>
+          </a:xfrm>
+          <a:prstGeom prst="rect">
+            <a:avLst/>
+          </a:prstGeom>
+          <a:noFill/>
+          <a:ln w="0">
+            <a:noFill/>
+          </a:ln>
+        </p:spPr>
+        <p:txBody>
+          <a:bodyPr wrap="square" lIns="0" tIns="0" rIns="0" bIns="0" anchor="t">
+            <a:noAutofit/>
+          </a:bodyPr>
+          <a:lstStyle>
+            <a:defPPr>
+              <a:defRPr sz="3300" b="1">
+                <a:solidFill>
+                  <a:srgbClr val="172A2A"/>
+                </a:solidFill>
+                <a:latin typeface="Hiragino Sans GB" panose="020B0300000000000000" charset="-122"/>
+                <a:ea typeface="Hiragino Sans GB" panose="020B0300000000000000" charset="-122"/>
+                <a:cs typeface="Hiragino Sans GB" panose="020B0300000000000000" charset="-122"/>
+              </a:defRPr>
+            </a:defPPr>
+          </a:lstStyle>
+          <a:p>
+            <a:pPr>
+              <a:defRPr sz="3300" b="1">
+                <a:solidFill>
+                  <a:srgbClr val="172A2A"/>
+                </a:solidFill>
+                <a:latin typeface="Hiragino Sans GB" panose="020B0300000000000000" charset="-122"/>
+                <a:ea typeface="Hiragino Sans GB" panose="020B0300000000000000" charset="-122"/>
+                <a:cs typeface="Hiragino Sans GB" panose="020B0300000000000000" charset="-122"/>
+              </a:defRPr>
+            </a:pPr>
+            <a:r>
+              <a:rPr lang="zh-CN" sz="3300" b="1">
+                <a:solidFill>
+                  <a:srgbClr val="172A2A"/>
+                </a:solidFill>
+                <a:latin typeface="Hiragino Sans GB" panose="020B0300000000000000" charset="-122"/>
+                <a:ea typeface="Hiragino Sans GB" panose="020B0300000000000000" charset="-122"/>
+                <a:cs typeface="Hiragino Sans GB" panose="020B0300000000000000" charset="-122"/>
+              </a:rPr>
+              <a:t>花费</a:t>
+            </a:r>
+            <a:r>
+              <a:rPr lang="zh-CN" altLang="en-US" sz="3300" b="1">
+                <a:solidFill>
+                  <a:srgbClr val="172A2A"/>
+                </a:solidFill>
+                <a:latin typeface="Hiragino Sans GB" panose="020B0300000000000000" charset="-122"/>
+                <a:ea typeface="Hiragino Sans GB" panose="020B0300000000000000" charset="-122"/>
+                <a:cs typeface="Hiragino Sans GB" panose="020B0300000000000000" charset="-122"/>
+              </a:rPr>
+              <a:t>约</a:t>
+            </a:r>
+            <a:r>
+              <a:rPr lang="en-US" altLang="zh-CN" sz="3300" b="1">
+                <a:solidFill>
+                  <a:srgbClr val="172A2A"/>
+                </a:solidFill>
+                <a:latin typeface="Hiragino Sans GB" panose="020B0300000000000000" charset="-122"/>
+                <a:ea typeface="Hiragino Sans GB" panose="020B0300000000000000" charset="-122"/>
+                <a:cs typeface="Hiragino Sans GB" panose="020B0300000000000000" charset="-122"/>
+              </a:rPr>
+              <a:t>170</a:t>
+            </a:r>
+            <a:r>
+              <a:rPr sz="3300" b="1">
+                <a:solidFill>
+                  <a:srgbClr val="172A2A"/>
+                </a:solidFill>
+                <a:latin typeface="Hiragino Sans GB" panose="020B0300000000000000" charset="-122"/>
+                <a:ea typeface="Hiragino Sans GB" panose="020B0300000000000000" charset="-122"/>
+                <a:cs typeface="Hiragino Sans GB" panose="020B0300000000000000" charset="-122"/>
+              </a:rPr>
+              <a:t>小时，</a:t>
+            </a:r>
+            <a:r>
+              <a:rPr lang="zh-CN" sz="3300" b="1">
+                <a:solidFill>
+                  <a:srgbClr val="172A2A"/>
+                </a:solidFill>
+                <a:latin typeface="Hiragino Sans GB" panose="020B0300000000000000" charset="-122"/>
+                <a:ea typeface="Hiragino Sans GB" panose="020B0300000000000000" charset="-122"/>
+                <a:cs typeface="Hiragino Sans GB" panose="020B0300000000000000" charset="-122"/>
+              </a:rPr>
+              <a:t>各个渠道获取</a:t>
+            </a:r>
+            <a:r>
+              <a:rPr lang="zh-CN" sz="3300" b="1">
+                <a:solidFill>
+                  <a:srgbClr val="172A2A"/>
+                </a:solidFill>
+                <a:latin typeface="Hiragino Sans GB" panose="020B0300000000000000" charset="-122"/>
+                <a:ea typeface="Hiragino Sans GB" panose="020B0300000000000000" charset="-122"/>
+                <a:cs typeface="Hiragino Sans GB" panose="020B0300000000000000" charset="-122"/>
+              </a:rPr>
+              <a:t>数据</a:t>
+            </a:r>
+            <a:endParaRPr lang="zh-CN" sz="3300" b="1">
+              <a:solidFill>
+                <a:srgbClr val="172A2A"/>
+              </a:solidFill>
+              <a:latin typeface="Hiragino Sans GB" panose="020B0300000000000000" charset="-122"/>
+              <a:ea typeface="Hiragino Sans GB" panose="020B0300000000000000" charset="-122"/>
+              <a:cs typeface="Hiragino Sans GB" panose="020B0300000000000000" charset="-122"/>
+            </a:endParaRPr>
+          </a:p>
+        </p:txBody>
+      </p:sp>
+      <p:sp>
+        <p:nvSpPr>
+          <p:cNvPr id="4" name="矩形 3"/>
+          <p:cNvSpPr>
+            <a:spLocks noGrp="1"/>
+          </p:cNvSpPr>
+          <p:nvPr/>
+        </p:nvSpPr>
+        <p:spPr>
+          <a:xfrm>
+            <a:off x="609600" y="1885950"/>
+            <a:ext cx="4381500" cy="1952625"/>
+          </a:xfrm>
+          <a:prstGeom prst="rect">
+            <a:avLst/>
+          </a:prstGeom>
+          <a:noFill/>
+          <a:ln w="0">
+            <a:noFill/>
+          </a:ln>
+        </p:spPr>
+        <p:txBody>
+          <a:bodyPr wrap="square" lIns="0" tIns="0" rIns="0" bIns="0" anchor="t">
+            <a:noAutofit/>
+          </a:bodyPr>
+          <a:lstStyle>
+            <a:defPPr>
+              <a:defRPr sz="13050" b="1">
+                <a:solidFill>
+                  <a:srgbClr val="246A5F"/>
+                </a:solidFill>
+                <a:latin typeface="Hiragino Sans GB" panose="020B0300000000000000" charset="-122"/>
+                <a:ea typeface="Hiragino Sans GB" panose="020B0300000000000000" charset="-122"/>
+                <a:cs typeface="Hiragino Sans GB" panose="020B0300000000000000" charset="-122"/>
+              </a:defRPr>
+            </a:defPPr>
+          </a:lstStyle>
+          <a:p>
+            <a:pPr>
+              <a:defRPr sz="13050" b="1">
+                <a:solidFill>
+                  <a:srgbClr val="246A5F"/>
+                </a:solidFill>
+                <a:latin typeface="Hiragino Sans GB" panose="020B0300000000000000" charset="-122"/>
+                <a:ea typeface="Hiragino Sans GB" panose="020B0300000000000000" charset="-122"/>
+                <a:cs typeface="Hiragino Sans GB" panose="020B0300000000000000" charset="-122"/>
+              </a:defRPr>
+            </a:pPr>
+            <a:r>
+              <a:rPr sz="13050" b="1">
+                <a:solidFill>
+                  <a:srgbClr val="246A5F"/>
+                </a:solidFill>
+                <a:latin typeface="Hiragino Sans GB" panose="020B0300000000000000" charset="-122"/>
+                <a:ea typeface="Hiragino Sans GB" panose="020B0300000000000000" charset="-122"/>
+                <a:cs typeface="Hiragino Sans GB" panose="020B0300000000000000" charset="-122"/>
+              </a:rPr>
+              <a:t>1</a:t>
+            </a:r>
+            <a:r>
+              <a:rPr lang="en-US" sz="13050" b="1">
+                <a:solidFill>
+                  <a:srgbClr val="246A5F"/>
+                </a:solidFill>
+                <a:latin typeface="Hiragino Sans GB" panose="020B0300000000000000" charset="-122"/>
+                <a:ea typeface="Hiragino Sans GB" panose="020B0300000000000000" charset="-122"/>
+                <a:cs typeface="Hiragino Sans GB" panose="020B0300000000000000" charset="-122"/>
+              </a:rPr>
+              <a:t>70</a:t>
+            </a:r>
+            <a:endParaRPr sz="13050" b="1">
+              <a:solidFill>
+                <a:srgbClr val="246A5F"/>
+              </a:solidFill>
+              <a:latin typeface="Hiragino Sans GB" panose="020B0300000000000000" charset="-122"/>
+              <a:ea typeface="Hiragino Sans GB" panose="020B0300000000000000" charset="-122"/>
+              <a:cs typeface="Hiragino Sans GB" panose="020B0300000000000000" charset="-122"/>
+            </a:endParaRPr>
+          </a:p>
+        </p:txBody>
+      </p:sp>
+      <p:sp>
+        <p:nvSpPr>
+          <p:cNvPr id="5" name="矩形 4"/>
+          <p:cNvSpPr>
+            <a:spLocks noGrp="1"/>
+          </p:cNvSpPr>
+          <p:nvPr/>
+        </p:nvSpPr>
+        <p:spPr>
+          <a:xfrm>
+            <a:off x="704850" y="3943350"/>
+            <a:ext cx="3524250" cy="628650"/>
+          </a:xfrm>
+          <a:prstGeom prst="rect">
+            <a:avLst/>
+          </a:prstGeom>
+          <a:noFill/>
+          <a:ln w="0">
+            <a:noFill/>
+          </a:ln>
+        </p:spPr>
+        <p:txBody>
+          <a:bodyPr wrap="square" lIns="0" tIns="0" rIns="0" bIns="0" anchor="t">
+            <a:noAutofit/>
+          </a:bodyPr>
+          <a:lstStyle>
+            <a:defPPr>
+              <a:defRPr sz="3000" b="0">
+                <a:solidFill>
+                  <a:srgbClr val="172A2A"/>
+                </a:solidFill>
+                <a:latin typeface="Hiragino Sans GB" panose="020B0300000000000000" charset="-122"/>
+                <a:ea typeface="Hiragino Sans GB" panose="020B0300000000000000" charset="-122"/>
+                <a:cs typeface="Hiragino Sans GB" panose="020B0300000000000000" charset="-122"/>
+              </a:defRPr>
+            </a:defPPr>
+          </a:lstStyle>
+          <a:p>
+            <a:pPr>
+              <a:defRPr sz="3000" b="0">
+                <a:solidFill>
+                  <a:srgbClr val="172A2A"/>
+                </a:solidFill>
+                <a:latin typeface="Hiragino Sans GB" panose="020B0300000000000000" charset="-122"/>
+                <a:ea typeface="Hiragino Sans GB" panose="020B0300000000000000" charset="-122"/>
+                <a:cs typeface="Hiragino Sans GB" panose="020B0300000000000000" charset="-122"/>
+              </a:defRPr>
+            </a:pPr>
+            <a:r>
+              <a:rPr sz="3000" b="0">
+                <a:solidFill>
+                  <a:srgbClr val="172A2A"/>
+                </a:solidFill>
+                <a:latin typeface="Hiragino Sans GB" panose="020B0300000000000000" charset="-122"/>
+                <a:ea typeface="Hiragino Sans GB" panose="020B0300000000000000" charset="-122"/>
+                <a:cs typeface="Hiragino Sans GB" panose="020B0300000000000000" charset="-122"/>
+              </a:rPr>
+              <a:t>小时</a:t>
+            </a:r>
+            <a:endParaRPr sz="3000" b="0">
+              <a:solidFill>
+                <a:srgbClr val="172A2A"/>
+              </a:solidFill>
+              <a:latin typeface="Hiragino Sans GB" panose="020B0300000000000000" charset="-122"/>
+              <a:ea typeface="Hiragino Sans GB" panose="020B0300000000000000" charset="-122"/>
+              <a:cs typeface="Hiragino Sans GB" panose="020B0300000000000000" charset="-122"/>
+            </a:endParaRPr>
+          </a:p>
+        </p:txBody>
+      </p:sp>
+      <p:sp>
+        <p:nvSpPr>
+          <p:cNvPr id="6" name="矩形 5"/>
+          <p:cNvSpPr>
+            <a:spLocks noGrp="1"/>
+          </p:cNvSpPr>
+          <p:nvPr/>
+        </p:nvSpPr>
+        <p:spPr>
+          <a:xfrm>
+            <a:off x="5476875" y="1809750"/>
+            <a:ext cx="5953125" cy="400050"/>
+          </a:xfrm>
+          <a:prstGeom prst="rect">
+            <a:avLst/>
+          </a:prstGeom>
+          <a:noFill/>
+          <a:ln w="0">
+            <a:noFill/>
+          </a:ln>
+        </p:spPr>
+        <p:txBody>
+          <a:bodyPr wrap="square" lIns="0" tIns="0" rIns="0" bIns="0" anchor="t">
+            <a:noAutofit/>
+          </a:bodyPr>
+          <a:lstStyle>
+            <a:defPPr>
+              <a:defRPr sz="2175" b="1">
+                <a:solidFill>
+                  <a:srgbClr val="172A2A"/>
+                </a:solidFill>
+                <a:latin typeface="Hiragino Sans GB" panose="020B0300000000000000" charset="-122"/>
+                <a:ea typeface="Hiragino Sans GB" panose="020B0300000000000000" charset="-122"/>
+                <a:cs typeface="Hiragino Sans GB" panose="020B0300000000000000" charset="-122"/>
+              </a:defRPr>
+            </a:defPPr>
+          </a:lstStyle>
+          <a:p>
+            <a:pPr>
+              <a:defRPr sz="2175" b="1">
+                <a:solidFill>
+                  <a:srgbClr val="172A2A"/>
+                </a:solidFill>
+                <a:latin typeface="Hiragino Sans GB" panose="020B0300000000000000" charset="-122"/>
+                <a:ea typeface="Hiragino Sans GB" panose="020B0300000000000000" charset="-122"/>
+                <a:cs typeface="Hiragino Sans GB" panose="020B0300000000000000" charset="-122"/>
+              </a:defRPr>
+            </a:pPr>
+            <a:r>
+              <a:rPr sz="2175" b="1">
+                <a:solidFill>
+                  <a:srgbClr val="172A2A"/>
+                </a:solidFill>
+                <a:latin typeface="Hiragino Sans GB" panose="020B0300000000000000" charset="-122"/>
+                <a:ea typeface="Hiragino Sans GB" panose="020B0300000000000000" charset="-122"/>
+                <a:cs typeface="Hiragino Sans GB" panose="020B0300000000000000" charset="-122"/>
+              </a:rPr>
+              <a:t>脚本编写</a:t>
+            </a:r>
+            <a:endParaRPr sz="2175" b="1">
+              <a:solidFill>
+                <a:srgbClr val="172A2A"/>
+              </a:solidFill>
+              <a:latin typeface="Hiragino Sans GB" panose="020B0300000000000000" charset="-122"/>
+              <a:ea typeface="Hiragino Sans GB" panose="020B0300000000000000" charset="-122"/>
+              <a:cs typeface="Hiragino Sans GB" panose="020B0300000000000000" charset="-122"/>
+            </a:endParaRPr>
+          </a:p>
+        </p:txBody>
+      </p:sp>
+      <p:sp>
+        <p:nvSpPr>
+          <p:cNvPr id="7" name="矩形 6"/>
+          <p:cNvSpPr>
+            <a:spLocks noGrp="1"/>
+          </p:cNvSpPr>
+          <p:nvPr/>
+        </p:nvSpPr>
+        <p:spPr>
+          <a:xfrm>
+            <a:off x="5476875" y="2257425"/>
+            <a:ext cx="5953125" cy="609600"/>
+          </a:xfrm>
+          <a:prstGeom prst="rect">
+            <a:avLst/>
+          </a:prstGeom>
+          <a:noFill/>
+          <a:ln w="0">
+            <a:noFill/>
+          </a:ln>
+        </p:spPr>
+        <p:txBody>
+          <a:bodyPr wrap="square" lIns="0" tIns="0" rIns="0" bIns="0" anchor="t">
+            <a:noAutofit/>
+          </a:bodyPr>
+          <a:lstStyle>
+            <a:defPPr>
+              <a:defRPr sz="1800" b="0">
+                <a:solidFill>
+                  <a:srgbClr val="5B6864"/>
+                </a:solidFill>
+                <a:latin typeface="Hiragino Sans GB" panose="020B0300000000000000" charset="-122"/>
+                <a:ea typeface="Hiragino Sans GB" panose="020B0300000000000000" charset="-122"/>
+                <a:cs typeface="Hiragino Sans GB" panose="020B0300000000000000" charset="-122"/>
+              </a:defRPr>
+            </a:defPPr>
+          </a:lstStyle>
+          <a:p>
+            <a:pPr>
+              <a:defRPr sz="1800" b="0">
+                <a:solidFill>
+                  <a:srgbClr val="5B6864"/>
+                </a:solidFill>
+                <a:latin typeface="Hiragino Sans GB" panose="020B0300000000000000" charset="-122"/>
+                <a:ea typeface="Hiragino Sans GB" panose="020B0300000000000000" charset="-122"/>
+                <a:cs typeface="Hiragino Sans GB" panose="020B0300000000000000" charset="-122"/>
+              </a:defRPr>
+            </a:pPr>
+            <a:r>
+              <a:rPr sz="1800" b="0">
+                <a:solidFill>
+                  <a:srgbClr val="5B6864"/>
+                </a:solidFill>
+                <a:latin typeface="Hiragino Sans GB" panose="020B0300000000000000" charset="-122"/>
+                <a:ea typeface="Hiragino Sans GB" panose="020B0300000000000000" charset="-122"/>
+                <a:cs typeface="Hiragino Sans GB" panose="020B0300000000000000" charset="-122"/>
+              </a:rPr>
+              <a:t>逐源解析、限速重试、错误识别和任务编排</a:t>
+            </a:r>
+            <a:endParaRPr sz="1800" b="0">
+              <a:solidFill>
+                <a:srgbClr val="5B6864"/>
+              </a:solidFill>
+              <a:latin typeface="Hiragino Sans GB" panose="020B0300000000000000" charset="-122"/>
+              <a:ea typeface="Hiragino Sans GB" panose="020B0300000000000000" charset="-122"/>
+              <a:cs typeface="Hiragino Sans GB" panose="020B0300000000000000" charset="-122"/>
+            </a:endParaRPr>
+          </a:p>
+        </p:txBody>
+      </p:sp>
+      <p:sp>
+        <p:nvSpPr>
+          <p:cNvPr id="8" name="矩形 7"/>
+          <p:cNvSpPr>
+            <a:spLocks noGrp="1"/>
+          </p:cNvSpPr>
+          <p:nvPr/>
+        </p:nvSpPr>
+        <p:spPr>
+          <a:xfrm>
+            <a:off x="5476875" y="2876550"/>
+            <a:ext cx="5953125" cy="400050"/>
+          </a:xfrm>
+          <a:prstGeom prst="rect">
+            <a:avLst/>
+          </a:prstGeom>
+          <a:noFill/>
+          <a:ln w="0">
+            <a:noFill/>
+          </a:ln>
+        </p:spPr>
+        <p:txBody>
+          <a:bodyPr wrap="square" lIns="0" tIns="0" rIns="0" bIns="0" anchor="t">
+            <a:noAutofit/>
+          </a:bodyPr>
+          <a:lstStyle>
+            <a:defPPr>
+              <a:defRPr sz="2175" b="1">
+                <a:solidFill>
+                  <a:srgbClr val="172A2A"/>
+                </a:solidFill>
+                <a:latin typeface="Hiragino Sans GB" panose="020B0300000000000000" charset="-122"/>
+                <a:ea typeface="Hiragino Sans GB" panose="020B0300000000000000" charset="-122"/>
+                <a:cs typeface="Hiragino Sans GB" panose="020B0300000000000000" charset="-122"/>
+              </a:defRPr>
+            </a:defPPr>
+          </a:lstStyle>
+          <a:p>
+            <a:pPr>
+              <a:defRPr sz="2175" b="1">
+                <a:solidFill>
+                  <a:srgbClr val="172A2A"/>
+                </a:solidFill>
+                <a:latin typeface="Hiragino Sans GB" panose="020B0300000000000000" charset="-122"/>
+                <a:ea typeface="Hiragino Sans GB" panose="020B0300000000000000" charset="-122"/>
+                <a:cs typeface="Hiragino Sans GB" panose="020B0300000000000000" charset="-122"/>
+              </a:defRPr>
+            </a:pPr>
+            <a:r>
+              <a:rPr sz="2175" b="1">
+                <a:solidFill>
+                  <a:srgbClr val="172A2A"/>
+                </a:solidFill>
+                <a:latin typeface="Hiragino Sans GB" panose="020B0300000000000000" charset="-122"/>
+                <a:ea typeface="Hiragino Sans GB" panose="020B0300000000000000" charset="-122"/>
+                <a:cs typeface="Hiragino Sans GB" panose="020B0300000000000000" charset="-122"/>
+              </a:rPr>
+              <a:t>数据库定义</a:t>
+            </a:r>
+            <a:endParaRPr sz="2175" b="1">
+              <a:solidFill>
+                <a:srgbClr val="172A2A"/>
+              </a:solidFill>
+              <a:latin typeface="Hiragino Sans GB" panose="020B0300000000000000" charset="-122"/>
+              <a:ea typeface="Hiragino Sans GB" panose="020B0300000000000000" charset="-122"/>
+              <a:cs typeface="Hiragino Sans GB" panose="020B0300000000000000" charset="-122"/>
+            </a:endParaRPr>
+          </a:p>
+        </p:txBody>
+      </p:sp>
+      <p:sp>
+        <p:nvSpPr>
+          <p:cNvPr id="9" name="矩形 8"/>
+          <p:cNvSpPr>
+            <a:spLocks noGrp="1"/>
+          </p:cNvSpPr>
+          <p:nvPr/>
+        </p:nvSpPr>
+        <p:spPr>
+          <a:xfrm>
+            <a:off x="5476875" y="3324225"/>
+            <a:ext cx="5953125" cy="609600"/>
+          </a:xfrm>
+          <a:prstGeom prst="rect">
+            <a:avLst/>
+          </a:prstGeom>
+          <a:noFill/>
+          <a:ln w="0">
+            <a:noFill/>
+          </a:ln>
+        </p:spPr>
+        <p:txBody>
+          <a:bodyPr wrap="square" lIns="0" tIns="0" rIns="0" bIns="0" anchor="t">
+            <a:noAutofit/>
+          </a:bodyPr>
+          <a:lstStyle>
+            <a:defPPr>
+              <a:defRPr sz="1800" b="0">
+                <a:solidFill>
+                  <a:srgbClr val="5B6864"/>
+                </a:solidFill>
+                <a:latin typeface="Hiragino Sans GB" panose="020B0300000000000000" charset="-122"/>
+                <a:ea typeface="Hiragino Sans GB" panose="020B0300000000000000" charset="-122"/>
+                <a:cs typeface="Hiragino Sans GB" panose="020B0300000000000000" charset="-122"/>
+              </a:defRPr>
+            </a:defPPr>
+          </a:lstStyle>
+          <a:p>
+            <a:pPr>
+              <a:defRPr sz="1800" b="0">
+                <a:solidFill>
+                  <a:srgbClr val="5B6864"/>
+                </a:solidFill>
+                <a:latin typeface="Hiragino Sans GB" panose="020B0300000000000000" charset="-122"/>
+                <a:ea typeface="Hiragino Sans GB" panose="020B0300000000000000" charset="-122"/>
+                <a:cs typeface="Hiragino Sans GB" panose="020B0300000000000000" charset="-122"/>
+              </a:defRPr>
+            </a:pPr>
+            <a:r>
+              <a:rPr sz="1800" b="0">
+                <a:solidFill>
+                  <a:srgbClr val="5B6864"/>
+                </a:solidFill>
+                <a:latin typeface="Hiragino Sans GB" panose="020B0300000000000000" charset="-122"/>
+                <a:ea typeface="Hiragino Sans GB" panose="020B0300000000000000" charset="-122"/>
+                <a:cs typeface="Hiragino Sans GB" panose="020B0300000000000000" charset="-122"/>
+              </a:rPr>
+              <a:t>数据表、索引、视图、队列和配额账本</a:t>
+            </a:r>
+            <a:endParaRPr sz="1800" b="0">
+              <a:solidFill>
+                <a:srgbClr val="5B6864"/>
+              </a:solidFill>
+              <a:latin typeface="Hiragino Sans GB" panose="020B0300000000000000" charset="-122"/>
+              <a:ea typeface="Hiragino Sans GB" panose="020B0300000000000000" charset="-122"/>
+              <a:cs typeface="Hiragino Sans GB" panose="020B0300000000000000" charset="-122"/>
+            </a:endParaRPr>
+          </a:p>
+        </p:txBody>
+      </p:sp>
+      <p:sp>
+        <p:nvSpPr>
+          <p:cNvPr id="10" name="矩形 9"/>
+          <p:cNvSpPr>
+            <a:spLocks noGrp="1"/>
+          </p:cNvSpPr>
+          <p:nvPr/>
+        </p:nvSpPr>
+        <p:spPr>
+          <a:xfrm>
+            <a:off x="5476875" y="3943350"/>
+            <a:ext cx="5953125" cy="400050"/>
+          </a:xfrm>
+          <a:prstGeom prst="rect">
+            <a:avLst/>
+          </a:prstGeom>
+          <a:noFill/>
+          <a:ln w="0">
+            <a:noFill/>
+          </a:ln>
+        </p:spPr>
+        <p:txBody>
+          <a:bodyPr wrap="square" lIns="0" tIns="0" rIns="0" bIns="0" anchor="t">
+            <a:noAutofit/>
+          </a:bodyPr>
+          <a:lstStyle>
+            <a:defPPr>
+              <a:defRPr sz="2175" b="1">
+                <a:solidFill>
+                  <a:srgbClr val="172A2A"/>
+                </a:solidFill>
+                <a:latin typeface="Hiragino Sans GB" panose="020B0300000000000000" charset="-122"/>
+                <a:ea typeface="Hiragino Sans GB" panose="020B0300000000000000" charset="-122"/>
+                <a:cs typeface="Hiragino Sans GB" panose="020B0300000000000000" charset="-122"/>
+              </a:defRPr>
+            </a:defPPr>
+          </a:lstStyle>
+          <a:p>
+            <a:pPr>
+              <a:defRPr sz="2175" b="1">
+                <a:solidFill>
+                  <a:srgbClr val="172A2A"/>
+                </a:solidFill>
+                <a:latin typeface="Hiragino Sans GB" panose="020B0300000000000000" charset="-122"/>
+                <a:ea typeface="Hiragino Sans GB" panose="020B0300000000000000" charset="-122"/>
+                <a:cs typeface="Hiragino Sans GB" panose="020B0300000000000000" charset="-122"/>
+              </a:defRPr>
+            </a:pPr>
+            <a:r>
+              <a:rPr sz="2175" b="1">
+                <a:solidFill>
+                  <a:srgbClr val="172A2A"/>
+                </a:solidFill>
+                <a:latin typeface="Hiragino Sans GB" panose="020B0300000000000000" charset="-122"/>
+                <a:ea typeface="Hiragino Sans GB" panose="020B0300000000000000" charset="-122"/>
+                <a:cs typeface="Hiragino Sans GB" panose="020B0300000000000000" charset="-122"/>
+              </a:rPr>
+              <a:t>数据获取与补抓</a:t>
+            </a:r>
+            <a:endParaRPr sz="2175" b="1">
+              <a:solidFill>
+                <a:srgbClr val="172A2A"/>
+              </a:solidFill>
+              <a:latin typeface="Hiragino Sans GB" panose="020B0300000000000000" charset="-122"/>
+              <a:ea typeface="Hiragino Sans GB" panose="020B0300000000000000" charset="-122"/>
+              <a:cs typeface="Hiragino Sans GB" panose="020B0300000000000000" charset="-122"/>
+            </a:endParaRPr>
+          </a:p>
+        </p:txBody>
+      </p:sp>
+      <p:sp>
+        <p:nvSpPr>
+          <p:cNvPr id="11" name="矩形 10"/>
+          <p:cNvSpPr>
+            <a:spLocks noGrp="1"/>
+          </p:cNvSpPr>
+          <p:nvPr/>
+        </p:nvSpPr>
+        <p:spPr>
+          <a:xfrm>
+            <a:off x="5476875" y="4391025"/>
+            <a:ext cx="5953125" cy="609600"/>
+          </a:xfrm>
+          <a:prstGeom prst="rect">
+            <a:avLst/>
+          </a:prstGeom>
+          <a:noFill/>
+          <a:ln w="0">
+            <a:noFill/>
+          </a:ln>
+        </p:spPr>
+        <p:txBody>
+          <a:bodyPr wrap="square" lIns="0" tIns="0" rIns="0" bIns="0" anchor="t">
+            <a:noAutofit/>
+          </a:bodyPr>
+          <a:lstStyle>
+            <a:defPPr>
+              <a:defRPr sz="1800" b="0">
+                <a:solidFill>
+                  <a:srgbClr val="5B6864"/>
+                </a:solidFill>
+                <a:latin typeface="Hiragino Sans GB" panose="020B0300000000000000" charset="-122"/>
+                <a:ea typeface="Hiragino Sans GB" panose="020B0300000000000000" charset="-122"/>
+                <a:cs typeface="Hiragino Sans GB" panose="020B0300000000000000" charset="-122"/>
+              </a:defRPr>
+            </a:defPPr>
+          </a:lstStyle>
+          <a:p>
+            <a:pPr>
+              <a:defRPr sz="1800" b="0">
+                <a:solidFill>
+                  <a:srgbClr val="5B6864"/>
+                </a:solidFill>
+                <a:latin typeface="Hiragino Sans GB" panose="020B0300000000000000" charset="-122"/>
+                <a:ea typeface="Hiragino Sans GB" panose="020B0300000000000000" charset="-122"/>
+                <a:cs typeface="Hiragino Sans GB" panose="020B0300000000000000" charset="-122"/>
+              </a:defRPr>
+            </a:pPr>
+            <a:r>
+              <a:rPr lang="zh-CN" sz="1800" b="0">
+                <a:solidFill>
+                  <a:srgbClr val="5B6864"/>
+                </a:solidFill>
+                <a:latin typeface="Hiragino Sans GB" panose="020B0300000000000000" charset="-122"/>
+                <a:ea typeface="Hiragino Sans GB" panose="020B0300000000000000" charset="-122"/>
+                <a:cs typeface="Hiragino Sans GB" panose="020B0300000000000000" charset="-122"/>
+              </a:rPr>
+              <a:t>全体组员</a:t>
+            </a:r>
+            <a:r>
+              <a:rPr sz="1800" b="0">
+                <a:solidFill>
+                  <a:srgbClr val="5B6864"/>
+                </a:solidFill>
+                <a:latin typeface="Hiragino Sans GB" panose="020B0300000000000000" charset="-122"/>
+                <a:ea typeface="Hiragino Sans GB" panose="020B0300000000000000" charset="-122"/>
+                <a:cs typeface="Hiragino Sans GB" panose="020B0300000000000000" charset="-122"/>
+              </a:rPr>
+              <a:t>多机连续运行</a:t>
+            </a:r>
+            <a:endParaRPr sz="1800" b="0">
+              <a:solidFill>
+                <a:srgbClr val="5B6864"/>
+              </a:solidFill>
+              <a:latin typeface="Hiragino Sans GB" panose="020B0300000000000000" charset="-122"/>
+              <a:ea typeface="Hiragino Sans GB" panose="020B0300000000000000" charset="-122"/>
+              <a:cs typeface="Hiragino Sans GB" panose="020B0300000000000000" charset="-122"/>
             </a:endParaRPr>
           </a:p>
         </p:txBody>
@@ -5131,146 +4978,6 @@
             <a:endParaRPr sz="3300" b="1">
               <a:solidFill>
                 <a:srgbClr val="172A2A"/>
-              </a:solidFill>
-              <a:latin typeface="Hiragino Sans GB" panose="020B0300000000000000" charset="-122"/>
-              <a:ea typeface="Hiragino Sans GB" panose="020B0300000000000000" charset="-122"/>
-              <a:cs typeface="Hiragino Sans GB" panose="020B0300000000000000" charset="-122"/>
-            </a:endParaRPr>
-          </a:p>
-        </p:txBody>
-      </p:sp>
-      <p:sp>
-        <p:nvSpPr>
-          <p:cNvPr id="2" name="矩形 1"/>
-          <p:cNvSpPr>
-            <a:spLocks noGrp="1"/>
-          </p:cNvSpPr>
-          <p:nvPr/>
-        </p:nvSpPr>
-        <p:spPr>
-          <a:xfrm>
-            <a:off x="10668000" y="6438900"/>
-            <a:ext cx="952500" cy="209550"/>
-          </a:xfrm>
-          <a:prstGeom prst="rect">
-            <a:avLst/>
-          </a:prstGeom>
-          <a:noFill/>
-          <a:ln w="0">
-            <a:noFill/>
-          </a:ln>
-        </p:spPr>
-        <p:txBody>
-          <a:bodyPr wrap="square" lIns="0" tIns="0" rIns="0" bIns="0" anchor="t">
-            <a:noAutofit/>
-          </a:bodyPr>
-          <a:lstStyle>
-            <a:defPPr>
-              <a:defRPr sz="1125" b="0">
-                <a:solidFill>
-                  <a:srgbClr val="5B6864"/>
-                </a:solidFill>
-                <a:latin typeface="Hiragino Sans GB" panose="020B0300000000000000" charset="-122"/>
-                <a:ea typeface="Hiragino Sans GB" panose="020B0300000000000000" charset="-122"/>
-                <a:cs typeface="Hiragino Sans GB" panose="020B0300000000000000" charset="-122"/>
-              </a:defRPr>
-            </a:defPPr>
-          </a:lstStyle>
-          <a:p>
-            <a:pPr>
-              <a:defRPr sz="1125" b="0">
-                <a:solidFill>
-                  <a:srgbClr val="5B6864"/>
-                </a:solidFill>
-                <a:latin typeface="Hiragino Sans GB" panose="020B0300000000000000" charset="-122"/>
-                <a:ea typeface="Hiragino Sans GB" panose="020B0300000000000000" charset="-122"/>
-                <a:cs typeface="Hiragino Sans GB" panose="020B0300000000000000" charset="-122"/>
-              </a:defRPr>
-            </a:pPr>
-            <a:r>
-              <a:rPr sz="1125" b="0">
-                <a:solidFill>
-                  <a:srgbClr val="5B6864"/>
-                </a:solidFill>
-                <a:latin typeface="Hiragino Sans GB" panose="020B0300000000000000" charset="-122"/>
-                <a:ea typeface="Hiragino Sans GB" panose="020B0300000000000000" charset="-122"/>
-                <a:cs typeface="Hiragino Sans GB" panose="020B0300000000000000" charset="-122"/>
-              </a:rPr>
-              <a:t>07 / 15</a:t>
-            </a:r>
-            <a:endParaRPr sz="1125" b="0">
-              <a:solidFill>
-                <a:srgbClr val="5B6864"/>
-              </a:solidFill>
-              <a:latin typeface="Hiragino Sans GB" panose="020B0300000000000000" charset="-122"/>
-              <a:ea typeface="Hiragino Sans GB" panose="020B0300000000000000" charset="-122"/>
-              <a:cs typeface="Hiragino Sans GB" panose="020B0300000000000000" charset="-122"/>
-            </a:endParaRPr>
-          </a:p>
-        </p:txBody>
-      </p:sp>
-      <p:sp>
-        <p:nvSpPr>
-          <p:cNvPr id="3" name="矩形 2"/>
-          <p:cNvSpPr>
-            <a:spLocks noGrp="1"/>
-          </p:cNvSpPr>
-          <p:nvPr/>
-        </p:nvSpPr>
-        <p:spPr>
-          <a:xfrm>
-            <a:off x="609600" y="6238875"/>
-            <a:ext cx="9715500" cy="457200"/>
-          </a:xfrm>
-          <a:prstGeom prst="rect">
-            <a:avLst/>
-          </a:prstGeom>
-          <a:noFill/>
-          <a:ln w="0">
-            <a:noFill/>
-          </a:ln>
-        </p:spPr>
-        <p:txBody>
-          <a:bodyPr wrap="square" lIns="0" tIns="0" rIns="0" bIns="0" anchor="t">
-            <a:noAutofit/>
-          </a:bodyPr>
-          <a:lstStyle>
-            <a:defPPr>
-              <a:defRPr sz="1125" b="0">
-                <a:solidFill>
-                  <a:srgbClr val="5B6864"/>
-                </a:solidFill>
-                <a:latin typeface="Hiragino Sans GB" panose="020B0300000000000000" charset="-122"/>
-                <a:ea typeface="Hiragino Sans GB" panose="020B0300000000000000" charset="-122"/>
-                <a:cs typeface="Hiragino Sans GB" panose="020B0300000000000000" charset="-122"/>
-              </a:defRPr>
-            </a:defPPr>
-          </a:lstStyle>
-          <a:p>
-            <a:pPr>
-              <a:defRPr sz="1125" b="0">
-                <a:solidFill>
-                  <a:srgbClr val="5B6864"/>
-                </a:solidFill>
-                <a:latin typeface="Hiragino Sans GB" panose="020B0300000000000000" charset="-122"/>
-                <a:ea typeface="Hiragino Sans GB" panose="020B0300000000000000" charset="-122"/>
-                <a:cs typeface="Hiragino Sans GB" panose="020B0300000000000000" charset="-122"/>
-              </a:defRPr>
-            </a:pPr>
-            <a:r>
-              <a:rPr sz="1125" b="0">
-                <a:solidFill>
-                  <a:srgbClr val="5B6864"/>
-                </a:solidFill>
-                <a:latin typeface="Hiragino Sans GB" panose="020B0300000000000000" charset="-122"/>
-                <a:ea typeface="Hiragino Sans GB" panose="020B0300000000000000" charset="-122"/>
-                <a:cs typeface="Hiragino Sans GB" panose="020B0300000000000000" charset="-122"/>
-              </a:rPr>
-              <a:t>7张核心数据表的物理行数合计。同一游戏可出现在多张表中，不代表307万个独立对象。</a:t>
-            </a:r>
-            <a:endParaRPr sz="1125" b="0">
-              <a:solidFill>
-                <a:srgbClr val="5B6864"/>
               </a:solidFill>
               <a:latin typeface="Hiragino Sans GB" panose="020B0300000000000000" charset="-122"/>
               <a:ea typeface="Hiragino Sans GB" panose="020B0300000000000000" charset="-122"/>
@@ -5725,146 +5432,6 @@
           </a:p>
         </p:txBody>
       </p:sp>
-      <p:sp>
-        <p:nvSpPr>
-          <p:cNvPr id="2" name="矩形 1"/>
-          <p:cNvSpPr>
-            <a:spLocks noGrp="1"/>
-          </p:cNvSpPr>
-          <p:nvPr/>
-        </p:nvSpPr>
-        <p:spPr>
-          <a:xfrm>
-            <a:off x="10668000" y="6438900"/>
-            <a:ext cx="952500" cy="209550"/>
-          </a:xfrm>
-          <a:prstGeom prst="rect">
-            <a:avLst/>
-          </a:prstGeom>
-          <a:noFill/>
-          <a:ln w="0">
-            <a:noFill/>
-          </a:ln>
-        </p:spPr>
-        <p:txBody>
-          <a:bodyPr wrap="square" lIns="0" tIns="0" rIns="0" bIns="0" anchor="t">
-            <a:noAutofit/>
-          </a:bodyPr>
-          <a:lstStyle>
-            <a:defPPr>
-              <a:defRPr sz="1125" b="0">
-                <a:solidFill>
-                  <a:srgbClr val="5B6864"/>
-                </a:solidFill>
-                <a:latin typeface="Hiragino Sans GB" panose="020B0300000000000000" charset="-122"/>
-                <a:ea typeface="Hiragino Sans GB" panose="020B0300000000000000" charset="-122"/>
-                <a:cs typeface="Hiragino Sans GB" panose="020B0300000000000000" charset="-122"/>
-              </a:defRPr>
-            </a:defPPr>
-          </a:lstStyle>
-          <a:p>
-            <a:pPr>
-              <a:defRPr sz="1125" b="0">
-                <a:solidFill>
-                  <a:srgbClr val="5B6864"/>
-                </a:solidFill>
-                <a:latin typeface="Hiragino Sans GB" panose="020B0300000000000000" charset="-122"/>
-                <a:ea typeface="Hiragino Sans GB" panose="020B0300000000000000" charset="-122"/>
-                <a:cs typeface="Hiragino Sans GB" panose="020B0300000000000000" charset="-122"/>
-              </a:defRPr>
-            </a:pPr>
-            <a:r>
-              <a:rPr sz="1125" b="0">
-                <a:solidFill>
-                  <a:srgbClr val="5B6864"/>
-                </a:solidFill>
-                <a:latin typeface="Hiragino Sans GB" panose="020B0300000000000000" charset="-122"/>
-                <a:ea typeface="Hiragino Sans GB" panose="020B0300000000000000" charset="-122"/>
-                <a:cs typeface="Hiragino Sans GB" panose="020B0300000000000000" charset="-122"/>
-              </a:rPr>
-              <a:t>08 / 15</a:t>
-            </a:r>
-            <a:endParaRPr sz="1125" b="0">
-              <a:solidFill>
-                <a:srgbClr val="5B6864"/>
-              </a:solidFill>
-              <a:latin typeface="Hiragino Sans GB" panose="020B0300000000000000" charset="-122"/>
-              <a:ea typeface="Hiragino Sans GB" panose="020B0300000000000000" charset="-122"/>
-              <a:cs typeface="Hiragino Sans GB" panose="020B0300000000000000" charset="-122"/>
-            </a:endParaRPr>
-          </a:p>
-        </p:txBody>
-      </p:sp>
-      <p:sp>
-        <p:nvSpPr>
-          <p:cNvPr id="3" name="矩形 2"/>
-          <p:cNvSpPr>
-            <a:spLocks noGrp="1"/>
-          </p:cNvSpPr>
-          <p:nvPr/>
-        </p:nvSpPr>
-        <p:spPr>
-          <a:xfrm>
-            <a:off x="609600" y="6238875"/>
-            <a:ext cx="9715500" cy="457200"/>
-          </a:xfrm>
-          <a:prstGeom prst="rect">
-            <a:avLst/>
-          </a:prstGeom>
-          <a:noFill/>
-          <a:ln w="0">
-            <a:noFill/>
-          </a:ln>
-        </p:spPr>
-        <p:txBody>
-          <a:bodyPr wrap="square" lIns="0" tIns="0" rIns="0" bIns="0" anchor="t">
-            <a:noAutofit/>
-          </a:bodyPr>
-          <a:lstStyle>
-            <a:defPPr>
-              <a:defRPr sz="1125" b="0">
-                <a:solidFill>
-                  <a:srgbClr val="5B6864"/>
-                </a:solidFill>
-                <a:latin typeface="Hiragino Sans GB" panose="020B0300000000000000" charset="-122"/>
-                <a:ea typeface="Hiragino Sans GB" panose="020B0300000000000000" charset="-122"/>
-                <a:cs typeface="Hiragino Sans GB" panose="020B0300000000000000" charset="-122"/>
-              </a:defRPr>
-            </a:defPPr>
-          </a:lstStyle>
-          <a:p>
-            <a:pPr>
-              <a:defRPr sz="1125" b="0">
-                <a:solidFill>
-                  <a:srgbClr val="5B6864"/>
-                </a:solidFill>
-                <a:latin typeface="Hiragino Sans GB" panose="020B0300000000000000" charset="-122"/>
-                <a:ea typeface="Hiragino Sans GB" panose="020B0300000000000000" charset="-122"/>
-                <a:cs typeface="Hiragino Sans GB" panose="020B0300000000000000" charset="-122"/>
-              </a:defRPr>
-            </a:pPr>
-            <a:r>
-              <a:rPr sz="1125" b="0">
-                <a:solidFill>
-                  <a:srgbClr val="5B6864"/>
-                </a:solidFill>
-                <a:latin typeface="Hiragino Sans GB" panose="020B0300000000000000" charset="-122"/>
-                <a:ea typeface="Hiragino Sans GB" panose="020B0300000000000000" charset="-122"/>
-                <a:cs typeface="Hiragino Sans GB" panose="020B0300000000000000" charset="-122"/>
-              </a:rPr>
-              <a:t>统计时点：2026-10-13 11:32（北京时间），全部为精确 COUNT(*)。</a:t>
-            </a:r>
-            <a:endParaRPr sz="1125" b="0">
-              <a:solidFill>
-                <a:srgbClr val="5B6864"/>
-              </a:solidFill>
-              <a:latin typeface="Hiragino Sans GB" panose="020B0300000000000000" charset="-122"/>
-              <a:ea typeface="Hiragino Sans GB" panose="020B0300000000000000" charset="-122"/>
-              <a:cs typeface="Hiragino Sans GB" panose="020B0300000000000000" charset="-122"/>
-            </a:endParaRPr>
-          </a:p>
-        </p:txBody>
-      </p:sp>
       <p:graphicFrame>
         <p:nvGraphicFramePr>
           <p:cNvPr id="4" name="表格 3"/>
@@ -7268,6 +6835,17 @@
               </a:defRPr>
             </a:pPr>
             <a:r>
+              <a:rPr lang="zh-CN" sz="3300" b="1">
+                <a:solidFill>
+                  <a:srgbClr val="172A2A"/>
+                </a:solidFill>
+                <a:latin typeface="Hiragino Sans GB" panose="020B0300000000000000" charset="-122"/>
+                <a:ea typeface="Hiragino Sans GB" panose="020B0300000000000000" charset="-122"/>
+                <a:cs typeface="Hiragino Sans GB" panose="020B0300000000000000" charset="-122"/>
+              </a:rPr>
+              <a:t>后续计划</a:t>
+            </a:r>
+            <a:r>
               <a:rPr sz="3300" b="1">
                 <a:solidFill>
                   <a:srgbClr val="172A2A"/>
@@ -7276,81 +6854,11 @@
                 <a:ea typeface="Hiragino Sans GB" panose="020B0300000000000000" charset="-122"/>
                 <a:cs typeface="Hiragino Sans GB" panose="020B0300000000000000" charset="-122"/>
               </a:rPr>
-              <a:t>最新版 PLAN 包含六个后续方向</a:t>
+              <a:t> 包含六个方向</a:t>
             </a:r>
             <a:endParaRPr sz="3300" b="1">
               <a:solidFill>
                 <a:srgbClr val="172A2A"/>
-              </a:solidFill>
-              <a:latin typeface="Hiragino Sans GB" panose="020B0300000000000000" charset="-122"/>
-              <a:ea typeface="Hiragino Sans GB" panose="020B0300000000000000" charset="-122"/>
-              <a:cs typeface="Hiragino Sans GB" panose="020B0300000000000000" charset="-122"/>
-            </a:endParaRPr>
-          </a:p>
-        </p:txBody>
-      </p:sp>
-      <p:sp>
-        <p:nvSpPr>
-          <p:cNvPr id="2" name="矩形 1"/>
-          <p:cNvSpPr>
-            <a:spLocks noGrp="1"/>
-          </p:cNvSpPr>
-          <p:nvPr/>
-        </p:nvSpPr>
-        <p:spPr>
-          <a:xfrm>
-            <a:off x="10668000" y="6438900"/>
-            <a:ext cx="952500" cy="209550"/>
-          </a:xfrm>
-          <a:prstGeom prst="rect">
-            <a:avLst/>
-          </a:prstGeom>
-          <a:noFill/>
-          <a:ln w="0">
-            <a:noFill/>
-          </a:ln>
-        </p:spPr>
-        <p:txBody>
-          <a:bodyPr wrap="square" lIns="0" tIns="0" rIns="0" bIns="0" anchor="t">
-            <a:noAutofit/>
-          </a:bodyPr>
-          <a:lstStyle>
-            <a:defPPr>
-              <a:defRPr sz="1125" b="0">
-                <a:solidFill>
-                  <a:srgbClr val="5B6864"/>
-                </a:solidFill>
-                <a:latin typeface="Hiragino Sans GB" panose="020B0300000000000000" charset="-122"/>
-                <a:ea typeface="Hiragino Sans GB" panose="020B0300000000000000" charset="-122"/>
-                <a:cs typeface="Hiragino Sans GB" panose="020B0300000000000000" charset="-122"/>
-              </a:defRPr>
-            </a:defPPr>
-          </a:lstStyle>
-          <a:p>
-            <a:pPr>
-              <a:defRPr sz="1125" b="0">
-                <a:solidFill>
-                  <a:srgbClr val="5B6864"/>
-                </a:solidFill>
-                <a:latin typeface="Hiragino Sans GB" panose="020B0300000000000000" charset="-122"/>
-                <a:ea typeface="Hiragino Sans GB" panose="020B0300000000000000" charset="-122"/>
-                <a:cs typeface="Hiragino Sans GB" panose="020B0300000000000000" charset="-122"/>
-              </a:defRPr>
-            </a:pPr>
-            <a:r>
-              <a:rPr sz="1125" b="0">
-                <a:solidFill>
-                  <a:srgbClr val="5B6864"/>
-                </a:solidFill>
-                <a:latin typeface="Hiragino Sans GB" panose="020B0300000000000000" charset="-122"/>
-                <a:ea typeface="Hiragino Sans GB" panose="020B0300000000000000" charset="-122"/>
-                <a:cs typeface="Hiragino Sans GB" panose="020B0300000000000000" charset="-122"/>
-              </a:rPr>
-              <a:t>13 / 15</a:t>
-            </a:r>
-            <a:endParaRPr sz="1125" b="0">
-              <a:solidFill>
-                <a:srgbClr val="5B6864"/>
               </a:solidFill>
               <a:latin typeface="Hiragino Sans GB" panose="020B0300000000000000" charset="-122"/>
               <a:ea typeface="Hiragino Sans GB" panose="020B0300000000000000" charset="-122"/>
@@ -7446,8 +6954,8 @@
               <a:tblGrid>
                 <a:gridCol w="3571875"/>
                 <a:gridCol w="1095375"/>
-                <a:gridCol w="876300"/>
-                <a:gridCol w="1428750"/>
+                <a:gridCol w="291900"/>
+                <a:gridCol w="2013150"/>
                 <a:gridCol w="4000500"/>
               </a:tblGrid>
               <a:tr h="576943">
@@ -7565,17 +7073,6 @@
                     <a:lstStyle/>
                     <a:p>
                       <a:pPr algn="l"/>
-                      <a:r>
-                        <a:rPr sz="1725" b="1">
-                          <a:solidFill>
-                            <a:srgbClr val="FFFFFF"/>
-                          </a:solidFill>
-                          <a:latin typeface="Hiragino Sans GB" panose="020B0300000000000000" charset="-122"/>
-                          <a:ea typeface="Hiragino Sans GB" panose="020B0300000000000000" charset="-122"/>
-                          <a:cs typeface="Hiragino Sans GB" panose="020B0300000000000000" charset="-122"/>
-                        </a:rPr>
-                        <a:t>难度</a:t>
-                      </a:r>
                       <a:endParaRPr sz="1725" b="1">
                         <a:solidFill>
                           <a:srgbClr val="FFFFFF"/>
@@ -7816,17 +7313,6 @@
                     <a:lstStyle/>
                     <a:p>
                       <a:pPr algn="l"/>
-                      <a:r>
-                        <a:rPr sz="1725" b="0">
-                          <a:solidFill>
-                            <a:srgbClr val="172A2A"/>
-                          </a:solidFill>
-                          <a:latin typeface="Hiragino Sans GB" panose="020B0300000000000000" charset="-122"/>
-                          <a:ea typeface="Hiragino Sans GB" panose="020B0300000000000000" charset="-122"/>
-                          <a:cs typeface="Hiragino Sans GB" panose="020B0300000000000000" charset="-122"/>
-                        </a:rPr>
-                        <a:t>2/5</a:t>
-                      </a:r>
                       <a:endParaRPr sz="1725" b="0">
                         <a:solidFill>
                           <a:srgbClr val="172A2A"/>
@@ -7862,7 +7348,7 @@
                     <a:p>
                       <a:pPr algn="l"/>
                       <a:r>
-                        <a:rPr sz="1725" b="0">
+                        <a:rPr lang="zh-CN" altLang="en-US" sz="1725" b="0">
                           <a:solidFill>
                             <a:srgbClr val="172A2A"/>
                           </a:solidFill>
@@ -7870,9 +7356,9 @@
                           <a:ea typeface="Hiragino Sans GB" panose="020B0300000000000000" charset="-122"/>
                           <a:cs typeface="Hiragino Sans GB" panose="020B0300000000000000" charset="-122"/>
                         </a:rPr>
-                        <a:t>待分工</a:t>
+                        <a:t>杨金辉</a:t>
                       </a:r>
-                      <a:endParaRPr sz="1725" b="0">
+                      <a:endParaRPr lang="zh-CN" altLang="en-US" sz="1725" b="0">
                         <a:solidFill>
                           <a:srgbClr val="172A2A"/>
                         </a:solidFill>
@@ -8049,17 +7535,6 @@
                     <a:lstStyle/>
                     <a:p>
                       <a:pPr algn="l"/>
-                      <a:r>
-                        <a:rPr sz="1725" b="0">
-                          <a:solidFill>
-                            <a:srgbClr val="172A2A"/>
-                          </a:solidFill>
-                          <a:latin typeface="Hiragino Sans GB" panose="020B0300000000000000" charset="-122"/>
-                          <a:ea typeface="Hiragino Sans GB" panose="020B0300000000000000" charset="-122"/>
-                          <a:cs typeface="Hiragino Sans GB" panose="020B0300000000000000" charset="-122"/>
-                        </a:rPr>
-                        <a:t>3/5</a:t>
-                      </a:r>
                       <a:endParaRPr sz="1725" b="0">
                         <a:solidFill>
                           <a:srgbClr val="172A2A"/>
@@ -8095,7 +7570,7 @@
                     <a:p>
                       <a:pPr algn="l"/>
                       <a:r>
-                        <a:rPr sz="1725" b="0">
+                        <a:rPr lang="zh-CN" altLang="en-US" sz="1725" b="0">
                           <a:solidFill>
                             <a:srgbClr val="172A2A"/>
                           </a:solidFill>
@@ -8103,9 +7578,9 @@
                           <a:ea typeface="Hiragino Sans GB" panose="020B0300000000000000" charset="-122"/>
                           <a:cs typeface="Hiragino Sans GB" panose="020B0300000000000000" charset="-122"/>
                         </a:rPr>
-                        <a:t>待分工</a:t>
+                        <a:t>耶美田</a:t>
                       </a:r>
-                      <a:endParaRPr sz="1725" b="0">
+                      <a:endParaRPr lang="zh-CN" altLang="en-US" sz="1725" b="0">
                         <a:solidFill>
                           <a:srgbClr val="172A2A"/>
                         </a:solidFill>
@@ -8282,17 +7757,6 @@
                     <a:lstStyle/>
                     <a:p>
                       <a:pPr algn="l"/>
-                      <a:r>
-                        <a:rPr sz="1725" b="0">
-                          <a:solidFill>
-                            <a:srgbClr val="172A2A"/>
-                          </a:solidFill>
-                          <a:latin typeface="Hiragino Sans GB" panose="020B0300000000000000" charset="-122"/>
-                          <a:ea typeface="Hiragino Sans GB" panose="020B0300000000000000" charset="-122"/>
-                          <a:cs typeface="Hiragino Sans GB" panose="020B0300000000000000" charset="-122"/>
-                        </a:rPr>
-                        <a:t>3/5</a:t>
-                      </a:r>
                       <a:endParaRPr sz="1725" b="0">
                         <a:solidFill>
                           <a:srgbClr val="172A2A"/>
@@ -8515,17 +7979,6 @@
                     <a:lstStyle/>
                     <a:p>
                       <a:pPr algn="l"/>
-                      <a:r>
-                        <a:rPr sz="1725" b="0">
-                          <a:solidFill>
-                            <a:srgbClr val="172A2A"/>
-                          </a:solidFill>
-                          <a:latin typeface="Hiragino Sans GB" panose="020B0300000000000000" charset="-122"/>
-                          <a:ea typeface="Hiragino Sans GB" panose="020B0300000000000000" charset="-122"/>
-                          <a:cs typeface="Hiragino Sans GB" panose="020B0300000000000000" charset="-122"/>
-                        </a:rPr>
-                        <a:t>3/5</a:t>
-                      </a:r>
                       <a:endParaRPr sz="1725" b="0">
                         <a:solidFill>
                           <a:srgbClr val="172A2A"/>
@@ -8561,7 +8014,7 @@
                     <a:p>
                       <a:pPr algn="l"/>
                       <a:r>
-                        <a:rPr sz="1725" b="0">
+                        <a:rPr lang="zh-CN" altLang="en-US" sz="1725" b="0">
                           <a:solidFill>
                             <a:srgbClr val="172A2A"/>
                           </a:solidFill>
@@ -8569,9 +8022,9 @@
                           <a:ea typeface="Hiragino Sans GB" panose="020B0300000000000000" charset="-122"/>
                           <a:cs typeface="Hiragino Sans GB" panose="020B0300000000000000" charset="-122"/>
                         </a:rPr>
-                        <a:t>待分工</a:t>
+                        <a:t>朱政宇</a:t>
                       </a:r>
-                      <a:endParaRPr sz="1725" b="0">
+                      <a:endParaRPr lang="zh-CN" altLang="en-US" sz="1725" b="0">
                         <a:solidFill>
                           <a:srgbClr val="172A2A"/>
                         </a:solidFill>
@@ -8748,17 +8201,6 @@
                     <a:lstStyle/>
                     <a:p>
                       <a:pPr algn="l"/>
-                      <a:r>
-                        <a:rPr sz="1725" b="0">
-                          <a:solidFill>
-                            <a:srgbClr val="172A2A"/>
-                          </a:solidFill>
-                          <a:latin typeface="Hiragino Sans GB" panose="020B0300000000000000" charset="-122"/>
-                          <a:ea typeface="Hiragino Sans GB" panose="020B0300000000000000" charset="-122"/>
-                          <a:cs typeface="Hiragino Sans GB" panose="020B0300000000000000" charset="-122"/>
-                        </a:rPr>
-                        <a:t>4/5</a:t>
-                      </a:r>
                       <a:endParaRPr sz="1725" b="0">
                         <a:solidFill>
                           <a:srgbClr val="172A2A"/>
@@ -8981,17 +8423,6 @@
                     <a:lstStyle/>
                     <a:p>
                       <a:pPr algn="l"/>
-                      <a:r>
-                        <a:rPr sz="1725" b="0">
-                          <a:solidFill>
-                            <a:srgbClr val="172A2A"/>
-                          </a:solidFill>
-                          <a:latin typeface="Hiragino Sans GB" panose="020B0300000000000000" charset="-122"/>
-                          <a:ea typeface="Hiragino Sans GB" panose="020B0300000000000000" charset="-122"/>
-                          <a:cs typeface="Hiragino Sans GB" panose="020B0300000000000000" charset="-122"/>
-                        </a:rPr>
-                        <a:t>4/5</a:t>
-                      </a:r>
                       <a:endParaRPr sz="1725" b="0">
                         <a:solidFill>
                           <a:srgbClr val="172A2A"/>
@@ -9115,1458 +8546,6 @@
           </a:graphicData>
         </a:graphic>
       </p:graphicFrame>
-    </p:spTree>
-  </p:cSld>
-  <p:clrMapOvr>
-    <a:masterClrMapping/>
-  </p:clrMapOvr>
-</p:sld>
-</file>
-
-<file path=ppt/slides/slide7.xml><?xml version="1.0" encoding="utf-8"?>
-<p:sld xmlns:a="http://schemas.openxmlformats.org/drawingml/2006/main" xmlns:r="http://schemas.openxmlformats.org/officeDocument/2006/relationships" xmlns:p="http://schemas.openxmlformats.org/presentationml/2006/main">
-  <p:cSld>
-    <p:bg>
-      <p:bgPr>
-        <a:solidFill>
-          <a:srgbClr val="F4F2EC"/>
-        </a:solidFill>
-        <a:effectLst/>
-      </p:bgPr>
-    </p:bg>
-    <p:spTree>
-      <p:nvGrpSpPr>
-        <p:cNvPr id="1" name=""/>
-        <p:cNvGrpSpPr/>
-        <p:nvPr/>
-      </p:nvGrpSpPr>
-      <p:grpSpPr/>
-      <p:sp>
-        <p:nvSpPr>
-          <p:cNvPr id="12" name="矩形 11"/>
-          <p:cNvSpPr>
-            <a:spLocks noGrp="1"/>
-          </p:cNvSpPr>
-          <p:nvPr/>
-        </p:nvSpPr>
-        <p:spPr>
-          <a:xfrm>
-            <a:off x="609600" y="457200"/>
-            <a:ext cx="10972800" cy="838200"/>
-          </a:xfrm>
-          <a:prstGeom prst="rect">
-            <a:avLst/>
-          </a:prstGeom>
-          <a:noFill/>
-          <a:ln w="0">
-            <a:noFill/>
-          </a:ln>
-        </p:spPr>
-        <p:txBody>
-          <a:bodyPr wrap="square" lIns="0" tIns="0" rIns="0" bIns="0" anchor="t">
-            <a:noAutofit/>
-          </a:bodyPr>
-          <a:lstStyle>
-            <a:defPPr>
-              <a:defRPr sz="3300" b="1">
-                <a:solidFill>
-                  <a:srgbClr val="172A2A"/>
-                </a:solidFill>
-                <a:latin typeface="Hiragino Sans GB" panose="020B0300000000000000" charset="-122"/>
-                <a:ea typeface="Hiragino Sans GB" panose="020B0300000000000000" charset="-122"/>
-                <a:cs typeface="Hiragino Sans GB" panose="020B0300000000000000" charset="-122"/>
-              </a:defRPr>
-            </a:defPPr>
-          </a:lstStyle>
-          <a:p>
-            <a:pPr>
-              <a:defRPr sz="3300" b="1">
-                <a:solidFill>
-                  <a:srgbClr val="172A2A"/>
-                </a:solidFill>
-                <a:latin typeface="Hiragino Sans GB" panose="020B0300000000000000" charset="-122"/>
-                <a:ea typeface="Hiragino Sans GB" panose="020B0300000000000000" charset="-122"/>
-                <a:cs typeface="Hiragino Sans GB" panose="020B0300000000000000" charset="-122"/>
-              </a:defRPr>
-            </a:pPr>
-            <a:r>
-              <a:rPr sz="3300" b="1">
-                <a:solidFill>
-                  <a:srgbClr val="172A2A"/>
-                </a:solidFill>
-                <a:latin typeface="Hiragino Sans GB" panose="020B0300000000000000" charset="-122"/>
-                <a:ea typeface="Hiragino Sans GB" panose="020B0300000000000000" charset="-122"/>
-                <a:cs typeface="Hiragino Sans GB" panose="020B0300000000000000" charset="-122"/>
-              </a:rPr>
-              <a:t>建议推进顺序：先验证小样本，再扩到全量</a:t>
-            </a:r>
-            <a:endParaRPr sz="3300" b="1">
-              <a:solidFill>
-                <a:srgbClr val="172A2A"/>
-              </a:solidFill>
-              <a:latin typeface="Hiragino Sans GB" panose="020B0300000000000000" charset="-122"/>
-              <a:ea typeface="Hiragino Sans GB" panose="020B0300000000000000" charset="-122"/>
-              <a:cs typeface="Hiragino Sans GB" panose="020B0300000000000000" charset="-122"/>
-            </a:endParaRPr>
-          </a:p>
-        </p:txBody>
-      </p:sp>
-      <p:sp>
-        <p:nvSpPr>
-          <p:cNvPr id="2" name="矩形 1"/>
-          <p:cNvSpPr>
-            <a:spLocks noGrp="1"/>
-          </p:cNvSpPr>
-          <p:nvPr/>
-        </p:nvSpPr>
-        <p:spPr>
-          <a:xfrm>
-            <a:off x="10668000" y="6438900"/>
-            <a:ext cx="952500" cy="209550"/>
-          </a:xfrm>
-          <a:prstGeom prst="rect">
-            <a:avLst/>
-          </a:prstGeom>
-          <a:noFill/>
-          <a:ln w="0">
-            <a:noFill/>
-          </a:ln>
-        </p:spPr>
-        <p:txBody>
-          <a:bodyPr wrap="square" lIns="0" tIns="0" rIns="0" bIns="0" anchor="t">
-            <a:noAutofit/>
-          </a:bodyPr>
-          <a:lstStyle>
-            <a:defPPr>
-              <a:defRPr sz="1125" b="0">
-                <a:solidFill>
-                  <a:srgbClr val="5B6864"/>
-                </a:solidFill>
-                <a:latin typeface="Hiragino Sans GB" panose="020B0300000000000000" charset="-122"/>
-                <a:ea typeface="Hiragino Sans GB" panose="020B0300000000000000" charset="-122"/>
-                <a:cs typeface="Hiragino Sans GB" panose="020B0300000000000000" charset="-122"/>
-              </a:defRPr>
-            </a:defPPr>
-          </a:lstStyle>
-          <a:p>
-            <a:pPr>
-              <a:defRPr sz="1125" b="0">
-                <a:solidFill>
-                  <a:srgbClr val="5B6864"/>
-                </a:solidFill>
-                <a:latin typeface="Hiragino Sans GB" panose="020B0300000000000000" charset="-122"/>
-                <a:ea typeface="Hiragino Sans GB" panose="020B0300000000000000" charset="-122"/>
-                <a:cs typeface="Hiragino Sans GB" panose="020B0300000000000000" charset="-122"/>
-              </a:defRPr>
-            </a:pPr>
-            <a:r>
-              <a:rPr sz="1125" b="0">
-                <a:solidFill>
-                  <a:srgbClr val="5B6864"/>
-                </a:solidFill>
-                <a:latin typeface="Hiragino Sans GB" panose="020B0300000000000000" charset="-122"/>
-                <a:ea typeface="Hiragino Sans GB" panose="020B0300000000000000" charset="-122"/>
-                <a:cs typeface="Hiragino Sans GB" panose="020B0300000000000000" charset="-122"/>
-              </a:rPr>
-              <a:t>14 / 15</a:t>
-            </a:r>
-            <a:endParaRPr sz="1125" b="0">
-              <a:solidFill>
-                <a:srgbClr val="5B6864"/>
-              </a:solidFill>
-              <a:latin typeface="Hiragino Sans GB" panose="020B0300000000000000" charset="-122"/>
-              <a:ea typeface="Hiragino Sans GB" panose="020B0300000000000000" charset="-122"/>
-              <a:cs typeface="Hiragino Sans GB" panose="020B0300000000000000" charset="-122"/>
-            </a:endParaRPr>
-          </a:p>
-        </p:txBody>
-      </p:sp>
-      <p:sp>
-        <p:nvSpPr>
-          <p:cNvPr id="3" name="矩形 2"/>
-          <p:cNvSpPr>
-            <a:spLocks noGrp="1"/>
-          </p:cNvSpPr>
-          <p:nvPr/>
-        </p:nvSpPr>
-        <p:spPr>
-          <a:xfrm>
-            <a:off x="609600" y="6238875"/>
-            <a:ext cx="9715500" cy="457200"/>
-          </a:xfrm>
-          <a:prstGeom prst="rect">
-            <a:avLst/>
-          </a:prstGeom>
-          <a:noFill/>
-          <a:ln w="0">
-            <a:noFill/>
-          </a:ln>
-        </p:spPr>
-        <p:txBody>
-          <a:bodyPr wrap="square" lIns="0" tIns="0" rIns="0" bIns="0" anchor="t">
-            <a:noAutofit/>
-          </a:bodyPr>
-          <a:lstStyle>
-            <a:defPPr>
-              <a:defRPr sz="1125" b="0">
-                <a:solidFill>
-                  <a:srgbClr val="5B6864"/>
-                </a:solidFill>
-                <a:latin typeface="Hiragino Sans GB" panose="020B0300000000000000" charset="-122"/>
-                <a:ea typeface="Hiragino Sans GB" panose="020B0300000000000000" charset="-122"/>
-                <a:cs typeface="Hiragino Sans GB" panose="020B0300000000000000" charset="-122"/>
-              </a:defRPr>
-            </a:defPPr>
-          </a:lstStyle>
-          <a:p>
-            <a:pPr>
-              <a:defRPr sz="1125" b="0">
-                <a:solidFill>
-                  <a:srgbClr val="5B6864"/>
-                </a:solidFill>
-                <a:latin typeface="Hiragino Sans GB" panose="020B0300000000000000" charset="-122"/>
-                <a:ea typeface="Hiragino Sans GB" panose="020B0300000000000000" charset="-122"/>
-                <a:cs typeface="Hiragino Sans GB" panose="020B0300000000000000" charset="-122"/>
-              </a:defRPr>
-            </a:pPr>
-            <a:r>
-              <a:rPr sz="1125" b="0">
-                <a:solidFill>
-                  <a:srgbClr val="5B6864"/>
-                </a:solidFill>
-                <a:latin typeface="Hiragino Sans GB" panose="020B0300000000000000" charset="-122"/>
-                <a:ea typeface="Hiragino Sans GB" panose="020B0300000000000000" charset="-122"/>
-                <a:cs typeface="Hiragino Sans GB" panose="020B0300000000000000" charset="-122"/>
-              </a:rPr>
-              <a:t>以下为推进建议，尚未承诺具体日期。主线标注需要人工核验，不能由完成率排序代替剧情顺序。</a:t>
-            </a:r>
-            <a:endParaRPr sz="1125" b="0">
-              <a:solidFill>
-                <a:srgbClr val="5B6864"/>
-              </a:solidFill>
-              <a:latin typeface="Hiragino Sans GB" panose="020B0300000000000000" charset="-122"/>
-              <a:ea typeface="Hiragino Sans GB" panose="020B0300000000000000" charset="-122"/>
-              <a:cs typeface="Hiragino Sans GB" panose="020B0300000000000000" charset="-122"/>
-            </a:endParaRPr>
-          </a:p>
-        </p:txBody>
-      </p:sp>
-      <p:sp>
-        <p:nvSpPr>
-          <p:cNvPr id="4" name="矩形 3"/>
-          <p:cNvSpPr>
-            <a:spLocks noGrp="1"/>
-          </p:cNvSpPr>
-          <p:nvPr/>
-        </p:nvSpPr>
-        <p:spPr>
-          <a:xfrm>
-            <a:off x="609600" y="1581150"/>
-            <a:ext cx="10858500" cy="400050"/>
-          </a:xfrm>
-          <a:prstGeom prst="rect">
-            <a:avLst/>
-          </a:prstGeom>
-          <a:noFill/>
-          <a:ln w="0">
-            <a:noFill/>
-          </a:ln>
-        </p:spPr>
-        <p:txBody>
-          <a:bodyPr wrap="square" lIns="0" tIns="0" rIns="0" bIns="0" anchor="t">
-            <a:noAutofit/>
-          </a:bodyPr>
-          <a:lstStyle>
-            <a:defPPr>
-              <a:defRPr sz="2175" b="1">
-                <a:solidFill>
-                  <a:srgbClr val="172A2A"/>
-                </a:solidFill>
-                <a:latin typeface="Hiragino Sans GB" panose="020B0300000000000000" charset="-122"/>
-                <a:ea typeface="Hiragino Sans GB" panose="020B0300000000000000" charset="-122"/>
-                <a:cs typeface="Hiragino Sans GB" panose="020B0300000000000000" charset="-122"/>
-              </a:defRPr>
-            </a:defPPr>
-          </a:lstStyle>
-          <a:p>
-            <a:pPr>
-              <a:defRPr sz="2175" b="1">
-                <a:solidFill>
-                  <a:srgbClr val="172A2A"/>
-                </a:solidFill>
-                <a:latin typeface="Hiragino Sans GB" panose="020B0300000000000000" charset="-122"/>
-                <a:ea typeface="Hiragino Sans GB" panose="020B0300000000000000" charset="-122"/>
-                <a:cs typeface="Hiragino Sans GB" panose="020B0300000000000000" charset="-122"/>
-              </a:defRPr>
-            </a:pPr>
-            <a:r>
-              <a:rPr sz="2175" b="1">
-                <a:solidFill>
-                  <a:srgbClr val="172A2A"/>
-                </a:solidFill>
-                <a:latin typeface="Hiragino Sans GB" panose="020B0300000000000000" charset="-122"/>
-                <a:ea typeface="Hiragino Sans GB" panose="020B0300000000000000" charset="-122"/>
-                <a:cs typeface="Hiragino Sans GB" panose="020B0300000000000000" charset="-122"/>
-              </a:rPr>
-              <a:t>第一阶段  核验数据与小规模试标</a:t>
-            </a:r>
-            <a:endParaRPr sz="2175" b="1">
-              <a:solidFill>
-                <a:srgbClr val="172A2A"/>
-              </a:solidFill>
-              <a:latin typeface="Hiragino Sans GB" panose="020B0300000000000000" charset="-122"/>
-              <a:ea typeface="Hiragino Sans GB" panose="020B0300000000000000" charset="-122"/>
-              <a:cs typeface="Hiragino Sans GB" panose="020B0300000000000000" charset="-122"/>
-            </a:endParaRPr>
-          </a:p>
-        </p:txBody>
-      </p:sp>
-      <p:sp>
-        <p:nvSpPr>
-          <p:cNvPr id="5" name="矩形 4"/>
-          <p:cNvSpPr>
-            <a:spLocks noGrp="1"/>
-          </p:cNvSpPr>
-          <p:nvPr/>
-        </p:nvSpPr>
-        <p:spPr>
-          <a:xfrm>
-            <a:off x="609600" y="2028825"/>
-            <a:ext cx="10858500" cy="609600"/>
-          </a:xfrm>
-          <a:prstGeom prst="rect">
-            <a:avLst/>
-          </a:prstGeom>
-          <a:noFill/>
-          <a:ln w="0">
-            <a:noFill/>
-          </a:ln>
-        </p:spPr>
-        <p:txBody>
-          <a:bodyPr wrap="square" lIns="0" tIns="0" rIns="0" bIns="0" anchor="t">
-            <a:noAutofit/>
-          </a:bodyPr>
-          <a:lstStyle>
-            <a:defPPr>
-              <a:defRPr sz="1800" b="0">
-                <a:solidFill>
-                  <a:srgbClr val="5B6864"/>
-                </a:solidFill>
-                <a:latin typeface="Hiragino Sans GB" panose="020B0300000000000000" charset="-122"/>
-                <a:ea typeface="Hiragino Sans GB" panose="020B0300000000000000" charset="-122"/>
-                <a:cs typeface="Hiragino Sans GB" panose="020B0300000000000000" charset="-122"/>
-              </a:defRPr>
-            </a:defPPr>
-          </a:lstStyle>
-          <a:p>
-            <a:pPr>
-              <a:defRPr sz="1800" b="0">
-                <a:solidFill>
-                  <a:srgbClr val="5B6864"/>
-                </a:solidFill>
-                <a:latin typeface="Hiragino Sans GB" panose="020B0300000000000000" charset="-122"/>
-                <a:ea typeface="Hiragino Sans GB" panose="020B0300000000000000" charset="-122"/>
-                <a:cs typeface="Hiragino Sans GB" panose="020B0300000000000000" charset="-122"/>
-              </a:defRPr>
-            </a:pPr>
-            <a:r>
-              <a:rPr sz="1800" b="0">
-                <a:solidFill>
-                  <a:srgbClr val="5B6864"/>
-                </a:solidFill>
-                <a:latin typeface="Hiragino Sans GB" panose="020B0300000000000000" charset="-122"/>
-                <a:ea typeface="Hiragino Sans GB" panose="020B0300000000000000" charset="-122"/>
-                <a:cs typeface="Hiragino Sans GB" panose="020B0300000000000000" charset="-122"/>
-              </a:rPr>
-              <a:t>修复剩余映射问题，核验RAWG字段，先试标20款知名游戏</a:t>
-            </a:r>
-            <a:endParaRPr sz="1800" b="0">
-              <a:solidFill>
-                <a:srgbClr val="5B6864"/>
-              </a:solidFill>
-              <a:latin typeface="Hiragino Sans GB" panose="020B0300000000000000" charset="-122"/>
-              <a:ea typeface="Hiragino Sans GB" panose="020B0300000000000000" charset="-122"/>
-              <a:cs typeface="Hiragino Sans GB" panose="020B0300000000000000" charset="-122"/>
-            </a:endParaRPr>
-          </a:p>
-        </p:txBody>
-      </p:sp>
-      <p:sp>
-        <p:nvSpPr>
-          <p:cNvPr id="6" name="矩形 5"/>
-          <p:cNvSpPr>
-            <a:spLocks noGrp="1"/>
-          </p:cNvSpPr>
-          <p:nvPr/>
-        </p:nvSpPr>
-        <p:spPr>
-          <a:xfrm>
-            <a:off x="609600" y="2647950"/>
-            <a:ext cx="10858500" cy="400050"/>
-          </a:xfrm>
-          <a:prstGeom prst="rect">
-            <a:avLst/>
-          </a:prstGeom>
-          <a:noFill/>
-          <a:ln w="0">
-            <a:noFill/>
-          </a:ln>
-        </p:spPr>
-        <p:txBody>
-          <a:bodyPr wrap="square" lIns="0" tIns="0" rIns="0" bIns="0" anchor="t">
-            <a:noAutofit/>
-          </a:bodyPr>
-          <a:lstStyle>
-            <a:defPPr>
-              <a:defRPr sz="2175" b="1">
-                <a:solidFill>
-                  <a:srgbClr val="172A2A"/>
-                </a:solidFill>
-                <a:latin typeface="Hiragino Sans GB" panose="020B0300000000000000" charset="-122"/>
-                <a:ea typeface="Hiragino Sans GB" panose="020B0300000000000000" charset="-122"/>
-                <a:cs typeface="Hiragino Sans GB" panose="020B0300000000000000" charset="-122"/>
-              </a:defRPr>
-            </a:defPPr>
-          </a:lstStyle>
-          <a:p>
-            <a:pPr>
-              <a:defRPr sz="2175" b="1">
-                <a:solidFill>
-                  <a:srgbClr val="172A2A"/>
-                </a:solidFill>
-                <a:latin typeface="Hiragino Sans GB" panose="020B0300000000000000" charset="-122"/>
-                <a:ea typeface="Hiragino Sans GB" panose="020B0300000000000000" charset="-122"/>
-                <a:cs typeface="Hiragino Sans GB" panose="020B0300000000000000" charset="-122"/>
-              </a:defRPr>
-            </a:pPr>
-            <a:r>
-              <a:rPr sz="2175" b="1">
-                <a:solidFill>
-                  <a:srgbClr val="172A2A"/>
-                </a:solidFill>
-                <a:latin typeface="Hiragino Sans GB" panose="020B0300000000000000" charset="-122"/>
-                <a:ea typeface="Hiragino Sans GB" panose="020B0300000000000000" charset="-122"/>
-                <a:cs typeface="Hiragino Sans GB" panose="020B0300000000000000" charset="-122"/>
-              </a:rPr>
-              <a:t>第二阶段  年度类型与主线漏斗</a:t>
-            </a:r>
-            <a:endParaRPr sz="2175" b="1">
-              <a:solidFill>
-                <a:srgbClr val="172A2A"/>
-              </a:solidFill>
-              <a:latin typeface="Hiragino Sans GB" panose="020B0300000000000000" charset="-122"/>
-              <a:ea typeface="Hiragino Sans GB" panose="020B0300000000000000" charset="-122"/>
-              <a:cs typeface="Hiragino Sans GB" panose="020B0300000000000000" charset="-122"/>
-            </a:endParaRPr>
-          </a:p>
-        </p:txBody>
-      </p:sp>
-      <p:sp>
-        <p:nvSpPr>
-          <p:cNvPr id="7" name="矩形 6"/>
-          <p:cNvSpPr>
-            <a:spLocks noGrp="1"/>
-          </p:cNvSpPr>
-          <p:nvPr/>
-        </p:nvSpPr>
-        <p:spPr>
-          <a:xfrm>
-            <a:off x="609600" y="3095625"/>
-            <a:ext cx="10858500" cy="609600"/>
-          </a:xfrm>
-          <a:prstGeom prst="rect">
-            <a:avLst/>
-          </a:prstGeom>
-          <a:noFill/>
-          <a:ln w="0">
-            <a:noFill/>
-          </a:ln>
-        </p:spPr>
-        <p:txBody>
-          <a:bodyPr wrap="square" lIns="0" tIns="0" rIns="0" bIns="0" anchor="t">
-            <a:noAutofit/>
-          </a:bodyPr>
-          <a:lstStyle>
-            <a:defPPr>
-              <a:defRPr sz="1800" b="0">
-                <a:solidFill>
-                  <a:srgbClr val="5B6864"/>
-                </a:solidFill>
-                <a:latin typeface="Hiragino Sans GB" panose="020B0300000000000000" charset="-122"/>
-                <a:ea typeface="Hiragino Sans GB" panose="020B0300000000000000" charset="-122"/>
-                <a:cs typeface="Hiragino Sans GB" panose="020B0300000000000000" charset="-122"/>
-              </a:defRPr>
-            </a:defPPr>
-          </a:lstStyle>
-          <a:p>
-            <a:pPr>
-              <a:defRPr sz="1800" b="0">
-                <a:solidFill>
-                  <a:srgbClr val="5B6864"/>
-                </a:solidFill>
-                <a:latin typeface="Hiragino Sans GB" panose="020B0300000000000000" charset="-122"/>
-                <a:ea typeface="Hiragino Sans GB" panose="020B0300000000000000" charset="-122"/>
-                <a:cs typeface="Hiragino Sans GB" panose="020B0300000000000000" charset="-122"/>
-              </a:defRPr>
-            </a:pPr>
-            <a:r>
-              <a:rPr sz="1800" b="0">
-                <a:solidFill>
-                  <a:srgbClr val="5B6864"/>
-                </a:solidFill>
-                <a:latin typeface="Hiragino Sans GB" panose="020B0300000000000000" charset="-122"/>
-                <a:ea typeface="Hiragino Sans GB" panose="020B0300000000000000" charset="-122"/>
-                <a:cs typeface="Hiragino Sans GB" panose="020B0300000000000000" charset="-122"/>
-              </a:rPr>
-              <a:t>完成年度标签统计，试标通过后再扩至100～1000款主线明确的游戏</a:t>
-            </a:r>
-            <a:endParaRPr sz="1800" b="0">
-              <a:solidFill>
-                <a:srgbClr val="5B6864"/>
-              </a:solidFill>
-              <a:latin typeface="Hiragino Sans GB" panose="020B0300000000000000" charset="-122"/>
-              <a:ea typeface="Hiragino Sans GB" panose="020B0300000000000000" charset="-122"/>
-              <a:cs typeface="Hiragino Sans GB" panose="020B0300000000000000" charset="-122"/>
-            </a:endParaRPr>
-          </a:p>
-        </p:txBody>
-      </p:sp>
-      <p:sp>
-        <p:nvSpPr>
-          <p:cNvPr id="8" name="矩形 7"/>
-          <p:cNvSpPr>
-            <a:spLocks noGrp="1"/>
-          </p:cNvSpPr>
-          <p:nvPr/>
-        </p:nvSpPr>
-        <p:spPr>
-          <a:xfrm>
-            <a:off x="609600" y="3714750"/>
-            <a:ext cx="10858500" cy="400050"/>
-          </a:xfrm>
-          <a:prstGeom prst="rect">
-            <a:avLst/>
-          </a:prstGeom>
-          <a:noFill/>
-          <a:ln w="0">
-            <a:noFill/>
-          </a:ln>
-        </p:spPr>
-        <p:txBody>
-          <a:bodyPr wrap="square" lIns="0" tIns="0" rIns="0" bIns="0" anchor="t">
-            <a:noAutofit/>
-          </a:bodyPr>
-          <a:lstStyle>
-            <a:defPPr>
-              <a:defRPr sz="2175" b="1">
-                <a:solidFill>
-                  <a:srgbClr val="172A2A"/>
-                </a:solidFill>
-                <a:latin typeface="Hiragino Sans GB" panose="020B0300000000000000" charset="-122"/>
-                <a:ea typeface="Hiragino Sans GB" panose="020B0300000000000000" charset="-122"/>
-                <a:cs typeface="Hiragino Sans GB" panose="020B0300000000000000" charset="-122"/>
-              </a:defRPr>
-            </a:defPPr>
-          </a:lstStyle>
-          <a:p>
-            <a:pPr>
-              <a:defRPr sz="2175" b="1">
-                <a:solidFill>
-                  <a:srgbClr val="172A2A"/>
-                </a:solidFill>
-                <a:latin typeface="Hiragino Sans GB" panose="020B0300000000000000" charset="-122"/>
-                <a:ea typeface="Hiragino Sans GB" panose="020B0300000000000000" charset="-122"/>
-                <a:cs typeface="Hiragino Sans GB" panose="020B0300000000000000" charset="-122"/>
-              </a:defRPr>
-            </a:pPr>
-            <a:r>
-              <a:rPr sz="2175" b="1">
-                <a:solidFill>
-                  <a:srgbClr val="172A2A"/>
-                </a:solidFill>
-                <a:latin typeface="Hiragino Sans GB" panose="020B0300000000000000" charset="-122"/>
-                <a:ea typeface="Hiragino Sans GB" panose="020B0300000000000000" charset="-122"/>
-                <a:cs typeface="Hiragino Sans GB" panose="020B0300000000000000" charset="-122"/>
-              </a:rPr>
-              <a:t>第三阶段  可解释游戏推荐</a:t>
-            </a:r>
-            <a:endParaRPr sz="2175" b="1">
-              <a:solidFill>
-                <a:srgbClr val="172A2A"/>
-              </a:solidFill>
-              <a:latin typeface="Hiragino Sans GB" panose="020B0300000000000000" charset="-122"/>
-              <a:ea typeface="Hiragino Sans GB" panose="020B0300000000000000" charset="-122"/>
-              <a:cs typeface="Hiragino Sans GB" panose="020B0300000000000000" charset="-122"/>
-            </a:endParaRPr>
-          </a:p>
-        </p:txBody>
-      </p:sp>
-      <p:sp>
-        <p:nvSpPr>
-          <p:cNvPr id="9" name="矩形 8"/>
-          <p:cNvSpPr>
-            <a:spLocks noGrp="1"/>
-          </p:cNvSpPr>
-          <p:nvPr/>
-        </p:nvSpPr>
-        <p:spPr>
-          <a:xfrm>
-            <a:off x="609600" y="4162425"/>
-            <a:ext cx="10858500" cy="609600"/>
-          </a:xfrm>
-          <a:prstGeom prst="rect">
-            <a:avLst/>
-          </a:prstGeom>
-          <a:noFill/>
-          <a:ln w="0">
-            <a:noFill/>
-          </a:ln>
-        </p:spPr>
-        <p:txBody>
-          <a:bodyPr wrap="square" lIns="0" tIns="0" rIns="0" bIns="0" anchor="t">
-            <a:noAutofit/>
-          </a:bodyPr>
-          <a:lstStyle>
-            <a:defPPr>
-              <a:defRPr sz="1800" b="0">
-                <a:solidFill>
-                  <a:srgbClr val="5B6864"/>
-                </a:solidFill>
-                <a:latin typeface="Hiragino Sans GB" panose="020B0300000000000000" charset="-122"/>
-                <a:ea typeface="Hiragino Sans GB" panose="020B0300000000000000" charset="-122"/>
-                <a:cs typeface="Hiragino Sans GB" panose="020B0300000000000000" charset="-122"/>
-              </a:defRPr>
-            </a:defPPr>
-          </a:lstStyle>
-          <a:p>
-            <a:pPr>
-              <a:defRPr sz="1800" b="0">
-                <a:solidFill>
-                  <a:srgbClr val="5B6864"/>
-                </a:solidFill>
-                <a:latin typeface="Hiragino Sans GB" panose="020B0300000000000000" charset="-122"/>
-                <a:ea typeface="Hiragino Sans GB" panose="020B0300000000000000" charset="-122"/>
-                <a:cs typeface="Hiragino Sans GB" panose="020B0300000000000000" charset="-122"/>
-              </a:defRPr>
-            </a:pPr>
-            <a:r>
-              <a:rPr sz="1800" b="0">
-                <a:solidFill>
-                  <a:srgbClr val="5B6864"/>
-                </a:solidFill>
-                <a:latin typeface="Hiragino Sans GB" panose="020B0300000000000000" charset="-122"/>
-                <a:ea typeface="Hiragino Sans GB" panose="020B0300000000000000" charset="-122"/>
-                <a:cs typeface="Hiragino Sans GB" panose="020B0300000000000000" charset="-122"/>
-              </a:rPr>
-              <a:t>先比较简单标签重合与加权推荐，再组织游戏、标签、开发商关系</a:t>
-            </a:r>
-            <a:endParaRPr sz="1800" b="0">
-              <a:solidFill>
-                <a:srgbClr val="5B6864"/>
-              </a:solidFill>
-              <a:latin typeface="Hiragino Sans GB" panose="020B0300000000000000" charset="-122"/>
-              <a:ea typeface="Hiragino Sans GB" panose="020B0300000000000000" charset="-122"/>
-              <a:cs typeface="Hiragino Sans GB" panose="020B0300000000000000" charset="-122"/>
-            </a:endParaRPr>
-          </a:p>
-        </p:txBody>
-      </p:sp>
-      <p:sp>
-        <p:nvSpPr>
-          <p:cNvPr id="10" name="矩形 9"/>
-          <p:cNvSpPr>
-            <a:spLocks noGrp="1"/>
-          </p:cNvSpPr>
-          <p:nvPr/>
-        </p:nvSpPr>
-        <p:spPr>
-          <a:xfrm>
-            <a:off x="609600" y="4781550"/>
-            <a:ext cx="10858500" cy="400050"/>
-          </a:xfrm>
-          <a:prstGeom prst="rect">
-            <a:avLst/>
-          </a:prstGeom>
-          <a:noFill/>
-          <a:ln w="0">
-            <a:noFill/>
-          </a:ln>
-        </p:spPr>
-        <p:txBody>
-          <a:bodyPr wrap="square" lIns="0" tIns="0" rIns="0" bIns="0" anchor="t">
-            <a:noAutofit/>
-          </a:bodyPr>
-          <a:lstStyle>
-            <a:defPPr>
-              <a:defRPr sz="2175" b="1">
-                <a:solidFill>
-                  <a:srgbClr val="172A2A"/>
-                </a:solidFill>
-                <a:latin typeface="Hiragino Sans GB" panose="020B0300000000000000" charset="-122"/>
-                <a:ea typeface="Hiragino Sans GB" panose="020B0300000000000000" charset="-122"/>
-                <a:cs typeface="Hiragino Sans GB" panose="020B0300000000000000" charset="-122"/>
-              </a:defRPr>
-            </a:defPPr>
-          </a:lstStyle>
-          <a:p>
-            <a:pPr>
-              <a:defRPr sz="2175" b="1">
-                <a:solidFill>
-                  <a:srgbClr val="172A2A"/>
-                </a:solidFill>
-                <a:latin typeface="Hiragino Sans GB" panose="020B0300000000000000" charset="-122"/>
-                <a:ea typeface="Hiragino Sans GB" panose="020B0300000000000000" charset="-122"/>
-                <a:cs typeface="Hiragino Sans GB" panose="020B0300000000000000" charset="-122"/>
-              </a:defRPr>
-            </a:pPr>
-            <a:r>
-              <a:rPr sz="2175" b="1">
-                <a:solidFill>
-                  <a:srgbClr val="172A2A"/>
-                </a:solidFill>
-                <a:latin typeface="Hiragino Sans GB" panose="020B0300000000000000" charset="-122"/>
-                <a:ea typeface="Hiragino Sans GB" panose="020B0300000000000000" charset="-122"/>
-                <a:cs typeface="Hiragino Sans GB" panose="020B0300000000000000" charset="-122"/>
-              </a:rPr>
-              <a:t>第四阶段  按时间选择扩展</a:t>
-            </a:r>
-            <a:endParaRPr sz="2175" b="1">
-              <a:solidFill>
-                <a:srgbClr val="172A2A"/>
-              </a:solidFill>
-              <a:latin typeface="Hiragino Sans GB" panose="020B0300000000000000" charset="-122"/>
-              <a:ea typeface="Hiragino Sans GB" panose="020B0300000000000000" charset="-122"/>
-              <a:cs typeface="Hiragino Sans GB" panose="020B0300000000000000" charset="-122"/>
-            </a:endParaRPr>
-          </a:p>
-        </p:txBody>
-      </p:sp>
-      <p:sp>
-        <p:nvSpPr>
-          <p:cNvPr id="11" name="矩形 10"/>
-          <p:cNvSpPr>
-            <a:spLocks noGrp="1"/>
-          </p:cNvSpPr>
-          <p:nvPr/>
-        </p:nvSpPr>
-        <p:spPr>
-          <a:xfrm>
-            <a:off x="609600" y="5229225"/>
-            <a:ext cx="10858500" cy="609600"/>
-          </a:xfrm>
-          <a:prstGeom prst="rect">
-            <a:avLst/>
-          </a:prstGeom>
-          <a:noFill/>
-          <a:ln w="0">
-            <a:noFill/>
-          </a:ln>
-        </p:spPr>
-        <p:txBody>
-          <a:bodyPr wrap="square" lIns="0" tIns="0" rIns="0" bIns="0" anchor="t">
-            <a:noAutofit/>
-          </a:bodyPr>
-          <a:lstStyle>
-            <a:defPPr>
-              <a:defRPr sz="1800" b="0">
-                <a:solidFill>
-                  <a:srgbClr val="5B6864"/>
-                </a:solidFill>
-                <a:latin typeface="Hiragino Sans GB" panose="020B0300000000000000" charset="-122"/>
-                <a:ea typeface="Hiragino Sans GB" panose="020B0300000000000000" charset="-122"/>
-                <a:cs typeface="Hiragino Sans GB" panose="020B0300000000000000" charset="-122"/>
-              </a:defRPr>
-            </a:defPPr>
-          </a:lstStyle>
-          <a:p>
-            <a:pPr>
-              <a:defRPr sz="1800" b="0">
-                <a:solidFill>
-                  <a:srgbClr val="5B6864"/>
-                </a:solidFill>
-                <a:latin typeface="Hiragino Sans GB" panose="020B0300000000000000" charset="-122"/>
-                <a:ea typeface="Hiragino Sans GB" panose="020B0300000000000000" charset="-122"/>
-                <a:cs typeface="Hiragino Sans GB" panose="020B0300000000000000" charset="-122"/>
-              </a:defRPr>
-            </a:pPr>
-            <a:r>
-              <a:rPr sz="1800" b="0">
-                <a:solidFill>
-                  <a:srgbClr val="5B6864"/>
-                </a:solidFill>
-                <a:latin typeface="Hiragino Sans GB" panose="020B0300000000000000" charset="-122"/>
-                <a:ea typeface="Hiragino Sans GB" panose="020B0300000000000000" charset="-122"/>
-                <a:cs typeface="Hiragino Sans GB" panose="020B0300000000000000" charset="-122"/>
-              </a:rPr>
-              <a:t>深化RAWG对照，在游戏画像聚类或口碑预测中选择一个扩展</a:t>
-            </a:r>
-            <a:endParaRPr sz="1800" b="0">
-              <a:solidFill>
-                <a:srgbClr val="5B6864"/>
-              </a:solidFill>
-              <a:latin typeface="Hiragino Sans GB" panose="020B0300000000000000" charset="-122"/>
-              <a:ea typeface="Hiragino Sans GB" panose="020B0300000000000000" charset="-122"/>
-              <a:cs typeface="Hiragino Sans GB" panose="020B0300000000000000" charset="-122"/>
-            </a:endParaRPr>
-          </a:p>
-        </p:txBody>
-      </p:sp>
-    </p:spTree>
-  </p:cSld>
-  <p:clrMapOvr>
-    <a:masterClrMapping/>
-  </p:clrMapOvr>
-</p:sld>
-</file>
-
-<file path=ppt/slides/slide8.xml><?xml version="1.0" encoding="utf-8"?>
-<p:sld xmlns:a="http://schemas.openxmlformats.org/drawingml/2006/main" xmlns:r="http://schemas.openxmlformats.org/officeDocument/2006/relationships" xmlns:p="http://schemas.openxmlformats.org/presentationml/2006/main">
-  <p:cSld>
-    <p:bg>
-      <p:bgPr>
-        <a:solidFill>
-          <a:srgbClr val="F4F2EC"/>
-        </a:solidFill>
-        <a:effectLst/>
-      </p:bgPr>
-    </p:bg>
-    <p:spTree>
-      <p:nvGrpSpPr>
-        <p:cNvPr id="1" name=""/>
-        <p:cNvGrpSpPr/>
-        <p:nvPr/>
-      </p:nvGrpSpPr>
-      <p:grpSpPr/>
-      <p:sp>
-        <p:nvSpPr>
-          <p:cNvPr id="10" name="矩形 9"/>
-          <p:cNvSpPr>
-            <a:spLocks noGrp="1"/>
-          </p:cNvSpPr>
-          <p:nvPr/>
-        </p:nvSpPr>
-        <p:spPr>
-          <a:xfrm>
-            <a:off x="609600" y="457200"/>
-            <a:ext cx="10972800" cy="838200"/>
-          </a:xfrm>
-          <a:prstGeom prst="rect">
-            <a:avLst/>
-          </a:prstGeom>
-          <a:noFill/>
-          <a:ln w="0">
-            <a:noFill/>
-          </a:ln>
-        </p:spPr>
-        <p:txBody>
-          <a:bodyPr wrap="square" lIns="0" tIns="0" rIns="0" bIns="0" anchor="t">
-            <a:noAutofit/>
-          </a:bodyPr>
-          <a:lstStyle>
-            <a:defPPr>
-              <a:defRPr sz="3300" b="1">
-                <a:solidFill>
-                  <a:srgbClr val="172A2A"/>
-                </a:solidFill>
-                <a:latin typeface="Hiragino Sans GB" panose="020B0300000000000000" charset="-122"/>
-                <a:ea typeface="Hiragino Sans GB" panose="020B0300000000000000" charset="-122"/>
-                <a:cs typeface="Hiragino Sans GB" panose="020B0300000000000000" charset="-122"/>
-              </a:defRPr>
-            </a:defPPr>
-          </a:lstStyle>
-          <a:p>
-            <a:pPr>
-              <a:defRPr sz="3300" b="1">
-                <a:solidFill>
-                  <a:srgbClr val="172A2A"/>
-                </a:solidFill>
-                <a:latin typeface="Hiragino Sans GB" panose="020B0300000000000000" charset="-122"/>
-                <a:ea typeface="Hiragino Sans GB" panose="020B0300000000000000" charset="-122"/>
-                <a:cs typeface="Hiragino Sans GB" panose="020B0300000000000000" charset="-122"/>
-              </a:defRPr>
-            </a:pPr>
-            <a:r>
-              <a:rPr sz="3300" b="1">
-                <a:solidFill>
-                  <a:srgbClr val="172A2A"/>
-                </a:solidFill>
-                <a:latin typeface="Hiragino Sans GB" panose="020B0300000000000000" charset="-122"/>
-                <a:ea typeface="Hiragino Sans GB" panose="020B0300000000000000" charset="-122"/>
-                <a:cs typeface="Hiragino Sans GB" panose="020B0300000000000000" charset="-122"/>
-              </a:rPr>
-              <a:t>下一次汇报，要带来能验证的分析结果</a:t>
-            </a:r>
-            <a:endParaRPr sz="3300" b="1">
-              <a:solidFill>
-                <a:srgbClr val="172A2A"/>
-              </a:solidFill>
-              <a:latin typeface="Hiragino Sans GB" panose="020B0300000000000000" charset="-122"/>
-              <a:ea typeface="Hiragino Sans GB" panose="020B0300000000000000" charset="-122"/>
-              <a:cs typeface="Hiragino Sans GB" panose="020B0300000000000000" charset="-122"/>
-            </a:endParaRPr>
-          </a:p>
-        </p:txBody>
-      </p:sp>
-      <p:sp>
-        <p:nvSpPr>
-          <p:cNvPr id="2" name="矩形 1"/>
-          <p:cNvSpPr>
-            <a:spLocks noGrp="1"/>
-          </p:cNvSpPr>
-          <p:nvPr/>
-        </p:nvSpPr>
-        <p:spPr>
-          <a:xfrm>
-            <a:off x="10668000" y="6438900"/>
-            <a:ext cx="952500" cy="209550"/>
-          </a:xfrm>
-          <a:prstGeom prst="rect">
-            <a:avLst/>
-          </a:prstGeom>
-          <a:noFill/>
-          <a:ln w="0">
-            <a:noFill/>
-          </a:ln>
-        </p:spPr>
-        <p:txBody>
-          <a:bodyPr wrap="square" lIns="0" tIns="0" rIns="0" bIns="0" anchor="t">
-            <a:noAutofit/>
-          </a:bodyPr>
-          <a:lstStyle>
-            <a:defPPr>
-              <a:defRPr sz="1125" b="0">
-                <a:solidFill>
-                  <a:srgbClr val="5B6864"/>
-                </a:solidFill>
-                <a:latin typeface="Hiragino Sans GB" panose="020B0300000000000000" charset="-122"/>
-                <a:ea typeface="Hiragino Sans GB" panose="020B0300000000000000" charset="-122"/>
-                <a:cs typeface="Hiragino Sans GB" panose="020B0300000000000000" charset="-122"/>
-              </a:defRPr>
-            </a:defPPr>
-          </a:lstStyle>
-          <a:p>
-            <a:pPr>
-              <a:defRPr sz="1125" b="0">
-                <a:solidFill>
-                  <a:srgbClr val="5B6864"/>
-                </a:solidFill>
-                <a:latin typeface="Hiragino Sans GB" panose="020B0300000000000000" charset="-122"/>
-                <a:ea typeface="Hiragino Sans GB" panose="020B0300000000000000" charset="-122"/>
-                <a:cs typeface="Hiragino Sans GB" panose="020B0300000000000000" charset="-122"/>
-              </a:defRPr>
-            </a:pPr>
-            <a:r>
-              <a:rPr sz="1125" b="0">
-                <a:solidFill>
-                  <a:srgbClr val="5B6864"/>
-                </a:solidFill>
-                <a:latin typeface="Hiragino Sans GB" panose="020B0300000000000000" charset="-122"/>
-                <a:ea typeface="Hiragino Sans GB" panose="020B0300000000000000" charset="-122"/>
-                <a:cs typeface="Hiragino Sans GB" panose="020B0300000000000000" charset="-122"/>
-              </a:rPr>
-              <a:t>15 / 15</a:t>
-            </a:r>
-            <a:endParaRPr sz="1125" b="0">
-              <a:solidFill>
-                <a:srgbClr val="5B6864"/>
-              </a:solidFill>
-              <a:latin typeface="Hiragino Sans GB" panose="020B0300000000000000" charset="-122"/>
-              <a:ea typeface="Hiragino Sans GB" panose="020B0300000000000000" charset="-122"/>
-              <a:cs typeface="Hiragino Sans GB" panose="020B0300000000000000" charset="-122"/>
-            </a:endParaRPr>
-          </a:p>
-        </p:txBody>
-      </p:sp>
-      <p:sp>
-        <p:nvSpPr>
-          <p:cNvPr id="3" name="矩形 2"/>
-          <p:cNvSpPr>
-            <a:spLocks noGrp="1"/>
-          </p:cNvSpPr>
-          <p:nvPr/>
-        </p:nvSpPr>
-        <p:spPr>
-          <a:xfrm>
-            <a:off x="609600" y="1647825"/>
-            <a:ext cx="10858500" cy="400050"/>
-          </a:xfrm>
-          <a:prstGeom prst="rect">
-            <a:avLst/>
-          </a:prstGeom>
-          <a:noFill/>
-          <a:ln w="0">
-            <a:noFill/>
-          </a:ln>
-        </p:spPr>
-        <p:txBody>
-          <a:bodyPr wrap="square" lIns="0" tIns="0" rIns="0" bIns="0" anchor="t">
-            <a:noAutofit/>
-          </a:bodyPr>
-          <a:lstStyle>
-            <a:defPPr>
-              <a:defRPr sz="2175" b="1">
-                <a:solidFill>
-                  <a:srgbClr val="172A2A"/>
-                </a:solidFill>
-                <a:latin typeface="Hiragino Sans GB" panose="020B0300000000000000" charset="-122"/>
-                <a:ea typeface="Hiragino Sans GB" panose="020B0300000000000000" charset="-122"/>
-                <a:cs typeface="Hiragino Sans GB" panose="020B0300000000000000" charset="-122"/>
-              </a:defRPr>
-            </a:defPPr>
-          </a:lstStyle>
-          <a:p>
-            <a:pPr>
-              <a:defRPr sz="2175" b="1">
-                <a:solidFill>
-                  <a:srgbClr val="172A2A"/>
-                </a:solidFill>
-                <a:latin typeface="Hiragino Sans GB" panose="020B0300000000000000" charset="-122"/>
-                <a:ea typeface="Hiragino Sans GB" panose="020B0300000000000000" charset="-122"/>
-                <a:cs typeface="Hiragino Sans GB" panose="020B0300000000000000" charset="-122"/>
-              </a:defRPr>
-            </a:pPr>
-            <a:r>
-              <a:rPr sz="2175" b="1">
-                <a:solidFill>
-                  <a:srgbClr val="172A2A"/>
-                </a:solidFill>
-                <a:latin typeface="Hiragino Sans GB" panose="020B0300000000000000" charset="-122"/>
-                <a:ea typeface="Hiragino Sans GB" panose="020B0300000000000000" charset="-122"/>
-                <a:cs typeface="Hiragino Sans GB" panose="020B0300000000000000" charset="-122"/>
-              </a:rPr>
-              <a:t>年度类型变化</a:t>
-            </a:r>
-            <a:endParaRPr sz="2175" b="1">
-              <a:solidFill>
-                <a:srgbClr val="172A2A"/>
-              </a:solidFill>
-              <a:latin typeface="Hiragino Sans GB" panose="020B0300000000000000" charset="-122"/>
-              <a:ea typeface="Hiragino Sans GB" panose="020B0300000000000000" charset="-122"/>
-              <a:cs typeface="Hiragino Sans GB" panose="020B0300000000000000" charset="-122"/>
-            </a:endParaRPr>
-          </a:p>
-        </p:txBody>
-      </p:sp>
-      <p:sp>
-        <p:nvSpPr>
-          <p:cNvPr id="4" name="矩形 3"/>
-          <p:cNvSpPr>
-            <a:spLocks noGrp="1"/>
-          </p:cNvSpPr>
-          <p:nvPr/>
-        </p:nvSpPr>
-        <p:spPr>
-          <a:xfrm>
-            <a:off x="609600" y="2095500"/>
-            <a:ext cx="10858500" cy="609600"/>
-          </a:xfrm>
-          <a:prstGeom prst="rect">
-            <a:avLst/>
-          </a:prstGeom>
-          <a:noFill/>
-          <a:ln w="0">
-            <a:noFill/>
-          </a:ln>
-        </p:spPr>
-        <p:txBody>
-          <a:bodyPr wrap="square" lIns="0" tIns="0" rIns="0" bIns="0" anchor="t">
-            <a:noAutofit/>
-          </a:bodyPr>
-          <a:lstStyle>
-            <a:defPPr>
-              <a:defRPr sz="1800" b="0">
-                <a:solidFill>
-                  <a:srgbClr val="5B6864"/>
-                </a:solidFill>
-                <a:latin typeface="Hiragino Sans GB" panose="020B0300000000000000" charset="-122"/>
-                <a:ea typeface="Hiragino Sans GB" panose="020B0300000000000000" charset="-122"/>
-                <a:cs typeface="Hiragino Sans GB" panose="020B0300000000000000" charset="-122"/>
-              </a:defRPr>
-            </a:defPPr>
-          </a:lstStyle>
-          <a:p>
-            <a:pPr>
-              <a:defRPr sz="1800" b="0">
-                <a:solidFill>
-                  <a:srgbClr val="5B6864"/>
-                </a:solidFill>
-                <a:latin typeface="Hiragino Sans GB" panose="020B0300000000000000" charset="-122"/>
-                <a:ea typeface="Hiragino Sans GB" panose="020B0300000000000000" charset="-122"/>
-                <a:cs typeface="Hiragino Sans GB" panose="020B0300000000000000" charset="-122"/>
-              </a:defRPr>
-            </a:pPr>
-            <a:r>
-              <a:rPr sz="1800" b="0">
-                <a:solidFill>
-                  <a:srgbClr val="5B6864"/>
-                </a:solidFill>
-                <a:latin typeface="Hiragino Sans GB" panose="020B0300000000000000" charset="-122"/>
-                <a:ea typeface="Hiragino Sans GB" panose="020B0300000000000000" charset="-122"/>
-                <a:cs typeface="Hiragino Sans GB" panose="020B0300000000000000" charset="-122"/>
-              </a:rPr>
-              <a:t>展示各年份标签占比，同时报告标签覆盖率</a:t>
-            </a:r>
-            <a:endParaRPr sz="1800" b="0">
-              <a:solidFill>
-                <a:srgbClr val="5B6864"/>
-              </a:solidFill>
-              <a:latin typeface="Hiragino Sans GB" panose="020B0300000000000000" charset="-122"/>
-              <a:ea typeface="Hiragino Sans GB" panose="020B0300000000000000" charset="-122"/>
-              <a:cs typeface="Hiragino Sans GB" panose="020B0300000000000000" charset="-122"/>
-            </a:endParaRPr>
-          </a:p>
-        </p:txBody>
-      </p:sp>
-      <p:sp>
-        <p:nvSpPr>
-          <p:cNvPr id="5" name="矩形 4"/>
-          <p:cNvSpPr>
-            <a:spLocks noGrp="1"/>
-          </p:cNvSpPr>
-          <p:nvPr/>
-        </p:nvSpPr>
-        <p:spPr>
-          <a:xfrm>
-            <a:off x="609600" y="2733675"/>
-            <a:ext cx="10858500" cy="400050"/>
-          </a:xfrm>
-          <a:prstGeom prst="rect">
-            <a:avLst/>
-          </a:prstGeom>
-          <a:noFill/>
-          <a:ln w="0">
-            <a:noFill/>
-          </a:ln>
-        </p:spPr>
-        <p:txBody>
-          <a:bodyPr wrap="square" lIns="0" tIns="0" rIns="0" bIns="0" anchor="t">
-            <a:noAutofit/>
-          </a:bodyPr>
-          <a:lstStyle>
-            <a:defPPr>
-              <a:defRPr sz="2175" b="1">
-                <a:solidFill>
-                  <a:srgbClr val="172A2A"/>
-                </a:solidFill>
-                <a:latin typeface="Hiragino Sans GB" panose="020B0300000000000000" charset="-122"/>
-                <a:ea typeface="Hiragino Sans GB" panose="020B0300000000000000" charset="-122"/>
-                <a:cs typeface="Hiragino Sans GB" panose="020B0300000000000000" charset="-122"/>
-              </a:defRPr>
-            </a:defPPr>
-          </a:lstStyle>
-          <a:p>
-            <a:pPr>
-              <a:defRPr sz="2175" b="1">
-                <a:solidFill>
-                  <a:srgbClr val="172A2A"/>
-                </a:solidFill>
-                <a:latin typeface="Hiragino Sans GB" panose="020B0300000000000000" charset="-122"/>
-                <a:ea typeface="Hiragino Sans GB" panose="020B0300000000000000" charset="-122"/>
-                <a:cs typeface="Hiragino Sans GB" panose="020B0300000000000000" charset="-122"/>
-              </a:defRPr>
-            </a:pPr>
-            <a:r>
-              <a:rPr sz="2175" b="1">
-                <a:solidFill>
-                  <a:srgbClr val="172A2A"/>
-                </a:solidFill>
-                <a:latin typeface="Hiragino Sans GB" panose="020B0300000000000000" charset="-122"/>
-                <a:ea typeface="Hiragino Sans GB" panose="020B0300000000000000" charset="-122"/>
-                <a:cs typeface="Hiragino Sans GB" panose="020B0300000000000000" charset="-122"/>
-              </a:rPr>
-              <a:t>重点游戏的主线完成表现</a:t>
-            </a:r>
-            <a:endParaRPr sz="2175" b="1">
-              <a:solidFill>
-                <a:srgbClr val="172A2A"/>
-              </a:solidFill>
-              <a:latin typeface="Hiragino Sans GB" panose="020B0300000000000000" charset="-122"/>
-              <a:ea typeface="Hiragino Sans GB" panose="020B0300000000000000" charset="-122"/>
-              <a:cs typeface="Hiragino Sans GB" panose="020B0300000000000000" charset="-122"/>
-            </a:endParaRPr>
-          </a:p>
-        </p:txBody>
-      </p:sp>
-      <p:sp>
-        <p:nvSpPr>
-          <p:cNvPr id="6" name="矩形 5"/>
-          <p:cNvSpPr>
-            <a:spLocks noGrp="1"/>
-          </p:cNvSpPr>
-          <p:nvPr/>
-        </p:nvSpPr>
-        <p:spPr>
-          <a:xfrm>
-            <a:off x="609600" y="3181350"/>
-            <a:ext cx="10858500" cy="609600"/>
-          </a:xfrm>
-          <a:prstGeom prst="rect">
-            <a:avLst/>
-          </a:prstGeom>
-          <a:noFill/>
-          <a:ln w="0">
-            <a:noFill/>
-          </a:ln>
-        </p:spPr>
-        <p:txBody>
-          <a:bodyPr wrap="square" lIns="0" tIns="0" rIns="0" bIns="0" anchor="t">
-            <a:noAutofit/>
-          </a:bodyPr>
-          <a:lstStyle>
-            <a:defPPr>
-              <a:defRPr sz="1800" b="0">
-                <a:solidFill>
-                  <a:srgbClr val="5B6864"/>
-                </a:solidFill>
-                <a:latin typeface="Hiragino Sans GB" panose="020B0300000000000000" charset="-122"/>
-                <a:ea typeface="Hiragino Sans GB" panose="020B0300000000000000" charset="-122"/>
-                <a:cs typeface="Hiragino Sans GB" panose="020B0300000000000000" charset="-122"/>
-              </a:defRPr>
-            </a:defPPr>
-          </a:lstStyle>
-          <a:p>
-            <a:pPr>
-              <a:defRPr sz="1800" b="0">
-                <a:solidFill>
-                  <a:srgbClr val="5B6864"/>
-                </a:solidFill>
-                <a:latin typeface="Hiragino Sans GB" panose="020B0300000000000000" charset="-122"/>
-                <a:ea typeface="Hiragino Sans GB" panose="020B0300000000000000" charset="-122"/>
-                <a:cs typeface="Hiragino Sans GB" panose="020B0300000000000000" charset="-122"/>
-              </a:defRPr>
-            </a:pPr>
-            <a:r>
-              <a:rPr sz="1800" b="0">
-                <a:solidFill>
-                  <a:srgbClr val="5B6864"/>
-                </a:solidFill>
-                <a:latin typeface="Hiragino Sans GB" panose="020B0300000000000000" charset="-122"/>
-                <a:ea typeface="Hiragino Sans GB" panose="020B0300000000000000" charset="-122"/>
-                <a:cs typeface="Hiragino Sans GB" panose="020B0300000000000000" charset="-122"/>
-              </a:rPr>
-              <a:t>展示人工核验后的剧情节点，并说明哪些指标可以计算</a:t>
-            </a:r>
-            <a:endParaRPr sz="1800" b="0">
-              <a:solidFill>
-                <a:srgbClr val="5B6864"/>
-              </a:solidFill>
-              <a:latin typeface="Hiragino Sans GB" panose="020B0300000000000000" charset="-122"/>
-              <a:ea typeface="Hiragino Sans GB" panose="020B0300000000000000" charset="-122"/>
-              <a:cs typeface="Hiragino Sans GB" panose="020B0300000000000000" charset="-122"/>
-            </a:endParaRPr>
-          </a:p>
-        </p:txBody>
-      </p:sp>
-      <p:sp>
-        <p:nvSpPr>
-          <p:cNvPr id="7" name="矩形 6"/>
-          <p:cNvSpPr>
-            <a:spLocks noGrp="1"/>
-          </p:cNvSpPr>
-          <p:nvPr/>
-        </p:nvSpPr>
-        <p:spPr>
-          <a:xfrm>
-            <a:off x="609600" y="3819525"/>
-            <a:ext cx="10858500" cy="400050"/>
-          </a:xfrm>
-          <a:prstGeom prst="rect">
-            <a:avLst/>
-          </a:prstGeom>
-          <a:noFill/>
-          <a:ln w="0">
-            <a:noFill/>
-          </a:ln>
-        </p:spPr>
-        <p:txBody>
-          <a:bodyPr wrap="square" lIns="0" tIns="0" rIns="0" bIns="0" anchor="t">
-            <a:noAutofit/>
-          </a:bodyPr>
-          <a:lstStyle>
-            <a:defPPr>
-              <a:defRPr sz="2175" b="1">
-                <a:solidFill>
-                  <a:srgbClr val="172A2A"/>
-                </a:solidFill>
-                <a:latin typeface="Hiragino Sans GB" panose="020B0300000000000000" charset="-122"/>
-                <a:ea typeface="Hiragino Sans GB" panose="020B0300000000000000" charset="-122"/>
-                <a:cs typeface="Hiragino Sans GB" panose="020B0300000000000000" charset="-122"/>
-              </a:defRPr>
-            </a:defPPr>
-          </a:lstStyle>
-          <a:p>
-            <a:pPr>
-              <a:defRPr sz="2175" b="1">
-                <a:solidFill>
-                  <a:srgbClr val="172A2A"/>
-                </a:solidFill>
-                <a:latin typeface="Hiragino Sans GB" panose="020B0300000000000000" charset="-122"/>
-                <a:ea typeface="Hiragino Sans GB" panose="020B0300000000000000" charset="-122"/>
-                <a:cs typeface="Hiragino Sans GB" panose="020B0300000000000000" charset="-122"/>
-              </a:defRPr>
-            </a:pPr>
-            <a:r>
-              <a:rPr sz="2175" b="1">
-                <a:solidFill>
-                  <a:srgbClr val="172A2A"/>
-                </a:solidFill>
-                <a:latin typeface="Hiragino Sans GB" panose="020B0300000000000000" charset="-122"/>
-                <a:ea typeface="Hiragino Sans GB" panose="020B0300000000000000" charset="-122"/>
-                <a:cs typeface="Hiragino Sans GB" panose="020B0300000000000000" charset="-122"/>
-              </a:rPr>
-              <a:t>有理由、可比较的游戏推荐</a:t>
-            </a:r>
-            <a:endParaRPr sz="2175" b="1">
-              <a:solidFill>
-                <a:srgbClr val="172A2A"/>
-              </a:solidFill>
-              <a:latin typeface="Hiragino Sans GB" panose="020B0300000000000000" charset="-122"/>
-              <a:ea typeface="Hiragino Sans GB" panose="020B0300000000000000" charset="-122"/>
-              <a:cs typeface="Hiragino Sans GB" panose="020B0300000000000000" charset="-122"/>
-            </a:endParaRPr>
-          </a:p>
-        </p:txBody>
-      </p:sp>
-      <p:sp>
-        <p:nvSpPr>
-          <p:cNvPr id="8" name="矩形 7"/>
-          <p:cNvSpPr>
-            <a:spLocks noGrp="1"/>
-          </p:cNvSpPr>
-          <p:nvPr/>
-        </p:nvSpPr>
-        <p:spPr>
-          <a:xfrm>
-            <a:off x="609600" y="4267200"/>
-            <a:ext cx="10858500" cy="609600"/>
-          </a:xfrm>
-          <a:prstGeom prst="rect">
-            <a:avLst/>
-          </a:prstGeom>
-          <a:noFill/>
-          <a:ln w="0">
-            <a:noFill/>
-          </a:ln>
-        </p:spPr>
-        <p:txBody>
-          <a:bodyPr wrap="square" lIns="0" tIns="0" rIns="0" bIns="0" anchor="t">
-            <a:noAutofit/>
-          </a:bodyPr>
-          <a:lstStyle>
-            <a:defPPr>
-              <a:defRPr sz="1800" b="0">
-                <a:solidFill>
-                  <a:srgbClr val="5B6864"/>
-                </a:solidFill>
-                <a:latin typeface="Hiragino Sans GB" panose="020B0300000000000000" charset="-122"/>
-                <a:ea typeface="Hiragino Sans GB" panose="020B0300000000000000" charset="-122"/>
-                <a:cs typeface="Hiragino Sans GB" panose="020B0300000000000000" charset="-122"/>
-              </a:defRPr>
-            </a:defPPr>
-          </a:lstStyle>
-          <a:p>
-            <a:pPr>
-              <a:defRPr sz="1800" b="0">
-                <a:solidFill>
-                  <a:srgbClr val="5B6864"/>
-                </a:solidFill>
-                <a:latin typeface="Hiragino Sans GB" panose="020B0300000000000000" charset="-122"/>
-                <a:ea typeface="Hiragino Sans GB" panose="020B0300000000000000" charset="-122"/>
-                <a:cs typeface="Hiragino Sans GB" panose="020B0300000000000000" charset="-122"/>
-              </a:defRPr>
-            </a:pPr>
-            <a:r>
-              <a:rPr sz="1800" b="0">
-                <a:solidFill>
-                  <a:srgbClr val="5B6864"/>
-                </a:solidFill>
-                <a:latin typeface="Hiragino Sans GB" panose="020B0300000000000000" charset="-122"/>
-                <a:ea typeface="Hiragino Sans GB" panose="020B0300000000000000" charset="-122"/>
-                <a:cs typeface="Hiragino Sans GB" panose="020B0300000000000000" charset="-122"/>
-              </a:rPr>
-              <a:t>展示相似标签与成就特征，让同学盲评推荐是否相关</a:t>
-            </a:r>
-            <a:endParaRPr sz="1800" b="0">
-              <a:solidFill>
-                <a:srgbClr val="5B6864"/>
-              </a:solidFill>
-              <a:latin typeface="Hiragino Sans GB" panose="020B0300000000000000" charset="-122"/>
-              <a:ea typeface="Hiragino Sans GB" panose="020B0300000000000000" charset="-122"/>
-              <a:cs typeface="Hiragino Sans GB" panose="020B0300000000000000" charset="-122"/>
-            </a:endParaRPr>
-          </a:p>
-        </p:txBody>
-      </p:sp>
-      <p:sp>
-        <p:nvSpPr>
-          <p:cNvPr id="9" name="矩形 8"/>
-          <p:cNvSpPr>
-            <a:spLocks noGrp="1"/>
-          </p:cNvSpPr>
-          <p:nvPr/>
-        </p:nvSpPr>
-        <p:spPr>
-          <a:xfrm>
-            <a:off x="609600" y="5334000"/>
-            <a:ext cx="10906125" cy="552450"/>
-          </a:xfrm>
-          <a:prstGeom prst="rect">
-            <a:avLst/>
-          </a:prstGeom>
-          <a:noFill/>
-          <a:ln w="0">
-            <a:noFill/>
-          </a:ln>
-        </p:spPr>
-        <p:txBody>
-          <a:bodyPr wrap="square" lIns="0" tIns="0" rIns="0" bIns="0" anchor="t">
-            <a:noAutofit/>
-          </a:bodyPr>
-          <a:lstStyle>
-            <a:defPPr>
-              <a:defRPr sz="2550" b="1">
-                <a:solidFill>
-                  <a:srgbClr val="246A5F"/>
-                </a:solidFill>
-                <a:latin typeface="Hiragino Sans GB" panose="020B0300000000000000" charset="-122"/>
-                <a:ea typeface="Hiragino Sans GB" panose="020B0300000000000000" charset="-122"/>
-                <a:cs typeface="Hiragino Sans GB" panose="020B0300000000000000" charset="-122"/>
-              </a:defRPr>
-            </a:defPPr>
-          </a:lstStyle>
-          <a:p>
-            <a:pPr>
-              <a:defRPr sz="2550" b="1">
-                <a:solidFill>
-                  <a:srgbClr val="246A5F"/>
-                </a:solidFill>
-                <a:latin typeface="Hiragino Sans GB" panose="020B0300000000000000" charset="-122"/>
-                <a:ea typeface="Hiragino Sans GB" panose="020B0300000000000000" charset="-122"/>
-                <a:cs typeface="Hiragino Sans GB" panose="020B0300000000000000" charset="-122"/>
-              </a:defRPr>
-            </a:pPr>
-            <a:r>
-              <a:rPr sz="2550" b="1">
-                <a:solidFill>
-                  <a:srgbClr val="246A5F"/>
-                </a:solidFill>
-                <a:latin typeface="Hiragino Sans GB" panose="020B0300000000000000" charset="-122"/>
-                <a:ea typeface="Hiragino Sans GB" panose="020B0300000000000000" charset="-122"/>
-                <a:cs typeface="Hiragino Sans GB" panose="020B0300000000000000" charset="-122"/>
-              </a:rPr>
-              <a:t>数据获取已形成底座，后续工作转向分析与验证</a:t>
-            </a:r>
-            <a:endParaRPr sz="2550" b="1">
-              <a:solidFill>
-                <a:srgbClr val="246A5F"/>
-              </a:solidFill>
-              <a:latin typeface="Hiragino Sans GB" panose="020B0300000000000000" charset="-122"/>
-              <a:ea typeface="Hiragino Sans GB" panose="020B0300000000000000" charset="-122"/>
-              <a:cs typeface="Hiragino Sans GB" panose="020B0300000000000000" charset="-122"/>
-            </a:endParaRPr>
-          </a:p>
-        </p:txBody>
-      </p:sp>
     </p:spTree>
   </p:cSld>
   <p:clrMapOvr>

--- a/docs/presentations/数据获取与后续计划-2026-10-13-最终版.pptx
+++ b/docs/presentations/数据获取与后续计划-2026-10-13-最终版.pptx
@@ -2788,7 +2788,7 @@
         </p:nvSpPr>
         <p:spPr>
           <a:xfrm>
-            <a:off x="609600" y="3566795"/>
+            <a:off x="623570" y="3120390"/>
             <a:ext cx="10858500" cy="857250"/>
           </a:xfrm>
           <a:prstGeom prst="rect">
@@ -2880,7 +2880,7 @@
         </p:nvSpPr>
         <p:spPr>
           <a:xfrm>
-            <a:off x="609600" y="4424045"/>
+            <a:off x="609600" y="3932555"/>
             <a:ext cx="10858500" cy="857250"/>
           </a:xfrm>
           <a:prstGeom prst="rect">
@@ -3049,8 +3049,8 @@
         </p:nvSpPr>
         <p:spPr>
           <a:xfrm>
-            <a:off x="623570" y="5229225"/>
-            <a:ext cx="10858500" cy="857250"/>
+            <a:off x="623570" y="4874260"/>
+            <a:ext cx="10492105" cy="467360"/>
           </a:xfrm>
           <a:prstGeom prst="rect">
             <a:avLst/>
@@ -3088,7 +3088,7 @@
               </a:defRPr>
             </a:pPr>
             <a:r>
-              <a:rPr lang="zh-CN" altLang="en-US" sz="4200" b="1">
+              <a:rPr lang="zh-CN" altLang="en-US" sz="2400" b="1">
                 <a:solidFill>
                   <a:srgbClr val="FFFFFF"/>
                 </a:solidFill>
@@ -3096,10 +3096,10 @@
                 <a:ea typeface="Hiragino Sans GB" panose="020B0300000000000000" charset="-122"/>
                 <a:cs typeface="Hiragino Sans GB" panose="020B0300000000000000" charset="-122"/>
               </a:rPr>
-              <a:t>项目地址</a:t>
+              <a:t>项目仓库</a:t>
             </a:r>
             <a:r>
-              <a:rPr lang="en-US" altLang="zh-CN" sz="4200" b="1">
+              <a:rPr lang="en-US" altLang="zh-CN" sz="2400" b="1">
                 <a:solidFill>
                   <a:srgbClr val="FFFFFF"/>
                 </a:solidFill>
@@ -3122,6 +3122,174 @@
               <a:t>https://github.com/WwhdsOne/achievement-analytics</a:t>
             </a:r>
             <a:endParaRPr lang="en-US" altLang="zh-CN" sz="2000" b="1">
+              <a:solidFill>
+                <a:srgbClr val="FFFFFF"/>
+              </a:solidFill>
+              <a:latin typeface="Hiragino Sans GB" panose="020B0300000000000000" charset="-122"/>
+              <a:ea typeface="Hiragino Sans GB" panose="020B0300000000000000" charset="-122"/>
+              <a:cs typeface="Hiragino Sans GB" panose="020B0300000000000000" charset="-122"/>
+              <a:hlinkClick r:id="rId1" action="ppaction://hlinkfile"/>
+            </a:endParaRPr>
+          </a:p>
+          <a:p>
+            <a:pPr>
+              <a:defRPr sz="4200" b="1">
+                <a:solidFill>
+                  <a:srgbClr val="FFFFFF"/>
+                </a:solidFill>
+                <a:latin typeface="Hiragino Sans GB" panose="020B0300000000000000" charset="-122"/>
+                <a:ea typeface="Hiragino Sans GB" panose="020B0300000000000000" charset="-122"/>
+                <a:cs typeface="Hiragino Sans GB" panose="020B0300000000000000" charset="-122"/>
+              </a:defRPr>
+            </a:pPr>
+            <a:endParaRPr lang="zh-CN" altLang="en-US" sz="2000" b="1">
+              <a:solidFill>
+                <a:srgbClr val="FFFFFF"/>
+              </a:solidFill>
+              <a:latin typeface="Hiragino Sans GB" panose="020B0300000000000000" charset="-122"/>
+              <a:ea typeface="Hiragino Sans GB" panose="020B0300000000000000" charset="-122"/>
+              <a:cs typeface="Hiragino Sans GB" panose="020B0300000000000000" charset="-122"/>
+              <a:hlinkClick r:id="rId1" action="ppaction://hlinkfile"/>
+            </a:endParaRPr>
+          </a:p>
+        </p:txBody>
+      </p:sp>
+      <p:sp>
+        <p:nvSpPr>
+          <p:cNvPr id="3" name="矩形 2"/>
+          <p:cNvSpPr>
+            <a:spLocks noGrp="1"/>
+          </p:cNvSpPr>
+          <p:nvPr/>
+        </p:nvSpPr>
+        <p:spPr>
+          <a:xfrm>
+            <a:off x="609600" y="5483225"/>
+            <a:ext cx="10492105" cy="467360"/>
+          </a:xfrm>
+          <a:prstGeom prst="rect">
+            <a:avLst/>
+          </a:prstGeom>
+          <a:noFill/>
+          <a:ln w="0">
+            <a:noFill/>
+          </a:ln>
+        </p:spPr>
+        <p:txBody>
+          <a:bodyPr wrap="square" lIns="0" tIns="0" rIns="0" bIns="0" anchor="t">
+            <a:noAutofit/>
+          </a:bodyPr>
+          <a:lstStyle>
+            <a:defPPr>
+              <a:defRPr sz="4200" b="1">
+                <a:solidFill>
+                  <a:srgbClr val="FFFFFF"/>
+                </a:solidFill>
+                <a:latin typeface="Hiragino Sans GB" panose="020B0300000000000000" charset="-122"/>
+                <a:ea typeface="Hiragino Sans GB" panose="020B0300000000000000" charset="-122"/>
+                <a:cs typeface="Hiragino Sans GB" panose="020B0300000000000000" charset="-122"/>
+              </a:defRPr>
+            </a:defPPr>
+          </a:lstStyle>
+          <a:p>
+            <a:pPr>
+              <a:defRPr sz="4200" b="1">
+                <a:solidFill>
+                  <a:srgbClr val="FFFFFF"/>
+                </a:solidFill>
+                <a:latin typeface="Hiragino Sans GB" panose="020B0300000000000000" charset="-122"/>
+                <a:ea typeface="Hiragino Sans GB" panose="020B0300000000000000" charset="-122"/>
+                <a:cs typeface="Hiragino Sans GB" panose="020B0300000000000000" charset="-122"/>
+              </a:defRPr>
+            </a:pPr>
+            <a:r>
+              <a:rPr lang="zh-CN" altLang="en-US" sz="2400" b="1">
+                <a:solidFill>
+                  <a:srgbClr val="FFFFFF"/>
+                </a:solidFill>
+                <a:latin typeface="Hiragino Sans GB" panose="020B0300000000000000" charset="-122"/>
+                <a:ea typeface="Hiragino Sans GB" panose="020B0300000000000000" charset="-122"/>
+                <a:cs typeface="Hiragino Sans GB" panose="020B0300000000000000" charset="-122"/>
+              </a:rPr>
+              <a:t>项目</a:t>
+            </a:r>
+            <a:r>
+              <a:rPr lang="zh-CN" altLang="en-US" sz="2400" b="1">
+                <a:solidFill>
+                  <a:srgbClr val="FFFFFF"/>
+                </a:solidFill>
+                <a:latin typeface="Hiragino Sans GB" panose="020B0300000000000000" charset="-122"/>
+                <a:ea typeface="Hiragino Sans GB" panose="020B0300000000000000" charset="-122"/>
+                <a:cs typeface="Hiragino Sans GB" panose="020B0300000000000000" charset="-122"/>
+              </a:rPr>
+              <a:t>体验地址</a:t>
+            </a:r>
+            <a:r>
+              <a:rPr lang="en-US" altLang="zh-CN" sz="2400" b="1">
+                <a:solidFill>
+                  <a:srgbClr val="FFFFFF"/>
+                </a:solidFill>
+                <a:latin typeface="Hiragino Sans GB" panose="020B0300000000000000" charset="-122"/>
+                <a:ea typeface="Hiragino Sans GB" panose="020B0300000000000000" charset="-122"/>
+                <a:cs typeface="Hiragino Sans GB" panose="020B0300000000000000" charset="-122"/>
+              </a:rPr>
+              <a:t>：</a:t>
+            </a:r>
+            <a:r>
+              <a:rPr lang="en-US" altLang="zh-CN" sz="2400" b="1">
+                <a:solidFill>
+                  <a:srgbClr val="FFFFFF"/>
+                </a:solidFill>
+                <a:latin typeface="Hiragino Sans GB" panose="020B0300000000000000" charset="-122"/>
+                <a:ea typeface="Hiragino Sans GB" panose="020B0300000000000000" charset="-122"/>
+                <a:cs typeface="Hiragino Sans GB" panose="020B0300000000000000" charset="-122"/>
+                <a:hlinkClick r:id="rId2" action="ppaction://hlinkfile"/>
+              </a:rPr>
+              <a:t>https://www.soyorinlove.cn</a:t>
+            </a:r>
+            <a:endParaRPr lang="en-US" altLang="zh-CN" sz="2400" b="1">
+              <a:solidFill>
+                <a:srgbClr val="FFFFFF"/>
+              </a:solidFill>
+              <a:latin typeface="Hiragino Sans GB" panose="020B0300000000000000" charset="-122"/>
+              <a:ea typeface="Hiragino Sans GB" panose="020B0300000000000000" charset="-122"/>
+              <a:cs typeface="Hiragino Sans GB" panose="020B0300000000000000" charset="-122"/>
+              <a:hlinkClick r:id="rId2" action="ppaction://hlinkfile"/>
+            </a:endParaRPr>
+          </a:p>
+          <a:p>
+            <a:pPr>
+              <a:defRPr sz="4200" b="1">
+                <a:solidFill>
+                  <a:srgbClr val="FFFFFF"/>
+                </a:solidFill>
+                <a:latin typeface="Hiragino Sans GB" panose="020B0300000000000000" charset="-122"/>
+                <a:ea typeface="Hiragino Sans GB" panose="020B0300000000000000" charset="-122"/>
+                <a:cs typeface="Hiragino Sans GB" panose="020B0300000000000000" charset="-122"/>
+              </a:defRPr>
+            </a:pPr>
+            <a:endParaRPr lang="en-US" altLang="zh-CN" sz="2000" b="1">
+              <a:solidFill>
+                <a:srgbClr val="FFFFFF"/>
+              </a:solidFill>
+              <a:latin typeface="Hiragino Sans GB" panose="020B0300000000000000" charset="-122"/>
+              <a:ea typeface="Hiragino Sans GB" panose="020B0300000000000000" charset="-122"/>
+              <a:cs typeface="Hiragino Sans GB" panose="020B0300000000000000" charset="-122"/>
+              <a:hlinkClick r:id="rId1" action="ppaction://hlinkfile"/>
+            </a:endParaRPr>
+          </a:p>
+          <a:p>
+            <a:pPr>
+              <a:defRPr sz="4200" b="1">
+                <a:solidFill>
+                  <a:srgbClr val="FFFFFF"/>
+                </a:solidFill>
+                <a:latin typeface="Hiragino Sans GB" panose="020B0300000000000000" charset="-122"/>
+                <a:ea typeface="Hiragino Sans GB" panose="020B0300000000000000" charset="-122"/>
+                <a:cs typeface="Hiragino Sans GB" panose="020B0300000000000000" charset="-122"/>
+              </a:defRPr>
+            </a:pPr>
+            <a:endParaRPr lang="zh-CN" altLang="en-US" sz="2000" b="1">
               <a:solidFill>
                 <a:srgbClr val="FFFFFF"/>
               </a:solidFill>
@@ -4232,6 +4400,12 @@
               </a:defRPr>
             </a:pPr>
             <a:r>
+              <a:rPr lang="zh-CN">
+                <a:sym typeface="+mn-ea"/>
+              </a:rPr>
+              <a:t>各个渠道获取数据</a:t>
+            </a:r>
+            <a:r>
               <a:rPr lang="zh-CN" sz="3300" b="1">
                 <a:solidFill>
                   <a:srgbClr val="172A2A"/>
@@ -4273,29 +4447,7 @@
                 <a:ea typeface="Hiragino Sans GB" panose="020B0300000000000000" charset="-122"/>
                 <a:cs typeface="Hiragino Sans GB" panose="020B0300000000000000" charset="-122"/>
               </a:rPr>
-              <a:t>小时，</a:t>
-            </a:r>
-            <a:r>
-              <a:rPr lang="zh-CN" sz="3300" b="1">
-                <a:solidFill>
-                  <a:srgbClr val="172A2A"/>
-                </a:solidFill>
-                <a:latin typeface="Hiragino Sans GB" panose="020B0300000000000000" charset="-122"/>
-                <a:ea typeface="Hiragino Sans GB" panose="020B0300000000000000" charset="-122"/>
-                <a:cs typeface="Hiragino Sans GB" panose="020B0300000000000000" charset="-122"/>
-              </a:rPr>
-              <a:t>各个渠道获取</a:t>
-            </a:r>
-            <a:r>
-              <a:rPr lang="zh-CN" sz="3300" b="1">
-                <a:solidFill>
-                  <a:srgbClr val="172A2A"/>
-                </a:solidFill>
-                <a:latin typeface="Hiragino Sans GB" panose="020B0300000000000000" charset="-122"/>
-                <a:ea typeface="Hiragino Sans GB" panose="020B0300000000000000" charset="-122"/>
-                <a:cs typeface="Hiragino Sans GB" panose="020B0300000000000000" charset="-122"/>
-              </a:rPr>
-              <a:t>数据</a:t>
+              <a:t>小时</a:t>
             </a:r>
             <a:endParaRPr lang="zh-CN" sz="3300" b="1">
               <a:solidFill>
@@ -4378,6 +4530,37 @@
               </a:rPr>
               <a:t>70</a:t>
             </a:r>
+            <a:r>
+              <a:rPr lang="en-US" sz="7200" b="1">
+                <a:solidFill>
+                  <a:srgbClr val="246A5F"/>
+                </a:solidFill>
+                <a:latin typeface="Hiragino Sans GB" panose="020B0300000000000000" charset="-122"/>
+                <a:ea typeface="Hiragino Sans GB" panose="020B0300000000000000" charset="-122"/>
+                <a:cs typeface="Hiragino Sans GB" panose="020B0300000000000000" charset="-122"/>
+              </a:rPr>
+              <a:t>H</a:t>
+            </a:r>
+            <a:endParaRPr b="0">
+              <a:solidFill>
+                <a:srgbClr val="172A2A"/>
+              </a:solidFill>
+              <a:latin typeface="Hiragino Sans GB" panose="020B0300000000000000" charset="-122"/>
+              <a:ea typeface="Hiragino Sans GB" panose="020B0300000000000000" charset="-122"/>
+              <a:cs typeface="Hiragino Sans GB" panose="020B0300000000000000" charset="-122"/>
+            </a:endParaRPr>
+          </a:p>
+          <a:p>
+            <a:pPr>
+              <a:defRPr sz="13050" b="1">
+                <a:solidFill>
+                  <a:srgbClr val="246A5F"/>
+                </a:solidFill>
+                <a:latin typeface="Hiragino Sans GB" panose="020B0300000000000000" charset="-122"/>
+                <a:ea typeface="Hiragino Sans GB" panose="020B0300000000000000" charset="-122"/>
+                <a:cs typeface="Hiragino Sans GB" panose="020B0300000000000000" charset="-122"/>
+              </a:defRPr>
+            </a:pPr>
             <a:endParaRPr sz="13050" b="1">
               <a:solidFill>
                 <a:srgbClr val="246A5F"/>
@@ -4437,17 +4620,6 @@
                 <a:cs typeface="Hiragino Sans GB" panose="020B0300000000000000" charset="-122"/>
               </a:defRPr>
             </a:pPr>
-            <a:r>
-              <a:rPr sz="3000" b="0">
-                <a:solidFill>
-                  <a:srgbClr val="172A2A"/>
-                </a:solidFill>
-                <a:latin typeface="Hiragino Sans GB" panose="020B0300000000000000" charset="-122"/>
-                <a:ea typeface="Hiragino Sans GB" panose="020B0300000000000000" charset="-122"/>
-                <a:cs typeface="Hiragino Sans GB" panose="020B0300000000000000" charset="-122"/>
-              </a:rPr>
-              <a:t>小时</a:t>
-            </a:r>
             <a:endParaRPr sz="3000" b="0">
               <a:solidFill>
                 <a:srgbClr val="172A2A"/>
@@ -4880,6 +5052,98 @@
               <a:t>多机连续运行</a:t>
             </a:r>
             <a:endParaRPr sz="1800" b="0">
+              <a:solidFill>
+                <a:srgbClr val="5B6864"/>
+              </a:solidFill>
+              <a:latin typeface="Hiragino Sans GB" panose="020B0300000000000000" charset="-122"/>
+              <a:ea typeface="Hiragino Sans GB" panose="020B0300000000000000" charset="-122"/>
+              <a:cs typeface="Hiragino Sans GB" panose="020B0300000000000000" charset="-122"/>
+            </a:endParaRPr>
+          </a:p>
+        </p:txBody>
+      </p:sp>
+      <p:sp>
+        <p:nvSpPr>
+          <p:cNvPr id="2" name="矩形 1"/>
+          <p:cNvSpPr>
+            <a:spLocks noGrp="1"/>
+          </p:cNvSpPr>
+          <p:nvPr/>
+        </p:nvSpPr>
+        <p:spPr>
+          <a:xfrm>
+            <a:off x="5476875" y="5229225"/>
+            <a:ext cx="5953125" cy="609600"/>
+          </a:xfrm>
+          <a:prstGeom prst="rect">
+            <a:avLst/>
+          </a:prstGeom>
+          <a:noFill/>
+          <a:ln w="0">
+            <a:noFill/>
+          </a:ln>
+        </p:spPr>
+        <p:txBody>
+          <a:bodyPr wrap="square" lIns="0" tIns="0" rIns="0" bIns="0" anchor="t">
+            <a:noAutofit/>
+          </a:bodyPr>
+          <a:lstStyle>
+            <a:defPPr>
+              <a:defRPr sz="1800" b="0">
+                <a:solidFill>
+                  <a:srgbClr val="5B6864"/>
+                </a:solidFill>
+                <a:latin typeface="Hiragino Sans GB" panose="020B0300000000000000" charset="-122"/>
+                <a:ea typeface="Hiragino Sans GB" panose="020B0300000000000000" charset="-122"/>
+                <a:cs typeface="Hiragino Sans GB" panose="020B0300000000000000" charset="-122"/>
+              </a:defRPr>
+            </a:defPPr>
+          </a:lstStyle>
+          <a:p>
+            <a:pPr>
+              <a:defRPr sz="1800" b="0">
+                <a:solidFill>
+                  <a:srgbClr val="5B6864"/>
+                </a:solidFill>
+                <a:latin typeface="Hiragino Sans GB" panose="020B0300000000000000" charset="-122"/>
+                <a:ea typeface="Hiragino Sans GB" panose="020B0300000000000000" charset="-122"/>
+                <a:cs typeface="Hiragino Sans GB" panose="020B0300000000000000" charset="-122"/>
+              </a:defRPr>
+            </a:pPr>
+            <a:r>
+              <a:rPr lang="zh-CN" sz="1800" b="0">
+                <a:solidFill>
+                  <a:srgbClr val="5B6864"/>
+                </a:solidFill>
+                <a:latin typeface="Hiragino Sans GB" panose="020B0300000000000000" charset="-122"/>
+                <a:ea typeface="Hiragino Sans GB" panose="020B0300000000000000" charset="-122"/>
+                <a:cs typeface="Hiragino Sans GB" panose="020B0300000000000000" charset="-122"/>
+              </a:rPr>
+              <a:t>从中秋假期</a:t>
+            </a:r>
+            <a:r>
+              <a:rPr lang="zh-CN" sz="1800" b="0">
+                <a:solidFill>
+                  <a:srgbClr val="5B6864"/>
+                </a:solidFill>
+                <a:latin typeface="Hiragino Sans GB" panose="020B0300000000000000" charset="-122"/>
+                <a:ea typeface="Hiragino Sans GB" panose="020B0300000000000000" charset="-122"/>
+                <a:cs typeface="Hiragino Sans GB" panose="020B0300000000000000" charset="-122"/>
+              </a:rPr>
+              <a:t>前跑到国庆第二天才跑完原始</a:t>
+            </a:r>
+            <a:r>
+              <a:rPr lang="zh-CN" sz="1800" b="0">
+                <a:solidFill>
+                  <a:srgbClr val="5B6864"/>
+                </a:solidFill>
+                <a:latin typeface="Hiragino Sans GB" panose="020B0300000000000000" charset="-122"/>
+                <a:ea typeface="Hiragino Sans GB" panose="020B0300000000000000" charset="-122"/>
+                <a:cs typeface="Hiragino Sans GB" panose="020B0300000000000000" charset="-122"/>
+              </a:rPr>
+              <a:t>数据</a:t>
+            </a:r>
+            <a:endParaRPr lang="zh-CN" sz="1800" b="0">
               <a:solidFill>
                 <a:srgbClr val="5B6864"/>
               </a:solidFill>
@@ -6867,76 +7131,6 @@
           </a:p>
         </p:txBody>
       </p:sp>
-      <p:sp>
-        <p:nvSpPr>
-          <p:cNvPr id="3" name="矩形 2"/>
-          <p:cNvSpPr>
-            <a:spLocks noGrp="1"/>
-          </p:cNvSpPr>
-          <p:nvPr/>
-        </p:nvSpPr>
-        <p:spPr>
-          <a:xfrm>
-            <a:off x="609600" y="6238875"/>
-            <a:ext cx="9715500" cy="457200"/>
-          </a:xfrm>
-          <a:prstGeom prst="rect">
-            <a:avLst/>
-          </a:prstGeom>
-          <a:noFill/>
-          <a:ln w="0">
-            <a:noFill/>
-          </a:ln>
-        </p:spPr>
-        <p:txBody>
-          <a:bodyPr wrap="square" lIns="0" tIns="0" rIns="0" bIns="0" anchor="t">
-            <a:noAutofit/>
-          </a:bodyPr>
-          <a:lstStyle>
-            <a:defPPr>
-              <a:defRPr sz="1125" b="0">
-                <a:solidFill>
-                  <a:srgbClr val="5B6864"/>
-                </a:solidFill>
-                <a:latin typeface="Hiragino Sans GB" panose="020B0300000000000000" charset="-122"/>
-                <a:ea typeface="Hiragino Sans GB" panose="020B0300000000000000" charset="-122"/>
-                <a:cs typeface="Hiragino Sans GB" panose="020B0300000000000000" charset="-122"/>
-              </a:defRPr>
-            </a:defPPr>
-          </a:lstStyle>
-          <a:p>
-            <a:pPr>
-              <a:defRPr sz="1125" b="0">
-                <a:solidFill>
-                  <a:srgbClr val="5B6864"/>
-                </a:solidFill>
-                <a:latin typeface="Hiragino Sans GB" panose="020B0300000000000000" charset="-122"/>
-                <a:ea typeface="Hiragino Sans GB" panose="020B0300000000000000" charset="-122"/>
-                <a:cs typeface="Hiragino Sans GB" panose="020B0300000000000000" charset="-122"/>
-              </a:defRPr>
-            </a:pPr>
-            <a:r>
-              <a:rPr sz="1125" b="0">
-                <a:solidFill>
-                  <a:srgbClr val="5B6864"/>
-                </a:solidFill>
-                <a:latin typeface="Hiragino Sans GB" panose="020B0300000000000000" charset="-122"/>
-                <a:ea typeface="Hiragino Sans GB" panose="020B0300000000000000" charset="-122"/>
-                <a:cs typeface="Hiragino Sans GB" panose="020B0300000000000000" charset="-122"/>
-              </a:rPr>
-              <a:t>按现有 plan.md：主线优先采用类型演变、主线进度漏斗与可解释推荐，其余分阶段扩展。</a:t>
-            </a:r>
-            <a:endParaRPr sz="1125" b="0">
-              <a:solidFill>
-                <a:srgbClr val="5B6864"/>
-              </a:solidFill>
-              <a:latin typeface="Hiragino Sans GB" panose="020B0300000000000000" charset="-122"/>
-              <a:ea typeface="Hiragino Sans GB" panose="020B0300000000000000" charset="-122"/>
-              <a:cs typeface="Hiragino Sans GB" panose="020B0300000000000000" charset="-122"/>
-            </a:endParaRPr>
-          </a:p>
-        </p:txBody>
-      </p:sp>
       <p:graphicFrame>
         <p:nvGraphicFramePr>
           <p:cNvPr id="4" name="表格 3"/>
@@ -7226,7 +7420,29 @@
                           <a:ea typeface="Hiragino Sans GB" panose="020B0300000000000000" charset="-122"/>
                           <a:cs typeface="Hiragino Sans GB" panose="020B0300000000000000" charset="-122"/>
                         </a:rPr>
-                        <a:t>发售年份与类型演变</a:t>
+                        <a:t>发售年份与</a:t>
+                      </a:r>
+                      <a:r>
+                        <a:rPr lang="zh-CN" sz="1725" b="0">
+                          <a:solidFill>
+                            <a:srgbClr val="172A2A"/>
+                          </a:solidFill>
+                          <a:latin typeface="Hiragino Sans GB" panose="020B0300000000000000" charset="-122"/>
+                          <a:ea typeface="Hiragino Sans GB" panose="020B0300000000000000" charset="-122"/>
+                          <a:cs typeface="Hiragino Sans GB" panose="020B0300000000000000" charset="-122"/>
+                        </a:rPr>
+                        <a:t>潮流</a:t>
+                      </a:r>
+                      <a:r>
+                        <a:rPr sz="1725" b="0">
+                          <a:solidFill>
+                            <a:srgbClr val="172A2A"/>
+                          </a:solidFill>
+                          <a:latin typeface="Hiragino Sans GB" panose="020B0300000000000000" charset="-122"/>
+                          <a:ea typeface="Hiragino Sans GB" panose="020B0300000000000000" charset="-122"/>
+                          <a:cs typeface="Hiragino Sans GB" panose="020B0300000000000000" charset="-122"/>
+                        </a:rPr>
+                        <a:t>类型演变</a:t>
                       </a:r>
                       <a:endParaRPr sz="1725" b="0">
                         <a:solidFill>
@@ -7448,7 +7664,7 @@
                           <a:ea typeface="Hiragino Sans GB" panose="020B0300000000000000" charset="-122"/>
                           <a:cs typeface="Hiragino Sans GB" panose="020B0300000000000000" charset="-122"/>
                         </a:rPr>
-                        <a:t>游戏画像聚类与分型</a:t>
+                        <a:t>游戏画像聚类</a:t>
                       </a:r>
                       <a:endParaRPr sz="1725" b="0">
                         <a:solidFill>
@@ -8106,6 +8322,17 @@
                     <a:p>
                       <a:pPr algn="l"/>
                       <a:r>
+                        <a:rPr lang="zh-CN" sz="1725" b="0">
+                          <a:solidFill>
+                            <a:srgbClr val="172A2A"/>
+                          </a:solidFill>
+                          <a:latin typeface="Hiragino Sans GB" panose="020B0300000000000000" charset="-122"/>
+                          <a:ea typeface="Hiragino Sans GB" panose="020B0300000000000000" charset="-122"/>
+                          <a:cs typeface="Hiragino Sans GB" panose="020B0300000000000000" charset="-122"/>
+                        </a:rPr>
+                        <a:t>实际</a:t>
+                      </a:r>
+                      <a:r>
                         <a:rPr sz="1725" b="0">
                           <a:solidFill>
                             <a:srgbClr val="172A2A"/>
@@ -8114,9 +8341,31 @@
                           <a:ea typeface="Hiragino Sans GB" panose="020B0300000000000000" charset="-122"/>
                           <a:cs typeface="Hiragino Sans GB" panose="020B0300000000000000" charset="-122"/>
                         </a:rPr>
-                        <a:t>分类完成曲线与RAWG对比</a:t>
+                        <a:t>完成曲线与RAWG</a:t>
                       </a:r>
-                      <a:endParaRPr sz="1725" b="0">
+                      <a:r>
+                        <a:rPr lang="zh-CN" sz="1725" b="0">
+                          <a:solidFill>
+                            <a:srgbClr val="172A2A"/>
+                          </a:solidFill>
+                          <a:latin typeface="Hiragino Sans GB" panose="020B0300000000000000" charset="-122"/>
+                          <a:ea typeface="Hiragino Sans GB" panose="020B0300000000000000" charset="-122"/>
+                          <a:cs typeface="Hiragino Sans GB" panose="020B0300000000000000" charset="-122"/>
+                        </a:rPr>
+                        <a:t>论坛数据</a:t>
+                      </a:r>
+                      <a:r>
+                        <a:rPr lang="zh-CN" sz="1725" b="0">
+                          <a:solidFill>
+                            <a:srgbClr val="172A2A"/>
+                          </a:solidFill>
+                          <a:latin typeface="Hiragino Sans GB" panose="020B0300000000000000" charset="-122"/>
+                          <a:ea typeface="Hiragino Sans GB" panose="020B0300000000000000" charset="-122"/>
+                          <a:cs typeface="Hiragino Sans GB" panose="020B0300000000000000" charset="-122"/>
+                        </a:rPr>
+                        <a:t>对比</a:t>
+                      </a:r>
+                      <a:endParaRPr lang="zh-CN" sz="1725" b="0">
                         <a:solidFill>
                           <a:srgbClr val="172A2A"/>
                         </a:solidFill>

--- a/docs/presentations/数据获取与后续计划-2026-10-13-最终版.pptx
+++ b/docs/presentations/数据获取与后续计划-2026-10-13-最终版.pptx
@@ -10,10 +10,10 @@
   <p:sldIdLst>
     <p:sldId id="256" r:id="rId3"/>
     <p:sldId id="259" r:id="rId5"/>
-    <p:sldId id="257" r:id="rId6"/>
-    <p:sldId id="262" r:id="rId7"/>
-    <p:sldId id="263" r:id="rId8"/>
-    <p:sldId id="268" r:id="rId9"/>
+    <p:sldId id="268" r:id="rId6"/>
+    <p:sldId id="257" r:id="rId7"/>
+    <p:sldId id="262" r:id="rId8"/>
+    <p:sldId id="263" r:id="rId9"/>
   </p:sldIdLst>
   <p:sldSz cx="12192000" cy="6858000"/>
   <p:notesSz cx="6858000" cy="9144000"/>
@@ -362,17 +362,7 @@
         <p:txBody>
           <a:bodyPr/>
           <a:lstStyle/>
-          <a:p>
-            <a:r>
-              <a:t>六个逐款源包括appdetails_en、appdetails_zh、global_ach、community_ach、steamspy、rawg。批量枚举另有store_search、store_applist、steamspy_all。SteamSpy平均与中位时长字段已失效，时长展示必须使用有效的RAWG字段。</a:t>
-            </a:r>
-          </a:p>
           <a:p/>
-          <a:p>
-            <a:r>
-              <a:t>来源：/Users/Learning/course/achievement-analytics/AGENTS.md；/Users/Learning/course/achievement-analytics/docs/sources.md</a:t>
-            </a:r>
-          </a:p>
         </p:txBody>
       </p:sp>
       <p:sp>
@@ -436,17 +426,7 @@
         <p:txBody>
           <a:bodyPr/>
           <a:lstStyle/>
-          <a:p>
-            <a:r>
-              <a:t>这里表达个人累计工作投入。实际采集记录跨2026年9月18日至10月1日，采集窗口和人工投入不是同一个时间概念。不要把168小时说成系统跑完所需时间，也不要人为拆分各环节工时。</a:t>
-            </a:r>
-          </a:p>
           <a:p/>
-          <a:p>
-            <a:r>
-              <a:t>来源：用户本次说明；/Users/Learning/course/achievement-analytics/AGENTS.md；/Users/Learning/course/achievement-analytics/docs/data-report.md</a:t>
-            </a:r>
-          </a:p>
         </p:txBody>
       </p:sp>
       <p:sp>
@@ -510,17 +490,7 @@
         <p:txBody>
           <a:bodyPr/>
           <a:lstStyle/>
-          <a:p>
-            <a:r>
-              <a:t>核心数据表定义为games、store_search_games、steam_appdetails、steamspy_games、rawg_games、achievements、game_tags。它们总计3079278行。这里不计任务队列、日志与额度账本。全部15张表合计3639894行，后续表格逐一列明。</a:t>
-            </a:r>
-          </a:p>
           <a:p/>
-          <a:p>
-            <a:r>
-              <a:t>来源：共享 PostgreSQL 只读一致性统计，2026-10-13 11:32（北京时间）。统计读取现有15张基础表，不统计视图，不读取密钥明文。</a:t>
-            </a:r>
-          </a:p>
         </p:txBody>
       </p:sp>
       <p:sp>
@@ -584,17 +554,7 @@
         <p:txBody>
           <a:bodyPr/>
           <a:lstStyle/>
-          <a:p>
-            <a:r>
-              <a:t>这是7张核心数据表的完整行数。games与store_search_games行数相同，但角色不同，应各列一次。achievements包括每项成就的完成率、展示名等字段，一行不是一个玩家。</a:t>
-            </a:r>
-          </a:p>
           <a:p/>
-          <a:p>
-            <a:r>
-              <a:t>来源：共享 PostgreSQL 只读一致性统计，2026-10-13 11:32（北京时间）。统计读取现有15张基础表，不统计视图，不读取密钥明文。</a:t>
-            </a:r>
-          </a:p>
         </p:txBody>
       </p:sp>
       <p:sp>
@@ -658,17 +618,8 @@
         <p:txBody>
           <a:bodyPr/>
           <a:lstStyle/>
-          <a:p>
-            <a:r>
-              <a:t>未来方向依据最新版plan.md，共六个方向。优先组合是发售年份类型演变、主线进度漏斗和知识图谱推荐。游戏画像聚类或口碑预测选一个扩展。难度评分来自计划文件。刘宇翔负责主线漏斗，王文海负责RAWG对比及口碑分析，其余方向尚待分工。</a:t>
-            </a:r>
-          </a:p>
           <a:p/>
-          <a:p>
-            <a:r>
-              <a:t>来源：/Users/Learning/course/achievement-analytics/docs/plan.md</a:t>
-            </a:r>
-          </a:p>
+          <a:p/>
         </p:txBody>
       </p:sp>
       <p:sp>
@@ -2695,7 +2646,7 @@
                 <a:ea typeface="Hiragino Sans GB" panose="020B0300000000000000" charset="-122"/>
                 <a:cs typeface="Hiragino Sans GB" panose="020B0300000000000000" charset="-122"/>
               </a:rPr>
-              <a:t>基于游戏特征与成就数据的偏好分析</a:t>
+              <a:t>基于游戏特征与成就数据的分析</a:t>
             </a:r>
             <a:endParaRPr lang="zh-CN" altLang="en-US" sz="4800" b="1">
               <a:solidFill>
@@ -4353,1281 +4304,6 @@
       <p:grpSpPr/>
       <p:sp>
         <p:nvSpPr>
-          <p:cNvPr id="14" name="矩形 13"/>
-          <p:cNvSpPr>
-            <a:spLocks noGrp="1"/>
-          </p:cNvSpPr>
-          <p:nvPr/>
-        </p:nvSpPr>
-        <p:spPr>
-          <a:xfrm>
-            <a:off x="609600" y="457200"/>
-            <a:ext cx="10972800" cy="838200"/>
-          </a:xfrm>
-          <a:prstGeom prst="rect">
-            <a:avLst/>
-          </a:prstGeom>
-          <a:noFill/>
-          <a:ln w="0">
-            <a:noFill/>
-          </a:ln>
-        </p:spPr>
-        <p:txBody>
-          <a:bodyPr wrap="square" lIns="0" tIns="0" rIns="0" bIns="0" anchor="t">
-            <a:noAutofit/>
-          </a:bodyPr>
-          <a:lstStyle>
-            <a:defPPr>
-              <a:defRPr sz="3300" b="1">
-                <a:solidFill>
-                  <a:srgbClr val="172A2A"/>
-                </a:solidFill>
-                <a:latin typeface="Hiragino Sans GB" panose="020B0300000000000000" charset="-122"/>
-                <a:ea typeface="Hiragino Sans GB" panose="020B0300000000000000" charset="-122"/>
-                <a:cs typeface="Hiragino Sans GB" panose="020B0300000000000000" charset="-122"/>
-              </a:defRPr>
-            </a:defPPr>
-          </a:lstStyle>
-          <a:p>
-            <a:pPr>
-              <a:defRPr sz="3300" b="1">
-                <a:solidFill>
-                  <a:srgbClr val="172A2A"/>
-                </a:solidFill>
-                <a:latin typeface="Hiragino Sans GB" panose="020B0300000000000000" charset="-122"/>
-                <a:ea typeface="Hiragino Sans GB" panose="020B0300000000000000" charset="-122"/>
-                <a:cs typeface="Hiragino Sans GB" panose="020B0300000000000000" charset="-122"/>
-              </a:defRPr>
-            </a:pPr>
-            <a:r>
-              <a:rPr lang="zh-CN">
-                <a:sym typeface="+mn-ea"/>
-              </a:rPr>
-              <a:t>各个渠道获取数据</a:t>
-            </a:r>
-            <a:r>
-              <a:rPr lang="zh-CN" sz="3300" b="1">
-                <a:solidFill>
-                  <a:srgbClr val="172A2A"/>
-                </a:solidFill>
-                <a:latin typeface="Hiragino Sans GB" panose="020B0300000000000000" charset="-122"/>
-                <a:ea typeface="Hiragino Sans GB" panose="020B0300000000000000" charset="-122"/>
-                <a:cs typeface="Hiragino Sans GB" panose="020B0300000000000000" charset="-122"/>
-              </a:rPr>
-              <a:t>花费</a:t>
-            </a:r>
-            <a:r>
-              <a:rPr lang="zh-CN" altLang="en-US" sz="3300" b="1">
-                <a:solidFill>
-                  <a:srgbClr val="172A2A"/>
-                </a:solidFill>
-                <a:latin typeface="Hiragino Sans GB" panose="020B0300000000000000" charset="-122"/>
-                <a:ea typeface="Hiragino Sans GB" panose="020B0300000000000000" charset="-122"/>
-                <a:cs typeface="Hiragino Sans GB" panose="020B0300000000000000" charset="-122"/>
-              </a:rPr>
-              <a:t>约</a:t>
-            </a:r>
-            <a:r>
-              <a:rPr lang="en-US" altLang="zh-CN" sz="3300" b="1">
-                <a:solidFill>
-                  <a:srgbClr val="172A2A"/>
-                </a:solidFill>
-                <a:latin typeface="Hiragino Sans GB" panose="020B0300000000000000" charset="-122"/>
-                <a:ea typeface="Hiragino Sans GB" panose="020B0300000000000000" charset="-122"/>
-                <a:cs typeface="Hiragino Sans GB" panose="020B0300000000000000" charset="-122"/>
-              </a:rPr>
-              <a:t>170</a:t>
-            </a:r>
-            <a:r>
-              <a:rPr sz="3300" b="1">
-                <a:solidFill>
-                  <a:srgbClr val="172A2A"/>
-                </a:solidFill>
-                <a:latin typeface="Hiragino Sans GB" panose="020B0300000000000000" charset="-122"/>
-                <a:ea typeface="Hiragino Sans GB" panose="020B0300000000000000" charset="-122"/>
-                <a:cs typeface="Hiragino Sans GB" panose="020B0300000000000000" charset="-122"/>
-              </a:rPr>
-              <a:t>小时</a:t>
-            </a:r>
-            <a:endParaRPr lang="zh-CN" sz="3300" b="1">
-              <a:solidFill>
-                <a:srgbClr val="172A2A"/>
-              </a:solidFill>
-              <a:latin typeface="Hiragino Sans GB" panose="020B0300000000000000" charset="-122"/>
-              <a:ea typeface="Hiragino Sans GB" panose="020B0300000000000000" charset="-122"/>
-              <a:cs typeface="Hiragino Sans GB" panose="020B0300000000000000" charset="-122"/>
-            </a:endParaRPr>
-          </a:p>
-        </p:txBody>
-      </p:sp>
-      <p:sp>
-        <p:nvSpPr>
-          <p:cNvPr id="4" name="矩形 3"/>
-          <p:cNvSpPr>
-            <a:spLocks noGrp="1"/>
-          </p:cNvSpPr>
-          <p:nvPr/>
-        </p:nvSpPr>
-        <p:spPr>
-          <a:xfrm>
-            <a:off x="609600" y="1885950"/>
-            <a:ext cx="4381500" cy="1952625"/>
-          </a:xfrm>
-          <a:prstGeom prst="rect">
-            <a:avLst/>
-          </a:prstGeom>
-          <a:noFill/>
-          <a:ln w="0">
-            <a:noFill/>
-          </a:ln>
-        </p:spPr>
-        <p:txBody>
-          <a:bodyPr wrap="square" lIns="0" tIns="0" rIns="0" bIns="0" anchor="t">
-            <a:noAutofit/>
-          </a:bodyPr>
-          <a:lstStyle>
-            <a:defPPr>
-              <a:defRPr sz="13050" b="1">
-                <a:solidFill>
-                  <a:srgbClr val="246A5F"/>
-                </a:solidFill>
-                <a:latin typeface="Hiragino Sans GB" panose="020B0300000000000000" charset="-122"/>
-                <a:ea typeface="Hiragino Sans GB" panose="020B0300000000000000" charset="-122"/>
-                <a:cs typeface="Hiragino Sans GB" panose="020B0300000000000000" charset="-122"/>
-              </a:defRPr>
-            </a:defPPr>
-          </a:lstStyle>
-          <a:p>
-            <a:pPr>
-              <a:defRPr sz="13050" b="1">
-                <a:solidFill>
-                  <a:srgbClr val="246A5F"/>
-                </a:solidFill>
-                <a:latin typeface="Hiragino Sans GB" panose="020B0300000000000000" charset="-122"/>
-                <a:ea typeface="Hiragino Sans GB" panose="020B0300000000000000" charset="-122"/>
-                <a:cs typeface="Hiragino Sans GB" panose="020B0300000000000000" charset="-122"/>
-              </a:defRPr>
-            </a:pPr>
-            <a:r>
-              <a:rPr sz="13050" b="1">
-                <a:solidFill>
-                  <a:srgbClr val="246A5F"/>
-                </a:solidFill>
-                <a:latin typeface="Hiragino Sans GB" panose="020B0300000000000000" charset="-122"/>
-                <a:ea typeface="Hiragino Sans GB" panose="020B0300000000000000" charset="-122"/>
-                <a:cs typeface="Hiragino Sans GB" panose="020B0300000000000000" charset="-122"/>
-              </a:rPr>
-              <a:t>1</a:t>
-            </a:r>
-            <a:r>
-              <a:rPr lang="en-US" sz="13050" b="1">
-                <a:solidFill>
-                  <a:srgbClr val="246A5F"/>
-                </a:solidFill>
-                <a:latin typeface="Hiragino Sans GB" panose="020B0300000000000000" charset="-122"/>
-                <a:ea typeface="Hiragino Sans GB" panose="020B0300000000000000" charset="-122"/>
-                <a:cs typeface="Hiragino Sans GB" panose="020B0300000000000000" charset="-122"/>
-              </a:rPr>
-              <a:t>70</a:t>
-            </a:r>
-            <a:r>
-              <a:rPr lang="en-US" sz="7200" b="1">
-                <a:solidFill>
-                  <a:srgbClr val="246A5F"/>
-                </a:solidFill>
-                <a:latin typeface="Hiragino Sans GB" panose="020B0300000000000000" charset="-122"/>
-                <a:ea typeface="Hiragino Sans GB" panose="020B0300000000000000" charset="-122"/>
-                <a:cs typeface="Hiragino Sans GB" panose="020B0300000000000000" charset="-122"/>
-              </a:rPr>
-              <a:t>H</a:t>
-            </a:r>
-            <a:endParaRPr b="0">
-              <a:solidFill>
-                <a:srgbClr val="172A2A"/>
-              </a:solidFill>
-              <a:latin typeface="Hiragino Sans GB" panose="020B0300000000000000" charset="-122"/>
-              <a:ea typeface="Hiragino Sans GB" panose="020B0300000000000000" charset="-122"/>
-              <a:cs typeface="Hiragino Sans GB" panose="020B0300000000000000" charset="-122"/>
-            </a:endParaRPr>
-          </a:p>
-          <a:p>
-            <a:pPr>
-              <a:defRPr sz="13050" b="1">
-                <a:solidFill>
-                  <a:srgbClr val="246A5F"/>
-                </a:solidFill>
-                <a:latin typeface="Hiragino Sans GB" panose="020B0300000000000000" charset="-122"/>
-                <a:ea typeface="Hiragino Sans GB" panose="020B0300000000000000" charset="-122"/>
-                <a:cs typeface="Hiragino Sans GB" panose="020B0300000000000000" charset="-122"/>
-              </a:defRPr>
-            </a:pPr>
-            <a:endParaRPr sz="13050" b="1">
-              <a:solidFill>
-                <a:srgbClr val="246A5F"/>
-              </a:solidFill>
-              <a:latin typeface="Hiragino Sans GB" panose="020B0300000000000000" charset="-122"/>
-              <a:ea typeface="Hiragino Sans GB" panose="020B0300000000000000" charset="-122"/>
-              <a:cs typeface="Hiragino Sans GB" panose="020B0300000000000000" charset="-122"/>
-            </a:endParaRPr>
-          </a:p>
-        </p:txBody>
-      </p:sp>
-      <p:sp>
-        <p:nvSpPr>
-          <p:cNvPr id="5" name="矩形 4"/>
-          <p:cNvSpPr>
-            <a:spLocks noGrp="1"/>
-          </p:cNvSpPr>
-          <p:nvPr/>
-        </p:nvSpPr>
-        <p:spPr>
-          <a:xfrm>
-            <a:off x="704850" y="3943350"/>
-            <a:ext cx="3524250" cy="628650"/>
-          </a:xfrm>
-          <a:prstGeom prst="rect">
-            <a:avLst/>
-          </a:prstGeom>
-          <a:noFill/>
-          <a:ln w="0">
-            <a:noFill/>
-          </a:ln>
-        </p:spPr>
-        <p:txBody>
-          <a:bodyPr wrap="square" lIns="0" tIns="0" rIns="0" bIns="0" anchor="t">
-            <a:noAutofit/>
-          </a:bodyPr>
-          <a:lstStyle>
-            <a:defPPr>
-              <a:defRPr sz="3000" b="0">
-                <a:solidFill>
-                  <a:srgbClr val="172A2A"/>
-                </a:solidFill>
-                <a:latin typeface="Hiragino Sans GB" panose="020B0300000000000000" charset="-122"/>
-                <a:ea typeface="Hiragino Sans GB" panose="020B0300000000000000" charset="-122"/>
-                <a:cs typeface="Hiragino Sans GB" panose="020B0300000000000000" charset="-122"/>
-              </a:defRPr>
-            </a:defPPr>
-          </a:lstStyle>
-          <a:p>
-            <a:pPr>
-              <a:defRPr sz="3000" b="0">
-                <a:solidFill>
-                  <a:srgbClr val="172A2A"/>
-                </a:solidFill>
-                <a:latin typeface="Hiragino Sans GB" panose="020B0300000000000000" charset="-122"/>
-                <a:ea typeface="Hiragino Sans GB" panose="020B0300000000000000" charset="-122"/>
-                <a:cs typeface="Hiragino Sans GB" panose="020B0300000000000000" charset="-122"/>
-              </a:defRPr>
-            </a:pPr>
-            <a:endParaRPr sz="3000" b="0">
-              <a:solidFill>
-                <a:srgbClr val="172A2A"/>
-              </a:solidFill>
-              <a:latin typeface="Hiragino Sans GB" panose="020B0300000000000000" charset="-122"/>
-              <a:ea typeface="Hiragino Sans GB" panose="020B0300000000000000" charset="-122"/>
-              <a:cs typeface="Hiragino Sans GB" panose="020B0300000000000000" charset="-122"/>
-            </a:endParaRPr>
-          </a:p>
-        </p:txBody>
-      </p:sp>
-      <p:sp>
-        <p:nvSpPr>
-          <p:cNvPr id="6" name="矩形 5"/>
-          <p:cNvSpPr>
-            <a:spLocks noGrp="1"/>
-          </p:cNvSpPr>
-          <p:nvPr/>
-        </p:nvSpPr>
-        <p:spPr>
-          <a:xfrm>
-            <a:off x="5476875" y="1809750"/>
-            <a:ext cx="5953125" cy="400050"/>
-          </a:xfrm>
-          <a:prstGeom prst="rect">
-            <a:avLst/>
-          </a:prstGeom>
-          <a:noFill/>
-          <a:ln w="0">
-            <a:noFill/>
-          </a:ln>
-        </p:spPr>
-        <p:txBody>
-          <a:bodyPr wrap="square" lIns="0" tIns="0" rIns="0" bIns="0" anchor="t">
-            <a:noAutofit/>
-          </a:bodyPr>
-          <a:lstStyle>
-            <a:defPPr>
-              <a:defRPr sz="2175" b="1">
-                <a:solidFill>
-                  <a:srgbClr val="172A2A"/>
-                </a:solidFill>
-                <a:latin typeface="Hiragino Sans GB" panose="020B0300000000000000" charset="-122"/>
-                <a:ea typeface="Hiragino Sans GB" panose="020B0300000000000000" charset="-122"/>
-                <a:cs typeface="Hiragino Sans GB" panose="020B0300000000000000" charset="-122"/>
-              </a:defRPr>
-            </a:defPPr>
-          </a:lstStyle>
-          <a:p>
-            <a:pPr>
-              <a:defRPr sz="2175" b="1">
-                <a:solidFill>
-                  <a:srgbClr val="172A2A"/>
-                </a:solidFill>
-                <a:latin typeface="Hiragino Sans GB" panose="020B0300000000000000" charset="-122"/>
-                <a:ea typeface="Hiragino Sans GB" panose="020B0300000000000000" charset="-122"/>
-                <a:cs typeface="Hiragino Sans GB" panose="020B0300000000000000" charset="-122"/>
-              </a:defRPr>
-            </a:pPr>
-            <a:r>
-              <a:rPr sz="2175" b="1">
-                <a:solidFill>
-                  <a:srgbClr val="172A2A"/>
-                </a:solidFill>
-                <a:latin typeface="Hiragino Sans GB" panose="020B0300000000000000" charset="-122"/>
-                <a:ea typeface="Hiragino Sans GB" panose="020B0300000000000000" charset="-122"/>
-                <a:cs typeface="Hiragino Sans GB" panose="020B0300000000000000" charset="-122"/>
-              </a:rPr>
-              <a:t>脚本编写</a:t>
-            </a:r>
-            <a:endParaRPr sz="2175" b="1">
-              <a:solidFill>
-                <a:srgbClr val="172A2A"/>
-              </a:solidFill>
-              <a:latin typeface="Hiragino Sans GB" panose="020B0300000000000000" charset="-122"/>
-              <a:ea typeface="Hiragino Sans GB" panose="020B0300000000000000" charset="-122"/>
-              <a:cs typeface="Hiragino Sans GB" panose="020B0300000000000000" charset="-122"/>
-            </a:endParaRPr>
-          </a:p>
-        </p:txBody>
-      </p:sp>
-      <p:sp>
-        <p:nvSpPr>
-          <p:cNvPr id="7" name="矩形 6"/>
-          <p:cNvSpPr>
-            <a:spLocks noGrp="1"/>
-          </p:cNvSpPr>
-          <p:nvPr/>
-        </p:nvSpPr>
-        <p:spPr>
-          <a:xfrm>
-            <a:off x="5476875" y="2257425"/>
-            <a:ext cx="5953125" cy="609600"/>
-          </a:xfrm>
-          <a:prstGeom prst="rect">
-            <a:avLst/>
-          </a:prstGeom>
-          <a:noFill/>
-          <a:ln w="0">
-            <a:noFill/>
-          </a:ln>
-        </p:spPr>
-        <p:txBody>
-          <a:bodyPr wrap="square" lIns="0" tIns="0" rIns="0" bIns="0" anchor="t">
-            <a:noAutofit/>
-          </a:bodyPr>
-          <a:lstStyle>
-            <a:defPPr>
-              <a:defRPr sz="1800" b="0">
-                <a:solidFill>
-                  <a:srgbClr val="5B6864"/>
-                </a:solidFill>
-                <a:latin typeface="Hiragino Sans GB" panose="020B0300000000000000" charset="-122"/>
-                <a:ea typeface="Hiragino Sans GB" panose="020B0300000000000000" charset="-122"/>
-                <a:cs typeface="Hiragino Sans GB" panose="020B0300000000000000" charset="-122"/>
-              </a:defRPr>
-            </a:defPPr>
-          </a:lstStyle>
-          <a:p>
-            <a:pPr>
-              <a:defRPr sz="1800" b="0">
-                <a:solidFill>
-                  <a:srgbClr val="5B6864"/>
-                </a:solidFill>
-                <a:latin typeface="Hiragino Sans GB" panose="020B0300000000000000" charset="-122"/>
-                <a:ea typeface="Hiragino Sans GB" panose="020B0300000000000000" charset="-122"/>
-                <a:cs typeface="Hiragino Sans GB" panose="020B0300000000000000" charset="-122"/>
-              </a:defRPr>
-            </a:pPr>
-            <a:r>
-              <a:rPr sz="1800" b="0">
-                <a:solidFill>
-                  <a:srgbClr val="5B6864"/>
-                </a:solidFill>
-                <a:latin typeface="Hiragino Sans GB" panose="020B0300000000000000" charset="-122"/>
-                <a:ea typeface="Hiragino Sans GB" panose="020B0300000000000000" charset="-122"/>
-                <a:cs typeface="Hiragino Sans GB" panose="020B0300000000000000" charset="-122"/>
-              </a:rPr>
-              <a:t>逐源解析、限速重试、错误识别和任务编排</a:t>
-            </a:r>
-            <a:endParaRPr sz="1800" b="0">
-              <a:solidFill>
-                <a:srgbClr val="5B6864"/>
-              </a:solidFill>
-              <a:latin typeface="Hiragino Sans GB" panose="020B0300000000000000" charset="-122"/>
-              <a:ea typeface="Hiragino Sans GB" panose="020B0300000000000000" charset="-122"/>
-              <a:cs typeface="Hiragino Sans GB" panose="020B0300000000000000" charset="-122"/>
-            </a:endParaRPr>
-          </a:p>
-        </p:txBody>
-      </p:sp>
-      <p:sp>
-        <p:nvSpPr>
-          <p:cNvPr id="8" name="矩形 7"/>
-          <p:cNvSpPr>
-            <a:spLocks noGrp="1"/>
-          </p:cNvSpPr>
-          <p:nvPr/>
-        </p:nvSpPr>
-        <p:spPr>
-          <a:xfrm>
-            <a:off x="5476875" y="2876550"/>
-            <a:ext cx="5953125" cy="400050"/>
-          </a:xfrm>
-          <a:prstGeom prst="rect">
-            <a:avLst/>
-          </a:prstGeom>
-          <a:noFill/>
-          <a:ln w="0">
-            <a:noFill/>
-          </a:ln>
-        </p:spPr>
-        <p:txBody>
-          <a:bodyPr wrap="square" lIns="0" tIns="0" rIns="0" bIns="0" anchor="t">
-            <a:noAutofit/>
-          </a:bodyPr>
-          <a:lstStyle>
-            <a:defPPr>
-              <a:defRPr sz="2175" b="1">
-                <a:solidFill>
-                  <a:srgbClr val="172A2A"/>
-                </a:solidFill>
-                <a:latin typeface="Hiragino Sans GB" panose="020B0300000000000000" charset="-122"/>
-                <a:ea typeface="Hiragino Sans GB" panose="020B0300000000000000" charset="-122"/>
-                <a:cs typeface="Hiragino Sans GB" panose="020B0300000000000000" charset="-122"/>
-              </a:defRPr>
-            </a:defPPr>
-          </a:lstStyle>
-          <a:p>
-            <a:pPr>
-              <a:defRPr sz="2175" b="1">
-                <a:solidFill>
-                  <a:srgbClr val="172A2A"/>
-                </a:solidFill>
-                <a:latin typeface="Hiragino Sans GB" panose="020B0300000000000000" charset="-122"/>
-                <a:ea typeface="Hiragino Sans GB" panose="020B0300000000000000" charset="-122"/>
-                <a:cs typeface="Hiragino Sans GB" panose="020B0300000000000000" charset="-122"/>
-              </a:defRPr>
-            </a:pPr>
-            <a:r>
-              <a:rPr sz="2175" b="1">
-                <a:solidFill>
-                  <a:srgbClr val="172A2A"/>
-                </a:solidFill>
-                <a:latin typeface="Hiragino Sans GB" panose="020B0300000000000000" charset="-122"/>
-                <a:ea typeface="Hiragino Sans GB" panose="020B0300000000000000" charset="-122"/>
-                <a:cs typeface="Hiragino Sans GB" panose="020B0300000000000000" charset="-122"/>
-              </a:rPr>
-              <a:t>数据库定义</a:t>
-            </a:r>
-            <a:endParaRPr sz="2175" b="1">
-              <a:solidFill>
-                <a:srgbClr val="172A2A"/>
-              </a:solidFill>
-              <a:latin typeface="Hiragino Sans GB" panose="020B0300000000000000" charset="-122"/>
-              <a:ea typeface="Hiragino Sans GB" panose="020B0300000000000000" charset="-122"/>
-              <a:cs typeface="Hiragino Sans GB" panose="020B0300000000000000" charset="-122"/>
-            </a:endParaRPr>
-          </a:p>
-        </p:txBody>
-      </p:sp>
-      <p:sp>
-        <p:nvSpPr>
-          <p:cNvPr id="9" name="矩形 8"/>
-          <p:cNvSpPr>
-            <a:spLocks noGrp="1"/>
-          </p:cNvSpPr>
-          <p:nvPr/>
-        </p:nvSpPr>
-        <p:spPr>
-          <a:xfrm>
-            <a:off x="5476875" y="3324225"/>
-            <a:ext cx="5953125" cy="609600"/>
-          </a:xfrm>
-          <a:prstGeom prst="rect">
-            <a:avLst/>
-          </a:prstGeom>
-          <a:noFill/>
-          <a:ln w="0">
-            <a:noFill/>
-          </a:ln>
-        </p:spPr>
-        <p:txBody>
-          <a:bodyPr wrap="square" lIns="0" tIns="0" rIns="0" bIns="0" anchor="t">
-            <a:noAutofit/>
-          </a:bodyPr>
-          <a:lstStyle>
-            <a:defPPr>
-              <a:defRPr sz="1800" b="0">
-                <a:solidFill>
-                  <a:srgbClr val="5B6864"/>
-                </a:solidFill>
-                <a:latin typeface="Hiragino Sans GB" panose="020B0300000000000000" charset="-122"/>
-                <a:ea typeface="Hiragino Sans GB" panose="020B0300000000000000" charset="-122"/>
-                <a:cs typeface="Hiragino Sans GB" panose="020B0300000000000000" charset="-122"/>
-              </a:defRPr>
-            </a:defPPr>
-          </a:lstStyle>
-          <a:p>
-            <a:pPr>
-              <a:defRPr sz="1800" b="0">
-                <a:solidFill>
-                  <a:srgbClr val="5B6864"/>
-                </a:solidFill>
-                <a:latin typeface="Hiragino Sans GB" panose="020B0300000000000000" charset="-122"/>
-                <a:ea typeface="Hiragino Sans GB" panose="020B0300000000000000" charset="-122"/>
-                <a:cs typeface="Hiragino Sans GB" panose="020B0300000000000000" charset="-122"/>
-              </a:defRPr>
-            </a:pPr>
-            <a:r>
-              <a:rPr sz="1800" b="0">
-                <a:solidFill>
-                  <a:srgbClr val="5B6864"/>
-                </a:solidFill>
-                <a:latin typeface="Hiragino Sans GB" panose="020B0300000000000000" charset="-122"/>
-                <a:ea typeface="Hiragino Sans GB" panose="020B0300000000000000" charset="-122"/>
-                <a:cs typeface="Hiragino Sans GB" panose="020B0300000000000000" charset="-122"/>
-              </a:rPr>
-              <a:t>数据表、索引、视图、队列和配额账本</a:t>
-            </a:r>
-            <a:endParaRPr sz="1800" b="0">
-              <a:solidFill>
-                <a:srgbClr val="5B6864"/>
-              </a:solidFill>
-              <a:latin typeface="Hiragino Sans GB" panose="020B0300000000000000" charset="-122"/>
-              <a:ea typeface="Hiragino Sans GB" panose="020B0300000000000000" charset="-122"/>
-              <a:cs typeface="Hiragino Sans GB" panose="020B0300000000000000" charset="-122"/>
-            </a:endParaRPr>
-          </a:p>
-        </p:txBody>
-      </p:sp>
-      <p:sp>
-        <p:nvSpPr>
-          <p:cNvPr id="10" name="矩形 9"/>
-          <p:cNvSpPr>
-            <a:spLocks noGrp="1"/>
-          </p:cNvSpPr>
-          <p:nvPr/>
-        </p:nvSpPr>
-        <p:spPr>
-          <a:xfrm>
-            <a:off x="5476875" y="3943350"/>
-            <a:ext cx="5953125" cy="400050"/>
-          </a:xfrm>
-          <a:prstGeom prst="rect">
-            <a:avLst/>
-          </a:prstGeom>
-          <a:noFill/>
-          <a:ln w="0">
-            <a:noFill/>
-          </a:ln>
-        </p:spPr>
-        <p:txBody>
-          <a:bodyPr wrap="square" lIns="0" tIns="0" rIns="0" bIns="0" anchor="t">
-            <a:noAutofit/>
-          </a:bodyPr>
-          <a:lstStyle>
-            <a:defPPr>
-              <a:defRPr sz="2175" b="1">
-                <a:solidFill>
-                  <a:srgbClr val="172A2A"/>
-                </a:solidFill>
-                <a:latin typeface="Hiragino Sans GB" panose="020B0300000000000000" charset="-122"/>
-                <a:ea typeface="Hiragino Sans GB" panose="020B0300000000000000" charset="-122"/>
-                <a:cs typeface="Hiragino Sans GB" panose="020B0300000000000000" charset="-122"/>
-              </a:defRPr>
-            </a:defPPr>
-          </a:lstStyle>
-          <a:p>
-            <a:pPr>
-              <a:defRPr sz="2175" b="1">
-                <a:solidFill>
-                  <a:srgbClr val="172A2A"/>
-                </a:solidFill>
-                <a:latin typeface="Hiragino Sans GB" panose="020B0300000000000000" charset="-122"/>
-                <a:ea typeface="Hiragino Sans GB" panose="020B0300000000000000" charset="-122"/>
-                <a:cs typeface="Hiragino Sans GB" panose="020B0300000000000000" charset="-122"/>
-              </a:defRPr>
-            </a:pPr>
-            <a:r>
-              <a:rPr sz="2175" b="1">
-                <a:solidFill>
-                  <a:srgbClr val="172A2A"/>
-                </a:solidFill>
-                <a:latin typeface="Hiragino Sans GB" panose="020B0300000000000000" charset="-122"/>
-                <a:ea typeface="Hiragino Sans GB" panose="020B0300000000000000" charset="-122"/>
-                <a:cs typeface="Hiragino Sans GB" panose="020B0300000000000000" charset="-122"/>
-              </a:rPr>
-              <a:t>数据获取与补抓</a:t>
-            </a:r>
-            <a:endParaRPr sz="2175" b="1">
-              <a:solidFill>
-                <a:srgbClr val="172A2A"/>
-              </a:solidFill>
-              <a:latin typeface="Hiragino Sans GB" panose="020B0300000000000000" charset="-122"/>
-              <a:ea typeface="Hiragino Sans GB" panose="020B0300000000000000" charset="-122"/>
-              <a:cs typeface="Hiragino Sans GB" panose="020B0300000000000000" charset="-122"/>
-            </a:endParaRPr>
-          </a:p>
-        </p:txBody>
-      </p:sp>
-      <p:sp>
-        <p:nvSpPr>
-          <p:cNvPr id="11" name="矩形 10"/>
-          <p:cNvSpPr>
-            <a:spLocks noGrp="1"/>
-          </p:cNvSpPr>
-          <p:nvPr/>
-        </p:nvSpPr>
-        <p:spPr>
-          <a:xfrm>
-            <a:off x="5476875" y="4391025"/>
-            <a:ext cx="5953125" cy="609600"/>
-          </a:xfrm>
-          <a:prstGeom prst="rect">
-            <a:avLst/>
-          </a:prstGeom>
-          <a:noFill/>
-          <a:ln w="0">
-            <a:noFill/>
-          </a:ln>
-        </p:spPr>
-        <p:txBody>
-          <a:bodyPr wrap="square" lIns="0" tIns="0" rIns="0" bIns="0" anchor="t">
-            <a:noAutofit/>
-          </a:bodyPr>
-          <a:lstStyle>
-            <a:defPPr>
-              <a:defRPr sz="1800" b="0">
-                <a:solidFill>
-                  <a:srgbClr val="5B6864"/>
-                </a:solidFill>
-                <a:latin typeface="Hiragino Sans GB" panose="020B0300000000000000" charset="-122"/>
-                <a:ea typeface="Hiragino Sans GB" panose="020B0300000000000000" charset="-122"/>
-                <a:cs typeface="Hiragino Sans GB" panose="020B0300000000000000" charset="-122"/>
-              </a:defRPr>
-            </a:defPPr>
-          </a:lstStyle>
-          <a:p>
-            <a:pPr>
-              <a:defRPr sz="1800" b="0">
-                <a:solidFill>
-                  <a:srgbClr val="5B6864"/>
-                </a:solidFill>
-                <a:latin typeface="Hiragino Sans GB" panose="020B0300000000000000" charset="-122"/>
-                <a:ea typeface="Hiragino Sans GB" panose="020B0300000000000000" charset="-122"/>
-                <a:cs typeface="Hiragino Sans GB" panose="020B0300000000000000" charset="-122"/>
-              </a:defRPr>
-            </a:pPr>
-            <a:r>
-              <a:rPr lang="zh-CN" sz="1800" b="0">
-                <a:solidFill>
-                  <a:srgbClr val="5B6864"/>
-                </a:solidFill>
-                <a:latin typeface="Hiragino Sans GB" panose="020B0300000000000000" charset="-122"/>
-                <a:ea typeface="Hiragino Sans GB" panose="020B0300000000000000" charset="-122"/>
-                <a:cs typeface="Hiragino Sans GB" panose="020B0300000000000000" charset="-122"/>
-              </a:rPr>
-              <a:t>全体组员</a:t>
-            </a:r>
-            <a:r>
-              <a:rPr sz="1800" b="0">
-                <a:solidFill>
-                  <a:srgbClr val="5B6864"/>
-                </a:solidFill>
-                <a:latin typeface="Hiragino Sans GB" panose="020B0300000000000000" charset="-122"/>
-                <a:ea typeface="Hiragino Sans GB" panose="020B0300000000000000" charset="-122"/>
-                <a:cs typeface="Hiragino Sans GB" panose="020B0300000000000000" charset="-122"/>
-              </a:rPr>
-              <a:t>多机连续运行</a:t>
-            </a:r>
-            <a:endParaRPr sz="1800" b="0">
-              <a:solidFill>
-                <a:srgbClr val="5B6864"/>
-              </a:solidFill>
-              <a:latin typeface="Hiragino Sans GB" panose="020B0300000000000000" charset="-122"/>
-              <a:ea typeface="Hiragino Sans GB" panose="020B0300000000000000" charset="-122"/>
-              <a:cs typeface="Hiragino Sans GB" panose="020B0300000000000000" charset="-122"/>
-            </a:endParaRPr>
-          </a:p>
-        </p:txBody>
-      </p:sp>
-      <p:sp>
-        <p:nvSpPr>
-          <p:cNvPr id="2" name="矩形 1"/>
-          <p:cNvSpPr>
-            <a:spLocks noGrp="1"/>
-          </p:cNvSpPr>
-          <p:nvPr/>
-        </p:nvSpPr>
-        <p:spPr>
-          <a:xfrm>
-            <a:off x="5476875" y="5229225"/>
-            <a:ext cx="5953125" cy="609600"/>
-          </a:xfrm>
-          <a:prstGeom prst="rect">
-            <a:avLst/>
-          </a:prstGeom>
-          <a:noFill/>
-          <a:ln w="0">
-            <a:noFill/>
-          </a:ln>
-        </p:spPr>
-        <p:txBody>
-          <a:bodyPr wrap="square" lIns="0" tIns="0" rIns="0" bIns="0" anchor="t">
-            <a:noAutofit/>
-          </a:bodyPr>
-          <a:lstStyle>
-            <a:defPPr>
-              <a:defRPr sz="1800" b="0">
-                <a:solidFill>
-                  <a:srgbClr val="5B6864"/>
-                </a:solidFill>
-                <a:latin typeface="Hiragino Sans GB" panose="020B0300000000000000" charset="-122"/>
-                <a:ea typeface="Hiragino Sans GB" panose="020B0300000000000000" charset="-122"/>
-                <a:cs typeface="Hiragino Sans GB" panose="020B0300000000000000" charset="-122"/>
-              </a:defRPr>
-            </a:defPPr>
-          </a:lstStyle>
-          <a:p>
-            <a:pPr>
-              <a:defRPr sz="1800" b="0">
-                <a:solidFill>
-                  <a:srgbClr val="5B6864"/>
-                </a:solidFill>
-                <a:latin typeface="Hiragino Sans GB" panose="020B0300000000000000" charset="-122"/>
-                <a:ea typeface="Hiragino Sans GB" panose="020B0300000000000000" charset="-122"/>
-                <a:cs typeface="Hiragino Sans GB" panose="020B0300000000000000" charset="-122"/>
-              </a:defRPr>
-            </a:pPr>
-            <a:r>
-              <a:rPr lang="zh-CN" sz="1800" b="0">
-                <a:solidFill>
-                  <a:srgbClr val="5B6864"/>
-                </a:solidFill>
-                <a:latin typeface="Hiragino Sans GB" panose="020B0300000000000000" charset="-122"/>
-                <a:ea typeface="Hiragino Sans GB" panose="020B0300000000000000" charset="-122"/>
-                <a:cs typeface="Hiragino Sans GB" panose="020B0300000000000000" charset="-122"/>
-              </a:rPr>
-              <a:t>从中秋假期</a:t>
-            </a:r>
-            <a:r>
-              <a:rPr lang="zh-CN" sz="1800" b="0">
-                <a:solidFill>
-                  <a:srgbClr val="5B6864"/>
-                </a:solidFill>
-                <a:latin typeface="Hiragino Sans GB" panose="020B0300000000000000" charset="-122"/>
-                <a:ea typeface="Hiragino Sans GB" panose="020B0300000000000000" charset="-122"/>
-                <a:cs typeface="Hiragino Sans GB" panose="020B0300000000000000" charset="-122"/>
-              </a:rPr>
-              <a:t>前跑到国庆第二天才跑完原始</a:t>
-            </a:r>
-            <a:r>
-              <a:rPr lang="zh-CN" sz="1800" b="0">
-                <a:solidFill>
-                  <a:srgbClr val="5B6864"/>
-                </a:solidFill>
-                <a:latin typeface="Hiragino Sans GB" panose="020B0300000000000000" charset="-122"/>
-                <a:ea typeface="Hiragino Sans GB" panose="020B0300000000000000" charset="-122"/>
-                <a:cs typeface="Hiragino Sans GB" panose="020B0300000000000000" charset="-122"/>
-              </a:rPr>
-              <a:t>数据</a:t>
-            </a:r>
-            <a:endParaRPr lang="zh-CN" sz="1800" b="0">
-              <a:solidFill>
-                <a:srgbClr val="5B6864"/>
-              </a:solidFill>
-              <a:latin typeface="Hiragino Sans GB" panose="020B0300000000000000" charset="-122"/>
-              <a:ea typeface="Hiragino Sans GB" panose="020B0300000000000000" charset="-122"/>
-              <a:cs typeface="Hiragino Sans GB" panose="020B0300000000000000" charset="-122"/>
-            </a:endParaRPr>
-          </a:p>
-        </p:txBody>
-      </p:sp>
-    </p:spTree>
-  </p:cSld>
-  <p:clrMapOvr>
-    <a:masterClrMapping/>
-  </p:clrMapOvr>
-</p:sld>
-</file>
-
-<file path=ppt/slides/slide4.xml><?xml version="1.0" encoding="utf-8"?>
-<p:sld xmlns:a="http://schemas.openxmlformats.org/drawingml/2006/main" xmlns:r="http://schemas.openxmlformats.org/officeDocument/2006/relationships" xmlns:p="http://schemas.openxmlformats.org/presentationml/2006/main">
-  <p:cSld>
-    <p:bg>
-      <p:bgPr>
-        <a:solidFill>
-          <a:srgbClr val="F4F2EC"/>
-        </a:solidFill>
-        <a:effectLst/>
-      </p:bgPr>
-    </p:bg>
-    <p:spTree>
-      <p:nvGrpSpPr>
-        <p:cNvPr id="1" name=""/>
-        <p:cNvGrpSpPr/>
-        <p:nvPr/>
-      </p:nvGrpSpPr>
-      <p:grpSpPr/>
-      <p:sp>
-        <p:nvSpPr>
-          <p:cNvPr id="9" name="矩形 8"/>
-          <p:cNvSpPr>
-            <a:spLocks noGrp="1"/>
-          </p:cNvSpPr>
-          <p:nvPr/>
-        </p:nvSpPr>
-        <p:spPr>
-          <a:xfrm>
-            <a:off x="609600" y="457200"/>
-            <a:ext cx="10972800" cy="838200"/>
-          </a:xfrm>
-          <a:prstGeom prst="rect">
-            <a:avLst/>
-          </a:prstGeom>
-          <a:noFill/>
-          <a:ln w="0">
-            <a:noFill/>
-          </a:ln>
-        </p:spPr>
-        <p:txBody>
-          <a:bodyPr wrap="square" lIns="0" tIns="0" rIns="0" bIns="0" anchor="t">
-            <a:noAutofit/>
-          </a:bodyPr>
-          <a:lstStyle>
-            <a:defPPr>
-              <a:defRPr sz="3300" b="1">
-                <a:solidFill>
-                  <a:srgbClr val="172A2A"/>
-                </a:solidFill>
-                <a:latin typeface="Hiragino Sans GB" panose="020B0300000000000000" charset="-122"/>
-                <a:ea typeface="Hiragino Sans GB" panose="020B0300000000000000" charset="-122"/>
-                <a:cs typeface="Hiragino Sans GB" panose="020B0300000000000000" charset="-122"/>
-              </a:defRPr>
-            </a:defPPr>
-          </a:lstStyle>
-          <a:p>
-            <a:pPr>
-              <a:defRPr sz="3300" b="1">
-                <a:solidFill>
-                  <a:srgbClr val="172A2A"/>
-                </a:solidFill>
-                <a:latin typeface="Hiragino Sans GB" panose="020B0300000000000000" charset="-122"/>
-                <a:ea typeface="Hiragino Sans GB" panose="020B0300000000000000" charset="-122"/>
-                <a:cs typeface="Hiragino Sans GB" panose="020B0300000000000000" charset="-122"/>
-              </a:defRPr>
-            </a:pPr>
-            <a:r>
-              <a:rPr sz="3300" b="1">
-                <a:solidFill>
-                  <a:srgbClr val="172A2A"/>
-                </a:solidFill>
-                <a:latin typeface="Hiragino Sans GB" panose="020B0300000000000000" charset="-122"/>
-                <a:ea typeface="Hiragino Sans GB" panose="020B0300000000000000" charset="-122"/>
-                <a:cs typeface="Hiragino Sans GB" panose="020B0300000000000000" charset="-122"/>
-              </a:rPr>
-              <a:t>核心数据表已经累计 3,079,278 行</a:t>
-            </a:r>
-            <a:endParaRPr sz="3300" b="1">
-              <a:solidFill>
-                <a:srgbClr val="172A2A"/>
-              </a:solidFill>
-              <a:latin typeface="Hiragino Sans GB" panose="020B0300000000000000" charset="-122"/>
-              <a:ea typeface="Hiragino Sans GB" panose="020B0300000000000000" charset="-122"/>
-              <a:cs typeface="Hiragino Sans GB" panose="020B0300000000000000" charset="-122"/>
-            </a:endParaRPr>
-          </a:p>
-        </p:txBody>
-      </p:sp>
-      <p:sp>
-        <p:nvSpPr>
-          <p:cNvPr id="4" name="矩形 3"/>
-          <p:cNvSpPr>
-            <a:spLocks noGrp="1"/>
-          </p:cNvSpPr>
-          <p:nvPr/>
-        </p:nvSpPr>
-        <p:spPr>
-          <a:xfrm>
-            <a:off x="609600" y="1628775"/>
-            <a:ext cx="10668000" cy="1438275"/>
-          </a:xfrm>
-          <a:prstGeom prst="rect">
-            <a:avLst/>
-          </a:prstGeom>
-          <a:noFill/>
-          <a:ln w="0">
-            <a:noFill/>
-          </a:ln>
-        </p:spPr>
-        <p:txBody>
-          <a:bodyPr wrap="square" lIns="0" tIns="0" rIns="0" bIns="0" anchor="t">
-            <a:noAutofit/>
-          </a:bodyPr>
-          <a:lstStyle>
-            <a:defPPr>
-              <a:defRPr sz="8400" b="1">
-                <a:solidFill>
-                  <a:srgbClr val="246A5F"/>
-                </a:solidFill>
-                <a:latin typeface="Hiragino Sans GB" panose="020B0300000000000000" charset="-122"/>
-                <a:ea typeface="Hiragino Sans GB" panose="020B0300000000000000" charset="-122"/>
-                <a:cs typeface="Hiragino Sans GB" panose="020B0300000000000000" charset="-122"/>
-              </a:defRPr>
-            </a:defPPr>
-          </a:lstStyle>
-          <a:p>
-            <a:pPr>
-              <a:defRPr sz="8400" b="1">
-                <a:solidFill>
-                  <a:srgbClr val="246A5F"/>
-                </a:solidFill>
-                <a:latin typeface="Hiragino Sans GB" panose="020B0300000000000000" charset="-122"/>
-                <a:ea typeface="Hiragino Sans GB" panose="020B0300000000000000" charset="-122"/>
-                <a:cs typeface="Hiragino Sans GB" panose="020B0300000000000000" charset="-122"/>
-              </a:defRPr>
-            </a:pPr>
-            <a:r>
-              <a:rPr sz="8400" b="1">
-                <a:solidFill>
-                  <a:srgbClr val="246A5F"/>
-                </a:solidFill>
-                <a:latin typeface="Hiragino Sans GB" panose="020B0300000000000000" charset="-122"/>
-                <a:ea typeface="Hiragino Sans GB" panose="020B0300000000000000" charset="-122"/>
-                <a:cs typeface="Hiragino Sans GB" panose="020B0300000000000000" charset="-122"/>
-              </a:rPr>
-              <a:t>307.9 万</a:t>
-            </a:r>
-            <a:endParaRPr sz="8400" b="1">
-              <a:solidFill>
-                <a:srgbClr val="246A5F"/>
-              </a:solidFill>
-              <a:latin typeface="Hiragino Sans GB" panose="020B0300000000000000" charset="-122"/>
-              <a:ea typeface="Hiragino Sans GB" panose="020B0300000000000000" charset="-122"/>
-              <a:cs typeface="Hiragino Sans GB" panose="020B0300000000000000" charset="-122"/>
-            </a:endParaRPr>
-          </a:p>
-        </p:txBody>
-      </p:sp>
-      <p:sp>
-        <p:nvSpPr>
-          <p:cNvPr id="5" name="矩形 4"/>
-          <p:cNvSpPr>
-            <a:spLocks noGrp="1"/>
-          </p:cNvSpPr>
-          <p:nvPr/>
-        </p:nvSpPr>
-        <p:spPr>
-          <a:xfrm>
-            <a:off x="685800" y="3286125"/>
-            <a:ext cx="10191750" cy="590550"/>
-          </a:xfrm>
-          <a:prstGeom prst="rect">
-            <a:avLst/>
-          </a:prstGeom>
-          <a:noFill/>
-          <a:ln w="0">
-            <a:noFill/>
-          </a:ln>
-        </p:spPr>
-        <p:txBody>
-          <a:bodyPr wrap="square" lIns="0" tIns="0" rIns="0" bIns="0" anchor="t">
-            <a:noAutofit/>
-          </a:bodyPr>
-          <a:lstStyle>
-            <a:defPPr>
-              <a:defRPr sz="2625" b="0">
-                <a:solidFill>
-                  <a:srgbClr val="172A2A"/>
-                </a:solidFill>
-                <a:latin typeface="Hiragino Sans GB" panose="020B0300000000000000" charset="-122"/>
-                <a:ea typeface="Hiragino Sans GB" panose="020B0300000000000000" charset="-122"/>
-                <a:cs typeface="Hiragino Sans GB" panose="020B0300000000000000" charset="-122"/>
-              </a:defRPr>
-            </a:defPPr>
-          </a:lstStyle>
-          <a:p>
-            <a:pPr>
-              <a:defRPr sz="2625" b="0">
-                <a:solidFill>
-                  <a:srgbClr val="172A2A"/>
-                </a:solidFill>
-                <a:latin typeface="Hiragino Sans GB" panose="020B0300000000000000" charset="-122"/>
-                <a:ea typeface="Hiragino Sans GB" panose="020B0300000000000000" charset="-122"/>
-                <a:cs typeface="Hiragino Sans GB" panose="020B0300000000000000" charset="-122"/>
-              </a:defRPr>
-            </a:pPr>
-            <a:r>
-              <a:rPr sz="2625" b="0">
-                <a:solidFill>
-                  <a:srgbClr val="172A2A"/>
-                </a:solidFill>
-                <a:latin typeface="Hiragino Sans GB" panose="020B0300000000000000" charset="-122"/>
-                <a:ea typeface="Hiragino Sans GB" panose="020B0300000000000000" charset="-122"/>
-                <a:cs typeface="Hiragino Sans GB" panose="020B0300000000000000" charset="-122"/>
-              </a:rPr>
-              <a:t>核心数据记录</a:t>
-            </a:r>
-            <a:endParaRPr sz="2625" b="0">
-              <a:solidFill>
-                <a:srgbClr val="172A2A"/>
-              </a:solidFill>
-              <a:latin typeface="Hiragino Sans GB" panose="020B0300000000000000" charset="-122"/>
-              <a:ea typeface="Hiragino Sans GB" panose="020B0300000000000000" charset="-122"/>
-              <a:cs typeface="Hiragino Sans GB" panose="020B0300000000000000" charset="-122"/>
-            </a:endParaRPr>
-          </a:p>
-        </p:txBody>
-      </p:sp>
-      <p:sp>
-        <p:nvSpPr>
-          <p:cNvPr id="6" name="矩形 5"/>
-          <p:cNvSpPr>
-            <a:spLocks noGrp="1"/>
-          </p:cNvSpPr>
-          <p:nvPr/>
-        </p:nvSpPr>
-        <p:spPr>
-          <a:xfrm>
-            <a:off x="685800" y="4362450"/>
-            <a:ext cx="4857750" cy="666750"/>
-          </a:xfrm>
-          <a:prstGeom prst="rect">
-            <a:avLst/>
-          </a:prstGeom>
-          <a:noFill/>
-          <a:ln w="0">
-            <a:noFill/>
-          </a:ln>
-        </p:spPr>
-        <p:txBody>
-          <a:bodyPr wrap="square" lIns="0" tIns="0" rIns="0" bIns="0" anchor="t">
-            <a:noAutofit/>
-          </a:bodyPr>
-          <a:lstStyle>
-            <a:defPPr>
-              <a:defRPr sz="3150" b="1">
-                <a:solidFill>
-                  <a:srgbClr val="172A2A"/>
-                </a:solidFill>
-                <a:latin typeface="Hiragino Sans GB" panose="020B0300000000000000" charset="-122"/>
-                <a:ea typeface="Hiragino Sans GB" panose="020B0300000000000000" charset="-122"/>
-                <a:cs typeface="Hiragino Sans GB" panose="020B0300000000000000" charset="-122"/>
-              </a:defRPr>
-            </a:defPPr>
-          </a:lstStyle>
-          <a:p>
-            <a:pPr>
-              <a:defRPr sz="3150" b="1">
-                <a:solidFill>
-                  <a:srgbClr val="172A2A"/>
-                </a:solidFill>
-                <a:latin typeface="Hiragino Sans GB" panose="020B0300000000000000" charset="-122"/>
-                <a:ea typeface="Hiragino Sans GB" panose="020B0300000000000000" charset="-122"/>
-                <a:cs typeface="Hiragino Sans GB" panose="020B0300000000000000" charset="-122"/>
-              </a:defRPr>
-            </a:pPr>
-            <a:r>
-              <a:rPr sz="3150" b="1">
-                <a:solidFill>
-                  <a:srgbClr val="172A2A"/>
-                </a:solidFill>
-                <a:latin typeface="Hiragino Sans GB" panose="020B0300000000000000" charset="-122"/>
-                <a:ea typeface="Hiragino Sans GB" panose="020B0300000000000000" charset="-122"/>
-                <a:cs typeface="Hiragino Sans GB" panose="020B0300000000000000" charset="-122"/>
-              </a:rPr>
-              <a:t>50,956 款游戏</a:t>
-            </a:r>
-            <a:endParaRPr sz="3150" b="1">
-              <a:solidFill>
-                <a:srgbClr val="172A2A"/>
-              </a:solidFill>
-              <a:latin typeface="Hiragino Sans GB" panose="020B0300000000000000" charset="-122"/>
-              <a:ea typeface="Hiragino Sans GB" panose="020B0300000000000000" charset="-122"/>
-              <a:cs typeface="Hiragino Sans GB" panose="020B0300000000000000" charset="-122"/>
-            </a:endParaRPr>
-          </a:p>
-        </p:txBody>
-      </p:sp>
-      <p:sp>
-        <p:nvSpPr>
-          <p:cNvPr id="7" name="矩形 6"/>
-          <p:cNvSpPr>
-            <a:spLocks noGrp="1"/>
-          </p:cNvSpPr>
-          <p:nvPr/>
-        </p:nvSpPr>
-        <p:spPr>
-          <a:xfrm>
-            <a:off x="6057900" y="4362450"/>
-            <a:ext cx="5429250" cy="666750"/>
-          </a:xfrm>
-          <a:prstGeom prst="rect">
-            <a:avLst/>
-          </a:prstGeom>
-          <a:noFill/>
-          <a:ln w="0">
-            <a:noFill/>
-          </a:ln>
-        </p:spPr>
-        <p:txBody>
-          <a:bodyPr wrap="square" lIns="0" tIns="0" rIns="0" bIns="0" anchor="t">
-            <a:noAutofit/>
-          </a:bodyPr>
-          <a:lstStyle>
-            <a:defPPr>
-              <a:defRPr sz="3150" b="1">
-                <a:solidFill>
-                  <a:srgbClr val="172A2A"/>
-                </a:solidFill>
-                <a:latin typeface="Hiragino Sans GB" panose="020B0300000000000000" charset="-122"/>
-                <a:ea typeface="Hiragino Sans GB" panose="020B0300000000000000" charset="-122"/>
-                <a:cs typeface="Hiragino Sans GB" panose="020B0300000000000000" charset="-122"/>
-              </a:defRPr>
-            </a:defPPr>
-          </a:lstStyle>
-          <a:p>
-            <a:pPr>
-              <a:defRPr sz="3150" b="1">
-                <a:solidFill>
-                  <a:srgbClr val="172A2A"/>
-                </a:solidFill>
-                <a:latin typeface="Hiragino Sans GB" panose="020B0300000000000000" charset="-122"/>
-                <a:ea typeface="Hiragino Sans GB" panose="020B0300000000000000" charset="-122"/>
-                <a:cs typeface="Hiragino Sans GB" panose="020B0300000000000000" charset="-122"/>
-              </a:defRPr>
-            </a:pPr>
-            <a:r>
-              <a:rPr sz="3150" b="1">
-                <a:solidFill>
-                  <a:srgbClr val="172A2A"/>
-                </a:solidFill>
-                <a:latin typeface="Hiragino Sans GB" panose="020B0300000000000000" charset="-122"/>
-                <a:ea typeface="Hiragino Sans GB" panose="020B0300000000000000" charset="-122"/>
-                <a:cs typeface="Hiragino Sans GB" panose="020B0300000000000000" charset="-122"/>
-              </a:rPr>
-              <a:t>1,971,064 条成就</a:t>
-            </a:r>
-            <a:endParaRPr sz="3150" b="1">
-              <a:solidFill>
-                <a:srgbClr val="172A2A"/>
-              </a:solidFill>
-              <a:latin typeface="Hiragino Sans GB" panose="020B0300000000000000" charset="-122"/>
-              <a:ea typeface="Hiragino Sans GB" panose="020B0300000000000000" charset="-122"/>
-              <a:cs typeface="Hiragino Sans GB" panose="020B0300000000000000" charset="-122"/>
-            </a:endParaRPr>
-          </a:p>
-        </p:txBody>
-      </p:sp>
-      <p:sp>
-        <p:nvSpPr>
-          <p:cNvPr id="8" name="矩形 7"/>
-          <p:cNvSpPr>
-            <a:spLocks noGrp="1"/>
-          </p:cNvSpPr>
-          <p:nvPr/>
-        </p:nvSpPr>
-        <p:spPr>
-          <a:xfrm>
-            <a:off x="685800" y="5314950"/>
-            <a:ext cx="10382250" cy="647700"/>
-          </a:xfrm>
-          <a:prstGeom prst="rect">
-            <a:avLst/>
-          </a:prstGeom>
-          <a:noFill/>
-          <a:ln w="0">
-            <a:noFill/>
-          </a:ln>
-        </p:spPr>
-        <p:txBody>
-          <a:bodyPr wrap="square" lIns="0" tIns="0" rIns="0" bIns="0" anchor="t">
-            <a:noAutofit/>
-          </a:bodyPr>
-          <a:lstStyle>
-            <a:defPPr>
-              <a:defRPr sz="3150" b="1">
-                <a:solidFill>
-                  <a:srgbClr val="172A2A"/>
-                </a:solidFill>
-                <a:latin typeface="Hiragino Sans GB" panose="020B0300000000000000" charset="-122"/>
-                <a:ea typeface="Hiragino Sans GB" panose="020B0300000000000000" charset="-122"/>
-                <a:cs typeface="Hiragino Sans GB" panose="020B0300000000000000" charset="-122"/>
-              </a:defRPr>
-            </a:defPPr>
-          </a:lstStyle>
-          <a:p>
-            <a:pPr>
-              <a:defRPr sz="3150" b="1">
-                <a:solidFill>
-                  <a:srgbClr val="172A2A"/>
-                </a:solidFill>
-                <a:latin typeface="Hiragino Sans GB" panose="020B0300000000000000" charset="-122"/>
-                <a:ea typeface="Hiragino Sans GB" panose="020B0300000000000000" charset="-122"/>
-                <a:cs typeface="Hiragino Sans GB" panose="020B0300000000000000" charset="-122"/>
-              </a:defRPr>
-            </a:pPr>
-            <a:r>
-              <a:rPr sz="3150" b="1">
-                <a:solidFill>
-                  <a:srgbClr val="172A2A"/>
-                </a:solidFill>
-                <a:latin typeface="Hiragino Sans GB" panose="020B0300000000000000" charset="-122"/>
-                <a:ea typeface="Hiragino Sans GB" panose="020B0300000000000000" charset="-122"/>
-                <a:cs typeface="Hiragino Sans GB" panose="020B0300000000000000" charset="-122"/>
-              </a:rPr>
-              <a:t>888,837 条标签关系</a:t>
-            </a:r>
-            <a:endParaRPr sz="3150" b="1">
-              <a:solidFill>
-                <a:srgbClr val="172A2A"/>
-              </a:solidFill>
-              <a:latin typeface="Hiragino Sans GB" panose="020B0300000000000000" charset="-122"/>
-              <a:ea typeface="Hiragino Sans GB" panose="020B0300000000000000" charset="-122"/>
-              <a:cs typeface="Hiragino Sans GB" panose="020B0300000000000000" charset="-122"/>
-            </a:endParaRPr>
-          </a:p>
-        </p:txBody>
-      </p:sp>
-    </p:spTree>
-  </p:cSld>
-  <p:clrMapOvr>
-    <a:masterClrMapping/>
-  </p:clrMapOvr>
-</p:sld>
-</file>
-
-<file path=ppt/slides/slide5.xml><?xml version="1.0" encoding="utf-8"?>
-<p:sld xmlns:a="http://schemas.openxmlformats.org/drawingml/2006/main" xmlns:r="http://schemas.openxmlformats.org/officeDocument/2006/relationships" xmlns:p="http://schemas.openxmlformats.org/presentationml/2006/main">
-  <p:cSld>
-    <p:bg>
-      <p:bgPr>
-        <a:solidFill>
-          <a:srgbClr val="F4F2EC"/>
-        </a:solidFill>
-        <a:effectLst/>
-      </p:bgPr>
-    </p:bg>
-    <p:spTree>
-      <p:nvGrpSpPr>
-        <p:cNvPr id="1" name=""/>
-        <p:cNvGrpSpPr/>
-        <p:nvPr/>
-      </p:nvGrpSpPr>
-      <p:grpSpPr/>
-      <p:sp>
-        <p:nvSpPr>
           <p:cNvPr id="5" name="矩形 4"/>
           <p:cNvSpPr>
             <a:spLocks noGrp="1"/>
@@ -5675,7 +4351,7 @@
               </a:defRPr>
             </a:pPr>
             <a:r>
-              <a:rPr sz="3300" b="1">
+              <a:rPr lang="zh-CN" sz="3300" b="1">
                 <a:solidFill>
                   <a:srgbClr val="172A2A"/>
                 </a:solidFill>
@@ -5683,1421 +4359,19 @@
                 <a:ea typeface="Hiragino Sans GB" panose="020B0300000000000000" charset="-122"/>
                 <a:cs typeface="Hiragino Sans GB" panose="020B0300000000000000" charset="-122"/>
               </a:rPr>
-              <a:t>核心数据表：每张表有多少行</a:t>
+              <a:t>目标</a:t>
             </a:r>
-            <a:endParaRPr sz="3300" b="1">
-              <a:solidFill>
-                <a:srgbClr val="172A2A"/>
-              </a:solidFill>
-              <a:latin typeface="Hiragino Sans GB" panose="020B0300000000000000" charset="-122"/>
-              <a:ea typeface="Hiragino Sans GB" panose="020B0300000000000000" charset="-122"/>
-              <a:cs typeface="Hiragino Sans GB" panose="020B0300000000000000" charset="-122"/>
-            </a:endParaRPr>
-          </a:p>
-        </p:txBody>
-      </p:sp>
-      <p:graphicFrame>
-        <p:nvGraphicFramePr>
-          <p:cNvPr id="4" name="表格 3"/>
-          <p:cNvGraphicFramePr/>
-          <p:nvPr/>
-        </p:nvGraphicFramePr>
-        <p:xfrm>
-          <a:off x="609600" y="1562100"/>
-          <a:ext cx="10972800" cy="4057650"/>
-        </p:xfrm>
-        <a:graphic>
-          <a:graphicData uri="http://schemas.openxmlformats.org/drawingml/2006/table">
-            <a:tbl>
-              <a:tblPr firstRow="1" lastRow="1"/>
-              <a:tblGrid>
-                <a:gridCol w="3476625"/>
-                <a:gridCol w="2238375"/>
-                <a:gridCol w="5257800"/>
-              </a:tblGrid>
-              <a:tr h="450850">
-                <a:tc>
-                  <a:txBody>
-                    <a:bodyPr/>
-                    <a:lstStyle/>
-                    <a:p>
-                      <a:pPr algn="l"/>
-                      <a:r>
-                        <a:rPr sz="1800" b="1">
-                          <a:solidFill>
-                            <a:srgbClr val="FFFFFF"/>
-                          </a:solidFill>
-                          <a:latin typeface="Hiragino Sans GB" panose="020B0300000000000000" charset="-122"/>
-                          <a:ea typeface="Hiragino Sans GB" panose="020B0300000000000000" charset="-122"/>
-                          <a:cs typeface="Hiragino Sans GB" panose="020B0300000000000000" charset="-122"/>
-                        </a:rPr>
-                        <a:t>数据表</a:t>
-                      </a:r>
-                      <a:endParaRPr sz="1800" b="1">
-                        <a:solidFill>
-                          <a:srgbClr val="FFFFFF"/>
-                        </a:solidFill>
-                        <a:latin typeface="Hiragino Sans GB" panose="020B0300000000000000" charset="-122"/>
-                        <a:ea typeface="Hiragino Sans GB" panose="020B0300000000000000" charset="-122"/>
-                        <a:cs typeface="Hiragino Sans GB" panose="020B0300000000000000" charset="-122"/>
-                      </a:endParaRPr>
-                    </a:p>
-                  </a:txBody>
-                  <a:tcPr marL="133350" marR="133350" marT="76200" marB="76200" anchor="ctr">
-                    <a:lnL w="6191">
-                      <a:solidFill>
-                        <a:srgbClr val="D8DED7"/>
-                      </a:solidFill>
-                      <a:prstDash val="solid"/>
-                    </a:lnL>
-                    <a:lnR w="6191">
-                      <a:solidFill>
-                        <a:srgbClr val="D8DED7"/>
-                      </a:solidFill>
-                      <a:prstDash val="solid"/>
-                    </a:lnR>
-                    <a:lnT w="6191">
-                      <a:solidFill>
-                        <a:srgbClr val="D8DED7"/>
-                      </a:solidFill>
-                      <a:prstDash val="solid"/>
-                    </a:lnT>
-                    <a:lnB w="6191">
-                      <a:solidFill>
-                        <a:srgbClr val="D8DED7"/>
-                      </a:solidFill>
-                      <a:prstDash val="solid"/>
-                    </a:lnB>
-                    <a:solidFill>
-                      <a:srgbClr val="246A5F"/>
-                    </a:solidFill>
-                  </a:tcPr>
-                </a:tc>
-                <a:tc>
-                  <a:txBody>
-                    <a:bodyPr/>
-                    <a:lstStyle/>
-                    <a:p>
-                      <a:pPr algn="r"/>
-                      <a:r>
-                        <a:rPr sz="1800" b="1">
-                          <a:solidFill>
-                            <a:srgbClr val="FFFFFF"/>
-                          </a:solidFill>
-                          <a:latin typeface="Hiragino Sans GB" panose="020B0300000000000000" charset="-122"/>
-                          <a:ea typeface="Hiragino Sans GB" panose="020B0300000000000000" charset="-122"/>
-                          <a:cs typeface="Hiragino Sans GB" panose="020B0300000000000000" charset="-122"/>
-                        </a:rPr>
-                        <a:t>行数</a:t>
-                      </a:r>
-                      <a:endParaRPr sz="1800" b="1">
-                        <a:solidFill>
-                          <a:srgbClr val="FFFFFF"/>
-                        </a:solidFill>
-                        <a:latin typeface="Hiragino Sans GB" panose="020B0300000000000000" charset="-122"/>
-                        <a:ea typeface="Hiragino Sans GB" panose="020B0300000000000000" charset="-122"/>
-                        <a:cs typeface="Hiragino Sans GB" panose="020B0300000000000000" charset="-122"/>
-                      </a:endParaRPr>
-                    </a:p>
-                  </a:txBody>
-                  <a:tcPr marL="133350" marR="133350" marT="76200" marB="76200" anchor="ctr">
-                    <a:lnR w="6191">
-                      <a:solidFill>
-                        <a:srgbClr val="D8DED7"/>
-                      </a:solidFill>
-                      <a:prstDash val="solid"/>
-                    </a:lnR>
-                    <a:lnT w="6191">
-                      <a:solidFill>
-                        <a:srgbClr val="D8DED7"/>
-                      </a:solidFill>
-                      <a:prstDash val="solid"/>
-                    </a:lnT>
-                    <a:lnB w="6191">
-                      <a:solidFill>
-                        <a:srgbClr val="D8DED7"/>
-                      </a:solidFill>
-                      <a:prstDash val="solid"/>
-                    </a:lnB>
-                    <a:solidFill>
-                      <a:srgbClr val="246A5F"/>
-                    </a:solidFill>
-                  </a:tcPr>
-                </a:tc>
-                <a:tc>
-                  <a:txBody>
-                    <a:bodyPr/>
-                    <a:lstStyle/>
-                    <a:p>
-                      <a:pPr algn="l"/>
-                      <a:r>
-                        <a:rPr sz="1800" b="1">
-                          <a:solidFill>
-                            <a:srgbClr val="FFFFFF"/>
-                          </a:solidFill>
-                          <a:latin typeface="Hiragino Sans GB" panose="020B0300000000000000" charset="-122"/>
-                          <a:ea typeface="Hiragino Sans GB" panose="020B0300000000000000" charset="-122"/>
-                          <a:cs typeface="Hiragino Sans GB" panose="020B0300000000000000" charset="-122"/>
-                        </a:rPr>
-                        <a:t>内容</a:t>
-                      </a:r>
-                      <a:endParaRPr sz="1800" b="1">
-                        <a:solidFill>
-                          <a:srgbClr val="FFFFFF"/>
-                        </a:solidFill>
-                        <a:latin typeface="Hiragino Sans GB" panose="020B0300000000000000" charset="-122"/>
-                        <a:ea typeface="Hiragino Sans GB" panose="020B0300000000000000" charset="-122"/>
-                        <a:cs typeface="Hiragino Sans GB" panose="020B0300000000000000" charset="-122"/>
-                      </a:endParaRPr>
-                    </a:p>
-                  </a:txBody>
-                  <a:tcPr marL="133350" marR="133350" marT="76200" marB="76200" anchor="ctr">
-                    <a:lnR w="6191">
-                      <a:solidFill>
-                        <a:srgbClr val="D8DED7"/>
-                      </a:solidFill>
-                      <a:prstDash val="solid"/>
-                    </a:lnR>
-                    <a:lnT w="6191">
-                      <a:solidFill>
-                        <a:srgbClr val="D8DED7"/>
-                      </a:solidFill>
-                      <a:prstDash val="solid"/>
-                    </a:lnT>
-                    <a:lnB w="6191">
-                      <a:solidFill>
-                        <a:srgbClr val="D8DED7"/>
-                      </a:solidFill>
-                      <a:prstDash val="solid"/>
-                    </a:lnB>
-                    <a:solidFill>
-                      <a:srgbClr val="246A5F"/>
-                    </a:solidFill>
-                  </a:tcPr>
-                </a:tc>
-              </a:tr>
-              <a:tr h="450850">
-                <a:tc>
-                  <a:txBody>
-                    <a:bodyPr/>
-                    <a:lstStyle/>
-                    <a:p>
-                      <a:pPr algn="l"/>
-                      <a:r>
-                        <a:rPr sz="1800" b="0">
-                          <a:solidFill>
-                            <a:srgbClr val="172A2A"/>
-                          </a:solidFill>
-                          <a:latin typeface="Hiragino Sans GB" panose="020B0300000000000000" charset="-122"/>
-                          <a:ea typeface="Hiragino Sans GB" panose="020B0300000000000000" charset="-122"/>
-                          <a:cs typeface="Hiragino Sans GB" panose="020B0300000000000000" charset="-122"/>
-                        </a:rPr>
-                        <a:t>games</a:t>
-                      </a:r>
-                      <a:endParaRPr sz="1800" b="0">
-                        <a:solidFill>
-                          <a:srgbClr val="172A2A"/>
-                        </a:solidFill>
-                        <a:latin typeface="Hiragino Sans GB" panose="020B0300000000000000" charset="-122"/>
-                        <a:ea typeface="Hiragino Sans GB" panose="020B0300000000000000" charset="-122"/>
-                        <a:cs typeface="Hiragino Sans GB" panose="020B0300000000000000" charset="-122"/>
-                      </a:endParaRPr>
-                    </a:p>
-                  </a:txBody>
-                  <a:tcPr marL="133350" marR="133350" marT="76200" marB="76200" anchor="ctr">
-                    <a:lnL w="6191">
-                      <a:solidFill>
-                        <a:srgbClr val="D8DED7"/>
-                      </a:solidFill>
-                      <a:prstDash val="solid"/>
-                    </a:lnL>
-                    <a:lnR w="6191">
-                      <a:solidFill>
-                        <a:srgbClr val="D8DED7"/>
-                      </a:solidFill>
-                      <a:prstDash val="solid"/>
-                    </a:lnR>
-                    <a:lnB w="6191">
-                      <a:solidFill>
-                        <a:srgbClr val="D8DED7"/>
-                      </a:solidFill>
-                      <a:prstDash val="solid"/>
-                    </a:lnB>
-                    <a:solidFill>
-                      <a:srgbClr val="F4F2EC"/>
-                    </a:solidFill>
-                  </a:tcPr>
-                </a:tc>
-                <a:tc>
-                  <a:txBody>
-                    <a:bodyPr/>
-                    <a:lstStyle/>
-                    <a:p>
-                      <a:pPr algn="r"/>
-                      <a:r>
-                        <a:rPr sz="1800" b="0">
-                          <a:solidFill>
-                            <a:srgbClr val="172A2A"/>
-                          </a:solidFill>
-                          <a:latin typeface="Hiragino Sans GB" panose="020B0300000000000000" charset="-122"/>
-                          <a:ea typeface="Hiragino Sans GB" panose="020B0300000000000000" charset="-122"/>
-                          <a:cs typeface="Hiragino Sans GB" panose="020B0300000000000000" charset="-122"/>
-                        </a:rPr>
-                        <a:t>50,956</a:t>
-                      </a:r>
-                      <a:endParaRPr sz="1800" b="0">
-                        <a:solidFill>
-                          <a:srgbClr val="172A2A"/>
-                        </a:solidFill>
-                        <a:latin typeface="Hiragino Sans GB" panose="020B0300000000000000" charset="-122"/>
-                        <a:ea typeface="Hiragino Sans GB" panose="020B0300000000000000" charset="-122"/>
-                        <a:cs typeface="Hiragino Sans GB" panose="020B0300000000000000" charset="-122"/>
-                      </a:endParaRPr>
-                    </a:p>
-                  </a:txBody>
-                  <a:tcPr marL="133350" marR="133350" marT="76200" marB="76200" anchor="ctr">
-                    <a:lnR w="6191">
-                      <a:solidFill>
-                        <a:srgbClr val="D8DED7"/>
-                      </a:solidFill>
-                      <a:prstDash val="solid"/>
-                    </a:lnR>
-                    <a:lnB w="6191">
-                      <a:solidFill>
-                        <a:srgbClr val="D8DED7"/>
-                      </a:solidFill>
-                      <a:prstDash val="solid"/>
-                    </a:lnB>
-                    <a:solidFill>
-                      <a:srgbClr val="F4F2EC"/>
-                    </a:solidFill>
-                  </a:tcPr>
-                </a:tc>
-                <a:tc>
-                  <a:txBody>
-                    <a:bodyPr/>
-                    <a:lstStyle/>
-                    <a:p>
-                      <a:pPr algn="l"/>
-                      <a:r>
-                        <a:rPr sz="1800" b="0">
-                          <a:solidFill>
-                            <a:srgbClr val="172A2A"/>
-                          </a:solidFill>
-                          <a:latin typeface="Hiragino Sans GB" panose="020B0300000000000000" charset="-122"/>
-                          <a:ea typeface="Hiragino Sans GB" panose="020B0300000000000000" charset="-122"/>
-                          <a:cs typeface="Hiragino Sans GB" panose="020B0300000000000000" charset="-122"/>
-                        </a:rPr>
-                        <a:t>游戏主表</a:t>
-                      </a:r>
-                      <a:endParaRPr sz="1800" b="0">
-                        <a:solidFill>
-                          <a:srgbClr val="172A2A"/>
-                        </a:solidFill>
-                        <a:latin typeface="Hiragino Sans GB" panose="020B0300000000000000" charset="-122"/>
-                        <a:ea typeface="Hiragino Sans GB" panose="020B0300000000000000" charset="-122"/>
-                        <a:cs typeface="Hiragino Sans GB" panose="020B0300000000000000" charset="-122"/>
-                      </a:endParaRPr>
-                    </a:p>
-                  </a:txBody>
-                  <a:tcPr marL="133350" marR="133350" marT="76200" marB="76200" anchor="ctr">
-                    <a:lnR w="6191">
-                      <a:solidFill>
-                        <a:srgbClr val="D8DED7"/>
-                      </a:solidFill>
-                      <a:prstDash val="solid"/>
-                    </a:lnR>
-                    <a:lnB w="6191">
-                      <a:solidFill>
-                        <a:srgbClr val="D8DED7"/>
-                      </a:solidFill>
-                      <a:prstDash val="solid"/>
-                    </a:lnB>
-                    <a:solidFill>
-                      <a:srgbClr val="F4F2EC"/>
-                    </a:solidFill>
-                  </a:tcPr>
-                </a:tc>
-              </a:tr>
-              <a:tr h="450850">
-                <a:tc>
-                  <a:txBody>
-                    <a:bodyPr/>
-                    <a:lstStyle/>
-                    <a:p>
-                      <a:pPr algn="l"/>
-                      <a:r>
-                        <a:rPr sz="1800" b="0">
-                          <a:solidFill>
-                            <a:srgbClr val="172A2A"/>
-                          </a:solidFill>
-                          <a:latin typeface="Hiragino Sans GB" panose="020B0300000000000000" charset="-122"/>
-                          <a:ea typeface="Hiragino Sans GB" panose="020B0300000000000000" charset="-122"/>
-                          <a:cs typeface="Hiragino Sans GB" panose="020B0300000000000000" charset="-122"/>
-                        </a:rPr>
-                        <a:t>store_search_games</a:t>
-                      </a:r>
-                      <a:endParaRPr sz="1800" b="0">
-                        <a:solidFill>
-                          <a:srgbClr val="172A2A"/>
-                        </a:solidFill>
-                        <a:latin typeface="Hiragino Sans GB" panose="020B0300000000000000" charset="-122"/>
-                        <a:ea typeface="Hiragino Sans GB" panose="020B0300000000000000" charset="-122"/>
-                        <a:cs typeface="Hiragino Sans GB" panose="020B0300000000000000" charset="-122"/>
-                      </a:endParaRPr>
-                    </a:p>
-                  </a:txBody>
-                  <a:tcPr marL="133350" marR="133350" marT="76200" marB="76200" anchor="ctr">
-                    <a:lnL w="6191">
-                      <a:solidFill>
-                        <a:srgbClr val="D8DED7"/>
-                      </a:solidFill>
-                      <a:prstDash val="solid"/>
-                    </a:lnL>
-                    <a:lnR w="6191">
-                      <a:solidFill>
-                        <a:srgbClr val="D8DED7"/>
-                      </a:solidFill>
-                      <a:prstDash val="solid"/>
-                    </a:lnR>
-                    <a:lnB w="6191">
-                      <a:solidFill>
-                        <a:srgbClr val="D8DED7"/>
-                      </a:solidFill>
-                      <a:prstDash val="solid"/>
-                    </a:lnB>
-                    <a:solidFill>
-                      <a:srgbClr val="F4F2EC"/>
-                    </a:solidFill>
-                  </a:tcPr>
-                </a:tc>
-                <a:tc>
-                  <a:txBody>
-                    <a:bodyPr/>
-                    <a:lstStyle/>
-                    <a:p>
-                      <a:pPr algn="r"/>
-                      <a:r>
-                        <a:rPr sz="1800" b="0">
-                          <a:solidFill>
-                            <a:srgbClr val="172A2A"/>
-                          </a:solidFill>
-                          <a:latin typeface="Hiragino Sans GB" panose="020B0300000000000000" charset="-122"/>
-                          <a:ea typeface="Hiragino Sans GB" panose="020B0300000000000000" charset="-122"/>
-                          <a:cs typeface="Hiragino Sans GB" panose="020B0300000000000000" charset="-122"/>
-                        </a:rPr>
-                        <a:t>50,956</a:t>
-                      </a:r>
-                      <a:endParaRPr sz="1800" b="0">
-                        <a:solidFill>
-                          <a:srgbClr val="172A2A"/>
-                        </a:solidFill>
-                        <a:latin typeface="Hiragino Sans GB" panose="020B0300000000000000" charset="-122"/>
-                        <a:ea typeface="Hiragino Sans GB" panose="020B0300000000000000" charset="-122"/>
-                        <a:cs typeface="Hiragino Sans GB" panose="020B0300000000000000" charset="-122"/>
-                      </a:endParaRPr>
-                    </a:p>
-                  </a:txBody>
-                  <a:tcPr marL="133350" marR="133350" marT="76200" marB="76200" anchor="ctr">
-                    <a:lnR w="6191">
-                      <a:solidFill>
-                        <a:srgbClr val="D8DED7"/>
-                      </a:solidFill>
-                      <a:prstDash val="solid"/>
-                    </a:lnR>
-                    <a:lnB w="6191">
-                      <a:solidFill>
-                        <a:srgbClr val="D8DED7"/>
-                      </a:solidFill>
-                      <a:prstDash val="solid"/>
-                    </a:lnB>
-                    <a:solidFill>
-                      <a:srgbClr val="F4F2EC"/>
-                    </a:solidFill>
-                  </a:tcPr>
-                </a:tc>
-                <a:tc>
-                  <a:txBody>
-                    <a:bodyPr/>
-                    <a:lstStyle/>
-                    <a:p>
-                      <a:pPr algn="l"/>
-                      <a:r>
-                        <a:rPr sz="1800" b="0">
-                          <a:solidFill>
-                            <a:srgbClr val="172A2A"/>
-                          </a:solidFill>
-                          <a:latin typeface="Hiragino Sans GB" panose="020B0300000000000000" charset="-122"/>
-                          <a:ea typeface="Hiragino Sans GB" panose="020B0300000000000000" charset="-122"/>
-                          <a:cs typeface="Hiragino Sans GB" panose="020B0300000000000000" charset="-122"/>
-                        </a:rPr>
-                        <a:t>商店枚举记录</a:t>
-                      </a:r>
-                      <a:endParaRPr sz="1800" b="0">
-                        <a:solidFill>
-                          <a:srgbClr val="172A2A"/>
-                        </a:solidFill>
-                        <a:latin typeface="Hiragino Sans GB" panose="020B0300000000000000" charset="-122"/>
-                        <a:ea typeface="Hiragino Sans GB" panose="020B0300000000000000" charset="-122"/>
-                        <a:cs typeface="Hiragino Sans GB" panose="020B0300000000000000" charset="-122"/>
-                      </a:endParaRPr>
-                    </a:p>
-                  </a:txBody>
-                  <a:tcPr marL="133350" marR="133350" marT="76200" marB="76200" anchor="ctr">
-                    <a:lnR w="6191">
-                      <a:solidFill>
-                        <a:srgbClr val="D8DED7"/>
-                      </a:solidFill>
-                      <a:prstDash val="solid"/>
-                    </a:lnR>
-                    <a:lnB w="6191">
-                      <a:solidFill>
-                        <a:srgbClr val="D8DED7"/>
-                      </a:solidFill>
-                      <a:prstDash val="solid"/>
-                    </a:lnB>
-                    <a:solidFill>
-                      <a:srgbClr val="F4F2EC"/>
-                    </a:solidFill>
-                  </a:tcPr>
-                </a:tc>
-              </a:tr>
-              <a:tr h="450850">
-                <a:tc>
-                  <a:txBody>
-                    <a:bodyPr/>
-                    <a:lstStyle/>
-                    <a:p>
-                      <a:pPr algn="l"/>
-                      <a:r>
-                        <a:rPr sz="1800" b="0">
-                          <a:solidFill>
-                            <a:srgbClr val="172A2A"/>
-                          </a:solidFill>
-                          <a:latin typeface="Hiragino Sans GB" panose="020B0300000000000000" charset="-122"/>
-                          <a:ea typeface="Hiragino Sans GB" panose="020B0300000000000000" charset="-122"/>
-                          <a:cs typeface="Hiragino Sans GB" panose="020B0300000000000000" charset="-122"/>
-                        </a:rPr>
-                        <a:t>steam_appdetails</a:t>
-                      </a:r>
-                      <a:endParaRPr sz="1800" b="0">
-                        <a:solidFill>
-                          <a:srgbClr val="172A2A"/>
-                        </a:solidFill>
-                        <a:latin typeface="Hiragino Sans GB" panose="020B0300000000000000" charset="-122"/>
-                        <a:ea typeface="Hiragino Sans GB" panose="020B0300000000000000" charset="-122"/>
-                        <a:cs typeface="Hiragino Sans GB" panose="020B0300000000000000" charset="-122"/>
-                      </a:endParaRPr>
-                    </a:p>
-                  </a:txBody>
-                  <a:tcPr marL="133350" marR="133350" marT="76200" marB="76200" anchor="ctr">
-                    <a:lnL w="6191">
-                      <a:solidFill>
-                        <a:srgbClr val="D8DED7"/>
-                      </a:solidFill>
-                      <a:prstDash val="solid"/>
-                    </a:lnL>
-                    <a:lnR w="6191">
-                      <a:solidFill>
-                        <a:srgbClr val="D8DED7"/>
-                      </a:solidFill>
-                      <a:prstDash val="solid"/>
-                    </a:lnR>
-                    <a:lnB w="6191">
-                      <a:solidFill>
-                        <a:srgbClr val="D8DED7"/>
-                      </a:solidFill>
-                      <a:prstDash val="solid"/>
-                    </a:lnB>
-                    <a:solidFill>
-                      <a:srgbClr val="F4F2EC"/>
-                    </a:solidFill>
-                  </a:tcPr>
-                </a:tc>
-                <a:tc>
-                  <a:txBody>
-                    <a:bodyPr/>
-                    <a:lstStyle/>
-                    <a:p>
-                      <a:pPr algn="r"/>
-                      <a:r>
-                        <a:rPr sz="1800" b="0">
-                          <a:solidFill>
-                            <a:srgbClr val="172A2A"/>
-                          </a:solidFill>
-                          <a:latin typeface="Hiragino Sans GB" panose="020B0300000000000000" charset="-122"/>
-                          <a:ea typeface="Hiragino Sans GB" panose="020B0300000000000000" charset="-122"/>
-                          <a:cs typeface="Hiragino Sans GB" panose="020B0300000000000000" charset="-122"/>
-                        </a:rPr>
-                        <a:t>50,954</a:t>
-                      </a:r>
-                      <a:endParaRPr sz="1800" b="0">
-                        <a:solidFill>
-                          <a:srgbClr val="172A2A"/>
-                        </a:solidFill>
-                        <a:latin typeface="Hiragino Sans GB" panose="020B0300000000000000" charset="-122"/>
-                        <a:ea typeface="Hiragino Sans GB" panose="020B0300000000000000" charset="-122"/>
-                        <a:cs typeface="Hiragino Sans GB" panose="020B0300000000000000" charset="-122"/>
-                      </a:endParaRPr>
-                    </a:p>
-                  </a:txBody>
-                  <a:tcPr marL="133350" marR="133350" marT="76200" marB="76200" anchor="ctr">
-                    <a:lnR w="6191">
-                      <a:solidFill>
-                        <a:srgbClr val="D8DED7"/>
-                      </a:solidFill>
-                      <a:prstDash val="solid"/>
-                    </a:lnR>
-                    <a:lnB w="6191">
-                      <a:solidFill>
-                        <a:srgbClr val="D8DED7"/>
-                      </a:solidFill>
-                      <a:prstDash val="solid"/>
-                    </a:lnB>
-                    <a:solidFill>
-                      <a:srgbClr val="F4F2EC"/>
-                    </a:solidFill>
-                  </a:tcPr>
-                </a:tc>
-                <a:tc>
-                  <a:txBody>
-                    <a:bodyPr/>
-                    <a:lstStyle/>
-                    <a:p>
-                      <a:pPr algn="l"/>
-                      <a:r>
-                        <a:rPr sz="1800" b="0">
-                          <a:solidFill>
-                            <a:srgbClr val="172A2A"/>
-                          </a:solidFill>
-                          <a:latin typeface="Hiragino Sans GB" panose="020B0300000000000000" charset="-122"/>
-                          <a:ea typeface="Hiragino Sans GB" panose="020B0300000000000000" charset="-122"/>
-                          <a:cs typeface="Hiragino Sans GB" panose="020B0300000000000000" charset="-122"/>
-                        </a:rPr>
-                        <a:t>商店详情</a:t>
-                      </a:r>
-                      <a:endParaRPr sz="1800" b="0">
-                        <a:solidFill>
-                          <a:srgbClr val="172A2A"/>
-                        </a:solidFill>
-                        <a:latin typeface="Hiragino Sans GB" panose="020B0300000000000000" charset="-122"/>
-                        <a:ea typeface="Hiragino Sans GB" panose="020B0300000000000000" charset="-122"/>
-                        <a:cs typeface="Hiragino Sans GB" panose="020B0300000000000000" charset="-122"/>
-                      </a:endParaRPr>
-                    </a:p>
-                  </a:txBody>
-                  <a:tcPr marL="133350" marR="133350" marT="76200" marB="76200" anchor="ctr">
-                    <a:lnR w="6191">
-                      <a:solidFill>
-                        <a:srgbClr val="D8DED7"/>
-                      </a:solidFill>
-                      <a:prstDash val="solid"/>
-                    </a:lnR>
-                    <a:lnB w="6191">
-                      <a:solidFill>
-                        <a:srgbClr val="D8DED7"/>
-                      </a:solidFill>
-                      <a:prstDash val="solid"/>
-                    </a:lnB>
-                    <a:solidFill>
-                      <a:srgbClr val="F4F2EC"/>
-                    </a:solidFill>
-                  </a:tcPr>
-                </a:tc>
-              </a:tr>
-              <a:tr h="450850">
-                <a:tc>
-                  <a:txBody>
-                    <a:bodyPr/>
-                    <a:lstStyle/>
-                    <a:p>
-                      <a:pPr algn="l"/>
-                      <a:r>
-                        <a:rPr sz="1800" b="0">
-                          <a:solidFill>
-                            <a:srgbClr val="172A2A"/>
-                          </a:solidFill>
-                          <a:latin typeface="Hiragino Sans GB" panose="020B0300000000000000" charset="-122"/>
-                          <a:ea typeface="Hiragino Sans GB" panose="020B0300000000000000" charset="-122"/>
-                          <a:cs typeface="Hiragino Sans GB" panose="020B0300000000000000" charset="-122"/>
-                        </a:rPr>
-                        <a:t>steamspy_games</a:t>
-                      </a:r>
-                      <a:endParaRPr sz="1800" b="0">
-                        <a:solidFill>
-                          <a:srgbClr val="172A2A"/>
-                        </a:solidFill>
-                        <a:latin typeface="Hiragino Sans GB" panose="020B0300000000000000" charset="-122"/>
-                        <a:ea typeface="Hiragino Sans GB" panose="020B0300000000000000" charset="-122"/>
-                        <a:cs typeface="Hiragino Sans GB" panose="020B0300000000000000" charset="-122"/>
-                      </a:endParaRPr>
-                    </a:p>
-                  </a:txBody>
-                  <a:tcPr marL="133350" marR="133350" marT="76200" marB="76200" anchor="ctr">
-                    <a:lnL w="6191">
-                      <a:solidFill>
-                        <a:srgbClr val="D8DED7"/>
-                      </a:solidFill>
-                      <a:prstDash val="solid"/>
-                    </a:lnL>
-                    <a:lnR w="6191">
-                      <a:solidFill>
-                        <a:srgbClr val="D8DED7"/>
-                      </a:solidFill>
-                      <a:prstDash val="solid"/>
-                    </a:lnR>
-                    <a:lnB w="6191">
-                      <a:solidFill>
-                        <a:srgbClr val="D8DED7"/>
-                      </a:solidFill>
-                      <a:prstDash val="solid"/>
-                    </a:lnB>
-                    <a:solidFill>
-                      <a:srgbClr val="F4F2EC"/>
-                    </a:solidFill>
-                  </a:tcPr>
-                </a:tc>
-                <a:tc>
-                  <a:txBody>
-                    <a:bodyPr/>
-                    <a:lstStyle/>
-                    <a:p>
-                      <a:pPr algn="r"/>
-                      <a:r>
-                        <a:rPr sz="1800" b="0">
-                          <a:solidFill>
-                            <a:srgbClr val="172A2A"/>
-                          </a:solidFill>
-                          <a:latin typeface="Hiragino Sans GB" panose="020B0300000000000000" charset="-122"/>
-                          <a:ea typeface="Hiragino Sans GB" panose="020B0300000000000000" charset="-122"/>
-                          <a:cs typeface="Hiragino Sans GB" panose="020B0300000000000000" charset="-122"/>
-                        </a:rPr>
-                        <a:t>50,741</a:t>
-                      </a:r>
-                      <a:endParaRPr sz="1800" b="0">
-                        <a:solidFill>
-                          <a:srgbClr val="172A2A"/>
-                        </a:solidFill>
-                        <a:latin typeface="Hiragino Sans GB" panose="020B0300000000000000" charset="-122"/>
-                        <a:ea typeface="Hiragino Sans GB" panose="020B0300000000000000" charset="-122"/>
-                        <a:cs typeface="Hiragino Sans GB" panose="020B0300000000000000" charset="-122"/>
-                      </a:endParaRPr>
-                    </a:p>
-                  </a:txBody>
-                  <a:tcPr marL="133350" marR="133350" marT="76200" marB="76200" anchor="ctr">
-                    <a:lnR w="6191">
-                      <a:solidFill>
-                        <a:srgbClr val="D8DED7"/>
-                      </a:solidFill>
-                      <a:prstDash val="solid"/>
-                    </a:lnR>
-                    <a:lnB w="6191">
-                      <a:solidFill>
-                        <a:srgbClr val="D8DED7"/>
-                      </a:solidFill>
-                      <a:prstDash val="solid"/>
-                    </a:lnB>
-                    <a:solidFill>
-                      <a:srgbClr val="F4F2EC"/>
-                    </a:solidFill>
-                  </a:tcPr>
-                </a:tc>
-                <a:tc>
-                  <a:txBody>
-                    <a:bodyPr/>
-                    <a:lstStyle/>
-                    <a:p>
-                      <a:pPr algn="l"/>
-                      <a:r>
-                        <a:rPr sz="1800" b="0">
-                          <a:solidFill>
-                            <a:srgbClr val="172A2A"/>
-                          </a:solidFill>
-                          <a:latin typeface="Hiragino Sans GB" panose="020B0300000000000000" charset="-122"/>
-                          <a:ea typeface="Hiragino Sans GB" panose="020B0300000000000000" charset="-122"/>
-                          <a:cs typeface="Hiragino Sans GB" panose="020B0300000000000000" charset="-122"/>
-                        </a:rPr>
-                        <a:t>热度与口碑</a:t>
-                      </a:r>
-                      <a:endParaRPr sz="1800" b="0">
-                        <a:solidFill>
-                          <a:srgbClr val="172A2A"/>
-                        </a:solidFill>
-                        <a:latin typeface="Hiragino Sans GB" panose="020B0300000000000000" charset="-122"/>
-                        <a:ea typeface="Hiragino Sans GB" panose="020B0300000000000000" charset="-122"/>
-                        <a:cs typeface="Hiragino Sans GB" panose="020B0300000000000000" charset="-122"/>
-                      </a:endParaRPr>
-                    </a:p>
-                  </a:txBody>
-                  <a:tcPr marL="133350" marR="133350" marT="76200" marB="76200" anchor="ctr">
-                    <a:lnR w="6191">
-                      <a:solidFill>
-                        <a:srgbClr val="D8DED7"/>
-                      </a:solidFill>
-                      <a:prstDash val="solid"/>
-                    </a:lnR>
-                    <a:lnB w="6191">
-                      <a:solidFill>
-                        <a:srgbClr val="D8DED7"/>
-                      </a:solidFill>
-                      <a:prstDash val="solid"/>
-                    </a:lnB>
-                    <a:solidFill>
-                      <a:srgbClr val="F4F2EC"/>
-                    </a:solidFill>
-                  </a:tcPr>
-                </a:tc>
-              </a:tr>
-              <a:tr h="450850">
-                <a:tc>
-                  <a:txBody>
-                    <a:bodyPr/>
-                    <a:lstStyle/>
-                    <a:p>
-                      <a:pPr algn="l"/>
-                      <a:r>
-                        <a:rPr sz="1800" b="0">
-                          <a:solidFill>
-                            <a:srgbClr val="172A2A"/>
-                          </a:solidFill>
-                          <a:latin typeface="Hiragino Sans GB" panose="020B0300000000000000" charset="-122"/>
-                          <a:ea typeface="Hiragino Sans GB" panose="020B0300000000000000" charset="-122"/>
-                          <a:cs typeface="Hiragino Sans GB" panose="020B0300000000000000" charset="-122"/>
-                        </a:rPr>
-                        <a:t>rawg_games</a:t>
-                      </a:r>
-                      <a:endParaRPr sz="1800" b="0">
-                        <a:solidFill>
-                          <a:srgbClr val="172A2A"/>
-                        </a:solidFill>
-                        <a:latin typeface="Hiragino Sans GB" panose="020B0300000000000000" charset="-122"/>
-                        <a:ea typeface="Hiragino Sans GB" panose="020B0300000000000000" charset="-122"/>
-                        <a:cs typeface="Hiragino Sans GB" panose="020B0300000000000000" charset="-122"/>
-                      </a:endParaRPr>
-                    </a:p>
-                  </a:txBody>
-                  <a:tcPr marL="133350" marR="133350" marT="76200" marB="76200" anchor="ctr">
-                    <a:lnL w="6191">
-                      <a:solidFill>
-                        <a:srgbClr val="D8DED7"/>
-                      </a:solidFill>
-                      <a:prstDash val="solid"/>
-                    </a:lnL>
-                    <a:lnR w="6191">
-                      <a:solidFill>
-                        <a:srgbClr val="D8DED7"/>
-                      </a:solidFill>
-                      <a:prstDash val="solid"/>
-                    </a:lnR>
-                    <a:lnB w="6191">
-                      <a:solidFill>
-                        <a:srgbClr val="D8DED7"/>
-                      </a:solidFill>
-                      <a:prstDash val="solid"/>
-                    </a:lnB>
-                    <a:solidFill>
-                      <a:srgbClr val="F4F2EC"/>
-                    </a:solidFill>
-                  </a:tcPr>
-                </a:tc>
-                <a:tc>
-                  <a:txBody>
-                    <a:bodyPr/>
-                    <a:lstStyle/>
-                    <a:p>
-                      <a:pPr algn="r"/>
-                      <a:r>
-                        <a:rPr sz="1800" b="0">
-                          <a:solidFill>
-                            <a:srgbClr val="172A2A"/>
-                          </a:solidFill>
-                          <a:latin typeface="Hiragino Sans GB" panose="020B0300000000000000" charset="-122"/>
-                          <a:ea typeface="Hiragino Sans GB" panose="020B0300000000000000" charset="-122"/>
-                          <a:cs typeface="Hiragino Sans GB" panose="020B0300000000000000" charset="-122"/>
-                        </a:rPr>
-                        <a:t>15,770</a:t>
-                      </a:r>
-                      <a:endParaRPr sz="1800" b="0">
-                        <a:solidFill>
-                          <a:srgbClr val="172A2A"/>
-                        </a:solidFill>
-                        <a:latin typeface="Hiragino Sans GB" panose="020B0300000000000000" charset="-122"/>
-                        <a:ea typeface="Hiragino Sans GB" panose="020B0300000000000000" charset="-122"/>
-                        <a:cs typeface="Hiragino Sans GB" panose="020B0300000000000000" charset="-122"/>
-                      </a:endParaRPr>
-                    </a:p>
-                  </a:txBody>
-                  <a:tcPr marL="133350" marR="133350" marT="76200" marB="76200" anchor="ctr">
-                    <a:lnR w="6191">
-                      <a:solidFill>
-                        <a:srgbClr val="D8DED7"/>
-                      </a:solidFill>
-                      <a:prstDash val="solid"/>
-                    </a:lnR>
-                    <a:lnB w="6191">
-                      <a:solidFill>
-                        <a:srgbClr val="D8DED7"/>
-                      </a:solidFill>
-                      <a:prstDash val="solid"/>
-                    </a:lnB>
-                    <a:solidFill>
-                      <a:srgbClr val="F4F2EC"/>
-                    </a:solidFill>
-                  </a:tcPr>
-                </a:tc>
-                <a:tc>
-                  <a:txBody>
-                    <a:bodyPr/>
-                    <a:lstStyle/>
-                    <a:p>
-                      <a:pPr algn="l"/>
-                      <a:r>
-                        <a:rPr sz="1800" b="0">
-                          <a:solidFill>
-                            <a:srgbClr val="172A2A"/>
-                          </a:solidFill>
-                          <a:latin typeface="Hiragino Sans GB" panose="020B0300000000000000" charset="-122"/>
-                          <a:ea typeface="Hiragino Sans GB" panose="020B0300000000000000" charset="-122"/>
-                          <a:cs typeface="Hiragino Sans GB" panose="020B0300000000000000" charset="-122"/>
-                        </a:rPr>
-                        <a:t>评分、时长与状态</a:t>
-                      </a:r>
-                      <a:endParaRPr sz="1800" b="0">
-                        <a:solidFill>
-                          <a:srgbClr val="172A2A"/>
-                        </a:solidFill>
-                        <a:latin typeface="Hiragino Sans GB" panose="020B0300000000000000" charset="-122"/>
-                        <a:ea typeface="Hiragino Sans GB" panose="020B0300000000000000" charset="-122"/>
-                        <a:cs typeface="Hiragino Sans GB" panose="020B0300000000000000" charset="-122"/>
-                      </a:endParaRPr>
-                    </a:p>
-                  </a:txBody>
-                  <a:tcPr marL="133350" marR="133350" marT="76200" marB="76200" anchor="ctr">
-                    <a:lnR w="6191">
-                      <a:solidFill>
-                        <a:srgbClr val="D8DED7"/>
-                      </a:solidFill>
-                      <a:prstDash val="solid"/>
-                    </a:lnR>
-                    <a:lnB w="6191">
-                      <a:solidFill>
-                        <a:srgbClr val="D8DED7"/>
-                      </a:solidFill>
-                      <a:prstDash val="solid"/>
-                    </a:lnB>
-                    <a:solidFill>
-                      <a:srgbClr val="F4F2EC"/>
-                    </a:solidFill>
-                  </a:tcPr>
-                </a:tc>
-              </a:tr>
-              <a:tr h="450850">
-                <a:tc>
-                  <a:txBody>
-                    <a:bodyPr/>
-                    <a:lstStyle/>
-                    <a:p>
-                      <a:pPr algn="l"/>
-                      <a:r>
-                        <a:rPr sz="1800" b="0">
-                          <a:solidFill>
-                            <a:srgbClr val="172A2A"/>
-                          </a:solidFill>
-                          <a:latin typeface="Hiragino Sans GB" panose="020B0300000000000000" charset="-122"/>
-                          <a:ea typeface="Hiragino Sans GB" panose="020B0300000000000000" charset="-122"/>
-                          <a:cs typeface="Hiragino Sans GB" panose="020B0300000000000000" charset="-122"/>
-                        </a:rPr>
-                        <a:t>achievements</a:t>
-                      </a:r>
-                      <a:endParaRPr sz="1800" b="0">
-                        <a:solidFill>
-                          <a:srgbClr val="172A2A"/>
-                        </a:solidFill>
-                        <a:latin typeface="Hiragino Sans GB" panose="020B0300000000000000" charset="-122"/>
-                        <a:ea typeface="Hiragino Sans GB" panose="020B0300000000000000" charset="-122"/>
-                        <a:cs typeface="Hiragino Sans GB" panose="020B0300000000000000" charset="-122"/>
-                      </a:endParaRPr>
-                    </a:p>
-                  </a:txBody>
-                  <a:tcPr marL="133350" marR="133350" marT="76200" marB="76200" anchor="ctr">
-                    <a:lnL w="6191">
-                      <a:solidFill>
-                        <a:srgbClr val="D8DED7"/>
-                      </a:solidFill>
-                      <a:prstDash val="solid"/>
-                    </a:lnL>
-                    <a:lnR w="6191">
-                      <a:solidFill>
-                        <a:srgbClr val="D8DED7"/>
-                      </a:solidFill>
-                      <a:prstDash val="solid"/>
-                    </a:lnR>
-                    <a:lnB w="6191">
-                      <a:solidFill>
-                        <a:srgbClr val="D8DED7"/>
-                      </a:solidFill>
-                      <a:prstDash val="solid"/>
-                    </a:lnB>
-                    <a:solidFill>
-                      <a:srgbClr val="F4F2EC"/>
-                    </a:solidFill>
-                  </a:tcPr>
-                </a:tc>
-                <a:tc>
-                  <a:txBody>
-                    <a:bodyPr/>
-                    <a:lstStyle/>
-                    <a:p>
-                      <a:pPr algn="r"/>
-                      <a:r>
-                        <a:rPr sz="1800" b="0">
-                          <a:solidFill>
-                            <a:srgbClr val="172A2A"/>
-                          </a:solidFill>
-                          <a:latin typeface="Hiragino Sans GB" panose="020B0300000000000000" charset="-122"/>
-                          <a:ea typeface="Hiragino Sans GB" panose="020B0300000000000000" charset="-122"/>
-                          <a:cs typeface="Hiragino Sans GB" panose="020B0300000000000000" charset="-122"/>
-                        </a:rPr>
-                        <a:t>1,971,064</a:t>
-                      </a:r>
-                      <a:endParaRPr sz="1800" b="0">
-                        <a:solidFill>
-                          <a:srgbClr val="172A2A"/>
-                        </a:solidFill>
-                        <a:latin typeface="Hiragino Sans GB" panose="020B0300000000000000" charset="-122"/>
-                        <a:ea typeface="Hiragino Sans GB" panose="020B0300000000000000" charset="-122"/>
-                        <a:cs typeface="Hiragino Sans GB" panose="020B0300000000000000" charset="-122"/>
-                      </a:endParaRPr>
-                    </a:p>
-                  </a:txBody>
-                  <a:tcPr marL="133350" marR="133350" marT="76200" marB="76200" anchor="ctr">
-                    <a:lnR w="6191">
-                      <a:solidFill>
-                        <a:srgbClr val="D8DED7"/>
-                      </a:solidFill>
-                      <a:prstDash val="solid"/>
-                    </a:lnR>
-                    <a:lnB w="6191">
-                      <a:solidFill>
-                        <a:srgbClr val="D8DED7"/>
-                      </a:solidFill>
-                      <a:prstDash val="solid"/>
-                    </a:lnB>
-                    <a:solidFill>
-                      <a:srgbClr val="F4F2EC"/>
-                    </a:solidFill>
-                  </a:tcPr>
-                </a:tc>
-                <a:tc>
-                  <a:txBody>
-                    <a:bodyPr/>
-                    <a:lstStyle/>
-                    <a:p>
-                      <a:pPr algn="l"/>
-                      <a:r>
-                        <a:rPr sz="1800" b="0">
-                          <a:solidFill>
-                            <a:srgbClr val="172A2A"/>
-                          </a:solidFill>
-                          <a:latin typeface="Hiragino Sans GB" panose="020B0300000000000000" charset="-122"/>
-                          <a:ea typeface="Hiragino Sans GB" panose="020B0300000000000000" charset="-122"/>
-                          <a:cs typeface="Hiragino Sans GB" panose="020B0300000000000000" charset="-122"/>
-                        </a:rPr>
-                        <a:t>成就及完成率</a:t>
-                      </a:r>
-                      <a:endParaRPr sz="1800" b="0">
-                        <a:solidFill>
-                          <a:srgbClr val="172A2A"/>
-                        </a:solidFill>
-                        <a:latin typeface="Hiragino Sans GB" panose="020B0300000000000000" charset="-122"/>
-                        <a:ea typeface="Hiragino Sans GB" panose="020B0300000000000000" charset="-122"/>
-                        <a:cs typeface="Hiragino Sans GB" panose="020B0300000000000000" charset="-122"/>
-                      </a:endParaRPr>
-                    </a:p>
-                  </a:txBody>
-                  <a:tcPr marL="133350" marR="133350" marT="76200" marB="76200" anchor="ctr">
-                    <a:lnR w="6191">
-                      <a:solidFill>
-                        <a:srgbClr val="D8DED7"/>
-                      </a:solidFill>
-                      <a:prstDash val="solid"/>
-                    </a:lnR>
-                    <a:lnB w="6191">
-                      <a:solidFill>
-                        <a:srgbClr val="D8DED7"/>
-                      </a:solidFill>
-                      <a:prstDash val="solid"/>
-                    </a:lnB>
-                    <a:solidFill>
-                      <a:srgbClr val="F4F2EC"/>
-                    </a:solidFill>
-                  </a:tcPr>
-                </a:tc>
-              </a:tr>
-              <a:tr h="450850">
-                <a:tc>
-                  <a:txBody>
-                    <a:bodyPr/>
-                    <a:lstStyle/>
-                    <a:p>
-                      <a:pPr algn="l"/>
-                      <a:r>
-                        <a:rPr sz="1800" b="0">
-                          <a:solidFill>
-                            <a:srgbClr val="172A2A"/>
-                          </a:solidFill>
-                          <a:latin typeface="Hiragino Sans GB" panose="020B0300000000000000" charset="-122"/>
-                          <a:ea typeface="Hiragino Sans GB" panose="020B0300000000000000" charset="-122"/>
-                          <a:cs typeface="Hiragino Sans GB" panose="020B0300000000000000" charset="-122"/>
-                        </a:rPr>
-                        <a:t>game_tags</a:t>
-                      </a:r>
-                      <a:endParaRPr sz="1800" b="0">
-                        <a:solidFill>
-                          <a:srgbClr val="172A2A"/>
-                        </a:solidFill>
-                        <a:latin typeface="Hiragino Sans GB" panose="020B0300000000000000" charset="-122"/>
-                        <a:ea typeface="Hiragino Sans GB" panose="020B0300000000000000" charset="-122"/>
-                        <a:cs typeface="Hiragino Sans GB" panose="020B0300000000000000" charset="-122"/>
-                      </a:endParaRPr>
-                    </a:p>
-                  </a:txBody>
-                  <a:tcPr marL="133350" marR="133350" marT="76200" marB="76200" anchor="ctr">
-                    <a:lnL w="6191">
-                      <a:solidFill>
-                        <a:srgbClr val="D8DED7"/>
-                      </a:solidFill>
-                      <a:prstDash val="solid"/>
-                    </a:lnL>
-                    <a:lnR w="6191">
-                      <a:solidFill>
-                        <a:srgbClr val="D8DED7"/>
-                      </a:solidFill>
-                      <a:prstDash val="solid"/>
-                    </a:lnR>
-                    <a:lnB w="6191">
-                      <a:solidFill>
-                        <a:srgbClr val="D8DED7"/>
-                      </a:solidFill>
-                      <a:prstDash val="solid"/>
-                    </a:lnB>
-                    <a:solidFill>
-                      <a:srgbClr val="F4F2EC"/>
-                    </a:solidFill>
-                  </a:tcPr>
-                </a:tc>
-                <a:tc>
-                  <a:txBody>
-                    <a:bodyPr/>
-                    <a:lstStyle/>
-                    <a:p>
-                      <a:pPr algn="r"/>
-                      <a:r>
-                        <a:rPr sz="1800" b="0">
-                          <a:solidFill>
-                            <a:srgbClr val="172A2A"/>
-                          </a:solidFill>
-                          <a:latin typeface="Hiragino Sans GB" panose="020B0300000000000000" charset="-122"/>
-                          <a:ea typeface="Hiragino Sans GB" panose="020B0300000000000000" charset="-122"/>
-                          <a:cs typeface="Hiragino Sans GB" panose="020B0300000000000000" charset="-122"/>
-                        </a:rPr>
-                        <a:t>888,837</a:t>
-                      </a:r>
-                      <a:endParaRPr sz="1800" b="0">
-                        <a:solidFill>
-                          <a:srgbClr val="172A2A"/>
-                        </a:solidFill>
-                        <a:latin typeface="Hiragino Sans GB" panose="020B0300000000000000" charset="-122"/>
-                        <a:ea typeface="Hiragino Sans GB" panose="020B0300000000000000" charset="-122"/>
-                        <a:cs typeface="Hiragino Sans GB" panose="020B0300000000000000" charset="-122"/>
-                      </a:endParaRPr>
-                    </a:p>
-                  </a:txBody>
-                  <a:tcPr marL="133350" marR="133350" marT="76200" marB="76200" anchor="ctr">
-                    <a:lnR w="6191">
-                      <a:solidFill>
-                        <a:srgbClr val="D8DED7"/>
-                      </a:solidFill>
-                      <a:prstDash val="solid"/>
-                    </a:lnR>
-                    <a:lnB w="6191">
-                      <a:solidFill>
-                        <a:srgbClr val="D8DED7"/>
-                      </a:solidFill>
-                      <a:prstDash val="solid"/>
-                    </a:lnB>
-                    <a:solidFill>
-                      <a:srgbClr val="F4F2EC"/>
-                    </a:solidFill>
-                  </a:tcPr>
-                </a:tc>
-                <a:tc>
-                  <a:txBody>
-                    <a:bodyPr/>
-                    <a:lstStyle/>
-                    <a:p>
-                      <a:pPr algn="l"/>
-                      <a:r>
-                        <a:rPr sz="1800" b="0">
-                          <a:solidFill>
-                            <a:srgbClr val="172A2A"/>
-                          </a:solidFill>
-                          <a:latin typeface="Hiragino Sans GB" panose="020B0300000000000000" charset="-122"/>
-                          <a:ea typeface="Hiragino Sans GB" panose="020B0300000000000000" charset="-122"/>
-                          <a:cs typeface="Hiragino Sans GB" panose="020B0300000000000000" charset="-122"/>
-                        </a:rPr>
-                        <a:t>游戏与标签关系</a:t>
-                      </a:r>
-                      <a:endParaRPr sz="1800" b="0">
-                        <a:solidFill>
-                          <a:srgbClr val="172A2A"/>
-                        </a:solidFill>
-                        <a:latin typeface="Hiragino Sans GB" panose="020B0300000000000000" charset="-122"/>
-                        <a:ea typeface="Hiragino Sans GB" panose="020B0300000000000000" charset="-122"/>
-                        <a:cs typeface="Hiragino Sans GB" panose="020B0300000000000000" charset="-122"/>
-                      </a:endParaRPr>
-                    </a:p>
-                  </a:txBody>
-                  <a:tcPr marL="133350" marR="133350" marT="76200" marB="76200" anchor="ctr">
-                    <a:lnR w="6191">
-                      <a:solidFill>
-                        <a:srgbClr val="D8DED7"/>
-                      </a:solidFill>
-                      <a:prstDash val="solid"/>
-                    </a:lnR>
-                    <a:lnB w="6191">
-                      <a:solidFill>
-                        <a:srgbClr val="D8DED7"/>
-                      </a:solidFill>
-                      <a:prstDash val="solid"/>
-                    </a:lnB>
-                    <a:solidFill>
-                      <a:srgbClr val="F4F2EC"/>
-                    </a:solidFill>
-                  </a:tcPr>
-                </a:tc>
-              </a:tr>
-              <a:tr h="450850">
-                <a:tc>
-                  <a:txBody>
-                    <a:bodyPr/>
-                    <a:lstStyle/>
-                    <a:p>
-                      <a:pPr algn="l"/>
-                      <a:r>
-                        <a:rPr sz="1800" b="1">
-                          <a:solidFill>
-                            <a:srgbClr val="172A2A"/>
-                          </a:solidFill>
-                          <a:latin typeface="Hiragino Sans GB" panose="020B0300000000000000" charset="-122"/>
-                          <a:ea typeface="Hiragino Sans GB" panose="020B0300000000000000" charset="-122"/>
-                          <a:cs typeface="Hiragino Sans GB" panose="020B0300000000000000" charset="-122"/>
-                        </a:rPr>
-                        <a:t>核心数据合计</a:t>
-                      </a:r>
-                      <a:endParaRPr sz="1800" b="1">
-                        <a:solidFill>
-                          <a:srgbClr val="172A2A"/>
-                        </a:solidFill>
-                        <a:latin typeface="Hiragino Sans GB" panose="020B0300000000000000" charset="-122"/>
-                        <a:ea typeface="Hiragino Sans GB" panose="020B0300000000000000" charset="-122"/>
-                        <a:cs typeface="Hiragino Sans GB" panose="020B0300000000000000" charset="-122"/>
-                      </a:endParaRPr>
-                    </a:p>
-                  </a:txBody>
-                  <a:tcPr marL="133350" marR="133350" marT="76200" marB="76200" anchor="ctr">
-                    <a:lnL w="6191">
-                      <a:solidFill>
-                        <a:srgbClr val="D8DED7"/>
-                      </a:solidFill>
-                      <a:prstDash val="solid"/>
-                    </a:lnL>
-                    <a:lnR w="6191">
-                      <a:solidFill>
-                        <a:srgbClr val="D8DED7"/>
-                      </a:solidFill>
-                      <a:prstDash val="solid"/>
-                    </a:lnR>
-                    <a:lnB w="6191">
-                      <a:solidFill>
-                        <a:srgbClr val="D8DED7"/>
-                      </a:solidFill>
-                      <a:prstDash val="solid"/>
-                    </a:lnB>
-                    <a:solidFill>
-                      <a:srgbClr val="E2E9DF"/>
-                    </a:solidFill>
-                  </a:tcPr>
-                </a:tc>
-                <a:tc>
-                  <a:txBody>
-                    <a:bodyPr/>
-                    <a:lstStyle/>
-                    <a:p>
-                      <a:pPr algn="r"/>
-                      <a:r>
-                        <a:rPr sz="1800" b="1">
-                          <a:solidFill>
-                            <a:srgbClr val="172A2A"/>
-                          </a:solidFill>
-                          <a:latin typeface="Hiragino Sans GB" panose="020B0300000000000000" charset="-122"/>
-                          <a:ea typeface="Hiragino Sans GB" panose="020B0300000000000000" charset="-122"/>
-                          <a:cs typeface="Hiragino Sans GB" panose="020B0300000000000000" charset="-122"/>
-                        </a:rPr>
-                        <a:t>3,079,278</a:t>
-                      </a:r>
-                      <a:endParaRPr sz="1800" b="1">
-                        <a:solidFill>
-                          <a:srgbClr val="172A2A"/>
-                        </a:solidFill>
-                        <a:latin typeface="Hiragino Sans GB" panose="020B0300000000000000" charset="-122"/>
-                        <a:ea typeface="Hiragino Sans GB" panose="020B0300000000000000" charset="-122"/>
-                        <a:cs typeface="Hiragino Sans GB" panose="020B0300000000000000" charset="-122"/>
-                      </a:endParaRPr>
-                    </a:p>
-                  </a:txBody>
-                  <a:tcPr marL="133350" marR="133350" marT="76200" marB="76200" anchor="ctr">
-                    <a:lnR w="6191">
-                      <a:solidFill>
-                        <a:srgbClr val="D8DED7"/>
-                      </a:solidFill>
-                      <a:prstDash val="solid"/>
-                    </a:lnR>
-                    <a:lnB w="6191">
-                      <a:solidFill>
-                        <a:srgbClr val="D8DED7"/>
-                      </a:solidFill>
-                      <a:prstDash val="solid"/>
-                    </a:lnB>
-                    <a:solidFill>
-                      <a:srgbClr val="E2E9DF"/>
-                    </a:solidFill>
-                  </a:tcPr>
-                </a:tc>
-                <a:tc>
-                  <a:txBody>
-                    <a:bodyPr/>
-                    <a:lstStyle/>
-                    <a:p>
-                      <a:pPr algn="l"/>
-                      <a:r>
-                        <a:rPr sz="1800" b="1">
-                          <a:solidFill>
-                            <a:srgbClr val="172A2A"/>
-                          </a:solidFill>
-                          <a:latin typeface="Hiragino Sans GB" panose="020B0300000000000000" charset="-122"/>
-                          <a:ea typeface="Hiragino Sans GB" panose="020B0300000000000000" charset="-122"/>
-                          <a:cs typeface="Hiragino Sans GB" panose="020B0300000000000000" charset="-122"/>
-                        </a:rPr>
-                        <a:t>以上7张表行数之和</a:t>
-                      </a:r>
-                      <a:endParaRPr sz="1800" b="1">
-                        <a:solidFill>
-                          <a:srgbClr val="172A2A"/>
-                        </a:solidFill>
-                        <a:latin typeface="Hiragino Sans GB" panose="020B0300000000000000" charset="-122"/>
-                        <a:ea typeface="Hiragino Sans GB" panose="020B0300000000000000" charset="-122"/>
-                        <a:cs typeface="Hiragino Sans GB" panose="020B0300000000000000" charset="-122"/>
-                      </a:endParaRPr>
-                    </a:p>
-                  </a:txBody>
-                  <a:tcPr marL="133350" marR="133350" marT="76200" marB="76200" anchor="ctr">
-                    <a:lnR w="6191">
-                      <a:solidFill>
-                        <a:srgbClr val="D8DED7"/>
-                      </a:solidFill>
-                      <a:prstDash val="solid"/>
-                    </a:lnR>
-                    <a:lnB w="6191">
-                      <a:solidFill>
-                        <a:srgbClr val="D8DED7"/>
-                      </a:solidFill>
-                      <a:prstDash val="solid"/>
-                    </a:lnB>
-                    <a:solidFill>
-                      <a:srgbClr val="E2E9DF"/>
-                    </a:solidFill>
-                  </a:tcPr>
-                </a:tc>
-              </a:tr>
-            </a:tbl>
-          </a:graphicData>
-        </a:graphic>
-      </p:graphicFrame>
-    </p:spTree>
-  </p:cSld>
-  <p:clrMapOvr>
-    <a:masterClrMapping/>
-  </p:clrMapOvr>
-</p:sld>
-</file>
-
-<file path=ppt/slides/slide6.xml><?xml version="1.0" encoding="utf-8"?>
-<p:sld xmlns:a="http://schemas.openxmlformats.org/drawingml/2006/main" xmlns:r="http://schemas.openxmlformats.org/officeDocument/2006/relationships" xmlns:p="http://schemas.openxmlformats.org/presentationml/2006/main">
-  <p:cSld>
-    <p:bg>
-      <p:bgPr>
-        <a:solidFill>
-          <a:srgbClr val="F4F2EC"/>
-        </a:solidFill>
-        <a:effectLst/>
-      </p:bgPr>
-    </p:bg>
-    <p:spTree>
-      <p:nvGrpSpPr>
-        <p:cNvPr id="1" name=""/>
-        <p:cNvGrpSpPr/>
-        <p:nvPr/>
-      </p:nvGrpSpPr>
-      <p:grpSpPr/>
-      <p:sp>
-        <p:nvSpPr>
-          <p:cNvPr id="5" name="矩形 4"/>
-          <p:cNvSpPr>
-            <a:spLocks noGrp="1"/>
-          </p:cNvSpPr>
-          <p:nvPr/>
-        </p:nvSpPr>
-        <p:spPr>
-          <a:xfrm>
-            <a:off x="609600" y="457200"/>
-            <a:ext cx="10972800" cy="838200"/>
-          </a:xfrm>
-          <a:prstGeom prst="rect">
-            <a:avLst/>
-          </a:prstGeom>
-          <a:noFill/>
-          <a:ln w="0">
-            <a:noFill/>
-          </a:ln>
-        </p:spPr>
-        <p:txBody>
-          <a:bodyPr wrap="square" lIns="0" tIns="0" rIns="0" bIns="0" anchor="t">
-            <a:noAutofit/>
-          </a:bodyPr>
-          <a:lstStyle>
-            <a:defPPr>
-              <a:defRPr sz="3300" b="1">
+            <a:r>
+              <a:rPr lang="en-US" altLang="zh-CN" sz="3300" b="1">
                 <a:solidFill>
                   <a:srgbClr val="172A2A"/>
                 </a:solidFill>
                 <a:latin typeface="Hiragino Sans GB" panose="020B0300000000000000" charset="-122"/>
                 <a:ea typeface="Hiragino Sans GB" panose="020B0300000000000000" charset="-122"/>
                 <a:cs typeface="Hiragino Sans GB" panose="020B0300000000000000" charset="-122"/>
-              </a:defRPr>
-            </a:defPPr>
-          </a:lstStyle>
-          <a:p>
-            <a:pPr>
-              <a:defRPr sz="3300" b="1">
-                <a:solidFill>
-                  <a:srgbClr val="172A2A"/>
-                </a:solidFill>
-                <a:latin typeface="Hiragino Sans GB" panose="020B0300000000000000" charset="-122"/>
-                <a:ea typeface="Hiragino Sans GB" panose="020B0300000000000000" charset="-122"/>
-                <a:cs typeface="Hiragino Sans GB" panose="020B0300000000000000" charset="-122"/>
-              </a:defRPr>
-            </a:pPr>
+              </a:rPr>
+              <a:t>：</a:t>
+            </a:r>
             <a:r>
               <a:rPr lang="zh-CN" sz="3300" b="1">
                 <a:solidFill>
@@ -7107,7 +4381,18 @@
                 <a:ea typeface="Hiragino Sans GB" panose="020B0300000000000000" charset="-122"/>
                 <a:cs typeface="Hiragino Sans GB" panose="020B0300000000000000" charset="-122"/>
               </a:rPr>
-              <a:t>后续计划</a:t>
+              <a:t>分析游戏数据</a:t>
+            </a:r>
+            <a:r>
+              <a:rPr lang="en-US" altLang="zh-CN" sz="3300" b="1">
+                <a:solidFill>
+                  <a:srgbClr val="172A2A"/>
+                </a:solidFill>
+                <a:latin typeface="Hiragino Sans GB" panose="020B0300000000000000" charset="-122"/>
+                <a:ea typeface="Hiragino Sans GB" panose="020B0300000000000000" charset="-122"/>
+                <a:cs typeface="Hiragino Sans GB" panose="020B0300000000000000" charset="-122"/>
+              </a:rPr>
+              <a:t>，</a:t>
             </a:r>
             <a:r>
               <a:rPr sz="3300" b="1">
@@ -7118,7 +4403,7 @@
                 <a:ea typeface="Hiragino Sans GB" panose="020B0300000000000000" charset="-122"/>
                 <a:cs typeface="Hiragino Sans GB" panose="020B0300000000000000" charset="-122"/>
               </a:rPr>
-              <a:t> 包含六个方向</a:t>
+              <a:t>包含六个方向</a:t>
             </a:r>
             <a:endParaRPr sz="3300" b="1">
               <a:solidFill>
@@ -7139,17 +4424,16 @@
         </p:nvGraphicFramePr>
         <p:xfrm>
           <a:off x="609600" y="1619250"/>
-          <a:ext cx="10972800" cy="4038601"/>
+          <a:ext cx="10972800" cy="4141470"/>
         </p:xfrm>
         <a:graphic>
           <a:graphicData uri="http://schemas.openxmlformats.org/drawingml/2006/table">
             <a:tbl>
               <a:tblPr firstRow="1"/>
               <a:tblGrid>
-                <a:gridCol w="3571875"/>
-                <a:gridCol w="1095375"/>
-                <a:gridCol w="291900"/>
-                <a:gridCol w="2013150"/>
+                <a:gridCol w="3572510"/>
+                <a:gridCol w="1094740"/>
+                <a:gridCol w="2051450"/>
                 <a:gridCol w="4000500"/>
               </a:tblGrid>
               <a:tr h="576943">
@@ -7227,46 +4511,6 @@
                         </a:rPr>
                         <a:t>优先级</a:t>
                       </a:r>
-                      <a:endParaRPr sz="1725" b="1">
-                        <a:solidFill>
-                          <a:srgbClr val="FFFFFF"/>
-                        </a:solidFill>
-                        <a:latin typeface="Hiragino Sans GB" panose="020B0300000000000000" charset="-122"/>
-                        <a:ea typeface="Hiragino Sans GB" panose="020B0300000000000000" charset="-122"/>
-                        <a:cs typeface="Hiragino Sans GB" panose="020B0300000000000000" charset="-122"/>
-                      </a:endParaRPr>
-                    </a:p>
-                  </a:txBody>
-                  <a:tcPr marL="133350" marR="133350" marT="76200" marB="76200" anchor="ctr">
-                    <a:lnR w="6191">
-                      <a:solidFill>
-                        <a:srgbClr val="D8DED7"/>
-                      </a:solidFill>
-                      <a:prstDash val="solid"/>
-                    </a:lnR>
-                    <a:lnT w="6191">
-                      <a:solidFill>
-                        <a:srgbClr val="D8DED7"/>
-                      </a:solidFill>
-                      <a:prstDash val="solid"/>
-                    </a:lnT>
-                    <a:lnB w="6191">
-                      <a:solidFill>
-                        <a:srgbClr val="D8DED7"/>
-                      </a:solidFill>
-                      <a:prstDash val="solid"/>
-                    </a:lnB>
-                    <a:solidFill>
-                      <a:srgbClr val="246A5F"/>
-                    </a:solidFill>
-                  </a:tcPr>
-                </a:tc>
-                <a:tc>
-                  <a:txBody>
-                    <a:bodyPr/>
-                    <a:lstStyle/>
-                    <a:p>
-                      <a:pPr algn="l"/>
                       <a:endParaRPr sz="1725" b="1">
                         <a:solidFill>
                           <a:srgbClr val="FFFFFF"/>
@@ -7529,40 +4773,6 @@
                     <a:lstStyle/>
                     <a:p>
                       <a:pPr algn="l"/>
-                      <a:endParaRPr sz="1725" b="0">
-                        <a:solidFill>
-                          <a:srgbClr val="172A2A"/>
-                        </a:solidFill>
-                        <a:latin typeface="Hiragino Sans GB" panose="020B0300000000000000" charset="-122"/>
-                        <a:ea typeface="Hiragino Sans GB" panose="020B0300000000000000" charset="-122"/>
-                        <a:cs typeface="Hiragino Sans GB" panose="020B0300000000000000" charset="-122"/>
-                      </a:endParaRPr>
-                    </a:p>
-                  </a:txBody>
-                  <a:tcPr marL="133350" marR="133350" marT="76200" marB="76200" anchor="ctr">
-                    <a:lnR w="6191">
-                      <a:solidFill>
-                        <a:srgbClr val="D8DED7"/>
-                      </a:solidFill>
-                      <a:prstDash val="solid"/>
-                    </a:lnR>
-                    <a:lnB w="6191">
-                      <a:solidFill>
-                        <a:srgbClr val="D8DED7"/>
-                      </a:solidFill>
-                      <a:prstDash val="solid"/>
-                    </a:lnB>
-                    <a:solidFill>
-                      <a:srgbClr val="F4F2EC"/>
-                    </a:solidFill>
-                  </a:tcPr>
-                </a:tc>
-                <a:tc>
-                  <a:txBody>
-                    <a:bodyPr/>
-                    <a:lstStyle/>
-                    <a:p>
-                      <a:pPr algn="l"/>
                       <a:r>
                         <a:rPr lang="zh-CN" altLang="en-US" sz="1725" b="0">
                           <a:solidFill>
@@ -7751,40 +4961,6 @@
                     <a:lstStyle/>
                     <a:p>
                       <a:pPr algn="l"/>
-                      <a:endParaRPr sz="1725" b="0">
-                        <a:solidFill>
-                          <a:srgbClr val="172A2A"/>
-                        </a:solidFill>
-                        <a:latin typeface="Hiragino Sans GB" panose="020B0300000000000000" charset="-122"/>
-                        <a:ea typeface="Hiragino Sans GB" panose="020B0300000000000000" charset="-122"/>
-                        <a:cs typeface="Hiragino Sans GB" panose="020B0300000000000000" charset="-122"/>
-                      </a:endParaRPr>
-                    </a:p>
-                  </a:txBody>
-                  <a:tcPr marL="133350" marR="133350" marT="76200" marB="76200" anchor="ctr">
-                    <a:lnR w="6191">
-                      <a:solidFill>
-                        <a:srgbClr val="D8DED7"/>
-                      </a:solidFill>
-                      <a:prstDash val="solid"/>
-                    </a:lnR>
-                    <a:lnB w="6191">
-                      <a:solidFill>
-                        <a:srgbClr val="D8DED7"/>
-                      </a:solidFill>
-                      <a:prstDash val="solid"/>
-                    </a:lnB>
-                    <a:solidFill>
-                      <a:srgbClr val="F4F2EC"/>
-                    </a:solidFill>
-                  </a:tcPr>
-                </a:tc>
-                <a:tc>
-                  <a:txBody>
-                    <a:bodyPr/>
-                    <a:lstStyle/>
-                    <a:p>
-                      <a:pPr algn="l"/>
                       <a:r>
                         <a:rPr lang="zh-CN" altLang="en-US" sz="1725" b="0">
                           <a:solidFill>
@@ -7973,40 +5149,6 @@
                     <a:lstStyle/>
                     <a:p>
                       <a:pPr algn="l"/>
-                      <a:endParaRPr sz="1725" b="0">
-                        <a:solidFill>
-                          <a:srgbClr val="172A2A"/>
-                        </a:solidFill>
-                        <a:latin typeface="Hiragino Sans GB" panose="020B0300000000000000" charset="-122"/>
-                        <a:ea typeface="Hiragino Sans GB" panose="020B0300000000000000" charset="-122"/>
-                        <a:cs typeface="Hiragino Sans GB" panose="020B0300000000000000" charset="-122"/>
-                      </a:endParaRPr>
-                    </a:p>
-                  </a:txBody>
-                  <a:tcPr marL="133350" marR="133350" marT="76200" marB="76200" anchor="ctr">
-                    <a:lnR w="6191">
-                      <a:solidFill>
-                        <a:srgbClr val="D8DED7"/>
-                      </a:solidFill>
-                      <a:prstDash val="solid"/>
-                    </a:lnR>
-                    <a:lnB w="6191">
-                      <a:solidFill>
-                        <a:srgbClr val="D8DED7"/>
-                      </a:solidFill>
-                      <a:prstDash val="solid"/>
-                    </a:lnB>
-                    <a:solidFill>
-                      <a:srgbClr val="F4F2EC"/>
-                    </a:solidFill>
-                  </a:tcPr>
-                </a:tc>
-                <a:tc>
-                  <a:txBody>
-                    <a:bodyPr/>
-                    <a:lstStyle/>
-                    <a:p>
-                      <a:pPr algn="l"/>
                       <a:r>
                         <a:rPr sz="1725" b="0">
                           <a:solidFill>
@@ -8108,7 +5250,7 @@
                           <a:ea typeface="Hiragino Sans GB" panose="020B0300000000000000" charset="-122"/>
                           <a:cs typeface="Hiragino Sans GB" panose="020B0300000000000000" charset="-122"/>
                         </a:rPr>
-                        <a:t>知识图谱与可解释推荐</a:t>
+                        <a:t>可解释推荐</a:t>
                       </a:r>
                       <a:endParaRPr sz="1725" b="0">
                         <a:solidFill>
@@ -8161,40 +5303,6 @@
                         </a:rPr>
                         <a:t>主线</a:t>
                       </a:r>
-                      <a:endParaRPr sz="1725" b="0">
-                        <a:solidFill>
-                          <a:srgbClr val="172A2A"/>
-                        </a:solidFill>
-                        <a:latin typeface="Hiragino Sans GB" panose="020B0300000000000000" charset="-122"/>
-                        <a:ea typeface="Hiragino Sans GB" panose="020B0300000000000000" charset="-122"/>
-                        <a:cs typeface="Hiragino Sans GB" panose="020B0300000000000000" charset="-122"/>
-                      </a:endParaRPr>
-                    </a:p>
-                  </a:txBody>
-                  <a:tcPr marL="133350" marR="133350" marT="76200" marB="76200" anchor="ctr">
-                    <a:lnR w="6191">
-                      <a:solidFill>
-                        <a:srgbClr val="D8DED7"/>
-                      </a:solidFill>
-                      <a:prstDash val="solid"/>
-                    </a:lnR>
-                    <a:lnB w="6191">
-                      <a:solidFill>
-                        <a:srgbClr val="D8DED7"/>
-                      </a:solidFill>
-                      <a:prstDash val="solid"/>
-                    </a:lnB>
-                    <a:solidFill>
-                      <a:srgbClr val="F4F2EC"/>
-                    </a:solidFill>
-                  </a:tcPr>
-                </a:tc>
-                <a:tc>
-                  <a:txBody>
-                    <a:bodyPr/>
-                    <a:lstStyle/>
-                    <a:p>
-                      <a:pPr algn="l"/>
                       <a:endParaRPr sz="1725" b="0">
                         <a:solidFill>
                           <a:srgbClr val="172A2A"/>
@@ -8450,40 +5558,6 @@
                     <a:lstStyle/>
                     <a:p>
                       <a:pPr algn="l"/>
-                      <a:endParaRPr sz="1725" b="0">
-                        <a:solidFill>
-                          <a:srgbClr val="172A2A"/>
-                        </a:solidFill>
-                        <a:latin typeface="Hiragino Sans GB" panose="020B0300000000000000" charset="-122"/>
-                        <a:ea typeface="Hiragino Sans GB" panose="020B0300000000000000" charset="-122"/>
-                        <a:cs typeface="Hiragino Sans GB" panose="020B0300000000000000" charset="-122"/>
-                      </a:endParaRPr>
-                    </a:p>
-                  </a:txBody>
-                  <a:tcPr marL="133350" marR="133350" marT="76200" marB="76200" anchor="ctr">
-                    <a:lnR w="6191">
-                      <a:solidFill>
-                        <a:srgbClr val="D8DED7"/>
-                      </a:solidFill>
-                      <a:prstDash val="solid"/>
-                    </a:lnR>
-                    <a:lnB w="6191">
-                      <a:solidFill>
-                        <a:srgbClr val="D8DED7"/>
-                      </a:solidFill>
-                      <a:prstDash val="solid"/>
-                    </a:lnB>
-                    <a:solidFill>
-                      <a:srgbClr val="F4F2EC"/>
-                    </a:solidFill>
-                  </a:tcPr>
-                </a:tc>
-                <a:tc>
-                  <a:txBody>
-                    <a:bodyPr/>
-                    <a:lstStyle/>
-                    <a:p>
-                      <a:pPr algn="l"/>
                       <a:r>
                         <a:rPr sz="1725" b="0">
                           <a:solidFill>
@@ -8672,40 +5746,6 @@
                     <a:lstStyle/>
                     <a:p>
                       <a:pPr algn="l"/>
-                      <a:endParaRPr sz="1725" b="0">
-                        <a:solidFill>
-                          <a:srgbClr val="172A2A"/>
-                        </a:solidFill>
-                        <a:latin typeface="Hiragino Sans GB" panose="020B0300000000000000" charset="-122"/>
-                        <a:ea typeface="Hiragino Sans GB" panose="020B0300000000000000" charset="-122"/>
-                        <a:cs typeface="Hiragino Sans GB" panose="020B0300000000000000" charset="-122"/>
-                      </a:endParaRPr>
-                    </a:p>
-                  </a:txBody>
-                  <a:tcPr marL="133350" marR="133350" marT="76200" marB="76200" anchor="ctr">
-                    <a:lnR w="6191">
-                      <a:solidFill>
-                        <a:srgbClr val="D8DED7"/>
-                      </a:solidFill>
-                      <a:prstDash val="solid"/>
-                    </a:lnR>
-                    <a:lnB w="6191">
-                      <a:solidFill>
-                        <a:srgbClr val="D8DED7"/>
-                      </a:solidFill>
-                      <a:prstDash val="solid"/>
-                    </a:lnB>
-                    <a:solidFill>
-                      <a:srgbClr val="F4F2EC"/>
-                    </a:solidFill>
-                  </a:tcPr>
-                </a:tc>
-                <a:tc>
-                  <a:txBody>
-                    <a:bodyPr/>
-                    <a:lstStyle/>
-                    <a:p>
-                      <a:pPr algn="l"/>
                       <a:r>
                         <a:rPr sz="1725" b="0">
                           <a:solidFill>
@@ -8787,6 +5827,2717 @@
                     </a:lnB>
                     <a:solidFill>
                       <a:srgbClr val="F4F2EC"/>
+                    </a:solidFill>
+                  </a:tcPr>
+                </a:tc>
+              </a:tr>
+            </a:tbl>
+          </a:graphicData>
+        </a:graphic>
+      </p:graphicFrame>
+    </p:spTree>
+  </p:cSld>
+  <p:clrMapOvr>
+    <a:masterClrMapping/>
+  </p:clrMapOvr>
+</p:sld>
+</file>
+
+<file path=ppt/slides/slide4.xml><?xml version="1.0" encoding="utf-8"?>
+<p:sld xmlns:a="http://schemas.openxmlformats.org/drawingml/2006/main" xmlns:r="http://schemas.openxmlformats.org/officeDocument/2006/relationships" xmlns:p="http://schemas.openxmlformats.org/presentationml/2006/main">
+  <p:cSld>
+    <p:bg>
+      <p:bgPr>
+        <a:solidFill>
+          <a:srgbClr val="F4F2EC"/>
+        </a:solidFill>
+        <a:effectLst/>
+      </p:bgPr>
+    </p:bg>
+    <p:spTree>
+      <p:nvGrpSpPr>
+        <p:cNvPr id="1" name=""/>
+        <p:cNvGrpSpPr/>
+        <p:nvPr/>
+      </p:nvGrpSpPr>
+      <p:grpSpPr/>
+      <p:sp>
+        <p:nvSpPr>
+          <p:cNvPr id="14" name="矩形 13"/>
+          <p:cNvSpPr>
+            <a:spLocks noGrp="1"/>
+          </p:cNvSpPr>
+          <p:nvPr/>
+        </p:nvSpPr>
+        <p:spPr>
+          <a:xfrm>
+            <a:off x="609600" y="457200"/>
+            <a:ext cx="10972800" cy="838200"/>
+          </a:xfrm>
+          <a:prstGeom prst="rect">
+            <a:avLst/>
+          </a:prstGeom>
+          <a:noFill/>
+          <a:ln w="0">
+            <a:noFill/>
+          </a:ln>
+        </p:spPr>
+        <p:txBody>
+          <a:bodyPr wrap="square" lIns="0" tIns="0" rIns="0" bIns="0" anchor="t">
+            <a:noAutofit/>
+          </a:bodyPr>
+          <a:lstStyle>
+            <a:defPPr>
+              <a:defRPr sz="3300" b="1">
+                <a:solidFill>
+                  <a:srgbClr val="172A2A"/>
+                </a:solidFill>
+                <a:latin typeface="Hiragino Sans GB" panose="020B0300000000000000" charset="-122"/>
+                <a:ea typeface="Hiragino Sans GB" panose="020B0300000000000000" charset="-122"/>
+                <a:cs typeface="Hiragino Sans GB" panose="020B0300000000000000" charset="-122"/>
+              </a:defRPr>
+            </a:defPPr>
+          </a:lstStyle>
+          <a:p>
+            <a:pPr>
+              <a:defRPr sz="3300" b="1">
+                <a:solidFill>
+                  <a:srgbClr val="172A2A"/>
+                </a:solidFill>
+                <a:latin typeface="Hiragino Sans GB" panose="020B0300000000000000" charset="-122"/>
+                <a:ea typeface="Hiragino Sans GB" panose="020B0300000000000000" charset="-122"/>
+                <a:cs typeface="Hiragino Sans GB" panose="020B0300000000000000" charset="-122"/>
+              </a:defRPr>
+            </a:pPr>
+            <a:r>
+              <a:rPr lang="zh-CN">
+                <a:sym typeface="+mn-ea"/>
+              </a:rPr>
+              <a:t>已完成数据获取</a:t>
+            </a:r>
+            <a:r>
+              <a:rPr lang="en-US" altLang="zh-CN">
+                <a:sym typeface="+mn-ea"/>
+              </a:rPr>
+              <a:t>，</a:t>
+            </a:r>
+            <a:r>
+              <a:rPr lang="zh-CN">
+                <a:sym typeface="+mn-ea"/>
+              </a:rPr>
+              <a:t>各个渠道获取数据</a:t>
+            </a:r>
+            <a:r>
+              <a:rPr lang="zh-CN" sz="3300" b="1">
+                <a:solidFill>
+                  <a:srgbClr val="172A2A"/>
+                </a:solidFill>
+                <a:latin typeface="Hiragino Sans GB" panose="020B0300000000000000" charset="-122"/>
+                <a:ea typeface="Hiragino Sans GB" panose="020B0300000000000000" charset="-122"/>
+                <a:cs typeface="Hiragino Sans GB" panose="020B0300000000000000" charset="-122"/>
+              </a:rPr>
+              <a:t>花费</a:t>
+            </a:r>
+            <a:r>
+              <a:rPr lang="zh-CN" altLang="en-US" sz="3300" b="1">
+                <a:solidFill>
+                  <a:srgbClr val="172A2A"/>
+                </a:solidFill>
+                <a:latin typeface="Hiragino Sans GB" panose="020B0300000000000000" charset="-122"/>
+                <a:ea typeface="Hiragino Sans GB" panose="020B0300000000000000" charset="-122"/>
+                <a:cs typeface="Hiragino Sans GB" panose="020B0300000000000000" charset="-122"/>
+              </a:rPr>
+              <a:t>约</a:t>
+            </a:r>
+            <a:r>
+              <a:rPr lang="en-US" altLang="zh-CN" sz="3300" b="1">
+                <a:solidFill>
+                  <a:srgbClr val="172A2A"/>
+                </a:solidFill>
+                <a:latin typeface="Hiragino Sans GB" panose="020B0300000000000000" charset="-122"/>
+                <a:ea typeface="Hiragino Sans GB" panose="020B0300000000000000" charset="-122"/>
+                <a:cs typeface="Hiragino Sans GB" panose="020B0300000000000000" charset="-122"/>
+              </a:rPr>
+              <a:t>170</a:t>
+            </a:r>
+            <a:r>
+              <a:rPr sz="3300" b="1">
+                <a:solidFill>
+                  <a:srgbClr val="172A2A"/>
+                </a:solidFill>
+                <a:latin typeface="Hiragino Sans GB" panose="020B0300000000000000" charset="-122"/>
+                <a:ea typeface="Hiragino Sans GB" panose="020B0300000000000000" charset="-122"/>
+                <a:cs typeface="Hiragino Sans GB" panose="020B0300000000000000" charset="-122"/>
+              </a:rPr>
+              <a:t>小时</a:t>
+            </a:r>
+            <a:endParaRPr lang="zh-CN" sz="3300" b="1">
+              <a:solidFill>
+                <a:srgbClr val="172A2A"/>
+              </a:solidFill>
+              <a:latin typeface="Hiragino Sans GB" panose="020B0300000000000000" charset="-122"/>
+              <a:ea typeface="Hiragino Sans GB" panose="020B0300000000000000" charset="-122"/>
+              <a:cs typeface="Hiragino Sans GB" panose="020B0300000000000000" charset="-122"/>
+            </a:endParaRPr>
+          </a:p>
+        </p:txBody>
+      </p:sp>
+      <p:sp>
+        <p:nvSpPr>
+          <p:cNvPr id="4" name="矩形 3"/>
+          <p:cNvSpPr>
+            <a:spLocks noGrp="1"/>
+          </p:cNvSpPr>
+          <p:nvPr/>
+        </p:nvSpPr>
+        <p:spPr>
+          <a:xfrm>
+            <a:off x="609600" y="1885950"/>
+            <a:ext cx="4381500" cy="1952625"/>
+          </a:xfrm>
+          <a:prstGeom prst="rect">
+            <a:avLst/>
+          </a:prstGeom>
+          <a:noFill/>
+          <a:ln w="0">
+            <a:noFill/>
+          </a:ln>
+        </p:spPr>
+        <p:txBody>
+          <a:bodyPr wrap="square" lIns="0" tIns="0" rIns="0" bIns="0" anchor="t">
+            <a:noAutofit/>
+          </a:bodyPr>
+          <a:lstStyle>
+            <a:defPPr>
+              <a:defRPr sz="13050" b="1">
+                <a:solidFill>
+                  <a:srgbClr val="246A5F"/>
+                </a:solidFill>
+                <a:latin typeface="Hiragino Sans GB" panose="020B0300000000000000" charset="-122"/>
+                <a:ea typeface="Hiragino Sans GB" panose="020B0300000000000000" charset="-122"/>
+                <a:cs typeface="Hiragino Sans GB" panose="020B0300000000000000" charset="-122"/>
+              </a:defRPr>
+            </a:defPPr>
+          </a:lstStyle>
+          <a:p>
+            <a:pPr>
+              <a:defRPr sz="13050" b="1">
+                <a:solidFill>
+                  <a:srgbClr val="246A5F"/>
+                </a:solidFill>
+                <a:latin typeface="Hiragino Sans GB" panose="020B0300000000000000" charset="-122"/>
+                <a:ea typeface="Hiragino Sans GB" panose="020B0300000000000000" charset="-122"/>
+                <a:cs typeface="Hiragino Sans GB" panose="020B0300000000000000" charset="-122"/>
+              </a:defRPr>
+            </a:pPr>
+            <a:r>
+              <a:rPr sz="13050" b="1">
+                <a:solidFill>
+                  <a:srgbClr val="246A5F"/>
+                </a:solidFill>
+                <a:latin typeface="Hiragino Sans GB" panose="020B0300000000000000" charset="-122"/>
+                <a:ea typeface="Hiragino Sans GB" panose="020B0300000000000000" charset="-122"/>
+                <a:cs typeface="Hiragino Sans GB" panose="020B0300000000000000" charset="-122"/>
+              </a:rPr>
+              <a:t>1</a:t>
+            </a:r>
+            <a:r>
+              <a:rPr lang="en-US" sz="13050" b="1">
+                <a:solidFill>
+                  <a:srgbClr val="246A5F"/>
+                </a:solidFill>
+                <a:latin typeface="Hiragino Sans GB" panose="020B0300000000000000" charset="-122"/>
+                <a:ea typeface="Hiragino Sans GB" panose="020B0300000000000000" charset="-122"/>
+                <a:cs typeface="Hiragino Sans GB" panose="020B0300000000000000" charset="-122"/>
+              </a:rPr>
+              <a:t>70</a:t>
+            </a:r>
+            <a:r>
+              <a:rPr lang="en-US" sz="7200" b="1">
+                <a:solidFill>
+                  <a:srgbClr val="246A5F"/>
+                </a:solidFill>
+                <a:latin typeface="Hiragino Sans GB" panose="020B0300000000000000" charset="-122"/>
+                <a:ea typeface="Hiragino Sans GB" panose="020B0300000000000000" charset="-122"/>
+                <a:cs typeface="Hiragino Sans GB" panose="020B0300000000000000" charset="-122"/>
+              </a:rPr>
+              <a:t>H</a:t>
+            </a:r>
+            <a:endParaRPr b="0">
+              <a:solidFill>
+                <a:srgbClr val="172A2A"/>
+              </a:solidFill>
+              <a:latin typeface="Hiragino Sans GB" panose="020B0300000000000000" charset="-122"/>
+              <a:ea typeface="Hiragino Sans GB" panose="020B0300000000000000" charset="-122"/>
+              <a:cs typeface="Hiragino Sans GB" panose="020B0300000000000000" charset="-122"/>
+            </a:endParaRPr>
+          </a:p>
+          <a:p>
+            <a:pPr>
+              <a:defRPr sz="13050" b="1">
+                <a:solidFill>
+                  <a:srgbClr val="246A5F"/>
+                </a:solidFill>
+                <a:latin typeface="Hiragino Sans GB" panose="020B0300000000000000" charset="-122"/>
+                <a:ea typeface="Hiragino Sans GB" panose="020B0300000000000000" charset="-122"/>
+                <a:cs typeface="Hiragino Sans GB" panose="020B0300000000000000" charset="-122"/>
+              </a:defRPr>
+            </a:pPr>
+            <a:endParaRPr sz="13050" b="1">
+              <a:solidFill>
+                <a:srgbClr val="246A5F"/>
+              </a:solidFill>
+              <a:latin typeface="Hiragino Sans GB" panose="020B0300000000000000" charset="-122"/>
+              <a:ea typeface="Hiragino Sans GB" panose="020B0300000000000000" charset="-122"/>
+              <a:cs typeface="Hiragino Sans GB" panose="020B0300000000000000" charset="-122"/>
+            </a:endParaRPr>
+          </a:p>
+        </p:txBody>
+      </p:sp>
+      <p:sp>
+        <p:nvSpPr>
+          <p:cNvPr id="5" name="矩形 4"/>
+          <p:cNvSpPr>
+            <a:spLocks noGrp="1"/>
+          </p:cNvSpPr>
+          <p:nvPr/>
+        </p:nvSpPr>
+        <p:spPr>
+          <a:xfrm>
+            <a:off x="704850" y="3943350"/>
+            <a:ext cx="3524250" cy="628650"/>
+          </a:xfrm>
+          <a:prstGeom prst="rect">
+            <a:avLst/>
+          </a:prstGeom>
+          <a:noFill/>
+          <a:ln w="0">
+            <a:noFill/>
+          </a:ln>
+        </p:spPr>
+        <p:txBody>
+          <a:bodyPr wrap="square" lIns="0" tIns="0" rIns="0" bIns="0" anchor="t">
+            <a:noAutofit/>
+          </a:bodyPr>
+          <a:lstStyle>
+            <a:defPPr>
+              <a:defRPr sz="3000" b="0">
+                <a:solidFill>
+                  <a:srgbClr val="172A2A"/>
+                </a:solidFill>
+                <a:latin typeface="Hiragino Sans GB" panose="020B0300000000000000" charset="-122"/>
+                <a:ea typeface="Hiragino Sans GB" panose="020B0300000000000000" charset="-122"/>
+                <a:cs typeface="Hiragino Sans GB" panose="020B0300000000000000" charset="-122"/>
+              </a:defRPr>
+            </a:defPPr>
+          </a:lstStyle>
+          <a:p>
+            <a:pPr>
+              <a:defRPr sz="3000" b="0">
+                <a:solidFill>
+                  <a:srgbClr val="172A2A"/>
+                </a:solidFill>
+                <a:latin typeface="Hiragino Sans GB" panose="020B0300000000000000" charset="-122"/>
+                <a:ea typeface="Hiragino Sans GB" panose="020B0300000000000000" charset="-122"/>
+                <a:cs typeface="Hiragino Sans GB" panose="020B0300000000000000" charset="-122"/>
+              </a:defRPr>
+            </a:pPr>
+            <a:endParaRPr sz="3000" b="0">
+              <a:solidFill>
+                <a:srgbClr val="172A2A"/>
+              </a:solidFill>
+              <a:latin typeface="Hiragino Sans GB" panose="020B0300000000000000" charset="-122"/>
+              <a:ea typeface="Hiragino Sans GB" panose="020B0300000000000000" charset="-122"/>
+              <a:cs typeface="Hiragino Sans GB" panose="020B0300000000000000" charset="-122"/>
+            </a:endParaRPr>
+          </a:p>
+        </p:txBody>
+      </p:sp>
+      <p:sp>
+        <p:nvSpPr>
+          <p:cNvPr id="6" name="矩形 5"/>
+          <p:cNvSpPr>
+            <a:spLocks noGrp="1"/>
+          </p:cNvSpPr>
+          <p:nvPr/>
+        </p:nvSpPr>
+        <p:spPr>
+          <a:xfrm>
+            <a:off x="5476875" y="1809750"/>
+            <a:ext cx="5953125" cy="400050"/>
+          </a:xfrm>
+          <a:prstGeom prst="rect">
+            <a:avLst/>
+          </a:prstGeom>
+          <a:noFill/>
+          <a:ln w="0">
+            <a:noFill/>
+          </a:ln>
+        </p:spPr>
+        <p:txBody>
+          <a:bodyPr wrap="square" lIns="0" tIns="0" rIns="0" bIns="0" anchor="t">
+            <a:noAutofit/>
+          </a:bodyPr>
+          <a:lstStyle>
+            <a:defPPr>
+              <a:defRPr sz="2175" b="1">
+                <a:solidFill>
+                  <a:srgbClr val="172A2A"/>
+                </a:solidFill>
+                <a:latin typeface="Hiragino Sans GB" panose="020B0300000000000000" charset="-122"/>
+                <a:ea typeface="Hiragino Sans GB" panose="020B0300000000000000" charset="-122"/>
+                <a:cs typeface="Hiragino Sans GB" panose="020B0300000000000000" charset="-122"/>
+              </a:defRPr>
+            </a:defPPr>
+          </a:lstStyle>
+          <a:p>
+            <a:pPr>
+              <a:defRPr sz="2175" b="1">
+                <a:solidFill>
+                  <a:srgbClr val="172A2A"/>
+                </a:solidFill>
+                <a:latin typeface="Hiragino Sans GB" panose="020B0300000000000000" charset="-122"/>
+                <a:ea typeface="Hiragino Sans GB" panose="020B0300000000000000" charset="-122"/>
+                <a:cs typeface="Hiragino Sans GB" panose="020B0300000000000000" charset="-122"/>
+              </a:defRPr>
+            </a:pPr>
+            <a:r>
+              <a:rPr sz="2175" b="1">
+                <a:solidFill>
+                  <a:srgbClr val="172A2A"/>
+                </a:solidFill>
+                <a:latin typeface="Hiragino Sans GB" panose="020B0300000000000000" charset="-122"/>
+                <a:ea typeface="Hiragino Sans GB" panose="020B0300000000000000" charset="-122"/>
+                <a:cs typeface="Hiragino Sans GB" panose="020B0300000000000000" charset="-122"/>
+              </a:rPr>
+              <a:t>脚本编写</a:t>
+            </a:r>
+            <a:endParaRPr sz="2175" b="1">
+              <a:solidFill>
+                <a:srgbClr val="172A2A"/>
+              </a:solidFill>
+              <a:latin typeface="Hiragino Sans GB" panose="020B0300000000000000" charset="-122"/>
+              <a:ea typeface="Hiragino Sans GB" panose="020B0300000000000000" charset="-122"/>
+              <a:cs typeface="Hiragino Sans GB" panose="020B0300000000000000" charset="-122"/>
+            </a:endParaRPr>
+          </a:p>
+        </p:txBody>
+      </p:sp>
+      <p:sp>
+        <p:nvSpPr>
+          <p:cNvPr id="7" name="矩形 6"/>
+          <p:cNvSpPr>
+            <a:spLocks noGrp="1"/>
+          </p:cNvSpPr>
+          <p:nvPr/>
+        </p:nvSpPr>
+        <p:spPr>
+          <a:xfrm>
+            <a:off x="5476875" y="2257425"/>
+            <a:ext cx="5953125" cy="609600"/>
+          </a:xfrm>
+          <a:prstGeom prst="rect">
+            <a:avLst/>
+          </a:prstGeom>
+          <a:noFill/>
+          <a:ln w="0">
+            <a:noFill/>
+          </a:ln>
+        </p:spPr>
+        <p:txBody>
+          <a:bodyPr wrap="square" lIns="0" tIns="0" rIns="0" bIns="0" anchor="t">
+            <a:noAutofit/>
+          </a:bodyPr>
+          <a:lstStyle>
+            <a:defPPr>
+              <a:defRPr sz="1800" b="0">
+                <a:solidFill>
+                  <a:srgbClr val="5B6864"/>
+                </a:solidFill>
+                <a:latin typeface="Hiragino Sans GB" panose="020B0300000000000000" charset="-122"/>
+                <a:ea typeface="Hiragino Sans GB" panose="020B0300000000000000" charset="-122"/>
+                <a:cs typeface="Hiragino Sans GB" panose="020B0300000000000000" charset="-122"/>
+              </a:defRPr>
+            </a:defPPr>
+          </a:lstStyle>
+          <a:p>
+            <a:pPr>
+              <a:defRPr sz="1800" b="0">
+                <a:solidFill>
+                  <a:srgbClr val="5B6864"/>
+                </a:solidFill>
+                <a:latin typeface="Hiragino Sans GB" panose="020B0300000000000000" charset="-122"/>
+                <a:ea typeface="Hiragino Sans GB" panose="020B0300000000000000" charset="-122"/>
+                <a:cs typeface="Hiragino Sans GB" panose="020B0300000000000000" charset="-122"/>
+              </a:defRPr>
+            </a:pPr>
+            <a:r>
+              <a:rPr sz="1800" b="0">
+                <a:solidFill>
+                  <a:srgbClr val="5B6864"/>
+                </a:solidFill>
+                <a:latin typeface="Hiragino Sans GB" panose="020B0300000000000000" charset="-122"/>
+                <a:ea typeface="Hiragino Sans GB" panose="020B0300000000000000" charset="-122"/>
+                <a:cs typeface="Hiragino Sans GB" panose="020B0300000000000000" charset="-122"/>
+              </a:rPr>
+              <a:t>逐源解析、限速重试、错误识别和任务编排</a:t>
+            </a:r>
+            <a:endParaRPr sz="1800" b="0">
+              <a:solidFill>
+                <a:srgbClr val="5B6864"/>
+              </a:solidFill>
+              <a:latin typeface="Hiragino Sans GB" panose="020B0300000000000000" charset="-122"/>
+              <a:ea typeface="Hiragino Sans GB" panose="020B0300000000000000" charset="-122"/>
+              <a:cs typeface="Hiragino Sans GB" panose="020B0300000000000000" charset="-122"/>
+            </a:endParaRPr>
+          </a:p>
+        </p:txBody>
+      </p:sp>
+      <p:sp>
+        <p:nvSpPr>
+          <p:cNvPr id="8" name="矩形 7"/>
+          <p:cNvSpPr>
+            <a:spLocks noGrp="1"/>
+          </p:cNvSpPr>
+          <p:nvPr/>
+        </p:nvSpPr>
+        <p:spPr>
+          <a:xfrm>
+            <a:off x="5476875" y="2876550"/>
+            <a:ext cx="5953125" cy="400050"/>
+          </a:xfrm>
+          <a:prstGeom prst="rect">
+            <a:avLst/>
+          </a:prstGeom>
+          <a:noFill/>
+          <a:ln w="0">
+            <a:noFill/>
+          </a:ln>
+        </p:spPr>
+        <p:txBody>
+          <a:bodyPr wrap="square" lIns="0" tIns="0" rIns="0" bIns="0" anchor="t">
+            <a:noAutofit/>
+          </a:bodyPr>
+          <a:lstStyle>
+            <a:defPPr>
+              <a:defRPr sz="2175" b="1">
+                <a:solidFill>
+                  <a:srgbClr val="172A2A"/>
+                </a:solidFill>
+                <a:latin typeface="Hiragino Sans GB" panose="020B0300000000000000" charset="-122"/>
+                <a:ea typeface="Hiragino Sans GB" panose="020B0300000000000000" charset="-122"/>
+                <a:cs typeface="Hiragino Sans GB" panose="020B0300000000000000" charset="-122"/>
+              </a:defRPr>
+            </a:defPPr>
+          </a:lstStyle>
+          <a:p>
+            <a:pPr>
+              <a:defRPr sz="2175" b="1">
+                <a:solidFill>
+                  <a:srgbClr val="172A2A"/>
+                </a:solidFill>
+                <a:latin typeface="Hiragino Sans GB" panose="020B0300000000000000" charset="-122"/>
+                <a:ea typeface="Hiragino Sans GB" panose="020B0300000000000000" charset="-122"/>
+                <a:cs typeface="Hiragino Sans GB" panose="020B0300000000000000" charset="-122"/>
+              </a:defRPr>
+            </a:pPr>
+            <a:r>
+              <a:rPr sz="2175" b="1">
+                <a:solidFill>
+                  <a:srgbClr val="172A2A"/>
+                </a:solidFill>
+                <a:latin typeface="Hiragino Sans GB" panose="020B0300000000000000" charset="-122"/>
+                <a:ea typeface="Hiragino Sans GB" panose="020B0300000000000000" charset="-122"/>
+                <a:cs typeface="Hiragino Sans GB" panose="020B0300000000000000" charset="-122"/>
+              </a:rPr>
+              <a:t>数据库定义</a:t>
+            </a:r>
+            <a:endParaRPr sz="2175" b="1">
+              <a:solidFill>
+                <a:srgbClr val="172A2A"/>
+              </a:solidFill>
+              <a:latin typeface="Hiragino Sans GB" panose="020B0300000000000000" charset="-122"/>
+              <a:ea typeface="Hiragino Sans GB" panose="020B0300000000000000" charset="-122"/>
+              <a:cs typeface="Hiragino Sans GB" panose="020B0300000000000000" charset="-122"/>
+            </a:endParaRPr>
+          </a:p>
+        </p:txBody>
+      </p:sp>
+      <p:sp>
+        <p:nvSpPr>
+          <p:cNvPr id="9" name="矩形 8"/>
+          <p:cNvSpPr>
+            <a:spLocks noGrp="1"/>
+          </p:cNvSpPr>
+          <p:nvPr/>
+        </p:nvSpPr>
+        <p:spPr>
+          <a:xfrm>
+            <a:off x="5476875" y="3324225"/>
+            <a:ext cx="5953125" cy="609600"/>
+          </a:xfrm>
+          <a:prstGeom prst="rect">
+            <a:avLst/>
+          </a:prstGeom>
+          <a:noFill/>
+          <a:ln w="0">
+            <a:noFill/>
+          </a:ln>
+        </p:spPr>
+        <p:txBody>
+          <a:bodyPr wrap="square" lIns="0" tIns="0" rIns="0" bIns="0" anchor="t">
+            <a:noAutofit/>
+          </a:bodyPr>
+          <a:lstStyle>
+            <a:defPPr>
+              <a:defRPr sz="1800" b="0">
+                <a:solidFill>
+                  <a:srgbClr val="5B6864"/>
+                </a:solidFill>
+                <a:latin typeface="Hiragino Sans GB" panose="020B0300000000000000" charset="-122"/>
+                <a:ea typeface="Hiragino Sans GB" panose="020B0300000000000000" charset="-122"/>
+                <a:cs typeface="Hiragino Sans GB" panose="020B0300000000000000" charset="-122"/>
+              </a:defRPr>
+            </a:defPPr>
+          </a:lstStyle>
+          <a:p>
+            <a:pPr>
+              <a:defRPr sz="1800" b="0">
+                <a:solidFill>
+                  <a:srgbClr val="5B6864"/>
+                </a:solidFill>
+                <a:latin typeface="Hiragino Sans GB" panose="020B0300000000000000" charset="-122"/>
+                <a:ea typeface="Hiragino Sans GB" panose="020B0300000000000000" charset="-122"/>
+                <a:cs typeface="Hiragino Sans GB" panose="020B0300000000000000" charset="-122"/>
+              </a:defRPr>
+            </a:pPr>
+            <a:r>
+              <a:rPr sz="1800" b="0">
+                <a:solidFill>
+                  <a:srgbClr val="5B6864"/>
+                </a:solidFill>
+                <a:latin typeface="Hiragino Sans GB" panose="020B0300000000000000" charset="-122"/>
+                <a:ea typeface="Hiragino Sans GB" panose="020B0300000000000000" charset="-122"/>
+                <a:cs typeface="Hiragino Sans GB" panose="020B0300000000000000" charset="-122"/>
+              </a:rPr>
+              <a:t>数据表、索引、视图、队列和配额账本</a:t>
+            </a:r>
+            <a:endParaRPr sz="1800" b="0">
+              <a:solidFill>
+                <a:srgbClr val="5B6864"/>
+              </a:solidFill>
+              <a:latin typeface="Hiragino Sans GB" panose="020B0300000000000000" charset="-122"/>
+              <a:ea typeface="Hiragino Sans GB" panose="020B0300000000000000" charset="-122"/>
+              <a:cs typeface="Hiragino Sans GB" panose="020B0300000000000000" charset="-122"/>
+            </a:endParaRPr>
+          </a:p>
+        </p:txBody>
+      </p:sp>
+      <p:sp>
+        <p:nvSpPr>
+          <p:cNvPr id="10" name="矩形 9"/>
+          <p:cNvSpPr>
+            <a:spLocks noGrp="1"/>
+          </p:cNvSpPr>
+          <p:nvPr/>
+        </p:nvSpPr>
+        <p:spPr>
+          <a:xfrm>
+            <a:off x="5476875" y="3943350"/>
+            <a:ext cx="5953125" cy="400050"/>
+          </a:xfrm>
+          <a:prstGeom prst="rect">
+            <a:avLst/>
+          </a:prstGeom>
+          <a:noFill/>
+          <a:ln w="0">
+            <a:noFill/>
+          </a:ln>
+        </p:spPr>
+        <p:txBody>
+          <a:bodyPr wrap="square" lIns="0" tIns="0" rIns="0" bIns="0" anchor="t">
+            <a:noAutofit/>
+          </a:bodyPr>
+          <a:lstStyle>
+            <a:defPPr>
+              <a:defRPr sz="2175" b="1">
+                <a:solidFill>
+                  <a:srgbClr val="172A2A"/>
+                </a:solidFill>
+                <a:latin typeface="Hiragino Sans GB" panose="020B0300000000000000" charset="-122"/>
+                <a:ea typeface="Hiragino Sans GB" panose="020B0300000000000000" charset="-122"/>
+                <a:cs typeface="Hiragino Sans GB" panose="020B0300000000000000" charset="-122"/>
+              </a:defRPr>
+            </a:defPPr>
+          </a:lstStyle>
+          <a:p>
+            <a:pPr>
+              <a:defRPr sz="2175" b="1">
+                <a:solidFill>
+                  <a:srgbClr val="172A2A"/>
+                </a:solidFill>
+                <a:latin typeface="Hiragino Sans GB" panose="020B0300000000000000" charset="-122"/>
+                <a:ea typeface="Hiragino Sans GB" panose="020B0300000000000000" charset="-122"/>
+                <a:cs typeface="Hiragino Sans GB" panose="020B0300000000000000" charset="-122"/>
+              </a:defRPr>
+            </a:pPr>
+            <a:r>
+              <a:rPr sz="2175" b="1">
+                <a:solidFill>
+                  <a:srgbClr val="172A2A"/>
+                </a:solidFill>
+                <a:latin typeface="Hiragino Sans GB" panose="020B0300000000000000" charset="-122"/>
+                <a:ea typeface="Hiragino Sans GB" panose="020B0300000000000000" charset="-122"/>
+                <a:cs typeface="Hiragino Sans GB" panose="020B0300000000000000" charset="-122"/>
+              </a:rPr>
+              <a:t>数据获取与补抓</a:t>
+            </a:r>
+            <a:endParaRPr sz="2175" b="1">
+              <a:solidFill>
+                <a:srgbClr val="172A2A"/>
+              </a:solidFill>
+              <a:latin typeface="Hiragino Sans GB" panose="020B0300000000000000" charset="-122"/>
+              <a:ea typeface="Hiragino Sans GB" panose="020B0300000000000000" charset="-122"/>
+              <a:cs typeface="Hiragino Sans GB" panose="020B0300000000000000" charset="-122"/>
+            </a:endParaRPr>
+          </a:p>
+        </p:txBody>
+      </p:sp>
+      <p:sp>
+        <p:nvSpPr>
+          <p:cNvPr id="11" name="矩形 10"/>
+          <p:cNvSpPr>
+            <a:spLocks noGrp="1"/>
+          </p:cNvSpPr>
+          <p:nvPr/>
+        </p:nvSpPr>
+        <p:spPr>
+          <a:xfrm>
+            <a:off x="5476875" y="4391025"/>
+            <a:ext cx="5953125" cy="609600"/>
+          </a:xfrm>
+          <a:prstGeom prst="rect">
+            <a:avLst/>
+          </a:prstGeom>
+          <a:noFill/>
+          <a:ln w="0">
+            <a:noFill/>
+          </a:ln>
+        </p:spPr>
+        <p:txBody>
+          <a:bodyPr wrap="square" lIns="0" tIns="0" rIns="0" bIns="0" anchor="t">
+            <a:noAutofit/>
+          </a:bodyPr>
+          <a:lstStyle>
+            <a:defPPr>
+              <a:defRPr sz="1800" b="0">
+                <a:solidFill>
+                  <a:srgbClr val="5B6864"/>
+                </a:solidFill>
+                <a:latin typeface="Hiragino Sans GB" panose="020B0300000000000000" charset="-122"/>
+                <a:ea typeface="Hiragino Sans GB" panose="020B0300000000000000" charset="-122"/>
+                <a:cs typeface="Hiragino Sans GB" panose="020B0300000000000000" charset="-122"/>
+              </a:defRPr>
+            </a:defPPr>
+          </a:lstStyle>
+          <a:p>
+            <a:pPr>
+              <a:defRPr sz="1800" b="0">
+                <a:solidFill>
+                  <a:srgbClr val="5B6864"/>
+                </a:solidFill>
+                <a:latin typeface="Hiragino Sans GB" panose="020B0300000000000000" charset="-122"/>
+                <a:ea typeface="Hiragino Sans GB" panose="020B0300000000000000" charset="-122"/>
+                <a:cs typeface="Hiragino Sans GB" panose="020B0300000000000000" charset="-122"/>
+              </a:defRPr>
+            </a:pPr>
+            <a:r>
+              <a:rPr lang="zh-CN" sz="1800" b="0">
+                <a:solidFill>
+                  <a:srgbClr val="5B6864"/>
+                </a:solidFill>
+                <a:latin typeface="Hiragino Sans GB" panose="020B0300000000000000" charset="-122"/>
+                <a:ea typeface="Hiragino Sans GB" panose="020B0300000000000000" charset="-122"/>
+                <a:cs typeface="Hiragino Sans GB" panose="020B0300000000000000" charset="-122"/>
+              </a:rPr>
+              <a:t>全体组员</a:t>
+            </a:r>
+            <a:r>
+              <a:rPr sz="1800" b="0">
+                <a:solidFill>
+                  <a:srgbClr val="5B6864"/>
+                </a:solidFill>
+                <a:latin typeface="Hiragino Sans GB" panose="020B0300000000000000" charset="-122"/>
+                <a:ea typeface="Hiragino Sans GB" panose="020B0300000000000000" charset="-122"/>
+                <a:cs typeface="Hiragino Sans GB" panose="020B0300000000000000" charset="-122"/>
+              </a:rPr>
+              <a:t>多机连续运行</a:t>
+            </a:r>
+            <a:endParaRPr sz="1800" b="0">
+              <a:solidFill>
+                <a:srgbClr val="5B6864"/>
+              </a:solidFill>
+              <a:latin typeface="Hiragino Sans GB" panose="020B0300000000000000" charset="-122"/>
+              <a:ea typeface="Hiragino Sans GB" panose="020B0300000000000000" charset="-122"/>
+              <a:cs typeface="Hiragino Sans GB" panose="020B0300000000000000" charset="-122"/>
+            </a:endParaRPr>
+          </a:p>
+        </p:txBody>
+      </p:sp>
+      <p:sp>
+        <p:nvSpPr>
+          <p:cNvPr id="2" name="矩形 1"/>
+          <p:cNvSpPr>
+            <a:spLocks noGrp="1"/>
+          </p:cNvSpPr>
+          <p:nvPr/>
+        </p:nvSpPr>
+        <p:spPr>
+          <a:xfrm>
+            <a:off x="5476875" y="5229225"/>
+            <a:ext cx="5953125" cy="609600"/>
+          </a:xfrm>
+          <a:prstGeom prst="rect">
+            <a:avLst/>
+          </a:prstGeom>
+          <a:noFill/>
+          <a:ln w="0">
+            <a:noFill/>
+          </a:ln>
+        </p:spPr>
+        <p:txBody>
+          <a:bodyPr wrap="square" lIns="0" tIns="0" rIns="0" bIns="0" anchor="t">
+            <a:noAutofit/>
+          </a:bodyPr>
+          <a:lstStyle>
+            <a:defPPr>
+              <a:defRPr sz="1800" b="0">
+                <a:solidFill>
+                  <a:srgbClr val="5B6864"/>
+                </a:solidFill>
+                <a:latin typeface="Hiragino Sans GB" panose="020B0300000000000000" charset="-122"/>
+                <a:ea typeface="Hiragino Sans GB" panose="020B0300000000000000" charset="-122"/>
+                <a:cs typeface="Hiragino Sans GB" panose="020B0300000000000000" charset="-122"/>
+              </a:defRPr>
+            </a:defPPr>
+          </a:lstStyle>
+          <a:p>
+            <a:pPr>
+              <a:defRPr sz="1800" b="0">
+                <a:solidFill>
+                  <a:srgbClr val="5B6864"/>
+                </a:solidFill>
+                <a:latin typeface="Hiragino Sans GB" panose="020B0300000000000000" charset="-122"/>
+                <a:ea typeface="Hiragino Sans GB" panose="020B0300000000000000" charset="-122"/>
+                <a:cs typeface="Hiragino Sans GB" panose="020B0300000000000000" charset="-122"/>
+              </a:defRPr>
+            </a:pPr>
+            <a:r>
+              <a:rPr lang="zh-CN" sz="1800" b="0">
+                <a:solidFill>
+                  <a:srgbClr val="5B6864"/>
+                </a:solidFill>
+                <a:latin typeface="Hiragino Sans GB" panose="020B0300000000000000" charset="-122"/>
+                <a:ea typeface="Hiragino Sans GB" panose="020B0300000000000000" charset="-122"/>
+                <a:cs typeface="Hiragino Sans GB" panose="020B0300000000000000" charset="-122"/>
+              </a:rPr>
+              <a:t>从中秋假期</a:t>
+            </a:r>
+            <a:r>
+              <a:rPr lang="zh-CN" sz="1800" b="0">
+                <a:solidFill>
+                  <a:srgbClr val="5B6864"/>
+                </a:solidFill>
+                <a:latin typeface="Hiragino Sans GB" panose="020B0300000000000000" charset="-122"/>
+                <a:ea typeface="Hiragino Sans GB" panose="020B0300000000000000" charset="-122"/>
+                <a:cs typeface="Hiragino Sans GB" panose="020B0300000000000000" charset="-122"/>
+              </a:rPr>
+              <a:t>前跑到国庆第二天才跑完原始</a:t>
+            </a:r>
+            <a:r>
+              <a:rPr lang="zh-CN" sz="1800" b="0">
+                <a:solidFill>
+                  <a:srgbClr val="5B6864"/>
+                </a:solidFill>
+                <a:latin typeface="Hiragino Sans GB" panose="020B0300000000000000" charset="-122"/>
+                <a:ea typeface="Hiragino Sans GB" panose="020B0300000000000000" charset="-122"/>
+                <a:cs typeface="Hiragino Sans GB" panose="020B0300000000000000" charset="-122"/>
+              </a:rPr>
+              <a:t>数据</a:t>
+            </a:r>
+            <a:endParaRPr lang="zh-CN" sz="1800" b="0">
+              <a:solidFill>
+                <a:srgbClr val="5B6864"/>
+              </a:solidFill>
+              <a:latin typeface="Hiragino Sans GB" panose="020B0300000000000000" charset="-122"/>
+              <a:ea typeface="Hiragino Sans GB" panose="020B0300000000000000" charset="-122"/>
+              <a:cs typeface="Hiragino Sans GB" panose="020B0300000000000000" charset="-122"/>
+            </a:endParaRPr>
+          </a:p>
+        </p:txBody>
+      </p:sp>
+    </p:spTree>
+  </p:cSld>
+  <p:clrMapOvr>
+    <a:masterClrMapping/>
+  </p:clrMapOvr>
+</p:sld>
+</file>
+
+<file path=ppt/slides/slide5.xml><?xml version="1.0" encoding="utf-8"?>
+<p:sld xmlns:a="http://schemas.openxmlformats.org/drawingml/2006/main" xmlns:r="http://schemas.openxmlformats.org/officeDocument/2006/relationships" xmlns:p="http://schemas.openxmlformats.org/presentationml/2006/main">
+  <p:cSld>
+    <p:bg>
+      <p:bgPr>
+        <a:solidFill>
+          <a:srgbClr val="F4F2EC"/>
+        </a:solidFill>
+        <a:effectLst/>
+      </p:bgPr>
+    </p:bg>
+    <p:spTree>
+      <p:nvGrpSpPr>
+        <p:cNvPr id="1" name=""/>
+        <p:cNvGrpSpPr/>
+        <p:nvPr/>
+      </p:nvGrpSpPr>
+      <p:grpSpPr/>
+      <p:sp>
+        <p:nvSpPr>
+          <p:cNvPr id="9" name="矩形 8"/>
+          <p:cNvSpPr>
+            <a:spLocks noGrp="1"/>
+          </p:cNvSpPr>
+          <p:nvPr/>
+        </p:nvSpPr>
+        <p:spPr>
+          <a:xfrm>
+            <a:off x="609600" y="457200"/>
+            <a:ext cx="10972800" cy="838200"/>
+          </a:xfrm>
+          <a:prstGeom prst="rect">
+            <a:avLst/>
+          </a:prstGeom>
+          <a:noFill/>
+          <a:ln w="0">
+            <a:noFill/>
+          </a:ln>
+        </p:spPr>
+        <p:txBody>
+          <a:bodyPr wrap="square" lIns="0" tIns="0" rIns="0" bIns="0" anchor="t">
+            <a:noAutofit/>
+          </a:bodyPr>
+          <a:lstStyle>
+            <a:defPPr>
+              <a:defRPr sz="3300" b="1">
+                <a:solidFill>
+                  <a:srgbClr val="172A2A"/>
+                </a:solidFill>
+                <a:latin typeface="Hiragino Sans GB" panose="020B0300000000000000" charset="-122"/>
+                <a:ea typeface="Hiragino Sans GB" panose="020B0300000000000000" charset="-122"/>
+                <a:cs typeface="Hiragino Sans GB" panose="020B0300000000000000" charset="-122"/>
+              </a:defRPr>
+            </a:defPPr>
+          </a:lstStyle>
+          <a:p>
+            <a:pPr>
+              <a:defRPr sz="3300" b="1">
+                <a:solidFill>
+                  <a:srgbClr val="172A2A"/>
+                </a:solidFill>
+                <a:latin typeface="Hiragino Sans GB" panose="020B0300000000000000" charset="-122"/>
+                <a:ea typeface="Hiragino Sans GB" panose="020B0300000000000000" charset="-122"/>
+                <a:cs typeface="Hiragino Sans GB" panose="020B0300000000000000" charset="-122"/>
+              </a:defRPr>
+            </a:pPr>
+            <a:r>
+              <a:rPr sz="3300" b="1">
+                <a:solidFill>
+                  <a:srgbClr val="172A2A"/>
+                </a:solidFill>
+                <a:latin typeface="Hiragino Sans GB" panose="020B0300000000000000" charset="-122"/>
+                <a:ea typeface="Hiragino Sans GB" panose="020B0300000000000000" charset="-122"/>
+                <a:cs typeface="Hiragino Sans GB" panose="020B0300000000000000" charset="-122"/>
+              </a:rPr>
+              <a:t>核心数据表已经累计 3,079,278 行</a:t>
+            </a:r>
+            <a:endParaRPr sz="3300" b="1">
+              <a:solidFill>
+                <a:srgbClr val="172A2A"/>
+              </a:solidFill>
+              <a:latin typeface="Hiragino Sans GB" panose="020B0300000000000000" charset="-122"/>
+              <a:ea typeface="Hiragino Sans GB" panose="020B0300000000000000" charset="-122"/>
+              <a:cs typeface="Hiragino Sans GB" panose="020B0300000000000000" charset="-122"/>
+            </a:endParaRPr>
+          </a:p>
+        </p:txBody>
+      </p:sp>
+      <p:sp>
+        <p:nvSpPr>
+          <p:cNvPr id="4" name="矩形 3"/>
+          <p:cNvSpPr>
+            <a:spLocks noGrp="1"/>
+          </p:cNvSpPr>
+          <p:nvPr/>
+        </p:nvSpPr>
+        <p:spPr>
+          <a:xfrm>
+            <a:off x="609600" y="1628775"/>
+            <a:ext cx="10668000" cy="1438275"/>
+          </a:xfrm>
+          <a:prstGeom prst="rect">
+            <a:avLst/>
+          </a:prstGeom>
+          <a:noFill/>
+          <a:ln w="0">
+            <a:noFill/>
+          </a:ln>
+        </p:spPr>
+        <p:txBody>
+          <a:bodyPr wrap="square" lIns="0" tIns="0" rIns="0" bIns="0" anchor="t">
+            <a:noAutofit/>
+          </a:bodyPr>
+          <a:lstStyle>
+            <a:defPPr>
+              <a:defRPr sz="8400" b="1">
+                <a:solidFill>
+                  <a:srgbClr val="246A5F"/>
+                </a:solidFill>
+                <a:latin typeface="Hiragino Sans GB" panose="020B0300000000000000" charset="-122"/>
+                <a:ea typeface="Hiragino Sans GB" panose="020B0300000000000000" charset="-122"/>
+                <a:cs typeface="Hiragino Sans GB" panose="020B0300000000000000" charset="-122"/>
+              </a:defRPr>
+            </a:defPPr>
+          </a:lstStyle>
+          <a:p>
+            <a:pPr>
+              <a:defRPr sz="8400" b="1">
+                <a:solidFill>
+                  <a:srgbClr val="246A5F"/>
+                </a:solidFill>
+                <a:latin typeface="Hiragino Sans GB" panose="020B0300000000000000" charset="-122"/>
+                <a:ea typeface="Hiragino Sans GB" panose="020B0300000000000000" charset="-122"/>
+                <a:cs typeface="Hiragino Sans GB" panose="020B0300000000000000" charset="-122"/>
+              </a:defRPr>
+            </a:pPr>
+            <a:r>
+              <a:rPr sz="8400" b="1">
+                <a:solidFill>
+                  <a:srgbClr val="246A5F"/>
+                </a:solidFill>
+                <a:latin typeface="Hiragino Sans GB" panose="020B0300000000000000" charset="-122"/>
+                <a:ea typeface="Hiragino Sans GB" panose="020B0300000000000000" charset="-122"/>
+                <a:cs typeface="Hiragino Sans GB" panose="020B0300000000000000" charset="-122"/>
+              </a:rPr>
+              <a:t>307.9 万</a:t>
+            </a:r>
+            <a:endParaRPr sz="8400" b="1">
+              <a:solidFill>
+                <a:srgbClr val="246A5F"/>
+              </a:solidFill>
+              <a:latin typeface="Hiragino Sans GB" panose="020B0300000000000000" charset="-122"/>
+              <a:ea typeface="Hiragino Sans GB" panose="020B0300000000000000" charset="-122"/>
+              <a:cs typeface="Hiragino Sans GB" panose="020B0300000000000000" charset="-122"/>
+            </a:endParaRPr>
+          </a:p>
+        </p:txBody>
+      </p:sp>
+      <p:sp>
+        <p:nvSpPr>
+          <p:cNvPr id="5" name="矩形 4"/>
+          <p:cNvSpPr>
+            <a:spLocks noGrp="1"/>
+          </p:cNvSpPr>
+          <p:nvPr/>
+        </p:nvSpPr>
+        <p:spPr>
+          <a:xfrm>
+            <a:off x="685800" y="3286125"/>
+            <a:ext cx="10191750" cy="590550"/>
+          </a:xfrm>
+          <a:prstGeom prst="rect">
+            <a:avLst/>
+          </a:prstGeom>
+          <a:noFill/>
+          <a:ln w="0">
+            <a:noFill/>
+          </a:ln>
+        </p:spPr>
+        <p:txBody>
+          <a:bodyPr wrap="square" lIns="0" tIns="0" rIns="0" bIns="0" anchor="t">
+            <a:noAutofit/>
+          </a:bodyPr>
+          <a:lstStyle>
+            <a:defPPr>
+              <a:defRPr sz="2625" b="0">
+                <a:solidFill>
+                  <a:srgbClr val="172A2A"/>
+                </a:solidFill>
+                <a:latin typeface="Hiragino Sans GB" panose="020B0300000000000000" charset="-122"/>
+                <a:ea typeface="Hiragino Sans GB" panose="020B0300000000000000" charset="-122"/>
+                <a:cs typeface="Hiragino Sans GB" panose="020B0300000000000000" charset="-122"/>
+              </a:defRPr>
+            </a:defPPr>
+          </a:lstStyle>
+          <a:p>
+            <a:pPr>
+              <a:defRPr sz="2625" b="0">
+                <a:solidFill>
+                  <a:srgbClr val="172A2A"/>
+                </a:solidFill>
+                <a:latin typeface="Hiragino Sans GB" panose="020B0300000000000000" charset="-122"/>
+                <a:ea typeface="Hiragino Sans GB" panose="020B0300000000000000" charset="-122"/>
+                <a:cs typeface="Hiragino Sans GB" panose="020B0300000000000000" charset="-122"/>
+              </a:defRPr>
+            </a:pPr>
+            <a:r>
+              <a:rPr sz="2625" b="0">
+                <a:solidFill>
+                  <a:srgbClr val="172A2A"/>
+                </a:solidFill>
+                <a:latin typeface="Hiragino Sans GB" panose="020B0300000000000000" charset="-122"/>
+                <a:ea typeface="Hiragino Sans GB" panose="020B0300000000000000" charset="-122"/>
+                <a:cs typeface="Hiragino Sans GB" panose="020B0300000000000000" charset="-122"/>
+              </a:rPr>
+              <a:t>核心数据记录</a:t>
+            </a:r>
+            <a:endParaRPr sz="2625" b="0">
+              <a:solidFill>
+                <a:srgbClr val="172A2A"/>
+              </a:solidFill>
+              <a:latin typeface="Hiragino Sans GB" panose="020B0300000000000000" charset="-122"/>
+              <a:ea typeface="Hiragino Sans GB" panose="020B0300000000000000" charset="-122"/>
+              <a:cs typeface="Hiragino Sans GB" panose="020B0300000000000000" charset="-122"/>
+            </a:endParaRPr>
+          </a:p>
+        </p:txBody>
+      </p:sp>
+      <p:sp>
+        <p:nvSpPr>
+          <p:cNvPr id="6" name="矩形 5"/>
+          <p:cNvSpPr>
+            <a:spLocks noGrp="1"/>
+          </p:cNvSpPr>
+          <p:nvPr/>
+        </p:nvSpPr>
+        <p:spPr>
+          <a:xfrm>
+            <a:off x="685800" y="4362450"/>
+            <a:ext cx="4857750" cy="666750"/>
+          </a:xfrm>
+          <a:prstGeom prst="rect">
+            <a:avLst/>
+          </a:prstGeom>
+          <a:noFill/>
+          <a:ln w="0">
+            <a:noFill/>
+          </a:ln>
+        </p:spPr>
+        <p:txBody>
+          <a:bodyPr wrap="square" lIns="0" tIns="0" rIns="0" bIns="0" anchor="t">
+            <a:noAutofit/>
+          </a:bodyPr>
+          <a:lstStyle>
+            <a:defPPr>
+              <a:defRPr sz="3150" b="1">
+                <a:solidFill>
+                  <a:srgbClr val="172A2A"/>
+                </a:solidFill>
+                <a:latin typeface="Hiragino Sans GB" panose="020B0300000000000000" charset="-122"/>
+                <a:ea typeface="Hiragino Sans GB" panose="020B0300000000000000" charset="-122"/>
+                <a:cs typeface="Hiragino Sans GB" panose="020B0300000000000000" charset="-122"/>
+              </a:defRPr>
+            </a:defPPr>
+          </a:lstStyle>
+          <a:p>
+            <a:pPr>
+              <a:defRPr sz="3150" b="1">
+                <a:solidFill>
+                  <a:srgbClr val="172A2A"/>
+                </a:solidFill>
+                <a:latin typeface="Hiragino Sans GB" panose="020B0300000000000000" charset="-122"/>
+                <a:ea typeface="Hiragino Sans GB" panose="020B0300000000000000" charset="-122"/>
+                <a:cs typeface="Hiragino Sans GB" panose="020B0300000000000000" charset="-122"/>
+              </a:defRPr>
+            </a:pPr>
+            <a:r>
+              <a:rPr sz="3150" b="1">
+                <a:solidFill>
+                  <a:srgbClr val="172A2A"/>
+                </a:solidFill>
+                <a:latin typeface="Hiragino Sans GB" panose="020B0300000000000000" charset="-122"/>
+                <a:ea typeface="Hiragino Sans GB" panose="020B0300000000000000" charset="-122"/>
+                <a:cs typeface="Hiragino Sans GB" panose="020B0300000000000000" charset="-122"/>
+              </a:rPr>
+              <a:t>50,956 款游戏</a:t>
+            </a:r>
+            <a:endParaRPr sz="3150" b="1">
+              <a:solidFill>
+                <a:srgbClr val="172A2A"/>
+              </a:solidFill>
+              <a:latin typeface="Hiragino Sans GB" panose="020B0300000000000000" charset="-122"/>
+              <a:ea typeface="Hiragino Sans GB" panose="020B0300000000000000" charset="-122"/>
+              <a:cs typeface="Hiragino Sans GB" panose="020B0300000000000000" charset="-122"/>
+            </a:endParaRPr>
+          </a:p>
+        </p:txBody>
+      </p:sp>
+      <p:sp>
+        <p:nvSpPr>
+          <p:cNvPr id="7" name="矩形 6"/>
+          <p:cNvSpPr>
+            <a:spLocks noGrp="1"/>
+          </p:cNvSpPr>
+          <p:nvPr/>
+        </p:nvSpPr>
+        <p:spPr>
+          <a:xfrm>
+            <a:off x="6057900" y="4362450"/>
+            <a:ext cx="5429250" cy="666750"/>
+          </a:xfrm>
+          <a:prstGeom prst="rect">
+            <a:avLst/>
+          </a:prstGeom>
+          <a:noFill/>
+          <a:ln w="0">
+            <a:noFill/>
+          </a:ln>
+        </p:spPr>
+        <p:txBody>
+          <a:bodyPr wrap="square" lIns="0" tIns="0" rIns="0" bIns="0" anchor="t">
+            <a:noAutofit/>
+          </a:bodyPr>
+          <a:lstStyle>
+            <a:defPPr>
+              <a:defRPr sz="3150" b="1">
+                <a:solidFill>
+                  <a:srgbClr val="172A2A"/>
+                </a:solidFill>
+                <a:latin typeface="Hiragino Sans GB" panose="020B0300000000000000" charset="-122"/>
+                <a:ea typeface="Hiragino Sans GB" panose="020B0300000000000000" charset="-122"/>
+                <a:cs typeface="Hiragino Sans GB" panose="020B0300000000000000" charset="-122"/>
+              </a:defRPr>
+            </a:defPPr>
+          </a:lstStyle>
+          <a:p>
+            <a:pPr>
+              <a:defRPr sz="3150" b="1">
+                <a:solidFill>
+                  <a:srgbClr val="172A2A"/>
+                </a:solidFill>
+                <a:latin typeface="Hiragino Sans GB" panose="020B0300000000000000" charset="-122"/>
+                <a:ea typeface="Hiragino Sans GB" panose="020B0300000000000000" charset="-122"/>
+                <a:cs typeface="Hiragino Sans GB" panose="020B0300000000000000" charset="-122"/>
+              </a:defRPr>
+            </a:pPr>
+            <a:r>
+              <a:rPr sz="3150" b="1">
+                <a:solidFill>
+                  <a:srgbClr val="172A2A"/>
+                </a:solidFill>
+                <a:latin typeface="Hiragino Sans GB" panose="020B0300000000000000" charset="-122"/>
+                <a:ea typeface="Hiragino Sans GB" panose="020B0300000000000000" charset="-122"/>
+                <a:cs typeface="Hiragino Sans GB" panose="020B0300000000000000" charset="-122"/>
+              </a:rPr>
+              <a:t>1,971,064 条成就</a:t>
+            </a:r>
+            <a:endParaRPr sz="3150" b="1">
+              <a:solidFill>
+                <a:srgbClr val="172A2A"/>
+              </a:solidFill>
+              <a:latin typeface="Hiragino Sans GB" panose="020B0300000000000000" charset="-122"/>
+              <a:ea typeface="Hiragino Sans GB" panose="020B0300000000000000" charset="-122"/>
+              <a:cs typeface="Hiragino Sans GB" panose="020B0300000000000000" charset="-122"/>
+            </a:endParaRPr>
+          </a:p>
+        </p:txBody>
+      </p:sp>
+      <p:sp>
+        <p:nvSpPr>
+          <p:cNvPr id="8" name="矩形 7"/>
+          <p:cNvSpPr>
+            <a:spLocks noGrp="1"/>
+          </p:cNvSpPr>
+          <p:nvPr/>
+        </p:nvSpPr>
+        <p:spPr>
+          <a:xfrm>
+            <a:off x="685800" y="5314950"/>
+            <a:ext cx="10382250" cy="647700"/>
+          </a:xfrm>
+          <a:prstGeom prst="rect">
+            <a:avLst/>
+          </a:prstGeom>
+          <a:noFill/>
+          <a:ln w="0">
+            <a:noFill/>
+          </a:ln>
+        </p:spPr>
+        <p:txBody>
+          <a:bodyPr wrap="square" lIns="0" tIns="0" rIns="0" bIns="0" anchor="t">
+            <a:noAutofit/>
+          </a:bodyPr>
+          <a:lstStyle>
+            <a:defPPr>
+              <a:defRPr sz="3150" b="1">
+                <a:solidFill>
+                  <a:srgbClr val="172A2A"/>
+                </a:solidFill>
+                <a:latin typeface="Hiragino Sans GB" panose="020B0300000000000000" charset="-122"/>
+                <a:ea typeface="Hiragino Sans GB" panose="020B0300000000000000" charset="-122"/>
+                <a:cs typeface="Hiragino Sans GB" panose="020B0300000000000000" charset="-122"/>
+              </a:defRPr>
+            </a:defPPr>
+          </a:lstStyle>
+          <a:p>
+            <a:pPr>
+              <a:defRPr sz="3150" b="1">
+                <a:solidFill>
+                  <a:srgbClr val="172A2A"/>
+                </a:solidFill>
+                <a:latin typeface="Hiragino Sans GB" panose="020B0300000000000000" charset="-122"/>
+                <a:ea typeface="Hiragino Sans GB" panose="020B0300000000000000" charset="-122"/>
+                <a:cs typeface="Hiragino Sans GB" panose="020B0300000000000000" charset="-122"/>
+              </a:defRPr>
+            </a:pPr>
+            <a:r>
+              <a:rPr sz="3150" b="1">
+                <a:solidFill>
+                  <a:srgbClr val="172A2A"/>
+                </a:solidFill>
+                <a:latin typeface="Hiragino Sans GB" panose="020B0300000000000000" charset="-122"/>
+                <a:ea typeface="Hiragino Sans GB" panose="020B0300000000000000" charset="-122"/>
+                <a:cs typeface="Hiragino Sans GB" panose="020B0300000000000000" charset="-122"/>
+              </a:rPr>
+              <a:t>888,837 条标签关系</a:t>
+            </a:r>
+            <a:endParaRPr sz="3150" b="1">
+              <a:solidFill>
+                <a:srgbClr val="172A2A"/>
+              </a:solidFill>
+              <a:latin typeface="Hiragino Sans GB" panose="020B0300000000000000" charset="-122"/>
+              <a:ea typeface="Hiragino Sans GB" panose="020B0300000000000000" charset="-122"/>
+              <a:cs typeface="Hiragino Sans GB" panose="020B0300000000000000" charset="-122"/>
+            </a:endParaRPr>
+          </a:p>
+        </p:txBody>
+      </p:sp>
+    </p:spTree>
+  </p:cSld>
+  <p:clrMapOvr>
+    <a:masterClrMapping/>
+  </p:clrMapOvr>
+</p:sld>
+</file>
+
+<file path=ppt/slides/slide6.xml><?xml version="1.0" encoding="utf-8"?>
+<p:sld xmlns:a="http://schemas.openxmlformats.org/drawingml/2006/main" xmlns:r="http://schemas.openxmlformats.org/officeDocument/2006/relationships" xmlns:p="http://schemas.openxmlformats.org/presentationml/2006/main">
+  <p:cSld>
+    <p:bg>
+      <p:bgPr>
+        <a:solidFill>
+          <a:srgbClr val="F4F2EC"/>
+        </a:solidFill>
+        <a:effectLst/>
+      </p:bgPr>
+    </p:bg>
+    <p:spTree>
+      <p:nvGrpSpPr>
+        <p:cNvPr id="1" name=""/>
+        <p:cNvGrpSpPr/>
+        <p:nvPr/>
+      </p:nvGrpSpPr>
+      <p:grpSpPr/>
+      <p:sp>
+        <p:nvSpPr>
+          <p:cNvPr id="5" name="矩形 4"/>
+          <p:cNvSpPr>
+            <a:spLocks noGrp="1"/>
+          </p:cNvSpPr>
+          <p:nvPr/>
+        </p:nvSpPr>
+        <p:spPr>
+          <a:xfrm>
+            <a:off x="609600" y="457200"/>
+            <a:ext cx="10972800" cy="838200"/>
+          </a:xfrm>
+          <a:prstGeom prst="rect">
+            <a:avLst/>
+          </a:prstGeom>
+          <a:noFill/>
+          <a:ln w="0">
+            <a:noFill/>
+          </a:ln>
+        </p:spPr>
+        <p:txBody>
+          <a:bodyPr wrap="square" lIns="0" tIns="0" rIns="0" bIns="0" anchor="t">
+            <a:noAutofit/>
+          </a:bodyPr>
+          <a:lstStyle>
+            <a:defPPr>
+              <a:defRPr sz="3300" b="1">
+                <a:solidFill>
+                  <a:srgbClr val="172A2A"/>
+                </a:solidFill>
+                <a:latin typeface="Hiragino Sans GB" panose="020B0300000000000000" charset="-122"/>
+                <a:ea typeface="Hiragino Sans GB" panose="020B0300000000000000" charset="-122"/>
+                <a:cs typeface="Hiragino Sans GB" panose="020B0300000000000000" charset="-122"/>
+              </a:defRPr>
+            </a:defPPr>
+          </a:lstStyle>
+          <a:p>
+            <a:pPr>
+              <a:defRPr sz="3300" b="1">
+                <a:solidFill>
+                  <a:srgbClr val="172A2A"/>
+                </a:solidFill>
+                <a:latin typeface="Hiragino Sans GB" panose="020B0300000000000000" charset="-122"/>
+                <a:ea typeface="Hiragino Sans GB" panose="020B0300000000000000" charset="-122"/>
+                <a:cs typeface="Hiragino Sans GB" panose="020B0300000000000000" charset="-122"/>
+              </a:defRPr>
+            </a:pPr>
+            <a:r>
+              <a:rPr sz="3300" b="1">
+                <a:solidFill>
+                  <a:srgbClr val="172A2A"/>
+                </a:solidFill>
+                <a:latin typeface="Hiragino Sans GB" panose="020B0300000000000000" charset="-122"/>
+                <a:ea typeface="Hiragino Sans GB" panose="020B0300000000000000" charset="-122"/>
+                <a:cs typeface="Hiragino Sans GB" panose="020B0300000000000000" charset="-122"/>
+              </a:rPr>
+              <a:t>核心数据表：每张表有多少行</a:t>
+            </a:r>
+            <a:endParaRPr sz="3300" b="1">
+              <a:solidFill>
+                <a:srgbClr val="172A2A"/>
+              </a:solidFill>
+              <a:latin typeface="Hiragino Sans GB" panose="020B0300000000000000" charset="-122"/>
+              <a:ea typeface="Hiragino Sans GB" panose="020B0300000000000000" charset="-122"/>
+              <a:cs typeface="Hiragino Sans GB" panose="020B0300000000000000" charset="-122"/>
+            </a:endParaRPr>
+          </a:p>
+        </p:txBody>
+      </p:sp>
+      <p:graphicFrame>
+        <p:nvGraphicFramePr>
+          <p:cNvPr id="4" name="表格 3"/>
+          <p:cNvGraphicFramePr/>
+          <p:nvPr/>
+        </p:nvGraphicFramePr>
+        <p:xfrm>
+          <a:off x="609600" y="1562100"/>
+          <a:ext cx="10972800" cy="4057650"/>
+        </p:xfrm>
+        <a:graphic>
+          <a:graphicData uri="http://schemas.openxmlformats.org/drawingml/2006/table">
+            <a:tbl>
+              <a:tblPr firstRow="1" lastRow="1"/>
+              <a:tblGrid>
+                <a:gridCol w="3476625"/>
+                <a:gridCol w="2238375"/>
+                <a:gridCol w="5257800"/>
+              </a:tblGrid>
+              <a:tr h="450850">
+                <a:tc>
+                  <a:txBody>
+                    <a:bodyPr/>
+                    <a:lstStyle/>
+                    <a:p>
+                      <a:pPr algn="l"/>
+                      <a:r>
+                        <a:rPr sz="1800" b="1">
+                          <a:solidFill>
+                            <a:srgbClr val="FFFFFF"/>
+                          </a:solidFill>
+                          <a:latin typeface="Hiragino Sans GB" panose="020B0300000000000000" charset="-122"/>
+                          <a:ea typeface="Hiragino Sans GB" panose="020B0300000000000000" charset="-122"/>
+                          <a:cs typeface="Hiragino Sans GB" panose="020B0300000000000000" charset="-122"/>
+                        </a:rPr>
+                        <a:t>数据表</a:t>
+                      </a:r>
+                      <a:endParaRPr sz="1800" b="1">
+                        <a:solidFill>
+                          <a:srgbClr val="FFFFFF"/>
+                        </a:solidFill>
+                        <a:latin typeface="Hiragino Sans GB" panose="020B0300000000000000" charset="-122"/>
+                        <a:ea typeface="Hiragino Sans GB" panose="020B0300000000000000" charset="-122"/>
+                        <a:cs typeface="Hiragino Sans GB" panose="020B0300000000000000" charset="-122"/>
+                      </a:endParaRPr>
+                    </a:p>
+                  </a:txBody>
+                  <a:tcPr marL="133350" marR="133350" marT="76200" marB="76200" anchor="ctr">
+                    <a:lnL w="6191">
+                      <a:solidFill>
+                        <a:srgbClr val="D8DED7"/>
+                      </a:solidFill>
+                      <a:prstDash val="solid"/>
+                    </a:lnL>
+                    <a:lnR w="6191">
+                      <a:solidFill>
+                        <a:srgbClr val="D8DED7"/>
+                      </a:solidFill>
+                      <a:prstDash val="solid"/>
+                    </a:lnR>
+                    <a:lnT w="6191">
+                      <a:solidFill>
+                        <a:srgbClr val="D8DED7"/>
+                      </a:solidFill>
+                      <a:prstDash val="solid"/>
+                    </a:lnT>
+                    <a:lnB w="6191">
+                      <a:solidFill>
+                        <a:srgbClr val="D8DED7"/>
+                      </a:solidFill>
+                      <a:prstDash val="solid"/>
+                    </a:lnB>
+                    <a:solidFill>
+                      <a:srgbClr val="246A5F"/>
+                    </a:solidFill>
+                  </a:tcPr>
+                </a:tc>
+                <a:tc>
+                  <a:txBody>
+                    <a:bodyPr/>
+                    <a:lstStyle/>
+                    <a:p>
+                      <a:pPr algn="r"/>
+                      <a:r>
+                        <a:rPr sz="1800" b="1">
+                          <a:solidFill>
+                            <a:srgbClr val="FFFFFF"/>
+                          </a:solidFill>
+                          <a:latin typeface="Hiragino Sans GB" panose="020B0300000000000000" charset="-122"/>
+                          <a:ea typeface="Hiragino Sans GB" panose="020B0300000000000000" charset="-122"/>
+                          <a:cs typeface="Hiragino Sans GB" panose="020B0300000000000000" charset="-122"/>
+                        </a:rPr>
+                        <a:t>行数</a:t>
+                      </a:r>
+                      <a:endParaRPr sz="1800" b="1">
+                        <a:solidFill>
+                          <a:srgbClr val="FFFFFF"/>
+                        </a:solidFill>
+                        <a:latin typeface="Hiragino Sans GB" panose="020B0300000000000000" charset="-122"/>
+                        <a:ea typeface="Hiragino Sans GB" panose="020B0300000000000000" charset="-122"/>
+                        <a:cs typeface="Hiragino Sans GB" panose="020B0300000000000000" charset="-122"/>
+                      </a:endParaRPr>
+                    </a:p>
+                  </a:txBody>
+                  <a:tcPr marL="133350" marR="133350" marT="76200" marB="76200" anchor="ctr">
+                    <a:lnR w="6191">
+                      <a:solidFill>
+                        <a:srgbClr val="D8DED7"/>
+                      </a:solidFill>
+                      <a:prstDash val="solid"/>
+                    </a:lnR>
+                    <a:lnT w="6191">
+                      <a:solidFill>
+                        <a:srgbClr val="D8DED7"/>
+                      </a:solidFill>
+                      <a:prstDash val="solid"/>
+                    </a:lnT>
+                    <a:lnB w="6191">
+                      <a:solidFill>
+                        <a:srgbClr val="D8DED7"/>
+                      </a:solidFill>
+                      <a:prstDash val="solid"/>
+                    </a:lnB>
+                    <a:solidFill>
+                      <a:srgbClr val="246A5F"/>
+                    </a:solidFill>
+                  </a:tcPr>
+                </a:tc>
+                <a:tc>
+                  <a:txBody>
+                    <a:bodyPr/>
+                    <a:lstStyle/>
+                    <a:p>
+                      <a:pPr algn="l"/>
+                      <a:r>
+                        <a:rPr sz="1800" b="1">
+                          <a:solidFill>
+                            <a:srgbClr val="FFFFFF"/>
+                          </a:solidFill>
+                          <a:latin typeface="Hiragino Sans GB" panose="020B0300000000000000" charset="-122"/>
+                          <a:ea typeface="Hiragino Sans GB" panose="020B0300000000000000" charset="-122"/>
+                          <a:cs typeface="Hiragino Sans GB" panose="020B0300000000000000" charset="-122"/>
+                        </a:rPr>
+                        <a:t>内容</a:t>
+                      </a:r>
+                      <a:endParaRPr sz="1800" b="1">
+                        <a:solidFill>
+                          <a:srgbClr val="FFFFFF"/>
+                        </a:solidFill>
+                        <a:latin typeface="Hiragino Sans GB" panose="020B0300000000000000" charset="-122"/>
+                        <a:ea typeface="Hiragino Sans GB" panose="020B0300000000000000" charset="-122"/>
+                        <a:cs typeface="Hiragino Sans GB" panose="020B0300000000000000" charset="-122"/>
+                      </a:endParaRPr>
+                    </a:p>
+                  </a:txBody>
+                  <a:tcPr marL="133350" marR="133350" marT="76200" marB="76200" anchor="ctr">
+                    <a:lnR w="6191">
+                      <a:solidFill>
+                        <a:srgbClr val="D8DED7"/>
+                      </a:solidFill>
+                      <a:prstDash val="solid"/>
+                    </a:lnR>
+                    <a:lnT w="6191">
+                      <a:solidFill>
+                        <a:srgbClr val="D8DED7"/>
+                      </a:solidFill>
+                      <a:prstDash val="solid"/>
+                    </a:lnT>
+                    <a:lnB w="6191">
+                      <a:solidFill>
+                        <a:srgbClr val="D8DED7"/>
+                      </a:solidFill>
+                      <a:prstDash val="solid"/>
+                    </a:lnB>
+                    <a:solidFill>
+                      <a:srgbClr val="246A5F"/>
+                    </a:solidFill>
+                  </a:tcPr>
+                </a:tc>
+              </a:tr>
+              <a:tr h="450850">
+                <a:tc>
+                  <a:txBody>
+                    <a:bodyPr/>
+                    <a:lstStyle/>
+                    <a:p>
+                      <a:pPr algn="l"/>
+                      <a:r>
+                        <a:rPr sz="1800" b="0">
+                          <a:solidFill>
+                            <a:srgbClr val="172A2A"/>
+                          </a:solidFill>
+                          <a:latin typeface="Hiragino Sans GB" panose="020B0300000000000000" charset="-122"/>
+                          <a:ea typeface="Hiragino Sans GB" panose="020B0300000000000000" charset="-122"/>
+                          <a:cs typeface="Hiragino Sans GB" panose="020B0300000000000000" charset="-122"/>
+                        </a:rPr>
+                        <a:t>games</a:t>
+                      </a:r>
+                      <a:endParaRPr sz="1800" b="0">
+                        <a:solidFill>
+                          <a:srgbClr val="172A2A"/>
+                        </a:solidFill>
+                        <a:latin typeface="Hiragino Sans GB" panose="020B0300000000000000" charset="-122"/>
+                        <a:ea typeface="Hiragino Sans GB" panose="020B0300000000000000" charset="-122"/>
+                        <a:cs typeface="Hiragino Sans GB" panose="020B0300000000000000" charset="-122"/>
+                      </a:endParaRPr>
+                    </a:p>
+                  </a:txBody>
+                  <a:tcPr marL="133350" marR="133350" marT="76200" marB="76200" anchor="ctr">
+                    <a:lnL w="6191">
+                      <a:solidFill>
+                        <a:srgbClr val="D8DED7"/>
+                      </a:solidFill>
+                      <a:prstDash val="solid"/>
+                    </a:lnL>
+                    <a:lnR w="6191">
+                      <a:solidFill>
+                        <a:srgbClr val="D8DED7"/>
+                      </a:solidFill>
+                      <a:prstDash val="solid"/>
+                    </a:lnR>
+                    <a:lnB w="6191">
+                      <a:solidFill>
+                        <a:srgbClr val="D8DED7"/>
+                      </a:solidFill>
+                      <a:prstDash val="solid"/>
+                    </a:lnB>
+                    <a:solidFill>
+                      <a:srgbClr val="F4F2EC"/>
+                    </a:solidFill>
+                  </a:tcPr>
+                </a:tc>
+                <a:tc>
+                  <a:txBody>
+                    <a:bodyPr/>
+                    <a:lstStyle/>
+                    <a:p>
+                      <a:pPr algn="r"/>
+                      <a:r>
+                        <a:rPr sz="1800" b="0">
+                          <a:solidFill>
+                            <a:srgbClr val="172A2A"/>
+                          </a:solidFill>
+                          <a:latin typeface="Hiragino Sans GB" panose="020B0300000000000000" charset="-122"/>
+                          <a:ea typeface="Hiragino Sans GB" panose="020B0300000000000000" charset="-122"/>
+                          <a:cs typeface="Hiragino Sans GB" panose="020B0300000000000000" charset="-122"/>
+                        </a:rPr>
+                        <a:t>50,956</a:t>
+                      </a:r>
+                      <a:endParaRPr sz="1800" b="0">
+                        <a:solidFill>
+                          <a:srgbClr val="172A2A"/>
+                        </a:solidFill>
+                        <a:latin typeface="Hiragino Sans GB" panose="020B0300000000000000" charset="-122"/>
+                        <a:ea typeface="Hiragino Sans GB" panose="020B0300000000000000" charset="-122"/>
+                        <a:cs typeface="Hiragino Sans GB" panose="020B0300000000000000" charset="-122"/>
+                      </a:endParaRPr>
+                    </a:p>
+                  </a:txBody>
+                  <a:tcPr marL="133350" marR="133350" marT="76200" marB="76200" anchor="ctr">
+                    <a:lnR w="6191">
+                      <a:solidFill>
+                        <a:srgbClr val="D8DED7"/>
+                      </a:solidFill>
+                      <a:prstDash val="solid"/>
+                    </a:lnR>
+                    <a:lnB w="6191">
+                      <a:solidFill>
+                        <a:srgbClr val="D8DED7"/>
+                      </a:solidFill>
+                      <a:prstDash val="solid"/>
+                    </a:lnB>
+                    <a:solidFill>
+                      <a:srgbClr val="F4F2EC"/>
+                    </a:solidFill>
+                  </a:tcPr>
+                </a:tc>
+                <a:tc>
+                  <a:txBody>
+                    <a:bodyPr/>
+                    <a:lstStyle/>
+                    <a:p>
+                      <a:pPr algn="l"/>
+                      <a:r>
+                        <a:rPr sz="1800" b="0">
+                          <a:solidFill>
+                            <a:srgbClr val="172A2A"/>
+                          </a:solidFill>
+                          <a:latin typeface="Hiragino Sans GB" panose="020B0300000000000000" charset="-122"/>
+                          <a:ea typeface="Hiragino Sans GB" panose="020B0300000000000000" charset="-122"/>
+                          <a:cs typeface="Hiragino Sans GB" panose="020B0300000000000000" charset="-122"/>
+                        </a:rPr>
+                        <a:t>游戏主表</a:t>
+                      </a:r>
+                      <a:endParaRPr sz="1800" b="0">
+                        <a:solidFill>
+                          <a:srgbClr val="172A2A"/>
+                        </a:solidFill>
+                        <a:latin typeface="Hiragino Sans GB" panose="020B0300000000000000" charset="-122"/>
+                        <a:ea typeface="Hiragino Sans GB" panose="020B0300000000000000" charset="-122"/>
+                        <a:cs typeface="Hiragino Sans GB" panose="020B0300000000000000" charset="-122"/>
+                      </a:endParaRPr>
+                    </a:p>
+                  </a:txBody>
+                  <a:tcPr marL="133350" marR="133350" marT="76200" marB="76200" anchor="ctr">
+                    <a:lnR w="6191">
+                      <a:solidFill>
+                        <a:srgbClr val="D8DED7"/>
+                      </a:solidFill>
+                      <a:prstDash val="solid"/>
+                    </a:lnR>
+                    <a:lnB w="6191">
+                      <a:solidFill>
+                        <a:srgbClr val="D8DED7"/>
+                      </a:solidFill>
+                      <a:prstDash val="solid"/>
+                    </a:lnB>
+                    <a:solidFill>
+                      <a:srgbClr val="F4F2EC"/>
+                    </a:solidFill>
+                  </a:tcPr>
+                </a:tc>
+              </a:tr>
+              <a:tr h="450850">
+                <a:tc>
+                  <a:txBody>
+                    <a:bodyPr/>
+                    <a:lstStyle/>
+                    <a:p>
+                      <a:pPr algn="l"/>
+                      <a:r>
+                        <a:rPr sz="1800" b="0">
+                          <a:solidFill>
+                            <a:srgbClr val="172A2A"/>
+                          </a:solidFill>
+                          <a:latin typeface="Hiragino Sans GB" panose="020B0300000000000000" charset="-122"/>
+                          <a:ea typeface="Hiragino Sans GB" panose="020B0300000000000000" charset="-122"/>
+                          <a:cs typeface="Hiragino Sans GB" panose="020B0300000000000000" charset="-122"/>
+                        </a:rPr>
+                        <a:t>store_search_games</a:t>
+                      </a:r>
+                      <a:endParaRPr sz="1800" b="0">
+                        <a:solidFill>
+                          <a:srgbClr val="172A2A"/>
+                        </a:solidFill>
+                        <a:latin typeface="Hiragino Sans GB" panose="020B0300000000000000" charset="-122"/>
+                        <a:ea typeface="Hiragino Sans GB" panose="020B0300000000000000" charset="-122"/>
+                        <a:cs typeface="Hiragino Sans GB" panose="020B0300000000000000" charset="-122"/>
+                      </a:endParaRPr>
+                    </a:p>
+                  </a:txBody>
+                  <a:tcPr marL="133350" marR="133350" marT="76200" marB="76200" anchor="ctr">
+                    <a:lnL w="6191">
+                      <a:solidFill>
+                        <a:srgbClr val="D8DED7"/>
+                      </a:solidFill>
+                      <a:prstDash val="solid"/>
+                    </a:lnL>
+                    <a:lnR w="6191">
+                      <a:solidFill>
+                        <a:srgbClr val="D8DED7"/>
+                      </a:solidFill>
+                      <a:prstDash val="solid"/>
+                    </a:lnR>
+                    <a:lnB w="6191">
+                      <a:solidFill>
+                        <a:srgbClr val="D8DED7"/>
+                      </a:solidFill>
+                      <a:prstDash val="solid"/>
+                    </a:lnB>
+                    <a:solidFill>
+                      <a:srgbClr val="F4F2EC"/>
+                    </a:solidFill>
+                  </a:tcPr>
+                </a:tc>
+                <a:tc>
+                  <a:txBody>
+                    <a:bodyPr/>
+                    <a:lstStyle/>
+                    <a:p>
+                      <a:pPr algn="r"/>
+                      <a:r>
+                        <a:rPr sz="1800" b="0">
+                          <a:solidFill>
+                            <a:srgbClr val="172A2A"/>
+                          </a:solidFill>
+                          <a:latin typeface="Hiragino Sans GB" panose="020B0300000000000000" charset="-122"/>
+                          <a:ea typeface="Hiragino Sans GB" panose="020B0300000000000000" charset="-122"/>
+                          <a:cs typeface="Hiragino Sans GB" panose="020B0300000000000000" charset="-122"/>
+                        </a:rPr>
+                        <a:t>50,956</a:t>
+                      </a:r>
+                      <a:endParaRPr sz="1800" b="0">
+                        <a:solidFill>
+                          <a:srgbClr val="172A2A"/>
+                        </a:solidFill>
+                        <a:latin typeface="Hiragino Sans GB" panose="020B0300000000000000" charset="-122"/>
+                        <a:ea typeface="Hiragino Sans GB" panose="020B0300000000000000" charset="-122"/>
+                        <a:cs typeface="Hiragino Sans GB" panose="020B0300000000000000" charset="-122"/>
+                      </a:endParaRPr>
+                    </a:p>
+                  </a:txBody>
+                  <a:tcPr marL="133350" marR="133350" marT="76200" marB="76200" anchor="ctr">
+                    <a:lnR w="6191">
+                      <a:solidFill>
+                        <a:srgbClr val="D8DED7"/>
+                      </a:solidFill>
+                      <a:prstDash val="solid"/>
+                    </a:lnR>
+                    <a:lnB w="6191">
+                      <a:solidFill>
+                        <a:srgbClr val="D8DED7"/>
+                      </a:solidFill>
+                      <a:prstDash val="solid"/>
+                    </a:lnB>
+                    <a:solidFill>
+                      <a:srgbClr val="F4F2EC"/>
+                    </a:solidFill>
+                  </a:tcPr>
+                </a:tc>
+                <a:tc>
+                  <a:txBody>
+                    <a:bodyPr/>
+                    <a:lstStyle/>
+                    <a:p>
+                      <a:pPr algn="l"/>
+                      <a:r>
+                        <a:rPr sz="1800" b="0">
+                          <a:solidFill>
+                            <a:srgbClr val="172A2A"/>
+                          </a:solidFill>
+                          <a:latin typeface="Hiragino Sans GB" panose="020B0300000000000000" charset="-122"/>
+                          <a:ea typeface="Hiragino Sans GB" panose="020B0300000000000000" charset="-122"/>
+                          <a:cs typeface="Hiragino Sans GB" panose="020B0300000000000000" charset="-122"/>
+                        </a:rPr>
+                        <a:t>商店枚举记录</a:t>
+                      </a:r>
+                      <a:endParaRPr sz="1800" b="0">
+                        <a:solidFill>
+                          <a:srgbClr val="172A2A"/>
+                        </a:solidFill>
+                        <a:latin typeface="Hiragino Sans GB" panose="020B0300000000000000" charset="-122"/>
+                        <a:ea typeface="Hiragino Sans GB" panose="020B0300000000000000" charset="-122"/>
+                        <a:cs typeface="Hiragino Sans GB" panose="020B0300000000000000" charset="-122"/>
+                      </a:endParaRPr>
+                    </a:p>
+                  </a:txBody>
+                  <a:tcPr marL="133350" marR="133350" marT="76200" marB="76200" anchor="ctr">
+                    <a:lnR w="6191">
+                      <a:solidFill>
+                        <a:srgbClr val="D8DED7"/>
+                      </a:solidFill>
+                      <a:prstDash val="solid"/>
+                    </a:lnR>
+                    <a:lnB w="6191">
+                      <a:solidFill>
+                        <a:srgbClr val="D8DED7"/>
+                      </a:solidFill>
+                      <a:prstDash val="solid"/>
+                    </a:lnB>
+                    <a:solidFill>
+                      <a:srgbClr val="F4F2EC"/>
+                    </a:solidFill>
+                  </a:tcPr>
+                </a:tc>
+              </a:tr>
+              <a:tr h="450850">
+                <a:tc>
+                  <a:txBody>
+                    <a:bodyPr/>
+                    <a:lstStyle/>
+                    <a:p>
+                      <a:pPr algn="l"/>
+                      <a:r>
+                        <a:rPr sz="1800" b="0">
+                          <a:solidFill>
+                            <a:srgbClr val="172A2A"/>
+                          </a:solidFill>
+                          <a:latin typeface="Hiragino Sans GB" panose="020B0300000000000000" charset="-122"/>
+                          <a:ea typeface="Hiragino Sans GB" panose="020B0300000000000000" charset="-122"/>
+                          <a:cs typeface="Hiragino Sans GB" panose="020B0300000000000000" charset="-122"/>
+                        </a:rPr>
+                        <a:t>steam_appdetails</a:t>
+                      </a:r>
+                      <a:endParaRPr sz="1800" b="0">
+                        <a:solidFill>
+                          <a:srgbClr val="172A2A"/>
+                        </a:solidFill>
+                        <a:latin typeface="Hiragino Sans GB" panose="020B0300000000000000" charset="-122"/>
+                        <a:ea typeface="Hiragino Sans GB" panose="020B0300000000000000" charset="-122"/>
+                        <a:cs typeface="Hiragino Sans GB" panose="020B0300000000000000" charset="-122"/>
+                      </a:endParaRPr>
+                    </a:p>
+                  </a:txBody>
+                  <a:tcPr marL="133350" marR="133350" marT="76200" marB="76200" anchor="ctr">
+                    <a:lnL w="6191">
+                      <a:solidFill>
+                        <a:srgbClr val="D8DED7"/>
+                      </a:solidFill>
+                      <a:prstDash val="solid"/>
+                    </a:lnL>
+                    <a:lnR w="6191">
+                      <a:solidFill>
+                        <a:srgbClr val="D8DED7"/>
+                      </a:solidFill>
+                      <a:prstDash val="solid"/>
+                    </a:lnR>
+                    <a:lnB w="6191">
+                      <a:solidFill>
+                        <a:srgbClr val="D8DED7"/>
+                      </a:solidFill>
+                      <a:prstDash val="solid"/>
+                    </a:lnB>
+                    <a:solidFill>
+                      <a:srgbClr val="F4F2EC"/>
+                    </a:solidFill>
+                  </a:tcPr>
+                </a:tc>
+                <a:tc>
+                  <a:txBody>
+                    <a:bodyPr/>
+                    <a:lstStyle/>
+                    <a:p>
+                      <a:pPr algn="r"/>
+                      <a:r>
+                        <a:rPr sz="1800" b="0">
+                          <a:solidFill>
+                            <a:srgbClr val="172A2A"/>
+                          </a:solidFill>
+                          <a:latin typeface="Hiragino Sans GB" panose="020B0300000000000000" charset="-122"/>
+                          <a:ea typeface="Hiragino Sans GB" panose="020B0300000000000000" charset="-122"/>
+                          <a:cs typeface="Hiragino Sans GB" panose="020B0300000000000000" charset="-122"/>
+                        </a:rPr>
+                        <a:t>50,954</a:t>
+                      </a:r>
+                      <a:endParaRPr sz="1800" b="0">
+                        <a:solidFill>
+                          <a:srgbClr val="172A2A"/>
+                        </a:solidFill>
+                        <a:latin typeface="Hiragino Sans GB" panose="020B0300000000000000" charset="-122"/>
+                        <a:ea typeface="Hiragino Sans GB" panose="020B0300000000000000" charset="-122"/>
+                        <a:cs typeface="Hiragino Sans GB" panose="020B0300000000000000" charset="-122"/>
+                      </a:endParaRPr>
+                    </a:p>
+                  </a:txBody>
+                  <a:tcPr marL="133350" marR="133350" marT="76200" marB="76200" anchor="ctr">
+                    <a:lnR w="6191">
+                      <a:solidFill>
+                        <a:srgbClr val="D8DED7"/>
+                      </a:solidFill>
+                      <a:prstDash val="solid"/>
+                    </a:lnR>
+                    <a:lnB w="6191">
+                      <a:solidFill>
+                        <a:srgbClr val="D8DED7"/>
+                      </a:solidFill>
+                      <a:prstDash val="solid"/>
+                    </a:lnB>
+                    <a:solidFill>
+                      <a:srgbClr val="F4F2EC"/>
+                    </a:solidFill>
+                  </a:tcPr>
+                </a:tc>
+                <a:tc>
+                  <a:txBody>
+                    <a:bodyPr/>
+                    <a:lstStyle/>
+                    <a:p>
+                      <a:pPr algn="l"/>
+                      <a:r>
+                        <a:rPr sz="1800" b="0">
+                          <a:solidFill>
+                            <a:srgbClr val="172A2A"/>
+                          </a:solidFill>
+                          <a:latin typeface="Hiragino Sans GB" panose="020B0300000000000000" charset="-122"/>
+                          <a:ea typeface="Hiragino Sans GB" panose="020B0300000000000000" charset="-122"/>
+                          <a:cs typeface="Hiragino Sans GB" panose="020B0300000000000000" charset="-122"/>
+                        </a:rPr>
+                        <a:t>商店详情</a:t>
+                      </a:r>
+                      <a:endParaRPr sz="1800" b="0">
+                        <a:solidFill>
+                          <a:srgbClr val="172A2A"/>
+                        </a:solidFill>
+                        <a:latin typeface="Hiragino Sans GB" panose="020B0300000000000000" charset="-122"/>
+                        <a:ea typeface="Hiragino Sans GB" panose="020B0300000000000000" charset="-122"/>
+                        <a:cs typeface="Hiragino Sans GB" panose="020B0300000000000000" charset="-122"/>
+                      </a:endParaRPr>
+                    </a:p>
+                  </a:txBody>
+                  <a:tcPr marL="133350" marR="133350" marT="76200" marB="76200" anchor="ctr">
+                    <a:lnR w="6191">
+                      <a:solidFill>
+                        <a:srgbClr val="D8DED7"/>
+                      </a:solidFill>
+                      <a:prstDash val="solid"/>
+                    </a:lnR>
+                    <a:lnB w="6191">
+                      <a:solidFill>
+                        <a:srgbClr val="D8DED7"/>
+                      </a:solidFill>
+                      <a:prstDash val="solid"/>
+                    </a:lnB>
+                    <a:solidFill>
+                      <a:srgbClr val="F4F2EC"/>
+                    </a:solidFill>
+                  </a:tcPr>
+                </a:tc>
+              </a:tr>
+              <a:tr h="450850">
+                <a:tc>
+                  <a:txBody>
+                    <a:bodyPr/>
+                    <a:lstStyle/>
+                    <a:p>
+                      <a:pPr algn="l"/>
+                      <a:r>
+                        <a:rPr sz="1800" b="0">
+                          <a:solidFill>
+                            <a:srgbClr val="172A2A"/>
+                          </a:solidFill>
+                          <a:latin typeface="Hiragino Sans GB" panose="020B0300000000000000" charset="-122"/>
+                          <a:ea typeface="Hiragino Sans GB" panose="020B0300000000000000" charset="-122"/>
+                          <a:cs typeface="Hiragino Sans GB" panose="020B0300000000000000" charset="-122"/>
+                        </a:rPr>
+                        <a:t>steamspy_games</a:t>
+                      </a:r>
+                      <a:endParaRPr sz="1800" b="0">
+                        <a:solidFill>
+                          <a:srgbClr val="172A2A"/>
+                        </a:solidFill>
+                        <a:latin typeface="Hiragino Sans GB" panose="020B0300000000000000" charset="-122"/>
+                        <a:ea typeface="Hiragino Sans GB" panose="020B0300000000000000" charset="-122"/>
+                        <a:cs typeface="Hiragino Sans GB" panose="020B0300000000000000" charset="-122"/>
+                      </a:endParaRPr>
+                    </a:p>
+                  </a:txBody>
+                  <a:tcPr marL="133350" marR="133350" marT="76200" marB="76200" anchor="ctr">
+                    <a:lnL w="6191">
+                      <a:solidFill>
+                        <a:srgbClr val="D8DED7"/>
+                      </a:solidFill>
+                      <a:prstDash val="solid"/>
+                    </a:lnL>
+                    <a:lnR w="6191">
+                      <a:solidFill>
+                        <a:srgbClr val="D8DED7"/>
+                      </a:solidFill>
+                      <a:prstDash val="solid"/>
+                    </a:lnR>
+                    <a:lnB w="6191">
+                      <a:solidFill>
+                        <a:srgbClr val="D8DED7"/>
+                      </a:solidFill>
+                      <a:prstDash val="solid"/>
+                    </a:lnB>
+                    <a:solidFill>
+                      <a:srgbClr val="F4F2EC"/>
+                    </a:solidFill>
+                  </a:tcPr>
+                </a:tc>
+                <a:tc>
+                  <a:txBody>
+                    <a:bodyPr/>
+                    <a:lstStyle/>
+                    <a:p>
+                      <a:pPr algn="r"/>
+                      <a:r>
+                        <a:rPr sz="1800" b="0">
+                          <a:solidFill>
+                            <a:srgbClr val="172A2A"/>
+                          </a:solidFill>
+                          <a:latin typeface="Hiragino Sans GB" panose="020B0300000000000000" charset="-122"/>
+                          <a:ea typeface="Hiragino Sans GB" panose="020B0300000000000000" charset="-122"/>
+                          <a:cs typeface="Hiragino Sans GB" panose="020B0300000000000000" charset="-122"/>
+                        </a:rPr>
+                        <a:t>50,741</a:t>
+                      </a:r>
+                      <a:endParaRPr sz="1800" b="0">
+                        <a:solidFill>
+                          <a:srgbClr val="172A2A"/>
+                        </a:solidFill>
+                        <a:latin typeface="Hiragino Sans GB" panose="020B0300000000000000" charset="-122"/>
+                        <a:ea typeface="Hiragino Sans GB" panose="020B0300000000000000" charset="-122"/>
+                        <a:cs typeface="Hiragino Sans GB" panose="020B0300000000000000" charset="-122"/>
+                      </a:endParaRPr>
+                    </a:p>
+                  </a:txBody>
+                  <a:tcPr marL="133350" marR="133350" marT="76200" marB="76200" anchor="ctr">
+                    <a:lnR w="6191">
+                      <a:solidFill>
+                        <a:srgbClr val="D8DED7"/>
+                      </a:solidFill>
+                      <a:prstDash val="solid"/>
+                    </a:lnR>
+                    <a:lnB w="6191">
+                      <a:solidFill>
+                        <a:srgbClr val="D8DED7"/>
+                      </a:solidFill>
+                      <a:prstDash val="solid"/>
+                    </a:lnB>
+                    <a:solidFill>
+                      <a:srgbClr val="F4F2EC"/>
+                    </a:solidFill>
+                  </a:tcPr>
+                </a:tc>
+                <a:tc>
+                  <a:txBody>
+                    <a:bodyPr/>
+                    <a:lstStyle/>
+                    <a:p>
+                      <a:pPr algn="l"/>
+                      <a:r>
+                        <a:rPr sz="1800" b="0">
+                          <a:solidFill>
+                            <a:srgbClr val="172A2A"/>
+                          </a:solidFill>
+                          <a:latin typeface="Hiragino Sans GB" panose="020B0300000000000000" charset="-122"/>
+                          <a:ea typeface="Hiragino Sans GB" panose="020B0300000000000000" charset="-122"/>
+                          <a:cs typeface="Hiragino Sans GB" panose="020B0300000000000000" charset="-122"/>
+                        </a:rPr>
+                        <a:t>热度与口碑</a:t>
+                      </a:r>
+                      <a:endParaRPr sz="1800" b="0">
+                        <a:solidFill>
+                          <a:srgbClr val="172A2A"/>
+                        </a:solidFill>
+                        <a:latin typeface="Hiragino Sans GB" panose="020B0300000000000000" charset="-122"/>
+                        <a:ea typeface="Hiragino Sans GB" panose="020B0300000000000000" charset="-122"/>
+                        <a:cs typeface="Hiragino Sans GB" panose="020B0300000000000000" charset="-122"/>
+                      </a:endParaRPr>
+                    </a:p>
+                  </a:txBody>
+                  <a:tcPr marL="133350" marR="133350" marT="76200" marB="76200" anchor="ctr">
+                    <a:lnR w="6191">
+                      <a:solidFill>
+                        <a:srgbClr val="D8DED7"/>
+                      </a:solidFill>
+                      <a:prstDash val="solid"/>
+                    </a:lnR>
+                    <a:lnB w="6191">
+                      <a:solidFill>
+                        <a:srgbClr val="D8DED7"/>
+                      </a:solidFill>
+                      <a:prstDash val="solid"/>
+                    </a:lnB>
+                    <a:solidFill>
+                      <a:srgbClr val="F4F2EC"/>
+                    </a:solidFill>
+                  </a:tcPr>
+                </a:tc>
+              </a:tr>
+              <a:tr h="450850">
+                <a:tc>
+                  <a:txBody>
+                    <a:bodyPr/>
+                    <a:lstStyle/>
+                    <a:p>
+                      <a:pPr algn="l"/>
+                      <a:r>
+                        <a:rPr sz="1800" b="0">
+                          <a:solidFill>
+                            <a:srgbClr val="172A2A"/>
+                          </a:solidFill>
+                          <a:latin typeface="Hiragino Sans GB" panose="020B0300000000000000" charset="-122"/>
+                          <a:ea typeface="Hiragino Sans GB" panose="020B0300000000000000" charset="-122"/>
+                          <a:cs typeface="Hiragino Sans GB" panose="020B0300000000000000" charset="-122"/>
+                        </a:rPr>
+                        <a:t>rawg_games</a:t>
+                      </a:r>
+                      <a:endParaRPr sz="1800" b="0">
+                        <a:solidFill>
+                          <a:srgbClr val="172A2A"/>
+                        </a:solidFill>
+                        <a:latin typeface="Hiragino Sans GB" panose="020B0300000000000000" charset="-122"/>
+                        <a:ea typeface="Hiragino Sans GB" panose="020B0300000000000000" charset="-122"/>
+                        <a:cs typeface="Hiragino Sans GB" panose="020B0300000000000000" charset="-122"/>
+                      </a:endParaRPr>
+                    </a:p>
+                  </a:txBody>
+                  <a:tcPr marL="133350" marR="133350" marT="76200" marB="76200" anchor="ctr">
+                    <a:lnL w="6191">
+                      <a:solidFill>
+                        <a:srgbClr val="D8DED7"/>
+                      </a:solidFill>
+                      <a:prstDash val="solid"/>
+                    </a:lnL>
+                    <a:lnR w="6191">
+                      <a:solidFill>
+                        <a:srgbClr val="D8DED7"/>
+                      </a:solidFill>
+                      <a:prstDash val="solid"/>
+                    </a:lnR>
+                    <a:lnB w="6191">
+                      <a:solidFill>
+                        <a:srgbClr val="D8DED7"/>
+                      </a:solidFill>
+                      <a:prstDash val="solid"/>
+                    </a:lnB>
+                    <a:solidFill>
+                      <a:srgbClr val="F4F2EC"/>
+                    </a:solidFill>
+                  </a:tcPr>
+                </a:tc>
+                <a:tc>
+                  <a:txBody>
+                    <a:bodyPr/>
+                    <a:lstStyle/>
+                    <a:p>
+                      <a:pPr algn="r"/>
+                      <a:r>
+                        <a:rPr sz="1800" b="0">
+                          <a:solidFill>
+                            <a:srgbClr val="172A2A"/>
+                          </a:solidFill>
+                          <a:latin typeface="Hiragino Sans GB" panose="020B0300000000000000" charset="-122"/>
+                          <a:ea typeface="Hiragino Sans GB" panose="020B0300000000000000" charset="-122"/>
+                          <a:cs typeface="Hiragino Sans GB" panose="020B0300000000000000" charset="-122"/>
+                        </a:rPr>
+                        <a:t>15,770</a:t>
+                      </a:r>
+                      <a:endParaRPr sz="1800" b="0">
+                        <a:solidFill>
+                          <a:srgbClr val="172A2A"/>
+                        </a:solidFill>
+                        <a:latin typeface="Hiragino Sans GB" panose="020B0300000000000000" charset="-122"/>
+                        <a:ea typeface="Hiragino Sans GB" panose="020B0300000000000000" charset="-122"/>
+                        <a:cs typeface="Hiragino Sans GB" panose="020B0300000000000000" charset="-122"/>
+                      </a:endParaRPr>
+                    </a:p>
+                  </a:txBody>
+                  <a:tcPr marL="133350" marR="133350" marT="76200" marB="76200" anchor="ctr">
+                    <a:lnR w="6191">
+                      <a:solidFill>
+                        <a:srgbClr val="D8DED7"/>
+                      </a:solidFill>
+                      <a:prstDash val="solid"/>
+                    </a:lnR>
+                    <a:lnB w="6191">
+                      <a:solidFill>
+                        <a:srgbClr val="D8DED7"/>
+                      </a:solidFill>
+                      <a:prstDash val="solid"/>
+                    </a:lnB>
+                    <a:solidFill>
+                      <a:srgbClr val="F4F2EC"/>
+                    </a:solidFill>
+                  </a:tcPr>
+                </a:tc>
+                <a:tc>
+                  <a:txBody>
+                    <a:bodyPr/>
+                    <a:lstStyle/>
+                    <a:p>
+                      <a:pPr algn="l"/>
+                      <a:r>
+                        <a:rPr sz="1800" b="0">
+                          <a:solidFill>
+                            <a:srgbClr val="172A2A"/>
+                          </a:solidFill>
+                          <a:latin typeface="Hiragino Sans GB" panose="020B0300000000000000" charset="-122"/>
+                          <a:ea typeface="Hiragino Sans GB" panose="020B0300000000000000" charset="-122"/>
+                          <a:cs typeface="Hiragino Sans GB" panose="020B0300000000000000" charset="-122"/>
+                        </a:rPr>
+                        <a:t>评分、时长与状态</a:t>
+                      </a:r>
+                      <a:endParaRPr sz="1800" b="0">
+                        <a:solidFill>
+                          <a:srgbClr val="172A2A"/>
+                        </a:solidFill>
+                        <a:latin typeface="Hiragino Sans GB" panose="020B0300000000000000" charset="-122"/>
+                        <a:ea typeface="Hiragino Sans GB" panose="020B0300000000000000" charset="-122"/>
+                        <a:cs typeface="Hiragino Sans GB" panose="020B0300000000000000" charset="-122"/>
+                      </a:endParaRPr>
+                    </a:p>
+                  </a:txBody>
+                  <a:tcPr marL="133350" marR="133350" marT="76200" marB="76200" anchor="ctr">
+                    <a:lnR w="6191">
+                      <a:solidFill>
+                        <a:srgbClr val="D8DED7"/>
+                      </a:solidFill>
+                      <a:prstDash val="solid"/>
+                    </a:lnR>
+                    <a:lnB w="6191">
+                      <a:solidFill>
+                        <a:srgbClr val="D8DED7"/>
+                      </a:solidFill>
+                      <a:prstDash val="solid"/>
+                    </a:lnB>
+                    <a:solidFill>
+                      <a:srgbClr val="F4F2EC"/>
+                    </a:solidFill>
+                  </a:tcPr>
+                </a:tc>
+              </a:tr>
+              <a:tr h="450850">
+                <a:tc>
+                  <a:txBody>
+                    <a:bodyPr/>
+                    <a:lstStyle/>
+                    <a:p>
+                      <a:pPr algn="l"/>
+                      <a:r>
+                        <a:rPr sz="1800" b="0">
+                          <a:solidFill>
+                            <a:srgbClr val="172A2A"/>
+                          </a:solidFill>
+                          <a:latin typeface="Hiragino Sans GB" panose="020B0300000000000000" charset="-122"/>
+                          <a:ea typeface="Hiragino Sans GB" panose="020B0300000000000000" charset="-122"/>
+                          <a:cs typeface="Hiragino Sans GB" panose="020B0300000000000000" charset="-122"/>
+                        </a:rPr>
+                        <a:t>achievements</a:t>
+                      </a:r>
+                      <a:endParaRPr sz="1800" b="0">
+                        <a:solidFill>
+                          <a:srgbClr val="172A2A"/>
+                        </a:solidFill>
+                        <a:latin typeface="Hiragino Sans GB" panose="020B0300000000000000" charset="-122"/>
+                        <a:ea typeface="Hiragino Sans GB" panose="020B0300000000000000" charset="-122"/>
+                        <a:cs typeface="Hiragino Sans GB" panose="020B0300000000000000" charset="-122"/>
+                      </a:endParaRPr>
+                    </a:p>
+                  </a:txBody>
+                  <a:tcPr marL="133350" marR="133350" marT="76200" marB="76200" anchor="ctr">
+                    <a:lnL w="6191">
+                      <a:solidFill>
+                        <a:srgbClr val="D8DED7"/>
+                      </a:solidFill>
+                      <a:prstDash val="solid"/>
+                    </a:lnL>
+                    <a:lnR w="6191">
+                      <a:solidFill>
+                        <a:srgbClr val="D8DED7"/>
+                      </a:solidFill>
+                      <a:prstDash val="solid"/>
+                    </a:lnR>
+                    <a:lnB w="6191">
+                      <a:solidFill>
+                        <a:srgbClr val="D8DED7"/>
+                      </a:solidFill>
+                      <a:prstDash val="solid"/>
+                    </a:lnB>
+                    <a:solidFill>
+                      <a:srgbClr val="F4F2EC"/>
+                    </a:solidFill>
+                  </a:tcPr>
+                </a:tc>
+                <a:tc>
+                  <a:txBody>
+                    <a:bodyPr/>
+                    <a:lstStyle/>
+                    <a:p>
+                      <a:pPr algn="r"/>
+                      <a:r>
+                        <a:rPr sz="1800" b="0">
+                          <a:solidFill>
+                            <a:srgbClr val="172A2A"/>
+                          </a:solidFill>
+                          <a:latin typeface="Hiragino Sans GB" panose="020B0300000000000000" charset="-122"/>
+                          <a:ea typeface="Hiragino Sans GB" panose="020B0300000000000000" charset="-122"/>
+                          <a:cs typeface="Hiragino Sans GB" panose="020B0300000000000000" charset="-122"/>
+                        </a:rPr>
+                        <a:t>1,971,064</a:t>
+                      </a:r>
+                      <a:endParaRPr sz="1800" b="0">
+                        <a:solidFill>
+                          <a:srgbClr val="172A2A"/>
+                        </a:solidFill>
+                        <a:latin typeface="Hiragino Sans GB" panose="020B0300000000000000" charset="-122"/>
+                        <a:ea typeface="Hiragino Sans GB" panose="020B0300000000000000" charset="-122"/>
+                        <a:cs typeface="Hiragino Sans GB" panose="020B0300000000000000" charset="-122"/>
+                      </a:endParaRPr>
+                    </a:p>
+                  </a:txBody>
+                  <a:tcPr marL="133350" marR="133350" marT="76200" marB="76200" anchor="ctr">
+                    <a:lnR w="6191">
+                      <a:solidFill>
+                        <a:srgbClr val="D8DED7"/>
+                      </a:solidFill>
+                      <a:prstDash val="solid"/>
+                    </a:lnR>
+                    <a:lnB w="6191">
+                      <a:solidFill>
+                        <a:srgbClr val="D8DED7"/>
+                      </a:solidFill>
+                      <a:prstDash val="solid"/>
+                    </a:lnB>
+                    <a:solidFill>
+                      <a:srgbClr val="F4F2EC"/>
+                    </a:solidFill>
+                  </a:tcPr>
+                </a:tc>
+                <a:tc>
+                  <a:txBody>
+                    <a:bodyPr/>
+                    <a:lstStyle/>
+                    <a:p>
+                      <a:pPr algn="l"/>
+                      <a:r>
+                        <a:rPr sz="1800" b="0">
+                          <a:solidFill>
+                            <a:srgbClr val="172A2A"/>
+                          </a:solidFill>
+                          <a:latin typeface="Hiragino Sans GB" panose="020B0300000000000000" charset="-122"/>
+                          <a:ea typeface="Hiragino Sans GB" panose="020B0300000000000000" charset="-122"/>
+                          <a:cs typeface="Hiragino Sans GB" panose="020B0300000000000000" charset="-122"/>
+                        </a:rPr>
+                        <a:t>成就及完成率</a:t>
+                      </a:r>
+                      <a:endParaRPr sz="1800" b="0">
+                        <a:solidFill>
+                          <a:srgbClr val="172A2A"/>
+                        </a:solidFill>
+                        <a:latin typeface="Hiragino Sans GB" panose="020B0300000000000000" charset="-122"/>
+                        <a:ea typeface="Hiragino Sans GB" panose="020B0300000000000000" charset="-122"/>
+                        <a:cs typeface="Hiragino Sans GB" panose="020B0300000000000000" charset="-122"/>
+                      </a:endParaRPr>
+                    </a:p>
+                  </a:txBody>
+                  <a:tcPr marL="133350" marR="133350" marT="76200" marB="76200" anchor="ctr">
+                    <a:lnR w="6191">
+                      <a:solidFill>
+                        <a:srgbClr val="D8DED7"/>
+                      </a:solidFill>
+                      <a:prstDash val="solid"/>
+                    </a:lnR>
+                    <a:lnB w="6191">
+                      <a:solidFill>
+                        <a:srgbClr val="D8DED7"/>
+                      </a:solidFill>
+                      <a:prstDash val="solid"/>
+                    </a:lnB>
+                    <a:solidFill>
+                      <a:srgbClr val="F4F2EC"/>
+                    </a:solidFill>
+                  </a:tcPr>
+                </a:tc>
+              </a:tr>
+              <a:tr h="450850">
+                <a:tc>
+                  <a:txBody>
+                    <a:bodyPr/>
+                    <a:lstStyle/>
+                    <a:p>
+                      <a:pPr algn="l"/>
+                      <a:r>
+                        <a:rPr sz="1800" b="0">
+                          <a:solidFill>
+                            <a:srgbClr val="172A2A"/>
+                          </a:solidFill>
+                          <a:latin typeface="Hiragino Sans GB" panose="020B0300000000000000" charset="-122"/>
+                          <a:ea typeface="Hiragino Sans GB" panose="020B0300000000000000" charset="-122"/>
+                          <a:cs typeface="Hiragino Sans GB" panose="020B0300000000000000" charset="-122"/>
+                        </a:rPr>
+                        <a:t>game_tags</a:t>
+                      </a:r>
+                      <a:endParaRPr sz="1800" b="0">
+                        <a:solidFill>
+                          <a:srgbClr val="172A2A"/>
+                        </a:solidFill>
+                        <a:latin typeface="Hiragino Sans GB" panose="020B0300000000000000" charset="-122"/>
+                        <a:ea typeface="Hiragino Sans GB" panose="020B0300000000000000" charset="-122"/>
+                        <a:cs typeface="Hiragino Sans GB" panose="020B0300000000000000" charset="-122"/>
+                      </a:endParaRPr>
+                    </a:p>
+                  </a:txBody>
+                  <a:tcPr marL="133350" marR="133350" marT="76200" marB="76200" anchor="ctr">
+                    <a:lnL w="6191">
+                      <a:solidFill>
+                        <a:srgbClr val="D8DED7"/>
+                      </a:solidFill>
+                      <a:prstDash val="solid"/>
+                    </a:lnL>
+                    <a:lnR w="6191">
+                      <a:solidFill>
+                        <a:srgbClr val="D8DED7"/>
+                      </a:solidFill>
+                      <a:prstDash val="solid"/>
+                    </a:lnR>
+                    <a:lnB w="6191">
+                      <a:solidFill>
+                        <a:srgbClr val="D8DED7"/>
+                      </a:solidFill>
+                      <a:prstDash val="solid"/>
+                    </a:lnB>
+                    <a:solidFill>
+                      <a:srgbClr val="F4F2EC"/>
+                    </a:solidFill>
+                  </a:tcPr>
+                </a:tc>
+                <a:tc>
+                  <a:txBody>
+                    <a:bodyPr/>
+                    <a:lstStyle/>
+                    <a:p>
+                      <a:pPr algn="r"/>
+                      <a:r>
+                        <a:rPr sz="1800" b="0">
+                          <a:solidFill>
+                            <a:srgbClr val="172A2A"/>
+                          </a:solidFill>
+                          <a:latin typeface="Hiragino Sans GB" panose="020B0300000000000000" charset="-122"/>
+                          <a:ea typeface="Hiragino Sans GB" panose="020B0300000000000000" charset="-122"/>
+                          <a:cs typeface="Hiragino Sans GB" panose="020B0300000000000000" charset="-122"/>
+                        </a:rPr>
+                        <a:t>888,837</a:t>
+                      </a:r>
+                      <a:endParaRPr sz="1800" b="0">
+                        <a:solidFill>
+                          <a:srgbClr val="172A2A"/>
+                        </a:solidFill>
+                        <a:latin typeface="Hiragino Sans GB" panose="020B0300000000000000" charset="-122"/>
+                        <a:ea typeface="Hiragino Sans GB" panose="020B0300000000000000" charset="-122"/>
+                        <a:cs typeface="Hiragino Sans GB" panose="020B0300000000000000" charset="-122"/>
+                      </a:endParaRPr>
+                    </a:p>
+                  </a:txBody>
+                  <a:tcPr marL="133350" marR="133350" marT="76200" marB="76200" anchor="ctr">
+                    <a:lnR w="6191">
+                      <a:solidFill>
+                        <a:srgbClr val="D8DED7"/>
+                      </a:solidFill>
+                      <a:prstDash val="solid"/>
+                    </a:lnR>
+                    <a:lnB w="6191">
+                      <a:solidFill>
+                        <a:srgbClr val="D8DED7"/>
+                      </a:solidFill>
+                      <a:prstDash val="solid"/>
+                    </a:lnB>
+                    <a:solidFill>
+                      <a:srgbClr val="F4F2EC"/>
+                    </a:solidFill>
+                  </a:tcPr>
+                </a:tc>
+                <a:tc>
+                  <a:txBody>
+                    <a:bodyPr/>
+                    <a:lstStyle/>
+                    <a:p>
+                      <a:pPr algn="l"/>
+                      <a:r>
+                        <a:rPr sz="1800" b="0">
+                          <a:solidFill>
+                            <a:srgbClr val="172A2A"/>
+                          </a:solidFill>
+                          <a:latin typeface="Hiragino Sans GB" panose="020B0300000000000000" charset="-122"/>
+                          <a:ea typeface="Hiragino Sans GB" panose="020B0300000000000000" charset="-122"/>
+                          <a:cs typeface="Hiragino Sans GB" panose="020B0300000000000000" charset="-122"/>
+                        </a:rPr>
+                        <a:t>游戏与标签关系</a:t>
+                      </a:r>
+                      <a:endParaRPr sz="1800" b="0">
+                        <a:solidFill>
+                          <a:srgbClr val="172A2A"/>
+                        </a:solidFill>
+                        <a:latin typeface="Hiragino Sans GB" panose="020B0300000000000000" charset="-122"/>
+                        <a:ea typeface="Hiragino Sans GB" panose="020B0300000000000000" charset="-122"/>
+                        <a:cs typeface="Hiragino Sans GB" panose="020B0300000000000000" charset="-122"/>
+                      </a:endParaRPr>
+                    </a:p>
+                  </a:txBody>
+                  <a:tcPr marL="133350" marR="133350" marT="76200" marB="76200" anchor="ctr">
+                    <a:lnR w="6191">
+                      <a:solidFill>
+                        <a:srgbClr val="D8DED7"/>
+                      </a:solidFill>
+                      <a:prstDash val="solid"/>
+                    </a:lnR>
+                    <a:lnB w="6191">
+                      <a:solidFill>
+                        <a:srgbClr val="D8DED7"/>
+                      </a:solidFill>
+                      <a:prstDash val="solid"/>
+                    </a:lnB>
+                    <a:solidFill>
+                      <a:srgbClr val="F4F2EC"/>
+                    </a:solidFill>
+                  </a:tcPr>
+                </a:tc>
+              </a:tr>
+              <a:tr h="450850">
+                <a:tc>
+                  <a:txBody>
+                    <a:bodyPr/>
+                    <a:lstStyle/>
+                    <a:p>
+                      <a:pPr algn="l"/>
+                      <a:r>
+                        <a:rPr sz="1800" b="1">
+                          <a:solidFill>
+                            <a:srgbClr val="172A2A"/>
+                          </a:solidFill>
+                          <a:latin typeface="Hiragino Sans GB" panose="020B0300000000000000" charset="-122"/>
+                          <a:ea typeface="Hiragino Sans GB" panose="020B0300000000000000" charset="-122"/>
+                          <a:cs typeface="Hiragino Sans GB" panose="020B0300000000000000" charset="-122"/>
+                        </a:rPr>
+                        <a:t>核心数据合计</a:t>
+                      </a:r>
+                      <a:endParaRPr sz="1800" b="1">
+                        <a:solidFill>
+                          <a:srgbClr val="172A2A"/>
+                        </a:solidFill>
+                        <a:latin typeface="Hiragino Sans GB" panose="020B0300000000000000" charset="-122"/>
+                        <a:ea typeface="Hiragino Sans GB" panose="020B0300000000000000" charset="-122"/>
+                        <a:cs typeface="Hiragino Sans GB" panose="020B0300000000000000" charset="-122"/>
+                      </a:endParaRPr>
+                    </a:p>
+                  </a:txBody>
+                  <a:tcPr marL="133350" marR="133350" marT="76200" marB="76200" anchor="ctr">
+                    <a:lnL w="6191">
+                      <a:solidFill>
+                        <a:srgbClr val="D8DED7"/>
+                      </a:solidFill>
+                      <a:prstDash val="solid"/>
+                    </a:lnL>
+                    <a:lnR w="6191">
+                      <a:solidFill>
+                        <a:srgbClr val="D8DED7"/>
+                      </a:solidFill>
+                      <a:prstDash val="solid"/>
+                    </a:lnR>
+                    <a:lnB w="6191">
+                      <a:solidFill>
+                        <a:srgbClr val="D8DED7"/>
+                      </a:solidFill>
+                      <a:prstDash val="solid"/>
+                    </a:lnB>
+                    <a:solidFill>
+                      <a:srgbClr val="E2E9DF"/>
+                    </a:solidFill>
+                  </a:tcPr>
+                </a:tc>
+                <a:tc>
+                  <a:txBody>
+                    <a:bodyPr/>
+                    <a:lstStyle/>
+                    <a:p>
+                      <a:pPr algn="r"/>
+                      <a:r>
+                        <a:rPr sz="1800" b="1">
+                          <a:solidFill>
+                            <a:srgbClr val="172A2A"/>
+                          </a:solidFill>
+                          <a:latin typeface="Hiragino Sans GB" panose="020B0300000000000000" charset="-122"/>
+                          <a:ea typeface="Hiragino Sans GB" panose="020B0300000000000000" charset="-122"/>
+                          <a:cs typeface="Hiragino Sans GB" panose="020B0300000000000000" charset="-122"/>
+                        </a:rPr>
+                        <a:t>3,079,278</a:t>
+                      </a:r>
+                      <a:endParaRPr sz="1800" b="1">
+                        <a:solidFill>
+                          <a:srgbClr val="172A2A"/>
+                        </a:solidFill>
+                        <a:latin typeface="Hiragino Sans GB" panose="020B0300000000000000" charset="-122"/>
+                        <a:ea typeface="Hiragino Sans GB" panose="020B0300000000000000" charset="-122"/>
+                        <a:cs typeface="Hiragino Sans GB" panose="020B0300000000000000" charset="-122"/>
+                      </a:endParaRPr>
+                    </a:p>
+                  </a:txBody>
+                  <a:tcPr marL="133350" marR="133350" marT="76200" marB="76200" anchor="ctr">
+                    <a:lnR w="6191">
+                      <a:solidFill>
+                        <a:srgbClr val="D8DED7"/>
+                      </a:solidFill>
+                      <a:prstDash val="solid"/>
+                    </a:lnR>
+                    <a:lnB w="6191">
+                      <a:solidFill>
+                        <a:srgbClr val="D8DED7"/>
+                      </a:solidFill>
+                      <a:prstDash val="solid"/>
+                    </a:lnB>
+                    <a:solidFill>
+                      <a:srgbClr val="E2E9DF"/>
+                    </a:solidFill>
+                  </a:tcPr>
+                </a:tc>
+                <a:tc>
+                  <a:txBody>
+                    <a:bodyPr/>
+                    <a:lstStyle/>
+                    <a:p>
+                      <a:pPr algn="l"/>
+                      <a:r>
+                        <a:rPr sz="1800" b="1">
+                          <a:solidFill>
+                            <a:srgbClr val="172A2A"/>
+                          </a:solidFill>
+                          <a:latin typeface="Hiragino Sans GB" panose="020B0300000000000000" charset="-122"/>
+                          <a:ea typeface="Hiragino Sans GB" panose="020B0300000000000000" charset="-122"/>
+                          <a:cs typeface="Hiragino Sans GB" panose="020B0300000000000000" charset="-122"/>
+                        </a:rPr>
+                        <a:t>以上7张表行数之和</a:t>
+                      </a:r>
+                      <a:endParaRPr sz="1800" b="1">
+                        <a:solidFill>
+                          <a:srgbClr val="172A2A"/>
+                        </a:solidFill>
+                        <a:latin typeface="Hiragino Sans GB" panose="020B0300000000000000" charset="-122"/>
+                        <a:ea typeface="Hiragino Sans GB" panose="020B0300000000000000" charset="-122"/>
+                        <a:cs typeface="Hiragino Sans GB" panose="020B0300000000000000" charset="-122"/>
+                      </a:endParaRPr>
+                    </a:p>
+                  </a:txBody>
+                  <a:tcPr marL="133350" marR="133350" marT="76200" marB="76200" anchor="ctr">
+                    <a:lnR w="6191">
+                      <a:solidFill>
+                        <a:srgbClr val="D8DED7"/>
+                      </a:solidFill>
+                      <a:prstDash val="solid"/>
+                    </a:lnR>
+                    <a:lnB w="6191">
+                      <a:solidFill>
+                        <a:srgbClr val="D8DED7"/>
+                      </a:solidFill>
+                      <a:prstDash val="solid"/>
+                    </a:lnB>
+                    <a:solidFill>
+                      <a:srgbClr val="E2E9DF"/>
                     </a:solidFill>
                   </a:tcPr>
                 </a:tc>
